--- a/retos/Reto_03_UT3_PC_Oficina_y_MiniPC/docs/Javier_Borrueco_Lorite_FHW_UT3_Reto_03.pptx
+++ b/retos/Reto_03_UT3_PC_Oficina_y_MiniPC/docs/Javier_Borrueco_Lorite_FHW_UT3_Reto_03.pptx
@@ -20,8 +20,8 @@
 </file>
 
 <file path=ppt/slideLayouts/slideLayout1.xml><?xml version="1.0" encoding="utf-8"?>
-<p:sldLayout xmlns:a="http://schemas.openxmlformats.org/drawingml/2006/main" xmlns:p="http://schemas.openxmlformats.org/presentationml/2006/main" xmlns:r="http://schemas.openxmlformats.org/officeDocument/2006/relationships" xmlns:p14="http://schemas.microsoft.com/office/powerpoint/2010/main" xmlns:p15="http://schemas.microsoft.com/office/powerpoint/2012/main" xmlns:mc="http://schemas.openxmlformats.org/markup-compatibility/2006" type="title" preserve="1">
-  <p:cSld name="Title Slide">
+<p:sldLayout xmlns:a="http://schemas.openxmlformats.org/drawingml/2006/main" xmlns:p="http://schemas.openxmlformats.org/presentationml/2006/main" xmlns:r="http://schemas.openxmlformats.org/officeDocument/2006/relationships" xmlns:p14="http://schemas.microsoft.com/office/powerpoint/2010/main" xmlns:p15="http://schemas.microsoft.com/office/powerpoint/2012/main" xmlns:mc="http://schemas.openxmlformats.org/markup-compatibility/2006" type="blank" preserve="1">
+  <p:cSld name="Blank">
     <p:bg>
       <p:bgPr>
         <a:solidFill>
@@ -52,7 +52,7 @@
         <p:spPr>
           <a:xfrm>
             <a:off x="0" y="0"/>
-            <a:ext cx="12191760" cy="6859800"/>
+            <a:ext cx="12191400" cy="6859440"/>
           </a:xfrm>
           <a:prstGeom prst="rect">
             <a:avLst/>
@@ -86,6 +86,11 @@
             <a:noAutofit/>
           </a:bodyPr>
           <a:p>
+            <a:pPr>
+              <a:lnSpc>
+                <a:spcPct val="100000"/>
+              </a:lnSpc>
+            </a:pPr>
             <a:endParaRPr lang="es-ES" sz="1800" b="0" u="none" strike="noStrike">
               <a:solidFill>
                 <a:srgbClr val="000000"/>
@@ -100,62 +105,6 @@
       <p:sp>
         <p:nvSpPr>
           <p:cNvPr id="3" name="PlaceHolder 1"/>
-          <p:cNvSpPr>
-            <a:spLocks noGrp="1"/>
-          </p:cNvSpPr>
-          <p:nvPr>
-            <p:ph type="title"/>
-          </p:nvPr>
-        </p:nvSpPr>
-        <p:spPr>
-          <a:xfrm>
-            <a:off x="1523880" y="1122480"/>
-            <a:ext cx="9143640" cy="2208960"/>
-          </a:xfrm>
-          <a:prstGeom prst="rect">
-            <a:avLst/>
-          </a:prstGeom>
-          <a:noFill/>
-          <a:ln w="0">
-            <a:noFill/>
-          </a:ln>
-        </p:spPr>
-        <p:txBody>
-          <a:bodyPr lIns="91440" rIns="91440" tIns="45720" bIns="45720" anchor="b">
-            <a:normAutofit/>
-          </a:bodyPr>
-          <a:p>
-            <a:pPr indent="0" algn="ctr" defTabSz="914400">
-              <a:lnSpc>
-                <a:spcPct val="100000"/>
-              </a:lnSpc>
-              <a:buNone/>
-            </a:pPr>
-            <a:r>
-              <a:rPr lang="en-US" sz="3600" b="0" u="none" strike="noStrike">
-                <a:solidFill>
-                  <a:schemeClr val="dk2"/>
-                </a:solidFill>
-                <a:effectLst/>
-                <a:uFillTx/>
-                <a:latin typeface="Walbaum Display"/>
-              </a:rPr>
-              <a:t>Click to edit Master title style</a:t>
-            </a:r>
-            <a:endParaRPr lang="es-ES" sz="3600" b="0" u="none" strike="noStrike">
-              <a:solidFill>
-                <a:schemeClr val="dk1"/>
-              </a:solidFill>
-              <a:effectLst/>
-              <a:uFillTx/>
-              <a:latin typeface="Aptos Light"/>
-            </a:endParaRPr>
-          </a:p>
-        </p:txBody>
-      </p:sp>
-      <p:sp>
-        <p:nvSpPr>
-          <p:cNvPr id="4" name="PlaceHolder 2"/>
           <p:cNvSpPr>
             <a:spLocks noGrp="1"/>
           </p:cNvSpPr>
@@ -166,7 +115,7 @@
         <p:spPr>
           <a:xfrm>
             <a:off x="877680" y="6356520"/>
-            <a:ext cx="2742840" cy="364680"/>
+            <a:ext cx="2742480" cy="364320"/>
           </a:xfrm>
           <a:prstGeom prst="rect">
             <a:avLst/>
@@ -186,6 +135,9 @@
                 <a:spcPct val="100000"/>
               </a:lnSpc>
               <a:buNone/>
+              <a:tabLst>
+                <a:tab algn="l" pos="0"/>
+              </a:tabLst>
               <a:defRPr lang="en-US" sz="800" b="0" u="none" spc="300" strike="noStrike" cap="all">
                 <a:solidFill>
                   <a:schemeClr val="dk2"/>
@@ -202,6 +154,9 @@
                 <a:spcPct val="100000"/>
               </a:lnSpc>
               <a:buNone/>
+              <a:tabLst>
+                <a:tab algn="l" pos="0"/>
+              </a:tabLst>
             </a:pPr>
             <a:r>
               <a:rPr lang="en-US" sz="800" b="0" u="none" spc="300" strike="noStrike" cap="all">
@@ -227,7 +182,7 @@
       </p:sp>
       <p:sp>
         <p:nvSpPr>
-          <p:cNvPr id="5" name="PlaceHolder 3"/>
+          <p:cNvPr id="4" name="PlaceHolder 2"/>
           <p:cNvSpPr>
             <a:spLocks noGrp="1"/>
           </p:cNvSpPr>
@@ -238,7 +193,7 @@
         <p:spPr>
           <a:xfrm>
             <a:off x="7132320" y="6356520"/>
-            <a:ext cx="4297320" cy="364680"/>
+            <a:ext cx="4296960" cy="364320"/>
           </a:xfrm>
           <a:prstGeom prst="rect">
             <a:avLst/>
@@ -254,7 +209,13 @@
           </a:bodyPr>
           <a:lstStyle>
             <a:lvl1pPr indent="0" algn="ctr">
-              <a:buNone/>
+              <a:lnSpc>
+                <a:spcPct val="100000"/>
+              </a:lnSpc>
+              <a:buNone/>
+              <a:tabLst>
+                <a:tab algn="l" pos="0"/>
+              </a:tabLst>
               <a:defRPr lang="en-US" sz="800" b="0" u="none" spc="300" strike="noStrike" cap="all">
                 <a:solidFill>
                   <a:schemeClr val="dk2"/>
@@ -267,7 +228,13 @@
           </a:lstStyle>
           <a:p>
             <a:pPr indent="0" algn="ctr">
-              <a:buNone/>
+              <a:lnSpc>
+                <a:spcPct val="100000"/>
+              </a:lnSpc>
+              <a:buNone/>
+              <a:tabLst>
+                <a:tab algn="l" pos="0"/>
+              </a:tabLst>
             </a:pPr>
             <a:r>
               <a:rPr lang="en-US" sz="800" b="0" u="none" spc="300" strike="noStrike" cap="all">
@@ -293,7 +260,7 @@
       </p:sp>
       <p:sp>
         <p:nvSpPr>
-          <p:cNvPr id="6" name="PlaceHolder 4"/>
+          <p:cNvPr id="5" name="PlaceHolder 3"/>
           <p:cNvSpPr>
             <a:spLocks noGrp="1"/>
           </p:cNvSpPr>
@@ -304,7 +271,7 @@
         <p:spPr>
           <a:xfrm>
             <a:off x="11430000" y="6356520"/>
-            <a:ext cx="520920" cy="364680"/>
+            <a:ext cx="520560" cy="364320"/>
           </a:xfrm>
           <a:prstGeom prst="rect">
             <a:avLst/>
@@ -324,6 +291,9 @@
                 <a:spcPct val="100000"/>
               </a:lnSpc>
               <a:buNone/>
+              <a:tabLst>
+                <a:tab algn="l" pos="0"/>
+              </a:tabLst>
               <a:defRPr lang="en-US" sz="1400" b="0" u="none" strike="noStrike">
                 <a:solidFill>
                   <a:schemeClr val="dk2"/>
@@ -340,8 +310,11 @@
                 <a:spcPct val="100000"/>
               </a:lnSpc>
               <a:buNone/>
-            </a:pPr>
-            <a:fld id="{E65524A7-5D68-43BB-8EB7-97B018862273}" type="slidenum">
+              <a:tabLst>
+                <a:tab algn="l" pos="0"/>
+              </a:tabLst>
+            </a:pPr>
+            <a:fld id="{DC752A89-4F37-465B-99C2-8FE63609BB0F}" type="slidenum">
               <a:rPr lang="en-US" sz="1400" b="0" u="none" strike="noStrike">
                 <a:solidFill>
                   <a:schemeClr val="dk2"/>
@@ -359,280 +332,6 @@
               <a:effectLst/>
               <a:uFillTx/>
               <a:latin typeface="Times New Roman"/>
-            </a:endParaRPr>
-          </a:p>
-        </p:txBody>
-      </p:sp>
-      <p:sp>
-        <p:nvSpPr>
-          <p:cNvPr id="7" name="PlaceHolder 5"/>
-          <p:cNvSpPr>
-            <a:spLocks noGrp="1"/>
-          </p:cNvSpPr>
-          <p:nvPr>
-            <p:ph type="body"/>
-          </p:nvPr>
-        </p:nvSpPr>
-        <p:spPr>
-          <a:xfrm>
-            <a:off x="609480" y="1604520"/>
-            <a:ext cx="10972440" cy="3977280"/>
-          </a:xfrm>
-          <a:prstGeom prst="rect">
-            <a:avLst/>
-          </a:prstGeom>
-          <a:noFill/>
-          <a:ln w="0">
-            <a:noFill/>
-          </a:ln>
-        </p:spPr>
-        <p:txBody>
-          <a:bodyPr lIns="0" rIns="0" tIns="0" bIns="0" anchor="t">
-            <a:normAutofit/>
-          </a:bodyPr>
-          <a:p>
-            <a:pPr marL="432000" indent="-324000">
-              <a:lnSpc>
-                <a:spcPct val="120000"/>
-              </a:lnSpc>
-              <a:spcBef>
-                <a:spcPts val="1417"/>
-              </a:spcBef>
-              <a:buClr>
-                <a:srgbClr val="000000"/>
-              </a:buClr>
-              <a:buSzPct val="45000"/>
-              <a:buFont typeface="Wingdings" charset="2"/>
-              <a:buChar char=""/>
-            </a:pPr>
-            <a:r>
-              <a:rPr lang="es-ES" sz="1600" b="0" u="none" strike="noStrike">
-                <a:solidFill>
-                  <a:schemeClr val="dk2"/>
-                </a:solidFill>
-                <a:effectLst/>
-                <a:uFillTx/>
-                <a:latin typeface="Aptos Light"/>
-              </a:rPr>
-              <a:t>Pulse para editar el formato de texto del esquema</a:t>
-            </a:r>
-            <a:endParaRPr lang="es-ES" sz="1600" b="0" u="none" strike="noStrike">
-              <a:solidFill>
-                <a:schemeClr val="dk2"/>
-              </a:solidFill>
-              <a:effectLst/>
-              <a:uFillTx/>
-              <a:latin typeface="Aptos Light"/>
-            </a:endParaRPr>
-          </a:p>
-          <a:p>
-            <a:pPr marL="864000" lvl="1" indent="-324000">
-              <a:lnSpc>
-                <a:spcPct val="120000"/>
-              </a:lnSpc>
-              <a:spcBef>
-                <a:spcPts val="1134"/>
-              </a:spcBef>
-              <a:buClr>
-                <a:srgbClr val="000000"/>
-              </a:buClr>
-              <a:buSzPct val="75000"/>
-              <a:buFont typeface="Symbol" charset="2"/>
-              <a:buChar char=""/>
-            </a:pPr>
-            <a:r>
-              <a:rPr lang="es-ES" sz="1200" b="0" u="none" strike="noStrike">
-                <a:solidFill>
-                  <a:schemeClr val="dk2"/>
-                </a:solidFill>
-                <a:effectLst/>
-                <a:uFillTx/>
-                <a:latin typeface="Aptos Light"/>
-              </a:rPr>
-              <a:t>Segundo nivel del esquema</a:t>
-            </a:r>
-            <a:endParaRPr lang="es-ES" sz="1200" b="0" u="none" strike="noStrike">
-              <a:solidFill>
-                <a:schemeClr val="dk2"/>
-              </a:solidFill>
-              <a:effectLst/>
-              <a:uFillTx/>
-              <a:latin typeface="Aptos Light"/>
-            </a:endParaRPr>
-          </a:p>
-          <a:p>
-            <a:pPr marL="1296000" lvl="2" indent="-288000">
-              <a:lnSpc>
-                <a:spcPct val="120000"/>
-              </a:lnSpc>
-              <a:spcBef>
-                <a:spcPts val="850"/>
-              </a:spcBef>
-              <a:buClr>
-                <a:srgbClr val="000000"/>
-              </a:buClr>
-              <a:buSzPct val="45000"/>
-              <a:buFont typeface="Wingdings" charset="2"/>
-              <a:buChar char=""/>
-            </a:pPr>
-            <a:r>
-              <a:rPr lang="es-ES" sz="1100" b="0" u="none" strike="noStrike">
-                <a:solidFill>
-                  <a:schemeClr val="dk2"/>
-                </a:solidFill>
-                <a:effectLst/>
-                <a:uFillTx/>
-                <a:latin typeface="Aptos Light"/>
-              </a:rPr>
-              <a:t>Tercer nivel del esquema</a:t>
-            </a:r>
-            <a:endParaRPr lang="es-ES" sz="1100" b="0" u="none" strike="noStrike">
-              <a:solidFill>
-                <a:schemeClr val="dk2"/>
-              </a:solidFill>
-              <a:effectLst/>
-              <a:uFillTx/>
-              <a:latin typeface="Aptos Light"/>
-            </a:endParaRPr>
-          </a:p>
-          <a:p>
-            <a:pPr marL="1728000" lvl="3" indent="-216000">
-              <a:lnSpc>
-                <a:spcPct val="120000"/>
-              </a:lnSpc>
-              <a:spcBef>
-                <a:spcPts val="567"/>
-              </a:spcBef>
-              <a:buClr>
-                <a:srgbClr val="000000"/>
-              </a:buClr>
-              <a:buSzPct val="75000"/>
-              <a:buFont typeface="Symbol" charset="2"/>
-              <a:buChar char=""/>
-            </a:pPr>
-            <a:r>
-              <a:rPr lang="es-ES" sz="1100" b="0" u="none" strike="noStrike">
-                <a:solidFill>
-                  <a:schemeClr val="dk2"/>
-                </a:solidFill>
-                <a:effectLst/>
-                <a:uFillTx/>
-                <a:latin typeface="Aptos Light"/>
-              </a:rPr>
-              <a:t>Cuarto nivel del esquema</a:t>
-            </a:r>
-            <a:endParaRPr lang="es-ES" sz="1100" b="0" u="none" strike="noStrike">
-              <a:solidFill>
-                <a:schemeClr val="dk2"/>
-              </a:solidFill>
-              <a:effectLst/>
-              <a:uFillTx/>
-              <a:latin typeface="Aptos Light"/>
-            </a:endParaRPr>
-          </a:p>
-          <a:p>
-            <a:pPr marL="2160000" lvl="4" indent="-216000">
-              <a:lnSpc>
-                <a:spcPct val="120000"/>
-              </a:lnSpc>
-              <a:spcBef>
-                <a:spcPts val="283"/>
-              </a:spcBef>
-              <a:buClr>
-                <a:srgbClr val="000000"/>
-              </a:buClr>
-              <a:buSzPct val="45000"/>
-              <a:buFont typeface="Wingdings" charset="2"/>
-              <a:buChar char=""/>
-            </a:pPr>
-            <a:r>
-              <a:rPr lang="es-ES" sz="2000" b="0" u="none" strike="noStrike">
-                <a:solidFill>
-                  <a:schemeClr val="dk2"/>
-                </a:solidFill>
-                <a:effectLst/>
-                <a:uFillTx/>
-                <a:latin typeface="Aptos Light"/>
-              </a:rPr>
-              <a:t>Quinto nivel del esquema</a:t>
-            </a:r>
-            <a:endParaRPr lang="es-ES" sz="2000" b="0" u="none" strike="noStrike">
-              <a:solidFill>
-                <a:schemeClr val="dk2"/>
-              </a:solidFill>
-              <a:effectLst/>
-              <a:uFillTx/>
-              <a:latin typeface="Aptos Light"/>
-            </a:endParaRPr>
-          </a:p>
-          <a:p>
-            <a:pPr marL="2592000" lvl="5" indent="-216000">
-              <a:lnSpc>
-                <a:spcPct val="120000"/>
-              </a:lnSpc>
-              <a:spcBef>
-                <a:spcPts val="283"/>
-              </a:spcBef>
-              <a:buClr>
-                <a:srgbClr val="000000"/>
-              </a:buClr>
-              <a:buSzPct val="45000"/>
-              <a:buFont typeface="Wingdings" charset="2"/>
-              <a:buChar char=""/>
-            </a:pPr>
-            <a:r>
-              <a:rPr lang="es-ES" sz="2000" b="0" u="none" strike="noStrike">
-                <a:solidFill>
-                  <a:schemeClr val="dk2"/>
-                </a:solidFill>
-                <a:effectLst/>
-                <a:uFillTx/>
-                <a:latin typeface="Aptos Light"/>
-              </a:rPr>
-              <a:t>Sexto nivel del esquema</a:t>
-            </a:r>
-            <a:endParaRPr lang="es-ES" sz="2000" b="0" u="none" strike="noStrike">
-              <a:solidFill>
-                <a:schemeClr val="dk2"/>
-              </a:solidFill>
-              <a:effectLst/>
-              <a:uFillTx/>
-              <a:latin typeface="Aptos Light"/>
-            </a:endParaRPr>
-          </a:p>
-          <a:p>
-            <a:pPr marL="3024000" lvl="6" indent="-216000">
-              <a:lnSpc>
-                <a:spcPct val="120000"/>
-              </a:lnSpc>
-              <a:spcBef>
-                <a:spcPts val="283"/>
-              </a:spcBef>
-              <a:buClr>
-                <a:srgbClr val="000000"/>
-              </a:buClr>
-              <a:buSzPct val="45000"/>
-              <a:buFont typeface="Wingdings" charset="2"/>
-              <a:buChar char=""/>
-            </a:pPr>
-            <a:r>
-              <a:rPr lang="es-ES" sz="2000" b="0" u="none" strike="noStrike">
-                <a:solidFill>
-                  <a:schemeClr val="dk2"/>
-                </a:solidFill>
-                <a:effectLst/>
-                <a:uFillTx/>
-                <a:latin typeface="Aptos Light"/>
-              </a:rPr>
-              <a:t>Séptimo nivel del esquema</a:t>
-            </a:r>
-            <a:endParaRPr lang="es-ES" sz="2000" b="0" u="none" strike="noStrike">
-              <a:solidFill>
-                <a:schemeClr val="dk2"/>
-              </a:solidFill>
-              <a:effectLst/>
-              <a:uFillTx/>
-              <a:latin typeface="Aptos Light"/>
             </a:endParaRPr>
           </a:p>
         </p:txBody>
@@ -644,7 +343,7 @@
 
 <file path=ppt/slideLayouts/slideLayout10.xml><?xml version="1.0" encoding="utf-8"?>
 <p:sldLayout xmlns:a="http://schemas.openxmlformats.org/drawingml/2006/main" xmlns:p="http://schemas.openxmlformats.org/presentationml/2006/main" xmlns:r="http://schemas.openxmlformats.org/officeDocument/2006/relationships" xmlns:p14="http://schemas.microsoft.com/office/powerpoint/2010/main" xmlns:p15="http://schemas.microsoft.com/office/powerpoint/2012/main" xmlns:mc="http://schemas.openxmlformats.org/markup-compatibility/2006" type="blank" preserve="1">
-  <p:cSld name="Content with Caption">
+  <p:cSld name="Comparison">
     <p:bg>
       <p:bgPr>
         <a:solidFill>
@@ -675,7 +374,7 @@
         <p:spPr>
           <a:xfrm>
             <a:off x="0" y="0"/>
-            <a:ext cx="12191760" cy="6859800"/>
+            <a:ext cx="12191400" cy="6859440"/>
           </a:xfrm>
           <a:prstGeom prst="rect">
             <a:avLst/>
@@ -709,6 +408,11 @@
             <a:noAutofit/>
           </a:bodyPr>
           <a:p>
+            <a:pPr>
+              <a:lnSpc>
+                <a:spcPct val="100000"/>
+              </a:lnSpc>
+            </a:pPr>
             <a:endParaRPr lang="es-ES" sz="1800" b="0" u="none" strike="noStrike">
               <a:solidFill>
                 <a:srgbClr val="000000"/>
@@ -732,8 +436,8 @@
         </p:nvSpPr>
         <p:spPr>
           <a:xfrm>
-            <a:off x="839880" y="807840"/>
-            <a:ext cx="3640320" cy="2062080"/>
+            <a:off x="881280" y="602640"/>
+            <a:ext cx="10428480" cy="768240"/>
           </a:xfrm>
           <a:prstGeom prst="rect">
             <a:avLst/>
@@ -744,8 +448,8 @@
           </a:ln>
         </p:spPr>
         <p:txBody>
-          <a:bodyPr lIns="91440" rIns="91440" tIns="45720" bIns="45720" anchor="t">
-            <a:normAutofit/>
+          <a:bodyPr lIns="91440" rIns="91440" tIns="45720" bIns="45720" anchor="b">
+            <a:noAutofit/>
           </a:bodyPr>
           <a:p>
             <a:pPr indent="0" defTabSz="914400">
@@ -753,9 +457,12 @@
                 <a:spcPct val="100000"/>
               </a:lnSpc>
               <a:buNone/>
-            </a:pPr>
-            <a:r>
-              <a:rPr lang="en-US" sz="2800" b="0" u="none" strike="noStrike">
+              <a:tabLst>
+                <a:tab algn="l" pos="0"/>
+              </a:tabLst>
+            </a:pPr>
+            <a:r>
+              <a:rPr lang="en-US" sz="3200" b="0" u="none" strike="noStrike">
                 <a:solidFill>
                   <a:schemeClr val="dk2"/>
                 </a:solidFill>
@@ -765,13 +472,13 @@
               </a:rPr>
               <a:t>Click to edit Master title style</a:t>
             </a:r>
-            <a:endParaRPr lang="es-ES" sz="2800" b="0" u="none" strike="noStrike">
-              <a:solidFill>
-                <a:schemeClr val="dk1"/>
-              </a:solidFill>
-              <a:effectLst/>
-              <a:uFillTx/>
-              <a:latin typeface="Aptos Light"/>
+            <a:endParaRPr lang="es-ES" sz="3200" b="0" u="none" strike="noStrike">
+              <a:solidFill>
+                <a:srgbClr val="000000"/>
+              </a:solidFill>
+              <a:effectLst/>
+              <a:uFillTx/>
+              <a:latin typeface="Arial"/>
             </a:endParaRPr>
           </a:p>
         </p:txBody>
@@ -788,8 +495,8 @@
         </p:nvSpPr>
         <p:spPr>
           <a:xfrm>
-            <a:off x="5432760" y="807840"/>
-            <a:ext cx="5922000" cy="5052960"/>
+            <a:off x="881280" y="1696320"/>
+            <a:ext cx="4962960" cy="646920"/>
           </a:xfrm>
           <a:prstGeom prst="rect">
             <a:avLst/>
@@ -800,25 +507,24 @@
           </a:ln>
         </p:spPr>
         <p:txBody>
-          <a:bodyPr lIns="91440" rIns="91440" tIns="45720" bIns="45720" anchor="t">
-            <a:normAutofit/>
+          <a:bodyPr lIns="91440" rIns="91440" tIns="45720" bIns="45720" anchor="b">
+            <a:noAutofit/>
           </a:bodyPr>
           <a:p>
-            <a:pPr marL="228600" indent="-228600" defTabSz="914400">
+            <a:pPr indent="0" defTabSz="914400">
               <a:lnSpc>
                 <a:spcPct val="120000"/>
               </a:lnSpc>
               <a:spcBef>
                 <a:spcPts val="1001"/>
               </a:spcBef>
-              <a:buClr>
-                <a:srgbClr val="35403a"/>
-              </a:buClr>
-              <a:buFont typeface="Arial"/>
-              <a:buChar char="•"/>
-            </a:pPr>
-            <a:r>
-              <a:rPr lang="en-US" sz="2400" b="0" u="none" strike="noStrike">
+              <a:buNone/>
+              <a:tabLst>
+                <a:tab algn="l" pos="0"/>
+              </a:tabLst>
+            </a:pPr>
+            <a:r>
+              <a:rPr lang="en-US" sz="1400" b="1" u="none" spc="300" strike="noStrike" cap="all">
                 <a:solidFill>
                   <a:schemeClr val="dk2"/>
                 </a:solidFill>
@@ -828,149 +534,13 @@
               </a:rPr>
               <a:t>Click to edit Master text styles</a:t>
             </a:r>
-            <a:endParaRPr lang="es-ES" sz="2400" b="0" u="none" strike="noStrike">
-              <a:solidFill>
-                <a:schemeClr val="dk2"/>
-              </a:solidFill>
-              <a:effectLst/>
-              <a:uFillTx/>
-              <a:latin typeface="Aptos Light"/>
-            </a:endParaRPr>
-          </a:p>
-          <a:p>
-            <a:pPr marL="457200" lvl="1" indent="-228600" defTabSz="914400">
-              <a:lnSpc>
-                <a:spcPct val="120000"/>
-              </a:lnSpc>
-              <a:spcBef>
-                <a:spcPts val="499"/>
-              </a:spcBef>
-              <a:buClr>
-                <a:srgbClr val="35403a"/>
-              </a:buClr>
-              <a:buFont typeface="Arial"/>
-              <a:buChar char="•"/>
-            </a:pPr>
-            <a:r>
-              <a:rPr lang="en-US" sz="2000" b="0" u="none" strike="noStrike">
-                <a:solidFill>
-                  <a:schemeClr val="dk2"/>
-                </a:solidFill>
-                <a:effectLst/>
-                <a:uFillTx/>
-                <a:latin typeface="Aptos Light"/>
-              </a:rPr>
-              <a:t>Second level</a:t>
-            </a:r>
-            <a:endParaRPr lang="es-ES" sz="2000" b="0" u="none" strike="noStrike">
-              <a:solidFill>
-                <a:schemeClr val="dk2"/>
-              </a:solidFill>
-              <a:effectLst/>
-              <a:uFillTx/>
-              <a:latin typeface="Aptos Light"/>
-            </a:endParaRPr>
-          </a:p>
-          <a:p>
-            <a:pPr marL="685800" lvl="2" indent="-228600" defTabSz="914400">
-              <a:lnSpc>
-                <a:spcPct val="120000"/>
-              </a:lnSpc>
-              <a:spcBef>
-                <a:spcPts val="499"/>
-              </a:spcBef>
-              <a:buClr>
-                <a:srgbClr val="35403a"/>
-              </a:buClr>
-              <a:buFont typeface="Arial"/>
-              <a:buChar char="•"/>
-            </a:pPr>
-            <a:r>
-              <a:rPr lang="en-US" sz="1800" b="0" u="none" strike="noStrike">
-                <a:solidFill>
-                  <a:schemeClr val="dk2"/>
-                </a:solidFill>
-                <a:effectLst/>
-                <a:uFillTx/>
-                <a:latin typeface="Aptos Light"/>
-              </a:rPr>
-              <a:t>Third level</a:t>
-            </a:r>
-            <a:endParaRPr lang="es-ES" sz="1800" b="0" u="none" strike="noStrike">
-              <a:solidFill>
-                <a:schemeClr val="dk2"/>
-              </a:solidFill>
-              <a:effectLst/>
-              <a:uFillTx/>
-              <a:latin typeface="Aptos Light"/>
-            </a:endParaRPr>
-          </a:p>
-          <a:p>
-            <a:pPr marL="914400" lvl="3" indent="-228600" defTabSz="914400">
-              <a:lnSpc>
-                <a:spcPct val="120000"/>
-              </a:lnSpc>
-              <a:spcBef>
-                <a:spcPts val="499"/>
-              </a:spcBef>
-              <a:buClr>
-                <a:srgbClr val="35403a"/>
-              </a:buClr>
-              <a:buFont typeface="Arial"/>
-              <a:buChar char="•"/>
-            </a:pPr>
-            <a:r>
-              <a:rPr lang="en-US" sz="1600" b="0" u="none" strike="noStrike">
-                <a:solidFill>
-                  <a:schemeClr val="dk2"/>
-                </a:solidFill>
-                <a:effectLst/>
-                <a:uFillTx/>
-                <a:latin typeface="Aptos Light"/>
-              </a:rPr>
-              <a:t>Fourth level</a:t>
-            </a:r>
-            <a:endParaRPr lang="es-ES" sz="1600" b="0" u="none" strike="noStrike">
-              <a:solidFill>
-                <a:schemeClr val="dk2"/>
-              </a:solidFill>
-              <a:effectLst/>
-              <a:uFillTx/>
-              <a:latin typeface="Aptos Light"/>
-            </a:endParaRPr>
-          </a:p>
-          <a:p>
-            <a:pPr marL="1143000" lvl="4" indent="-228600" defTabSz="914400">
-              <a:lnSpc>
-                <a:spcPct val="120000"/>
-              </a:lnSpc>
-              <a:spcBef>
-                <a:spcPts val="499"/>
-              </a:spcBef>
-              <a:buClr>
-                <a:srgbClr val="35403a"/>
-              </a:buClr>
-              <a:buFont typeface="Arial"/>
-              <a:buChar char="•"/>
-            </a:pPr>
-            <a:r>
-              <a:rPr lang="en-US" sz="1600" b="0" u="none" strike="noStrike">
-                <a:solidFill>
-                  <a:schemeClr val="dk2"/>
-                </a:solidFill>
-                <a:effectLst/>
-                <a:uFillTx/>
-                <a:latin typeface="Aptos Light"/>
-              </a:rPr>
-              <a:t>Fifth level</a:t>
-            </a:r>
-            <a:endParaRPr lang="es-ES" sz="1600" b="0" u="none" strike="noStrike">
-              <a:solidFill>
-                <a:schemeClr val="dk2"/>
-              </a:solidFill>
-              <a:effectLst/>
-              <a:uFillTx/>
-              <a:latin typeface="Aptos Light"/>
+            <a:endParaRPr lang="es-ES" sz="1400" b="0" u="none" strike="noStrike">
+              <a:solidFill>
+                <a:srgbClr val="000000"/>
+              </a:solidFill>
+              <a:effectLst/>
+              <a:uFillTx/>
+              <a:latin typeface="Arial"/>
             </a:endParaRPr>
           </a:p>
         </p:txBody>
@@ -987,8 +557,207 @@
         </p:nvSpPr>
         <p:spPr>
           <a:xfrm>
-            <a:off x="839880" y="3000600"/>
-            <a:ext cx="3640320" cy="2868120"/>
+            <a:off x="881280" y="2343960"/>
+            <a:ext cx="4962960" cy="3832560"/>
+          </a:xfrm>
+          <a:prstGeom prst="rect">
+            <a:avLst/>
+          </a:prstGeom>
+          <a:noFill/>
+          <a:ln w="0">
+            <a:noFill/>
+          </a:ln>
+        </p:spPr>
+        <p:txBody>
+          <a:bodyPr lIns="91440" rIns="91440" tIns="45720" bIns="45720" anchor="t">
+            <a:noAutofit/>
+          </a:bodyPr>
+          <a:p>
+            <a:pPr marL="228600" indent="-228600" defTabSz="914400">
+              <a:lnSpc>
+                <a:spcPct val="120000"/>
+              </a:lnSpc>
+              <a:spcBef>
+                <a:spcPts val="1001"/>
+              </a:spcBef>
+              <a:buClr>
+                <a:srgbClr val="35403a"/>
+              </a:buClr>
+              <a:buFont typeface="Arial"/>
+              <a:buChar char="•"/>
+            </a:pPr>
+            <a:r>
+              <a:rPr lang="en-US" sz="1600" b="0" u="none" strike="noStrike">
+                <a:solidFill>
+                  <a:schemeClr val="dk2"/>
+                </a:solidFill>
+                <a:effectLst/>
+                <a:uFillTx/>
+                <a:latin typeface="Aptos Light"/>
+              </a:rPr>
+              <a:t>Click to edit Master text styles</a:t>
+            </a:r>
+            <a:endParaRPr lang="es-ES" sz="1600" b="0" u="none" strike="noStrike">
+              <a:solidFill>
+                <a:srgbClr val="000000"/>
+              </a:solidFill>
+              <a:effectLst/>
+              <a:uFillTx/>
+              <a:latin typeface="Arial"/>
+            </a:endParaRPr>
+          </a:p>
+          <a:p>
+            <a:pPr marL="457200" lvl="1" indent="-228600" defTabSz="914400">
+              <a:lnSpc>
+                <a:spcPct val="120000"/>
+              </a:lnSpc>
+              <a:spcBef>
+                <a:spcPts val="499"/>
+              </a:spcBef>
+              <a:buClr>
+                <a:srgbClr val="35403a"/>
+              </a:buClr>
+              <a:buFont typeface="Arial"/>
+              <a:buChar char="•"/>
+            </a:pPr>
+            <a:r>
+              <a:rPr lang="en-US" sz="1400" b="0" u="none" strike="noStrike">
+                <a:solidFill>
+                  <a:schemeClr val="dk2"/>
+                </a:solidFill>
+                <a:effectLst/>
+                <a:uFillTx/>
+                <a:latin typeface="Aptos Light"/>
+              </a:rPr>
+              <a:t>Second level</a:t>
+            </a:r>
+            <a:endParaRPr lang="es-ES" sz="1400" b="0" u="none" strike="noStrike">
+              <a:solidFill>
+                <a:srgbClr val="000000"/>
+              </a:solidFill>
+              <a:effectLst/>
+              <a:uFillTx/>
+              <a:latin typeface="Arial"/>
+            </a:endParaRPr>
+          </a:p>
+          <a:p>
+            <a:pPr marL="685800" lvl="2" indent="-228600" defTabSz="914400">
+              <a:lnSpc>
+                <a:spcPct val="120000"/>
+              </a:lnSpc>
+              <a:spcBef>
+                <a:spcPts val="499"/>
+              </a:spcBef>
+              <a:buClr>
+                <a:srgbClr val="35403a"/>
+              </a:buClr>
+              <a:buFont typeface="Arial"/>
+              <a:buChar char="•"/>
+            </a:pPr>
+            <a:r>
+              <a:rPr lang="en-US" sz="1200" b="0" u="none" strike="noStrike">
+                <a:solidFill>
+                  <a:schemeClr val="dk2"/>
+                </a:solidFill>
+                <a:effectLst/>
+                <a:uFillTx/>
+                <a:latin typeface="Aptos Light"/>
+              </a:rPr>
+              <a:t>Third level</a:t>
+            </a:r>
+            <a:endParaRPr lang="es-ES" sz="1200" b="0" u="none" strike="noStrike">
+              <a:solidFill>
+                <a:srgbClr val="000000"/>
+              </a:solidFill>
+              <a:effectLst/>
+              <a:uFillTx/>
+              <a:latin typeface="Arial"/>
+            </a:endParaRPr>
+          </a:p>
+          <a:p>
+            <a:pPr marL="914400" lvl="3" indent="-228600" defTabSz="914400">
+              <a:lnSpc>
+                <a:spcPct val="120000"/>
+              </a:lnSpc>
+              <a:spcBef>
+                <a:spcPts val="499"/>
+              </a:spcBef>
+              <a:buClr>
+                <a:srgbClr val="35403a"/>
+              </a:buClr>
+              <a:buFont typeface="Arial"/>
+              <a:buChar char="•"/>
+            </a:pPr>
+            <a:r>
+              <a:rPr lang="en-US" sz="1100" b="0" u="none" strike="noStrike">
+                <a:solidFill>
+                  <a:schemeClr val="dk2"/>
+                </a:solidFill>
+                <a:effectLst/>
+                <a:uFillTx/>
+                <a:latin typeface="Aptos Light"/>
+              </a:rPr>
+              <a:t>Fourth level</a:t>
+            </a:r>
+            <a:endParaRPr lang="es-ES" sz="1100" b="0" u="none" strike="noStrike">
+              <a:solidFill>
+                <a:srgbClr val="000000"/>
+              </a:solidFill>
+              <a:effectLst/>
+              <a:uFillTx/>
+              <a:latin typeface="Arial"/>
+            </a:endParaRPr>
+          </a:p>
+          <a:p>
+            <a:pPr marL="1143000" lvl="4" indent="-228600" defTabSz="914400">
+              <a:lnSpc>
+                <a:spcPct val="120000"/>
+              </a:lnSpc>
+              <a:spcBef>
+                <a:spcPts val="499"/>
+              </a:spcBef>
+              <a:buClr>
+                <a:srgbClr val="35403a"/>
+              </a:buClr>
+              <a:buFont typeface="Arial"/>
+              <a:buChar char="•"/>
+            </a:pPr>
+            <a:r>
+              <a:rPr lang="en-US" sz="1100" b="0" u="none" strike="noStrike">
+                <a:solidFill>
+                  <a:schemeClr val="dk2"/>
+                </a:solidFill>
+                <a:effectLst/>
+                <a:uFillTx/>
+                <a:latin typeface="Aptos Light"/>
+              </a:rPr>
+              <a:t>Fifth level</a:t>
+            </a:r>
+            <a:endParaRPr lang="es-ES" sz="1100" b="0" u="none" strike="noStrike">
+              <a:solidFill>
+                <a:srgbClr val="000000"/>
+              </a:solidFill>
+              <a:effectLst/>
+              <a:uFillTx/>
+              <a:latin typeface="Arial"/>
+            </a:endParaRPr>
+          </a:p>
+        </p:txBody>
+      </p:sp>
+      <p:sp>
+        <p:nvSpPr>
+          <p:cNvPr id="61" name="PlaceHolder 4"/>
+          <p:cNvSpPr>
+            <a:spLocks noGrp="1"/>
+          </p:cNvSpPr>
+          <p:nvPr>
+            <p:ph type="body"/>
+          </p:nvPr>
+        </p:nvSpPr>
+        <p:spPr>
+          <a:xfrm>
+            <a:off x="6322680" y="1696320"/>
+            <a:ext cx="4987440" cy="646920"/>
           </a:xfrm>
           <a:prstGeom prst="rect">
             <a:avLst/>
@@ -1016,7 +785,7 @@
               </a:tabLst>
             </a:pPr>
             <a:r>
-              <a:rPr lang="en-US" sz="1600" b="0" u="none" strike="noStrike">
+              <a:rPr lang="en-US" sz="1400" b="1" u="none" spc="300" strike="noStrike" cap="all">
                 <a:solidFill>
                   <a:schemeClr val="dk2"/>
                 </a:solidFill>
@@ -1026,20 +795,219 @@
               </a:rPr>
               <a:t>Click to edit Master text styles</a:t>
             </a:r>
-            <a:endParaRPr lang="es-ES" sz="1600" b="0" u="none" strike="noStrike">
-              <a:solidFill>
-                <a:schemeClr val="dk2"/>
-              </a:solidFill>
-              <a:effectLst/>
-              <a:uFillTx/>
-              <a:latin typeface="Aptos Light"/>
+            <a:endParaRPr lang="es-ES" sz="1400" b="0" u="none" strike="noStrike">
+              <a:solidFill>
+                <a:srgbClr val="000000"/>
+              </a:solidFill>
+              <a:effectLst/>
+              <a:uFillTx/>
+              <a:latin typeface="Arial"/>
             </a:endParaRPr>
           </a:p>
         </p:txBody>
       </p:sp>
       <p:sp>
         <p:nvSpPr>
-          <p:cNvPr id="61" name="PlaceHolder 4"/>
+          <p:cNvPr id="62" name="PlaceHolder 5"/>
+          <p:cNvSpPr>
+            <a:spLocks noGrp="1"/>
+          </p:cNvSpPr>
+          <p:nvPr>
+            <p:ph type="body"/>
+          </p:nvPr>
+        </p:nvSpPr>
+        <p:spPr>
+          <a:xfrm>
+            <a:off x="6322680" y="2343960"/>
+            <a:ext cx="4987440" cy="3832560"/>
+          </a:xfrm>
+          <a:prstGeom prst="rect">
+            <a:avLst/>
+          </a:prstGeom>
+          <a:noFill/>
+          <a:ln w="0">
+            <a:noFill/>
+          </a:ln>
+        </p:spPr>
+        <p:txBody>
+          <a:bodyPr lIns="91440" rIns="91440" tIns="45720" bIns="45720" anchor="t">
+            <a:noAutofit/>
+          </a:bodyPr>
+          <a:p>
+            <a:pPr marL="228600" indent="-228600" defTabSz="914400">
+              <a:lnSpc>
+                <a:spcPct val="120000"/>
+              </a:lnSpc>
+              <a:spcBef>
+                <a:spcPts val="1001"/>
+              </a:spcBef>
+              <a:buClr>
+                <a:srgbClr val="35403a"/>
+              </a:buClr>
+              <a:buFont typeface="Arial"/>
+              <a:buChar char="•"/>
+            </a:pPr>
+            <a:r>
+              <a:rPr lang="en-US" sz="1600" b="0" u="none" strike="noStrike">
+                <a:solidFill>
+                  <a:schemeClr val="dk2"/>
+                </a:solidFill>
+                <a:effectLst/>
+                <a:uFillTx/>
+                <a:latin typeface="Aptos Light"/>
+              </a:rPr>
+              <a:t>Click to edit Master text styles</a:t>
+            </a:r>
+            <a:endParaRPr lang="es-ES" sz="1600" b="0" u="none" strike="noStrike">
+              <a:solidFill>
+                <a:srgbClr val="000000"/>
+              </a:solidFill>
+              <a:effectLst/>
+              <a:uFillTx/>
+              <a:latin typeface="Arial"/>
+            </a:endParaRPr>
+          </a:p>
+          <a:p>
+            <a:pPr marL="457200" lvl="1" indent="-228600" defTabSz="914400">
+              <a:lnSpc>
+                <a:spcPct val="120000"/>
+              </a:lnSpc>
+              <a:spcBef>
+                <a:spcPts val="499"/>
+              </a:spcBef>
+              <a:buClr>
+                <a:srgbClr val="35403a"/>
+              </a:buClr>
+              <a:buFont typeface="Arial"/>
+              <a:buChar char="•"/>
+            </a:pPr>
+            <a:r>
+              <a:rPr lang="en-US" sz="1400" b="0" u="none" strike="noStrike">
+                <a:solidFill>
+                  <a:schemeClr val="dk2"/>
+                </a:solidFill>
+                <a:effectLst/>
+                <a:uFillTx/>
+                <a:latin typeface="Aptos Light"/>
+              </a:rPr>
+              <a:t>Second level</a:t>
+            </a:r>
+            <a:endParaRPr lang="es-ES" sz="1400" b="0" u="none" strike="noStrike">
+              <a:solidFill>
+                <a:srgbClr val="000000"/>
+              </a:solidFill>
+              <a:effectLst/>
+              <a:uFillTx/>
+              <a:latin typeface="Arial"/>
+            </a:endParaRPr>
+          </a:p>
+          <a:p>
+            <a:pPr marL="685800" lvl="2" indent="-228600" defTabSz="914400">
+              <a:lnSpc>
+                <a:spcPct val="120000"/>
+              </a:lnSpc>
+              <a:spcBef>
+                <a:spcPts val="499"/>
+              </a:spcBef>
+              <a:buClr>
+                <a:srgbClr val="35403a"/>
+              </a:buClr>
+              <a:buFont typeface="Arial"/>
+              <a:buChar char="•"/>
+            </a:pPr>
+            <a:r>
+              <a:rPr lang="en-US" sz="1200" b="0" u="none" strike="noStrike">
+                <a:solidFill>
+                  <a:schemeClr val="dk2"/>
+                </a:solidFill>
+                <a:effectLst/>
+                <a:uFillTx/>
+                <a:latin typeface="Aptos Light"/>
+              </a:rPr>
+              <a:t>Third level</a:t>
+            </a:r>
+            <a:endParaRPr lang="es-ES" sz="1200" b="0" u="none" strike="noStrike">
+              <a:solidFill>
+                <a:srgbClr val="000000"/>
+              </a:solidFill>
+              <a:effectLst/>
+              <a:uFillTx/>
+              <a:latin typeface="Arial"/>
+            </a:endParaRPr>
+          </a:p>
+          <a:p>
+            <a:pPr marL="914400" lvl="3" indent="-228600" defTabSz="914400">
+              <a:lnSpc>
+                <a:spcPct val="120000"/>
+              </a:lnSpc>
+              <a:spcBef>
+                <a:spcPts val="499"/>
+              </a:spcBef>
+              <a:buClr>
+                <a:srgbClr val="35403a"/>
+              </a:buClr>
+              <a:buFont typeface="Arial"/>
+              <a:buChar char="•"/>
+            </a:pPr>
+            <a:r>
+              <a:rPr lang="en-US" sz="1100" b="0" u="none" strike="noStrike">
+                <a:solidFill>
+                  <a:schemeClr val="dk2"/>
+                </a:solidFill>
+                <a:effectLst/>
+                <a:uFillTx/>
+                <a:latin typeface="Aptos Light"/>
+              </a:rPr>
+              <a:t>Fourth level</a:t>
+            </a:r>
+            <a:endParaRPr lang="es-ES" sz="1100" b="0" u="none" strike="noStrike">
+              <a:solidFill>
+                <a:srgbClr val="000000"/>
+              </a:solidFill>
+              <a:effectLst/>
+              <a:uFillTx/>
+              <a:latin typeface="Arial"/>
+            </a:endParaRPr>
+          </a:p>
+          <a:p>
+            <a:pPr marL="1143000" lvl="4" indent="-228600" defTabSz="914400">
+              <a:lnSpc>
+                <a:spcPct val="120000"/>
+              </a:lnSpc>
+              <a:spcBef>
+                <a:spcPts val="499"/>
+              </a:spcBef>
+              <a:buClr>
+                <a:srgbClr val="35403a"/>
+              </a:buClr>
+              <a:buFont typeface="Arial"/>
+              <a:buChar char="•"/>
+            </a:pPr>
+            <a:r>
+              <a:rPr lang="en-US" sz="1100" b="0" u="none" strike="noStrike">
+                <a:solidFill>
+                  <a:schemeClr val="dk2"/>
+                </a:solidFill>
+                <a:effectLst/>
+                <a:uFillTx/>
+                <a:latin typeface="Aptos Light"/>
+              </a:rPr>
+              <a:t>Fifth level</a:t>
+            </a:r>
+            <a:endParaRPr lang="es-ES" sz="1100" b="0" u="none" strike="noStrike">
+              <a:solidFill>
+                <a:srgbClr val="000000"/>
+              </a:solidFill>
+              <a:effectLst/>
+              <a:uFillTx/>
+              <a:latin typeface="Arial"/>
+            </a:endParaRPr>
+          </a:p>
+        </p:txBody>
+      </p:sp>
+      <p:sp>
+        <p:nvSpPr>
+          <p:cNvPr id="63" name="PlaceHolder 6"/>
           <p:cNvSpPr>
             <a:spLocks noGrp="1"/>
           </p:cNvSpPr>
@@ -1050,7 +1018,7 @@
         <p:spPr>
           <a:xfrm>
             <a:off x="877680" y="6356520"/>
-            <a:ext cx="2742840" cy="364680"/>
+            <a:ext cx="2742480" cy="364320"/>
           </a:xfrm>
           <a:prstGeom prst="rect">
             <a:avLst/>
@@ -1070,6 +1038,9 @@
                 <a:spcPct val="100000"/>
               </a:lnSpc>
               <a:buNone/>
+              <a:tabLst>
+                <a:tab algn="l" pos="0"/>
+              </a:tabLst>
               <a:defRPr lang="en-US" sz="800" b="0" u="none" spc="300" strike="noStrike" cap="all">
                 <a:solidFill>
                   <a:schemeClr val="dk2"/>
@@ -1086,6 +1057,9 @@
                 <a:spcPct val="100000"/>
               </a:lnSpc>
               <a:buNone/>
+              <a:tabLst>
+                <a:tab algn="l" pos="0"/>
+              </a:tabLst>
             </a:pPr>
             <a:r>
               <a:rPr lang="en-US" sz="800" b="0" u="none" spc="300" strike="noStrike" cap="all">
@@ -1111,7 +1085,7 @@
       </p:sp>
       <p:sp>
         <p:nvSpPr>
-          <p:cNvPr id="62" name="PlaceHolder 5"/>
+          <p:cNvPr id="64" name="PlaceHolder 7"/>
           <p:cNvSpPr>
             <a:spLocks noGrp="1"/>
           </p:cNvSpPr>
@@ -1122,7 +1096,7 @@
         <p:spPr>
           <a:xfrm>
             <a:off x="7132320" y="6356520"/>
-            <a:ext cx="4297320" cy="364680"/>
+            <a:ext cx="4296960" cy="364320"/>
           </a:xfrm>
           <a:prstGeom prst="rect">
             <a:avLst/>
@@ -1138,7 +1112,13 @@
           </a:bodyPr>
           <a:lstStyle>
             <a:lvl1pPr indent="0" algn="ctr">
-              <a:buNone/>
+              <a:lnSpc>
+                <a:spcPct val="100000"/>
+              </a:lnSpc>
+              <a:buNone/>
+              <a:tabLst>
+                <a:tab algn="l" pos="0"/>
+              </a:tabLst>
               <a:defRPr lang="en-US" sz="800" b="0" u="none" spc="300" strike="noStrike" cap="all">
                 <a:solidFill>
                   <a:schemeClr val="dk2"/>
@@ -1151,7 +1131,13 @@
           </a:lstStyle>
           <a:p>
             <a:pPr indent="0" algn="ctr">
-              <a:buNone/>
+              <a:lnSpc>
+                <a:spcPct val="100000"/>
+              </a:lnSpc>
+              <a:buNone/>
+              <a:tabLst>
+                <a:tab algn="l" pos="0"/>
+              </a:tabLst>
             </a:pPr>
             <a:r>
               <a:rPr lang="en-US" sz="800" b="0" u="none" spc="300" strike="noStrike" cap="all">
@@ -1177,7 +1163,7 @@
       </p:sp>
       <p:sp>
         <p:nvSpPr>
-          <p:cNvPr id="63" name="PlaceHolder 6"/>
+          <p:cNvPr id="65" name="PlaceHolder 8"/>
           <p:cNvSpPr>
             <a:spLocks noGrp="1"/>
           </p:cNvSpPr>
@@ -1188,7 +1174,7 @@
         <p:spPr>
           <a:xfrm>
             <a:off x="11430000" y="6356520"/>
-            <a:ext cx="520920" cy="364680"/>
+            <a:ext cx="520560" cy="364320"/>
           </a:xfrm>
           <a:prstGeom prst="rect">
             <a:avLst/>
@@ -1208,6 +1194,9 @@
                 <a:spcPct val="100000"/>
               </a:lnSpc>
               <a:buNone/>
+              <a:tabLst>
+                <a:tab algn="l" pos="0"/>
+              </a:tabLst>
               <a:defRPr lang="en-US" sz="1400" b="0" u="none" strike="noStrike">
                 <a:solidFill>
                   <a:schemeClr val="dk2"/>
@@ -1224,8 +1213,11 @@
                 <a:spcPct val="100000"/>
               </a:lnSpc>
               <a:buNone/>
-            </a:pPr>
-            <a:fld id="{23C6077E-AB5B-41DC-82E0-95DB9E8C2E36}" type="slidenum">
+              <a:tabLst>
+                <a:tab algn="l" pos="0"/>
+              </a:tabLst>
+            </a:pPr>
+            <a:fld id="{20B6F1DC-FD33-4E02-BDDE-241EE0BF59D6}" type="slidenum">
               <a:rPr lang="en-US" sz="1400" b="0" u="none" strike="noStrike">
                 <a:solidFill>
                   <a:schemeClr val="dk2"/>
@@ -1253,8 +1245,8 @@
 </file>
 
 <file path=ppt/slideLayouts/slideLayout11.xml><?xml version="1.0" encoding="utf-8"?>
-<p:sldLayout xmlns:a="http://schemas.openxmlformats.org/drawingml/2006/main" xmlns:p="http://schemas.openxmlformats.org/presentationml/2006/main" xmlns:r="http://schemas.openxmlformats.org/officeDocument/2006/relationships" xmlns:p14="http://schemas.microsoft.com/office/powerpoint/2010/main" xmlns:p15="http://schemas.microsoft.com/office/powerpoint/2012/main" xmlns:mc="http://schemas.openxmlformats.org/markup-compatibility/2006" type="blank" preserve="1">
-  <p:cSld name="Picture with Caption">
+<p:sldLayout xmlns:a="http://schemas.openxmlformats.org/drawingml/2006/main" xmlns:p="http://schemas.openxmlformats.org/presentationml/2006/main" xmlns:r="http://schemas.openxmlformats.org/officeDocument/2006/relationships" xmlns:p14="http://schemas.microsoft.com/office/powerpoint/2010/main" xmlns:p15="http://schemas.microsoft.com/office/powerpoint/2012/main" xmlns:mc="http://schemas.openxmlformats.org/markup-compatibility/2006" type="titleOnly" preserve="1">
+  <p:cSld name="Title Only">
     <p:bg>
       <p:bgPr>
         <a:solidFill>
@@ -1278,14 +1270,14 @@
       </p:grpSpPr>
       <p:sp>
         <p:nvSpPr>
-          <p:cNvPr id="64" name="Rectangle 6"/>
+          <p:cNvPr id="66" name="Rectangle 6"/>
           <p:cNvSpPr/>
           <p:nvPr/>
         </p:nvSpPr>
         <p:spPr>
           <a:xfrm>
             <a:off x="0" y="0"/>
-            <a:ext cx="12191760" cy="6859800"/>
+            <a:ext cx="12191400" cy="6859440"/>
           </a:xfrm>
           <a:prstGeom prst="rect">
             <a:avLst/>
@@ -1319,6 +1311,11 @@
             <a:noAutofit/>
           </a:bodyPr>
           <a:p>
+            <a:pPr>
+              <a:lnSpc>
+                <a:spcPct val="100000"/>
+              </a:lnSpc>
+            </a:pPr>
             <a:endParaRPr lang="es-ES" sz="1800" b="0" u="none" strike="noStrike">
               <a:solidFill>
                 <a:srgbClr val="000000"/>
@@ -1332,7 +1329,7 @@
       </p:sp>
       <p:sp>
         <p:nvSpPr>
-          <p:cNvPr id="65" name="PlaceHolder 1"/>
+          <p:cNvPr id="67" name="PlaceHolder 1"/>
           <p:cNvSpPr>
             <a:spLocks noGrp="1"/>
           </p:cNvSpPr>
@@ -1342,338 +1339,8 @@
         </p:nvSpPr>
         <p:spPr>
           <a:xfrm>
-            <a:off x="839880" y="820800"/>
-            <a:ext cx="3638880" cy="2062080"/>
-          </a:xfrm>
-          <a:prstGeom prst="rect">
-            <a:avLst/>
-          </a:prstGeom>
-          <a:noFill/>
-          <a:ln w="0">
-            <a:noFill/>
-          </a:ln>
-        </p:spPr>
-        <p:txBody>
-          <a:bodyPr lIns="91440" rIns="91440" tIns="45720" bIns="45720" anchor="t">
-            <a:normAutofit/>
-          </a:bodyPr>
-          <a:p>
-            <a:pPr indent="0" defTabSz="914400">
-              <a:lnSpc>
-                <a:spcPct val="100000"/>
-              </a:lnSpc>
-              <a:buNone/>
-            </a:pPr>
-            <a:r>
-              <a:rPr lang="en-US" sz="2800" b="0" u="none" strike="noStrike">
-                <a:solidFill>
-                  <a:schemeClr val="dk2"/>
-                </a:solidFill>
-                <a:effectLst/>
-                <a:uFillTx/>
-                <a:latin typeface="Walbaum Display"/>
-              </a:rPr>
-              <a:t>Click to edit Master title style</a:t>
-            </a:r>
-            <a:endParaRPr lang="es-ES" sz="2800" b="0" u="none" strike="noStrike">
-              <a:solidFill>
-                <a:schemeClr val="dk1"/>
-              </a:solidFill>
-              <a:effectLst/>
-              <a:uFillTx/>
-              <a:latin typeface="Aptos Light"/>
-            </a:endParaRPr>
-          </a:p>
-        </p:txBody>
-      </p:sp>
-      <p:sp>
-        <p:nvSpPr>
-          <p:cNvPr id="66" name="PlaceHolder 2"/>
-          <p:cNvSpPr>
-            <a:spLocks noGrp="1"/>
-          </p:cNvSpPr>
-          <p:nvPr>
-            <p:ph type="body"/>
-          </p:nvPr>
-        </p:nvSpPr>
-        <p:spPr>
-          <a:xfrm>
-            <a:off x="5247360" y="919440"/>
-            <a:ext cx="6107760" cy="5013360"/>
-          </a:xfrm>
-          <a:prstGeom prst="rect">
-            <a:avLst/>
-          </a:prstGeom>
-          <a:noFill/>
-          <a:ln w="0">
-            <a:noFill/>
-          </a:ln>
-        </p:spPr>
-        <p:txBody>
-          <a:bodyPr lIns="90000" rIns="90000" tIns="45000" bIns="45000" anchor="t">
-            <a:noAutofit/>
-          </a:bodyPr>
-          <a:p>
-            <a:pPr marL="432000" indent="-324000">
-              <a:lnSpc>
-                <a:spcPct val="120000"/>
-              </a:lnSpc>
-              <a:spcBef>
-                <a:spcPts val="1417"/>
-              </a:spcBef>
-              <a:buClr>
-                <a:srgbClr val="000000"/>
-              </a:buClr>
-              <a:buSzPct val="45000"/>
-              <a:buFont typeface="Wingdings" charset="2"/>
-              <a:buChar char=""/>
-            </a:pPr>
-            <a:r>
-              <a:rPr lang="es-ES" sz="3200" b="0" u="none" strike="noStrike">
-                <a:solidFill>
-                  <a:schemeClr val="dk2"/>
-                </a:solidFill>
-                <a:effectLst/>
-                <a:uFillTx/>
-                <a:latin typeface="Aptos Light"/>
-              </a:rPr>
-              <a:t>Pulse para editar el formato de texto del esquema</a:t>
-            </a:r>
-            <a:endParaRPr lang="es-ES" sz="3200" b="0" u="none" strike="noStrike">
-              <a:solidFill>
-                <a:schemeClr val="dk2"/>
-              </a:solidFill>
-              <a:effectLst/>
-              <a:uFillTx/>
-              <a:latin typeface="Aptos Light"/>
-            </a:endParaRPr>
-          </a:p>
-          <a:p>
-            <a:pPr marL="864000" lvl="1" indent="-324000">
-              <a:lnSpc>
-                <a:spcPct val="120000"/>
-              </a:lnSpc>
-              <a:spcBef>
-                <a:spcPts val="1134"/>
-              </a:spcBef>
-              <a:buClr>
-                <a:srgbClr val="000000"/>
-              </a:buClr>
-              <a:buSzPct val="75000"/>
-              <a:buFont typeface="Symbol" charset="2"/>
-              <a:buChar char=""/>
-            </a:pPr>
-            <a:r>
-              <a:rPr lang="es-ES" sz="3200" b="0" u="none" strike="noStrike">
-                <a:solidFill>
-                  <a:schemeClr val="dk2"/>
-                </a:solidFill>
-                <a:effectLst/>
-                <a:uFillTx/>
-                <a:latin typeface="Aptos Light"/>
-              </a:rPr>
-              <a:t>Segundo nivel del esquema</a:t>
-            </a:r>
-            <a:endParaRPr lang="es-ES" sz="3200" b="0" u="none" strike="noStrike">
-              <a:solidFill>
-                <a:schemeClr val="dk2"/>
-              </a:solidFill>
-              <a:effectLst/>
-              <a:uFillTx/>
-              <a:latin typeface="Aptos Light"/>
-            </a:endParaRPr>
-          </a:p>
-          <a:p>
-            <a:pPr marL="1296000" lvl="2" indent="-288000">
-              <a:lnSpc>
-                <a:spcPct val="120000"/>
-              </a:lnSpc>
-              <a:spcBef>
-                <a:spcPts val="850"/>
-              </a:spcBef>
-              <a:buClr>
-                <a:srgbClr val="000000"/>
-              </a:buClr>
-              <a:buSzPct val="45000"/>
-              <a:buFont typeface="Wingdings" charset="2"/>
-              <a:buChar char=""/>
-            </a:pPr>
-            <a:r>
-              <a:rPr lang="es-ES" sz="3200" b="0" u="none" strike="noStrike">
-                <a:solidFill>
-                  <a:schemeClr val="dk2"/>
-                </a:solidFill>
-                <a:effectLst/>
-                <a:uFillTx/>
-                <a:latin typeface="Aptos Light"/>
-              </a:rPr>
-              <a:t>Tercer nivel del esquema</a:t>
-            </a:r>
-            <a:endParaRPr lang="es-ES" sz="3200" b="0" u="none" strike="noStrike">
-              <a:solidFill>
-                <a:schemeClr val="dk2"/>
-              </a:solidFill>
-              <a:effectLst/>
-              <a:uFillTx/>
-              <a:latin typeface="Aptos Light"/>
-            </a:endParaRPr>
-          </a:p>
-          <a:p>
-            <a:pPr marL="1728000" lvl="3" indent="-216000">
-              <a:lnSpc>
-                <a:spcPct val="120000"/>
-              </a:lnSpc>
-              <a:spcBef>
-                <a:spcPts val="567"/>
-              </a:spcBef>
-              <a:buClr>
-                <a:srgbClr val="000000"/>
-              </a:buClr>
-              <a:buSzPct val="75000"/>
-              <a:buFont typeface="Symbol" charset="2"/>
-              <a:buChar char=""/>
-            </a:pPr>
-            <a:r>
-              <a:rPr lang="es-ES" sz="3200" b="0" u="none" strike="noStrike">
-                <a:solidFill>
-                  <a:schemeClr val="dk2"/>
-                </a:solidFill>
-                <a:effectLst/>
-                <a:uFillTx/>
-                <a:latin typeface="Aptos Light"/>
-              </a:rPr>
-              <a:t>Cuarto nivel del esquema</a:t>
-            </a:r>
-            <a:endParaRPr lang="es-ES" sz="3200" b="0" u="none" strike="noStrike">
-              <a:solidFill>
-                <a:schemeClr val="dk2"/>
-              </a:solidFill>
-              <a:effectLst/>
-              <a:uFillTx/>
-              <a:latin typeface="Aptos Light"/>
-            </a:endParaRPr>
-          </a:p>
-          <a:p>
-            <a:pPr marL="2160000" lvl="4" indent="-216000">
-              <a:lnSpc>
-                <a:spcPct val="120000"/>
-              </a:lnSpc>
-              <a:spcBef>
-                <a:spcPts val="283"/>
-              </a:spcBef>
-              <a:buClr>
-                <a:srgbClr val="000000"/>
-              </a:buClr>
-              <a:buSzPct val="45000"/>
-              <a:buFont typeface="Wingdings" charset="2"/>
-              <a:buChar char=""/>
-            </a:pPr>
-            <a:r>
-              <a:rPr lang="es-ES" sz="3200" b="0" u="none" strike="noStrike">
-                <a:solidFill>
-                  <a:schemeClr val="dk2"/>
-                </a:solidFill>
-                <a:effectLst/>
-                <a:uFillTx/>
-                <a:latin typeface="Aptos Light"/>
-              </a:rPr>
-              <a:t>Quinto nivel del esquema</a:t>
-            </a:r>
-            <a:endParaRPr lang="es-ES" sz="3200" b="0" u="none" strike="noStrike">
-              <a:solidFill>
-                <a:schemeClr val="dk2"/>
-              </a:solidFill>
-              <a:effectLst/>
-              <a:uFillTx/>
-              <a:latin typeface="Aptos Light"/>
-            </a:endParaRPr>
-          </a:p>
-          <a:p>
-            <a:pPr marL="2592000" lvl="5" indent="-216000">
-              <a:lnSpc>
-                <a:spcPct val="120000"/>
-              </a:lnSpc>
-              <a:spcBef>
-                <a:spcPts val="283"/>
-              </a:spcBef>
-              <a:buClr>
-                <a:srgbClr val="000000"/>
-              </a:buClr>
-              <a:buSzPct val="45000"/>
-              <a:buFont typeface="Wingdings" charset="2"/>
-              <a:buChar char=""/>
-            </a:pPr>
-            <a:r>
-              <a:rPr lang="es-ES" sz="3200" b="0" u="none" strike="noStrike">
-                <a:solidFill>
-                  <a:schemeClr val="dk2"/>
-                </a:solidFill>
-                <a:effectLst/>
-                <a:uFillTx/>
-                <a:latin typeface="Aptos Light"/>
-              </a:rPr>
-              <a:t>Sexto nivel del esquema</a:t>
-            </a:r>
-            <a:endParaRPr lang="es-ES" sz="3200" b="0" u="none" strike="noStrike">
-              <a:solidFill>
-                <a:schemeClr val="dk2"/>
-              </a:solidFill>
-              <a:effectLst/>
-              <a:uFillTx/>
-              <a:latin typeface="Aptos Light"/>
-            </a:endParaRPr>
-          </a:p>
-          <a:p>
-            <a:pPr marL="3024000" lvl="6" indent="-216000">
-              <a:lnSpc>
-                <a:spcPct val="120000"/>
-              </a:lnSpc>
-              <a:spcBef>
-                <a:spcPts val="283"/>
-              </a:spcBef>
-              <a:buClr>
-                <a:srgbClr val="000000"/>
-              </a:buClr>
-              <a:buSzPct val="45000"/>
-              <a:buFont typeface="Wingdings" charset="2"/>
-              <a:buChar char=""/>
-            </a:pPr>
-            <a:r>
-              <a:rPr lang="es-ES" sz="3200" b="0" u="none" strike="noStrike">
-                <a:solidFill>
-                  <a:schemeClr val="dk2"/>
-                </a:solidFill>
-                <a:effectLst/>
-                <a:uFillTx/>
-                <a:latin typeface="Aptos Light"/>
-              </a:rPr>
-              <a:t>Séptimo nivel del esquema</a:t>
-            </a:r>
-            <a:endParaRPr lang="es-ES" sz="3200" b="0" u="none" strike="noStrike">
-              <a:solidFill>
-                <a:schemeClr val="dk2"/>
-              </a:solidFill>
-              <a:effectLst/>
-              <a:uFillTx/>
-              <a:latin typeface="Aptos Light"/>
-            </a:endParaRPr>
-          </a:p>
-        </p:txBody>
-      </p:sp>
-      <p:sp>
-        <p:nvSpPr>
-          <p:cNvPr id="67" name="PlaceHolder 3"/>
-          <p:cNvSpPr>
-            <a:spLocks noGrp="1"/>
-          </p:cNvSpPr>
-          <p:nvPr>
-            <p:ph type="body"/>
-          </p:nvPr>
-        </p:nvSpPr>
-        <p:spPr>
-          <a:xfrm>
-            <a:off x="839880" y="3000600"/>
-            <a:ext cx="3643560" cy="2868120"/>
+            <a:off x="871200" y="588240"/>
+            <a:ext cx="10449000" cy="1265040"/>
           </a:xfrm>
           <a:prstGeom prst="rect">
             <a:avLst/>
@@ -1690,41 +1357,38 @@
           <a:p>
             <a:pPr indent="0" defTabSz="914400">
               <a:lnSpc>
-                <a:spcPct val="120000"/>
-              </a:lnSpc>
-              <a:spcBef>
-                <a:spcPts val="1001"/>
-              </a:spcBef>
-              <a:buNone/>
-              <a:tabLst>
-                <a:tab algn="l" pos="0"/>
-              </a:tabLst>
-            </a:pPr>
-            <a:r>
-              <a:rPr lang="en-US" sz="1600" b="0" u="none" strike="noStrike">
-                <a:solidFill>
-                  <a:schemeClr val="dk2"/>
-                </a:solidFill>
-                <a:effectLst/>
-                <a:uFillTx/>
-                <a:latin typeface="Aptos Light"/>
-              </a:rPr>
-              <a:t>Click to edit Master text styles</a:t>
-            </a:r>
-            <a:endParaRPr lang="es-ES" sz="1600" b="0" u="none" strike="noStrike">
-              <a:solidFill>
-                <a:schemeClr val="dk2"/>
-              </a:solidFill>
-              <a:effectLst/>
-              <a:uFillTx/>
-              <a:latin typeface="Aptos Light"/>
+                <a:spcPct val="100000"/>
+              </a:lnSpc>
+              <a:buNone/>
+              <a:tabLst>
+                <a:tab algn="l" pos="0"/>
+              </a:tabLst>
+            </a:pPr>
+            <a:r>
+              <a:rPr lang="en-US" sz="3200" b="0" u="none" strike="noStrike">
+                <a:solidFill>
+                  <a:schemeClr val="dk2"/>
+                </a:solidFill>
+                <a:effectLst/>
+                <a:uFillTx/>
+                <a:latin typeface="Walbaum Display"/>
+              </a:rPr>
+              <a:t>Click to edit Master title style</a:t>
+            </a:r>
+            <a:endParaRPr lang="es-ES" sz="3200" b="0" u="none" strike="noStrike">
+              <a:solidFill>
+                <a:srgbClr val="000000"/>
+              </a:solidFill>
+              <a:effectLst/>
+              <a:uFillTx/>
+              <a:latin typeface="Arial"/>
             </a:endParaRPr>
           </a:p>
         </p:txBody>
       </p:sp>
       <p:sp>
         <p:nvSpPr>
-          <p:cNvPr id="68" name="PlaceHolder 4"/>
+          <p:cNvPr id="68" name="PlaceHolder 2"/>
           <p:cNvSpPr>
             <a:spLocks noGrp="1"/>
           </p:cNvSpPr>
@@ -1735,7 +1399,7 @@
         <p:spPr>
           <a:xfrm>
             <a:off x="877680" y="6356520"/>
-            <a:ext cx="2742840" cy="364680"/>
+            <a:ext cx="2742480" cy="364320"/>
           </a:xfrm>
           <a:prstGeom prst="rect">
             <a:avLst/>
@@ -1755,6 +1419,9 @@
                 <a:spcPct val="100000"/>
               </a:lnSpc>
               <a:buNone/>
+              <a:tabLst>
+                <a:tab algn="l" pos="0"/>
+              </a:tabLst>
               <a:defRPr lang="en-US" sz="800" b="0" u="none" spc="300" strike="noStrike" cap="all">
                 <a:solidFill>
                   <a:schemeClr val="dk2"/>
@@ -1771,6 +1438,9 @@
                 <a:spcPct val="100000"/>
               </a:lnSpc>
               <a:buNone/>
+              <a:tabLst>
+                <a:tab algn="l" pos="0"/>
+              </a:tabLst>
             </a:pPr>
             <a:r>
               <a:rPr lang="en-US" sz="800" b="0" u="none" spc="300" strike="noStrike" cap="all">
@@ -1796,7 +1466,7 @@
       </p:sp>
       <p:sp>
         <p:nvSpPr>
-          <p:cNvPr id="69" name="PlaceHolder 5"/>
+          <p:cNvPr id="69" name="PlaceHolder 3"/>
           <p:cNvSpPr>
             <a:spLocks noGrp="1"/>
           </p:cNvSpPr>
@@ -1807,7 +1477,7 @@
         <p:spPr>
           <a:xfrm>
             <a:off x="7132320" y="6356520"/>
-            <a:ext cx="4297320" cy="364680"/>
+            <a:ext cx="4296960" cy="364320"/>
           </a:xfrm>
           <a:prstGeom prst="rect">
             <a:avLst/>
@@ -1823,7 +1493,13 @@
           </a:bodyPr>
           <a:lstStyle>
             <a:lvl1pPr indent="0" algn="ctr">
-              <a:buNone/>
+              <a:lnSpc>
+                <a:spcPct val="100000"/>
+              </a:lnSpc>
+              <a:buNone/>
+              <a:tabLst>
+                <a:tab algn="l" pos="0"/>
+              </a:tabLst>
               <a:defRPr lang="en-US" sz="800" b="0" u="none" spc="300" strike="noStrike" cap="all">
                 <a:solidFill>
                   <a:schemeClr val="dk2"/>
@@ -1836,7 +1512,13 @@
           </a:lstStyle>
           <a:p>
             <a:pPr indent="0" algn="ctr">
-              <a:buNone/>
+              <a:lnSpc>
+                <a:spcPct val="100000"/>
+              </a:lnSpc>
+              <a:buNone/>
+              <a:tabLst>
+                <a:tab algn="l" pos="0"/>
+              </a:tabLst>
             </a:pPr>
             <a:r>
               <a:rPr lang="en-US" sz="800" b="0" u="none" spc="300" strike="noStrike" cap="all">
@@ -1862,7 +1544,7 @@
       </p:sp>
       <p:sp>
         <p:nvSpPr>
-          <p:cNvPr id="70" name="PlaceHolder 6"/>
+          <p:cNvPr id="70" name="PlaceHolder 4"/>
           <p:cNvSpPr>
             <a:spLocks noGrp="1"/>
           </p:cNvSpPr>
@@ -1873,7 +1555,7 @@
         <p:spPr>
           <a:xfrm>
             <a:off x="11430000" y="6356520"/>
-            <a:ext cx="520920" cy="364680"/>
+            <a:ext cx="520560" cy="364320"/>
           </a:xfrm>
           <a:prstGeom prst="rect">
             <a:avLst/>
@@ -1893,6 +1575,9 @@
                 <a:spcPct val="100000"/>
               </a:lnSpc>
               <a:buNone/>
+              <a:tabLst>
+                <a:tab algn="l" pos="0"/>
+              </a:tabLst>
               <a:defRPr lang="en-US" sz="1400" b="0" u="none" strike="noStrike">
                 <a:solidFill>
                   <a:schemeClr val="dk2"/>
@@ -1909,8 +1594,11 @@
                 <a:spcPct val="100000"/>
               </a:lnSpc>
               <a:buNone/>
-            </a:pPr>
-            <a:fld id="{23197871-8C75-4BB0-A633-75775121D8B8}" type="slidenum">
+              <a:tabLst>
+                <a:tab algn="l" pos="0"/>
+              </a:tabLst>
+            </a:pPr>
+            <a:fld id="{80A69B57-0F48-4F1E-8DEA-92E70784C226}" type="slidenum">
               <a:rPr lang="en-US" sz="1400" b="0" u="none" strike="noStrike">
                 <a:solidFill>
                   <a:schemeClr val="dk2"/>
@@ -1938,8 +1626,8 @@
 </file>
 
 <file path=ppt/slideLayouts/slideLayout2.xml><?xml version="1.0" encoding="utf-8"?>
-<p:sldLayout xmlns:a="http://schemas.openxmlformats.org/drawingml/2006/main" xmlns:p="http://schemas.openxmlformats.org/presentationml/2006/main" xmlns:r="http://schemas.openxmlformats.org/officeDocument/2006/relationships" xmlns:p14="http://schemas.microsoft.com/office/powerpoint/2010/main" xmlns:p15="http://schemas.microsoft.com/office/powerpoint/2012/main" xmlns:mc="http://schemas.openxmlformats.org/markup-compatibility/2006" type="vertTx" preserve="1">
-  <p:cSld name="Title and Vertical Text">
+<p:sldLayout xmlns:a="http://schemas.openxmlformats.org/drawingml/2006/main" xmlns:p="http://schemas.openxmlformats.org/presentationml/2006/main" xmlns:r="http://schemas.openxmlformats.org/officeDocument/2006/relationships" xmlns:p14="http://schemas.microsoft.com/office/powerpoint/2010/main" xmlns:p15="http://schemas.microsoft.com/office/powerpoint/2012/main" xmlns:mc="http://schemas.openxmlformats.org/markup-compatibility/2006" type="blank" preserve="1">
+  <p:cSld name="Content with Caption">
     <p:bg>
       <p:bgPr>
         <a:solidFill>
@@ -1963,14 +1651,14 @@
       </p:grpSpPr>
       <p:sp>
         <p:nvSpPr>
-          <p:cNvPr id="8" name="Rectangle 6"/>
+          <p:cNvPr id="6" name="Rectangle 6"/>
           <p:cNvSpPr/>
           <p:nvPr/>
         </p:nvSpPr>
         <p:spPr>
           <a:xfrm>
             <a:off x="0" y="0"/>
-            <a:ext cx="12191760" cy="6859800"/>
+            <a:ext cx="12191400" cy="6859440"/>
           </a:xfrm>
           <a:prstGeom prst="rect">
             <a:avLst/>
@@ -2004,6 +1692,11 @@
             <a:noAutofit/>
           </a:bodyPr>
           <a:p>
+            <a:pPr>
+              <a:lnSpc>
+                <a:spcPct val="100000"/>
+              </a:lnSpc>
+            </a:pPr>
             <a:endParaRPr lang="es-ES" sz="1800" b="0" u="none" strike="noStrike">
               <a:solidFill>
                 <a:srgbClr val="000000"/>
@@ -2017,7 +1710,7 @@
       </p:sp>
       <p:sp>
         <p:nvSpPr>
-          <p:cNvPr id="9" name="PlaceHolder 1"/>
+          <p:cNvPr id="7" name="PlaceHolder 1"/>
           <p:cNvSpPr>
             <a:spLocks noGrp="1"/>
           </p:cNvSpPr>
@@ -2027,8 +1720,266 @@
         </p:nvSpPr>
         <p:spPr>
           <a:xfrm>
-            <a:off x="871200" y="588240"/>
-            <a:ext cx="10449360" cy="1265400"/>
+            <a:off x="839880" y="807840"/>
+            <a:ext cx="3639960" cy="2061720"/>
+          </a:xfrm>
+          <a:prstGeom prst="rect">
+            <a:avLst/>
+          </a:prstGeom>
+          <a:noFill/>
+          <a:ln w="0">
+            <a:noFill/>
+          </a:ln>
+        </p:spPr>
+        <p:txBody>
+          <a:bodyPr lIns="91440" rIns="91440" tIns="45720" bIns="45720" anchor="t">
+            <a:normAutofit/>
+          </a:bodyPr>
+          <a:p>
+            <a:pPr indent="0" defTabSz="914400">
+              <a:lnSpc>
+                <a:spcPct val="100000"/>
+              </a:lnSpc>
+              <a:buNone/>
+              <a:tabLst>
+                <a:tab algn="l" pos="0"/>
+              </a:tabLst>
+            </a:pPr>
+            <a:r>
+              <a:rPr lang="en-US" sz="2800" b="0" u="none" strike="noStrike">
+                <a:solidFill>
+                  <a:schemeClr val="dk2"/>
+                </a:solidFill>
+                <a:effectLst/>
+                <a:uFillTx/>
+                <a:latin typeface="Walbaum Display"/>
+              </a:rPr>
+              <a:t>Click to edit Master title style</a:t>
+            </a:r>
+            <a:endParaRPr lang="es-ES" sz="2800" b="0" u="none" strike="noStrike">
+              <a:solidFill>
+                <a:srgbClr val="000000"/>
+              </a:solidFill>
+              <a:effectLst/>
+              <a:uFillTx/>
+              <a:latin typeface="Arial"/>
+            </a:endParaRPr>
+          </a:p>
+        </p:txBody>
+      </p:sp>
+      <p:sp>
+        <p:nvSpPr>
+          <p:cNvPr id="8" name="PlaceHolder 2"/>
+          <p:cNvSpPr>
+            <a:spLocks noGrp="1"/>
+          </p:cNvSpPr>
+          <p:nvPr>
+            <p:ph type="body"/>
+          </p:nvPr>
+        </p:nvSpPr>
+        <p:spPr>
+          <a:xfrm>
+            <a:off x="5432760" y="807840"/>
+            <a:ext cx="5921640" cy="5052600"/>
+          </a:xfrm>
+          <a:prstGeom prst="rect">
+            <a:avLst/>
+          </a:prstGeom>
+          <a:noFill/>
+          <a:ln w="0">
+            <a:noFill/>
+          </a:ln>
+        </p:spPr>
+        <p:txBody>
+          <a:bodyPr lIns="91440" rIns="91440" tIns="45720" bIns="45720" anchor="t">
+            <a:normAutofit/>
+          </a:bodyPr>
+          <a:p>
+            <a:pPr marL="228600" indent="-228600" defTabSz="914400">
+              <a:lnSpc>
+                <a:spcPct val="120000"/>
+              </a:lnSpc>
+              <a:spcBef>
+                <a:spcPts val="1001"/>
+              </a:spcBef>
+              <a:buClr>
+                <a:srgbClr val="35403a"/>
+              </a:buClr>
+              <a:buFont typeface="Arial"/>
+              <a:buChar char="•"/>
+            </a:pPr>
+            <a:r>
+              <a:rPr lang="en-US" sz="2400" b="0" u="none" strike="noStrike">
+                <a:solidFill>
+                  <a:schemeClr val="dk2"/>
+                </a:solidFill>
+                <a:effectLst/>
+                <a:uFillTx/>
+                <a:latin typeface="Aptos Light"/>
+              </a:rPr>
+              <a:t>Click to edit Master text styles</a:t>
+            </a:r>
+            <a:endParaRPr lang="es-ES" sz="2400" b="0" u="none" strike="noStrike">
+              <a:solidFill>
+                <a:srgbClr val="000000"/>
+              </a:solidFill>
+              <a:effectLst/>
+              <a:uFillTx/>
+              <a:latin typeface="Arial"/>
+            </a:endParaRPr>
+          </a:p>
+          <a:p>
+            <a:pPr marL="457200" lvl="1" indent="-228600" defTabSz="914400">
+              <a:lnSpc>
+                <a:spcPct val="120000"/>
+              </a:lnSpc>
+              <a:spcBef>
+                <a:spcPts val="499"/>
+              </a:spcBef>
+              <a:buClr>
+                <a:srgbClr val="35403a"/>
+              </a:buClr>
+              <a:buFont typeface="Arial"/>
+              <a:buChar char="•"/>
+            </a:pPr>
+            <a:r>
+              <a:rPr lang="en-US" sz="2000" b="0" u="none" strike="noStrike">
+                <a:solidFill>
+                  <a:schemeClr val="dk2"/>
+                </a:solidFill>
+                <a:effectLst/>
+                <a:uFillTx/>
+                <a:latin typeface="Aptos Light"/>
+              </a:rPr>
+              <a:t>Second level</a:t>
+            </a:r>
+            <a:endParaRPr lang="es-ES" sz="2000" b="0" u="none" strike="noStrike">
+              <a:solidFill>
+                <a:srgbClr val="000000"/>
+              </a:solidFill>
+              <a:effectLst/>
+              <a:uFillTx/>
+              <a:latin typeface="Arial"/>
+            </a:endParaRPr>
+          </a:p>
+          <a:p>
+            <a:pPr marL="685800" lvl="2" indent="-228600" defTabSz="914400">
+              <a:lnSpc>
+                <a:spcPct val="120000"/>
+              </a:lnSpc>
+              <a:spcBef>
+                <a:spcPts val="499"/>
+              </a:spcBef>
+              <a:buClr>
+                <a:srgbClr val="35403a"/>
+              </a:buClr>
+              <a:buFont typeface="Arial"/>
+              <a:buChar char="•"/>
+            </a:pPr>
+            <a:r>
+              <a:rPr lang="en-US" sz="1800" b="0" u="none" strike="noStrike">
+                <a:solidFill>
+                  <a:schemeClr val="dk2"/>
+                </a:solidFill>
+                <a:effectLst/>
+                <a:uFillTx/>
+                <a:latin typeface="Aptos Light"/>
+              </a:rPr>
+              <a:t>Third level</a:t>
+            </a:r>
+            <a:endParaRPr lang="es-ES" sz="1800" b="0" u="none" strike="noStrike">
+              <a:solidFill>
+                <a:srgbClr val="000000"/>
+              </a:solidFill>
+              <a:effectLst/>
+              <a:uFillTx/>
+              <a:latin typeface="Arial"/>
+            </a:endParaRPr>
+          </a:p>
+          <a:p>
+            <a:pPr marL="914400" lvl="3" indent="-228600" defTabSz="914400">
+              <a:lnSpc>
+                <a:spcPct val="120000"/>
+              </a:lnSpc>
+              <a:spcBef>
+                <a:spcPts val="499"/>
+              </a:spcBef>
+              <a:buClr>
+                <a:srgbClr val="35403a"/>
+              </a:buClr>
+              <a:buFont typeface="Arial"/>
+              <a:buChar char="•"/>
+            </a:pPr>
+            <a:r>
+              <a:rPr lang="en-US" sz="1600" b="0" u="none" strike="noStrike">
+                <a:solidFill>
+                  <a:schemeClr val="dk2"/>
+                </a:solidFill>
+                <a:effectLst/>
+                <a:uFillTx/>
+                <a:latin typeface="Aptos Light"/>
+              </a:rPr>
+              <a:t>Fourth level</a:t>
+            </a:r>
+            <a:endParaRPr lang="es-ES" sz="1600" b="0" u="none" strike="noStrike">
+              <a:solidFill>
+                <a:srgbClr val="000000"/>
+              </a:solidFill>
+              <a:effectLst/>
+              <a:uFillTx/>
+              <a:latin typeface="Arial"/>
+            </a:endParaRPr>
+          </a:p>
+          <a:p>
+            <a:pPr marL="1143000" lvl="4" indent="-228600" defTabSz="914400">
+              <a:lnSpc>
+                <a:spcPct val="120000"/>
+              </a:lnSpc>
+              <a:spcBef>
+                <a:spcPts val="499"/>
+              </a:spcBef>
+              <a:buClr>
+                <a:srgbClr val="35403a"/>
+              </a:buClr>
+              <a:buFont typeface="Arial"/>
+              <a:buChar char="•"/>
+            </a:pPr>
+            <a:r>
+              <a:rPr lang="en-US" sz="1600" b="0" u="none" strike="noStrike">
+                <a:solidFill>
+                  <a:schemeClr val="dk2"/>
+                </a:solidFill>
+                <a:effectLst/>
+                <a:uFillTx/>
+                <a:latin typeface="Aptos Light"/>
+              </a:rPr>
+              <a:t>Fifth level</a:t>
+            </a:r>
+            <a:endParaRPr lang="es-ES" sz="1600" b="0" u="none" strike="noStrike">
+              <a:solidFill>
+                <a:srgbClr val="000000"/>
+              </a:solidFill>
+              <a:effectLst/>
+              <a:uFillTx/>
+              <a:latin typeface="Arial"/>
+            </a:endParaRPr>
+          </a:p>
+        </p:txBody>
+      </p:sp>
+      <p:sp>
+        <p:nvSpPr>
+          <p:cNvPr id="9" name="PlaceHolder 3"/>
+          <p:cNvSpPr>
+            <a:spLocks noGrp="1"/>
+          </p:cNvSpPr>
+          <p:nvPr>
+            <p:ph type="body"/>
+          </p:nvPr>
+        </p:nvSpPr>
+        <p:spPr>
+          <a:xfrm>
+            <a:off x="839880" y="3000600"/>
+            <a:ext cx="3639960" cy="2867760"/>
           </a:xfrm>
           <a:prstGeom prst="rect">
             <a:avLst/>
@@ -2045,234 +1996,41 @@
           <a:p>
             <a:pPr indent="0" defTabSz="914400">
               <a:lnSpc>
-                <a:spcPct val="100000"/>
-              </a:lnSpc>
-              <a:buNone/>
-            </a:pPr>
-            <a:r>
-              <a:rPr lang="en-US" sz="3200" b="0" u="none" strike="noStrike">
-                <a:solidFill>
-                  <a:schemeClr val="dk2"/>
-                </a:solidFill>
-                <a:effectLst/>
-                <a:uFillTx/>
-                <a:latin typeface="Walbaum Display"/>
-              </a:rPr>
-              <a:t>Click to edit Master title style</a:t>
-            </a:r>
-            <a:endParaRPr lang="es-ES" sz="3200" b="0" u="none" strike="noStrike">
-              <a:solidFill>
-                <a:schemeClr val="dk1"/>
-              </a:solidFill>
-              <a:effectLst/>
-              <a:uFillTx/>
-              <a:latin typeface="Aptos Light"/>
+                <a:spcPct val="120000"/>
+              </a:lnSpc>
+              <a:spcBef>
+                <a:spcPts val="1001"/>
+              </a:spcBef>
+              <a:buNone/>
+              <a:tabLst>
+                <a:tab algn="l" pos="0"/>
+              </a:tabLst>
+            </a:pPr>
+            <a:r>
+              <a:rPr lang="en-US" sz="1600" b="0" u="none" strike="noStrike">
+                <a:solidFill>
+                  <a:schemeClr val="dk2"/>
+                </a:solidFill>
+                <a:effectLst/>
+                <a:uFillTx/>
+                <a:latin typeface="Aptos Light"/>
+              </a:rPr>
+              <a:t>Click to edit Master text styles</a:t>
+            </a:r>
+            <a:endParaRPr lang="es-ES" sz="1600" b="0" u="none" strike="noStrike">
+              <a:solidFill>
+                <a:srgbClr val="000000"/>
+              </a:solidFill>
+              <a:effectLst/>
+              <a:uFillTx/>
+              <a:latin typeface="Arial"/>
             </a:endParaRPr>
           </a:p>
         </p:txBody>
       </p:sp>
       <p:sp>
         <p:nvSpPr>
-          <p:cNvPr id="10" name="PlaceHolder 2"/>
-          <p:cNvSpPr>
-            <a:spLocks noGrp="1"/>
-          </p:cNvSpPr>
-          <p:nvPr>
-            <p:ph type="body"/>
-          </p:nvPr>
-        </p:nvSpPr>
-        <p:spPr>
-          <a:xfrm>
-            <a:off x="877680" y="2157840"/>
-            <a:ext cx="10442160" cy="3903480"/>
-          </a:xfrm>
-          <a:prstGeom prst="rect">
-            <a:avLst/>
-          </a:prstGeom>
-          <a:noFill/>
-          <a:ln w="0">
-            <a:noFill/>
-          </a:ln>
-        </p:spPr>
-        <p:txBody>
-          <a:bodyPr lIns="91440" rIns="91440" tIns="45720" bIns="45720" anchor="t" vert="eaVert">
-            <a:noAutofit/>
-          </a:bodyPr>
-          <a:p>
-            <a:pPr marL="228600" indent="-228600" defTabSz="914400">
-              <a:lnSpc>
-                <a:spcPct val="120000"/>
-              </a:lnSpc>
-              <a:spcBef>
-                <a:spcPts val="1001"/>
-              </a:spcBef>
-              <a:buClr>
-                <a:srgbClr val="35403a"/>
-              </a:buClr>
-              <a:buFont typeface="Arial"/>
-              <a:buChar char="•"/>
-            </a:pPr>
-            <a:r>
-              <a:rPr lang="en-US" sz="1600" b="0" u="none" strike="noStrike">
-                <a:solidFill>
-                  <a:schemeClr val="dk2"/>
-                </a:solidFill>
-                <a:effectLst/>
-                <a:uFillTx/>
-                <a:latin typeface="Aptos Light"/>
-              </a:rPr>
-              <a:t>Click to edit Master text styles</a:t>
-            </a:r>
-            <a:endParaRPr lang="es-ES" sz="1600" b="0" u="none" strike="noStrike">
-              <a:solidFill>
-                <a:schemeClr val="dk2"/>
-              </a:solidFill>
-              <a:effectLst/>
-              <a:uFillTx/>
-              <a:latin typeface="Aptos Light"/>
-            </a:endParaRPr>
-          </a:p>
-          <a:p>
-            <a:pPr marL="457200" lvl="1" indent="-228600" defTabSz="914400">
-              <a:lnSpc>
-                <a:spcPct val="120000"/>
-              </a:lnSpc>
-              <a:spcBef>
-                <a:spcPts val="499"/>
-              </a:spcBef>
-              <a:buClr>
-                <a:srgbClr val="35403a"/>
-              </a:buClr>
-              <a:buFont typeface="Arial"/>
-              <a:buChar char="•"/>
-            </a:pPr>
-            <a:r>
-              <a:rPr lang="en-US" sz="1400" b="0" u="none" strike="noStrike">
-                <a:solidFill>
-                  <a:schemeClr val="dk2"/>
-                </a:solidFill>
-                <a:effectLst/>
-                <a:uFillTx/>
-                <a:latin typeface="Aptos Light"/>
-              </a:rPr>
-              <a:t>Second level</a:t>
-            </a:r>
-            <a:endParaRPr lang="es-ES" sz="1400" b="0" u="none" strike="noStrike">
-              <a:solidFill>
-                <a:schemeClr val="dk2"/>
-              </a:solidFill>
-              <a:effectLst/>
-              <a:uFillTx/>
-              <a:latin typeface="Aptos Light"/>
-            </a:endParaRPr>
-          </a:p>
-          <a:p>
-            <a:pPr marL="685800" lvl="2" indent="-228600" defTabSz="914400">
-              <a:lnSpc>
-                <a:spcPct val="120000"/>
-              </a:lnSpc>
-              <a:spcBef>
-                <a:spcPts val="499"/>
-              </a:spcBef>
-              <a:buClr>
-                <a:srgbClr val="35403a"/>
-              </a:buClr>
-              <a:buFont typeface="Arial"/>
-              <a:buChar char="•"/>
-            </a:pPr>
-            <a:r>
-              <a:rPr lang="en-US" sz="1200" b="0" u="none" strike="noStrike">
-                <a:solidFill>
-                  <a:schemeClr val="dk2"/>
-                </a:solidFill>
-                <a:effectLst/>
-                <a:uFillTx/>
-                <a:latin typeface="Aptos Light"/>
-              </a:rPr>
-              <a:t>Third level</a:t>
-            </a:r>
-            <a:endParaRPr lang="es-ES" sz="1200" b="0" u="none" strike="noStrike">
-              <a:solidFill>
-                <a:schemeClr val="dk2"/>
-              </a:solidFill>
-              <a:effectLst/>
-              <a:uFillTx/>
-              <a:latin typeface="Aptos Light"/>
-            </a:endParaRPr>
-          </a:p>
-          <a:p>
-            <a:pPr marL="914400" lvl="3" indent="-228600" defTabSz="914400">
-              <a:lnSpc>
-                <a:spcPct val="120000"/>
-              </a:lnSpc>
-              <a:spcBef>
-                <a:spcPts val="499"/>
-              </a:spcBef>
-              <a:buClr>
-                <a:srgbClr val="35403a"/>
-              </a:buClr>
-              <a:buFont typeface="Arial"/>
-              <a:buChar char="•"/>
-            </a:pPr>
-            <a:r>
-              <a:rPr lang="en-US" sz="1100" b="0" u="none" strike="noStrike">
-                <a:solidFill>
-                  <a:schemeClr val="dk2"/>
-                </a:solidFill>
-                <a:effectLst/>
-                <a:uFillTx/>
-                <a:latin typeface="Aptos Light"/>
-              </a:rPr>
-              <a:t>Fourth level</a:t>
-            </a:r>
-            <a:endParaRPr lang="es-ES" sz="1100" b="0" u="none" strike="noStrike">
-              <a:solidFill>
-                <a:schemeClr val="dk2"/>
-              </a:solidFill>
-              <a:effectLst/>
-              <a:uFillTx/>
-              <a:latin typeface="Aptos Light"/>
-            </a:endParaRPr>
-          </a:p>
-          <a:p>
-            <a:pPr marL="1143000" lvl="4" indent="-228600" defTabSz="914400">
-              <a:lnSpc>
-                <a:spcPct val="120000"/>
-              </a:lnSpc>
-              <a:spcBef>
-                <a:spcPts val="499"/>
-              </a:spcBef>
-              <a:buClr>
-                <a:srgbClr val="35403a"/>
-              </a:buClr>
-              <a:buFont typeface="Arial"/>
-              <a:buChar char="•"/>
-            </a:pPr>
-            <a:r>
-              <a:rPr lang="en-US" sz="1100" b="0" u="none" strike="noStrike">
-                <a:solidFill>
-                  <a:schemeClr val="dk2"/>
-                </a:solidFill>
-                <a:effectLst/>
-                <a:uFillTx/>
-                <a:latin typeface="Aptos Light"/>
-              </a:rPr>
-              <a:t>Fifth level</a:t>
-            </a:r>
-            <a:endParaRPr lang="es-ES" sz="1100" b="0" u="none" strike="noStrike">
-              <a:solidFill>
-                <a:schemeClr val="dk2"/>
-              </a:solidFill>
-              <a:effectLst/>
-              <a:uFillTx/>
-              <a:latin typeface="Aptos Light"/>
-            </a:endParaRPr>
-          </a:p>
-        </p:txBody>
-      </p:sp>
-      <p:sp>
-        <p:nvSpPr>
-          <p:cNvPr id="11" name="PlaceHolder 3"/>
+          <p:cNvPr id="10" name="PlaceHolder 4"/>
           <p:cNvSpPr>
             <a:spLocks noGrp="1"/>
           </p:cNvSpPr>
@@ -2283,7 +2041,7 @@
         <p:spPr>
           <a:xfrm>
             <a:off x="877680" y="6356520"/>
-            <a:ext cx="2742840" cy="364680"/>
+            <a:ext cx="2742480" cy="364320"/>
           </a:xfrm>
           <a:prstGeom prst="rect">
             <a:avLst/>
@@ -2303,6 +2061,9 @@
                 <a:spcPct val="100000"/>
               </a:lnSpc>
               <a:buNone/>
+              <a:tabLst>
+                <a:tab algn="l" pos="0"/>
+              </a:tabLst>
               <a:defRPr lang="en-US" sz="800" b="0" u="none" spc="300" strike="noStrike" cap="all">
                 <a:solidFill>
                   <a:schemeClr val="dk2"/>
@@ -2319,6 +2080,9 @@
                 <a:spcPct val="100000"/>
               </a:lnSpc>
               <a:buNone/>
+              <a:tabLst>
+                <a:tab algn="l" pos="0"/>
+              </a:tabLst>
             </a:pPr>
             <a:r>
               <a:rPr lang="en-US" sz="800" b="0" u="none" spc="300" strike="noStrike" cap="all">
@@ -2344,7 +2108,7 @@
       </p:sp>
       <p:sp>
         <p:nvSpPr>
-          <p:cNvPr id="12" name="PlaceHolder 4"/>
+          <p:cNvPr id="11" name="PlaceHolder 5"/>
           <p:cNvSpPr>
             <a:spLocks noGrp="1"/>
           </p:cNvSpPr>
@@ -2355,7 +2119,7 @@
         <p:spPr>
           <a:xfrm>
             <a:off x="7132320" y="6356520"/>
-            <a:ext cx="4297320" cy="364680"/>
+            <a:ext cx="4296960" cy="364320"/>
           </a:xfrm>
           <a:prstGeom prst="rect">
             <a:avLst/>
@@ -2371,7 +2135,13 @@
           </a:bodyPr>
           <a:lstStyle>
             <a:lvl1pPr indent="0" algn="ctr">
-              <a:buNone/>
+              <a:lnSpc>
+                <a:spcPct val="100000"/>
+              </a:lnSpc>
+              <a:buNone/>
+              <a:tabLst>
+                <a:tab algn="l" pos="0"/>
+              </a:tabLst>
               <a:defRPr lang="en-US" sz="800" b="0" u="none" spc="300" strike="noStrike" cap="all">
                 <a:solidFill>
                   <a:schemeClr val="dk2"/>
@@ -2384,7 +2154,13 @@
           </a:lstStyle>
           <a:p>
             <a:pPr indent="0" algn="ctr">
-              <a:buNone/>
+              <a:lnSpc>
+                <a:spcPct val="100000"/>
+              </a:lnSpc>
+              <a:buNone/>
+              <a:tabLst>
+                <a:tab algn="l" pos="0"/>
+              </a:tabLst>
             </a:pPr>
             <a:r>
               <a:rPr lang="en-US" sz="800" b="0" u="none" spc="300" strike="noStrike" cap="all">
@@ -2410,7 +2186,7 @@
       </p:sp>
       <p:sp>
         <p:nvSpPr>
-          <p:cNvPr id="13" name="PlaceHolder 5"/>
+          <p:cNvPr id="12" name="PlaceHolder 6"/>
           <p:cNvSpPr>
             <a:spLocks noGrp="1"/>
           </p:cNvSpPr>
@@ -2421,7 +2197,7 @@
         <p:spPr>
           <a:xfrm>
             <a:off x="11430000" y="6356520"/>
-            <a:ext cx="520920" cy="364680"/>
+            <a:ext cx="520560" cy="364320"/>
           </a:xfrm>
           <a:prstGeom prst="rect">
             <a:avLst/>
@@ -2441,6 +2217,9 @@
                 <a:spcPct val="100000"/>
               </a:lnSpc>
               <a:buNone/>
+              <a:tabLst>
+                <a:tab algn="l" pos="0"/>
+              </a:tabLst>
               <a:defRPr lang="en-US" sz="1400" b="0" u="none" strike="noStrike">
                 <a:solidFill>
                   <a:schemeClr val="dk2"/>
@@ -2457,8 +2236,11 @@
                 <a:spcPct val="100000"/>
               </a:lnSpc>
               <a:buNone/>
-            </a:pPr>
-            <a:fld id="{B3200343-3FB8-4A41-BECB-2C3F6FBEF4A4}" type="slidenum">
+              <a:tabLst>
+                <a:tab algn="l" pos="0"/>
+              </a:tabLst>
+            </a:pPr>
+            <a:fld id="{421D190E-B7B0-4BAD-BC4D-124AC995AACA}" type="slidenum">
               <a:rPr lang="en-US" sz="1400" b="0" u="none" strike="noStrike">
                 <a:solidFill>
                   <a:schemeClr val="dk2"/>
@@ -2486,8 +2268,8 @@
 </file>
 
 <file path=ppt/slideLayouts/slideLayout3.xml><?xml version="1.0" encoding="utf-8"?>
-<p:sldLayout xmlns:a="http://schemas.openxmlformats.org/drawingml/2006/main" xmlns:p="http://schemas.openxmlformats.org/presentationml/2006/main" xmlns:r="http://schemas.openxmlformats.org/officeDocument/2006/relationships" xmlns:p14="http://schemas.microsoft.com/office/powerpoint/2010/main" xmlns:p15="http://schemas.microsoft.com/office/powerpoint/2012/main" xmlns:mc="http://schemas.openxmlformats.org/markup-compatibility/2006" type="vertTitleAndTx" preserve="1">
-  <p:cSld name="Vertical Title and Text">
+<p:sldLayout xmlns:a="http://schemas.openxmlformats.org/drawingml/2006/main" xmlns:p="http://schemas.openxmlformats.org/presentationml/2006/main" xmlns:r="http://schemas.openxmlformats.org/officeDocument/2006/relationships" xmlns:p14="http://schemas.microsoft.com/office/powerpoint/2010/main" xmlns:p15="http://schemas.microsoft.com/office/powerpoint/2012/main" xmlns:mc="http://schemas.openxmlformats.org/markup-compatibility/2006" type="blank" preserve="1">
+  <p:cSld name="Picture with Caption">
     <p:bg>
       <p:bgPr>
         <a:solidFill>
@@ -2511,14 +2293,14 @@
       </p:grpSpPr>
       <p:sp>
         <p:nvSpPr>
-          <p:cNvPr id="14" name="Rectangle 6"/>
+          <p:cNvPr id="13" name="Rectangle 6"/>
           <p:cNvSpPr/>
           <p:nvPr/>
         </p:nvSpPr>
         <p:spPr>
           <a:xfrm>
             <a:off x="0" y="0"/>
-            <a:ext cx="12191760" cy="6859800"/>
+            <a:ext cx="12191400" cy="6859440"/>
           </a:xfrm>
           <a:prstGeom prst="rect">
             <a:avLst/>
@@ -2552,6 +2334,11 @@
             <a:noAutofit/>
           </a:bodyPr>
           <a:p>
+            <a:pPr>
+              <a:lnSpc>
+                <a:spcPct val="100000"/>
+              </a:lnSpc>
+            </a:pPr>
             <a:endParaRPr lang="es-ES" sz="1800" b="0" u="none" strike="noStrike">
               <a:solidFill>
                 <a:srgbClr val="000000"/>
@@ -2565,7 +2352,7 @@
       </p:sp>
       <p:sp>
         <p:nvSpPr>
-          <p:cNvPr id="15" name="PlaceHolder 1"/>
+          <p:cNvPr id="14" name="PlaceHolder 1"/>
           <p:cNvSpPr>
             <a:spLocks noGrp="1"/>
           </p:cNvSpPr>
@@ -2575,8 +2362,8 @@
         </p:nvSpPr>
         <p:spPr>
           <a:xfrm>
-            <a:off x="8724960" y="592200"/>
-            <a:ext cx="2628720" cy="5584320"/>
+            <a:off x="839880" y="820800"/>
+            <a:ext cx="3638520" cy="2061720"/>
           </a:xfrm>
           <a:prstGeom prst="rect">
             <a:avLst/>
@@ -2587,8 +2374,8 @@
           </a:ln>
         </p:spPr>
         <p:txBody>
-          <a:bodyPr lIns="91440" rIns="91440" tIns="45720" bIns="45720" anchor="b" vert="eaVert">
-            <a:noAutofit/>
+          <a:bodyPr lIns="91440" rIns="91440" tIns="45720" bIns="45720" anchor="t">
+            <a:normAutofit/>
           </a:bodyPr>
           <a:p>
             <a:pPr indent="0" defTabSz="914400">
@@ -2596,9 +2383,12 @@
                 <a:spcPct val="100000"/>
               </a:lnSpc>
               <a:buNone/>
-            </a:pPr>
-            <a:r>
-              <a:rPr lang="en-US" sz="3200" b="0" u="none" strike="noStrike">
+              <a:tabLst>
+                <a:tab algn="l" pos="0"/>
+              </a:tabLst>
+            </a:pPr>
+            <a:r>
+              <a:rPr lang="en-US" sz="2800" b="0" u="none" strike="noStrike">
                 <a:solidFill>
                   <a:schemeClr val="dk2"/>
                 </a:solidFill>
@@ -2608,20 +2398,20 @@
               </a:rPr>
               <a:t>Click to edit Master title style</a:t>
             </a:r>
-            <a:endParaRPr lang="es-ES" sz="3200" b="0" u="none" strike="noStrike">
-              <a:solidFill>
-                <a:schemeClr val="dk1"/>
-              </a:solidFill>
-              <a:effectLst/>
-              <a:uFillTx/>
-              <a:latin typeface="Aptos Light"/>
+            <a:endParaRPr lang="es-ES" sz="2800" b="0" u="none" strike="noStrike">
+              <a:solidFill>
+                <a:srgbClr val="000000"/>
+              </a:solidFill>
+              <a:effectLst/>
+              <a:uFillTx/>
+              <a:latin typeface="Arial"/>
             </a:endParaRPr>
           </a:p>
         </p:txBody>
       </p:sp>
       <p:sp>
         <p:nvSpPr>
-          <p:cNvPr id="16" name="PlaceHolder 2"/>
+          <p:cNvPr id="15" name="PlaceHolder 2"/>
           <p:cNvSpPr>
             <a:spLocks noGrp="1"/>
           </p:cNvSpPr>
@@ -2631,8 +2421,8 @@
         </p:nvSpPr>
         <p:spPr>
           <a:xfrm>
-            <a:off x="838080" y="592200"/>
-            <a:ext cx="7733880" cy="5584320"/>
+            <a:off x="5247360" y="919440"/>
+            <a:ext cx="6107400" cy="5013000"/>
           </a:xfrm>
           <a:prstGeom prst="rect">
             <a:avLst/>
@@ -2643,184 +2433,321 @@
           </a:ln>
         </p:spPr>
         <p:txBody>
-          <a:bodyPr lIns="91440" rIns="91440" tIns="45720" bIns="45720" anchor="t" vert="eaVert">
+          <a:bodyPr lIns="90000" rIns="90000" tIns="45000" bIns="45000" anchor="t">
             <a:noAutofit/>
           </a:bodyPr>
           <a:p>
-            <a:pPr marL="228600" indent="-228600" defTabSz="914400">
+            <a:pPr marL="432000" indent="-324000">
               <a:lnSpc>
                 <a:spcPct val="120000"/>
               </a:lnSpc>
               <a:spcBef>
-                <a:spcPts val="1001"/>
+                <a:spcPts val="1417"/>
               </a:spcBef>
               <a:buClr>
-                <a:srgbClr val="35403a"/>
+                <a:srgbClr val="000000"/>
               </a:buClr>
-              <a:buFont typeface="Arial"/>
-              <a:buChar char="•"/>
-            </a:pPr>
-            <a:r>
-              <a:rPr lang="en-US" sz="1600" b="0" u="none" strike="noStrike">
-                <a:solidFill>
-                  <a:schemeClr val="dk2"/>
-                </a:solidFill>
-                <a:effectLst/>
-                <a:uFillTx/>
-                <a:latin typeface="Aptos Light"/>
-              </a:rPr>
-              <a:t>Click to edit Master text styles</a:t>
-            </a:r>
-            <a:endParaRPr lang="es-ES" sz="1600" b="0" u="none" strike="noStrike">
-              <a:solidFill>
-                <a:schemeClr val="dk2"/>
-              </a:solidFill>
-              <a:effectLst/>
-              <a:uFillTx/>
-              <a:latin typeface="Aptos Light"/>
-            </a:endParaRPr>
-          </a:p>
-          <a:p>
-            <a:pPr marL="457200" lvl="1" indent="-228600" defTabSz="914400">
+              <a:buSzPct val="45000"/>
+              <a:buFont typeface="Wingdings" charset="2"/>
+              <a:buChar char=""/>
+            </a:pPr>
+            <a:r>
+              <a:rPr lang="es-ES" sz="3200" b="0" u="none" strike="noStrike">
+                <a:solidFill>
+                  <a:schemeClr val="dk2"/>
+                </a:solidFill>
+                <a:effectLst/>
+                <a:uFillTx/>
+                <a:latin typeface="Aptos Light"/>
+              </a:rPr>
+              <a:t>Pulse para editar el formato de texto del esquema</a:t>
+            </a:r>
+            <a:endParaRPr lang="es-ES" sz="3200" b="0" u="none" strike="noStrike">
+              <a:solidFill>
+                <a:srgbClr val="000000"/>
+              </a:solidFill>
+              <a:effectLst/>
+              <a:uFillTx/>
+              <a:latin typeface="Arial"/>
+            </a:endParaRPr>
+          </a:p>
+          <a:p>
+            <a:pPr marL="864000" lvl="1" indent="-324000">
               <a:lnSpc>
                 <a:spcPct val="120000"/>
               </a:lnSpc>
               <a:spcBef>
-                <a:spcPts val="499"/>
+                <a:spcPts val="1134"/>
               </a:spcBef>
               <a:buClr>
-                <a:srgbClr val="35403a"/>
+                <a:srgbClr val="000000"/>
               </a:buClr>
-              <a:buFont typeface="Arial"/>
-              <a:buChar char="•"/>
-            </a:pPr>
-            <a:r>
-              <a:rPr lang="en-US" sz="1400" b="0" u="none" strike="noStrike">
-                <a:solidFill>
-                  <a:schemeClr val="dk2"/>
-                </a:solidFill>
-                <a:effectLst/>
-                <a:uFillTx/>
-                <a:latin typeface="Aptos Light"/>
-              </a:rPr>
-              <a:t>Second level</a:t>
-            </a:r>
-            <a:endParaRPr lang="es-ES" sz="1400" b="0" u="none" strike="noStrike">
-              <a:solidFill>
-                <a:schemeClr val="dk2"/>
-              </a:solidFill>
-              <a:effectLst/>
-              <a:uFillTx/>
-              <a:latin typeface="Aptos Light"/>
-            </a:endParaRPr>
-          </a:p>
-          <a:p>
-            <a:pPr marL="685800" lvl="2" indent="-228600" defTabSz="914400">
+              <a:buSzPct val="75000"/>
+              <a:buFont typeface="Symbol" charset="2"/>
+              <a:buChar char=""/>
+            </a:pPr>
+            <a:r>
+              <a:rPr lang="es-ES" sz="3200" b="0" u="none" strike="noStrike">
+                <a:solidFill>
+                  <a:schemeClr val="dk2"/>
+                </a:solidFill>
+                <a:effectLst/>
+                <a:uFillTx/>
+                <a:latin typeface="Aptos Light"/>
+              </a:rPr>
+              <a:t>Segundo nivel del esquema</a:t>
+            </a:r>
+            <a:endParaRPr lang="es-ES" sz="3200" b="0" u="none" strike="noStrike">
+              <a:solidFill>
+                <a:srgbClr val="000000"/>
+              </a:solidFill>
+              <a:effectLst/>
+              <a:uFillTx/>
+              <a:latin typeface="Arial"/>
+            </a:endParaRPr>
+          </a:p>
+          <a:p>
+            <a:pPr marL="1296000" lvl="2" indent="-288000">
               <a:lnSpc>
                 <a:spcPct val="120000"/>
               </a:lnSpc>
               <a:spcBef>
-                <a:spcPts val="499"/>
+                <a:spcPts val="850"/>
               </a:spcBef>
               <a:buClr>
-                <a:srgbClr val="35403a"/>
+                <a:srgbClr val="000000"/>
               </a:buClr>
-              <a:buFont typeface="Arial"/>
-              <a:buChar char="•"/>
-            </a:pPr>
-            <a:r>
-              <a:rPr lang="en-US" sz="1200" b="0" u="none" strike="noStrike">
-                <a:solidFill>
-                  <a:schemeClr val="dk2"/>
-                </a:solidFill>
-                <a:effectLst/>
-                <a:uFillTx/>
-                <a:latin typeface="Aptos Light"/>
-              </a:rPr>
-              <a:t>Third level</a:t>
-            </a:r>
-            <a:endParaRPr lang="es-ES" sz="1200" b="0" u="none" strike="noStrike">
-              <a:solidFill>
-                <a:schemeClr val="dk2"/>
-              </a:solidFill>
-              <a:effectLst/>
-              <a:uFillTx/>
-              <a:latin typeface="Aptos Light"/>
-            </a:endParaRPr>
-          </a:p>
-          <a:p>
-            <a:pPr marL="914400" lvl="3" indent="-228600" defTabSz="914400">
+              <a:buSzPct val="45000"/>
+              <a:buFont typeface="Wingdings" charset="2"/>
+              <a:buChar char=""/>
+            </a:pPr>
+            <a:r>
+              <a:rPr lang="es-ES" sz="3200" b="0" u="none" strike="noStrike">
+                <a:solidFill>
+                  <a:schemeClr val="dk2"/>
+                </a:solidFill>
+                <a:effectLst/>
+                <a:uFillTx/>
+                <a:latin typeface="Aptos Light"/>
+              </a:rPr>
+              <a:t>Tercer nivel del esquema</a:t>
+            </a:r>
+            <a:endParaRPr lang="es-ES" sz="3200" b="0" u="none" strike="noStrike">
+              <a:solidFill>
+                <a:srgbClr val="000000"/>
+              </a:solidFill>
+              <a:effectLst/>
+              <a:uFillTx/>
+              <a:latin typeface="Arial"/>
+            </a:endParaRPr>
+          </a:p>
+          <a:p>
+            <a:pPr marL="1728000" lvl="3" indent="-216000">
               <a:lnSpc>
                 <a:spcPct val="120000"/>
               </a:lnSpc>
               <a:spcBef>
-                <a:spcPts val="499"/>
+                <a:spcPts val="567"/>
               </a:spcBef>
               <a:buClr>
-                <a:srgbClr val="35403a"/>
+                <a:srgbClr val="000000"/>
               </a:buClr>
-              <a:buFont typeface="Arial"/>
-              <a:buChar char="•"/>
-            </a:pPr>
-            <a:r>
-              <a:rPr lang="en-US" sz="1100" b="0" u="none" strike="noStrike">
-                <a:solidFill>
-                  <a:schemeClr val="dk2"/>
-                </a:solidFill>
-                <a:effectLst/>
-                <a:uFillTx/>
-                <a:latin typeface="Aptos Light"/>
-              </a:rPr>
-              <a:t>Fourth level</a:t>
-            </a:r>
-            <a:endParaRPr lang="es-ES" sz="1100" b="0" u="none" strike="noStrike">
-              <a:solidFill>
-                <a:schemeClr val="dk2"/>
-              </a:solidFill>
-              <a:effectLst/>
-              <a:uFillTx/>
-              <a:latin typeface="Aptos Light"/>
-            </a:endParaRPr>
-          </a:p>
-          <a:p>
-            <a:pPr marL="1143000" lvl="4" indent="-228600" defTabSz="914400">
+              <a:buSzPct val="75000"/>
+              <a:buFont typeface="Symbol" charset="2"/>
+              <a:buChar char=""/>
+            </a:pPr>
+            <a:r>
+              <a:rPr lang="es-ES" sz="3200" b="0" u="none" strike="noStrike">
+                <a:solidFill>
+                  <a:schemeClr val="dk2"/>
+                </a:solidFill>
+                <a:effectLst/>
+                <a:uFillTx/>
+                <a:latin typeface="Aptos Light"/>
+              </a:rPr>
+              <a:t>Cuarto nivel del esquema</a:t>
+            </a:r>
+            <a:endParaRPr lang="es-ES" sz="3200" b="0" u="none" strike="noStrike">
+              <a:solidFill>
+                <a:srgbClr val="000000"/>
+              </a:solidFill>
+              <a:effectLst/>
+              <a:uFillTx/>
+              <a:latin typeface="Arial"/>
+            </a:endParaRPr>
+          </a:p>
+          <a:p>
+            <a:pPr marL="2160000" lvl="4" indent="-216000">
               <a:lnSpc>
                 <a:spcPct val="120000"/>
               </a:lnSpc>
               <a:spcBef>
-                <a:spcPts val="499"/>
+                <a:spcPts val="283"/>
               </a:spcBef>
               <a:buClr>
-                <a:srgbClr val="35403a"/>
+                <a:srgbClr val="000000"/>
               </a:buClr>
-              <a:buFont typeface="Arial"/>
-              <a:buChar char="•"/>
-            </a:pPr>
-            <a:r>
-              <a:rPr lang="en-US" sz="1100" b="0" u="none" strike="noStrike">
-                <a:solidFill>
-                  <a:schemeClr val="dk2"/>
-                </a:solidFill>
-                <a:effectLst/>
-                <a:uFillTx/>
-                <a:latin typeface="Aptos Light"/>
-              </a:rPr>
-              <a:t>Fifth level</a:t>
-            </a:r>
-            <a:endParaRPr lang="es-ES" sz="1100" b="0" u="none" strike="noStrike">
-              <a:solidFill>
-                <a:schemeClr val="dk2"/>
-              </a:solidFill>
-              <a:effectLst/>
-              <a:uFillTx/>
-              <a:latin typeface="Aptos Light"/>
+              <a:buSzPct val="45000"/>
+              <a:buFont typeface="Wingdings" charset="2"/>
+              <a:buChar char=""/>
+            </a:pPr>
+            <a:r>
+              <a:rPr lang="es-ES" sz="3200" b="0" u="none" strike="noStrike">
+                <a:solidFill>
+                  <a:schemeClr val="dk2"/>
+                </a:solidFill>
+                <a:effectLst/>
+                <a:uFillTx/>
+                <a:latin typeface="Aptos Light"/>
+              </a:rPr>
+              <a:t>Quinto nivel del esquema</a:t>
+            </a:r>
+            <a:endParaRPr lang="es-ES" sz="3200" b="0" u="none" strike="noStrike">
+              <a:solidFill>
+                <a:srgbClr val="000000"/>
+              </a:solidFill>
+              <a:effectLst/>
+              <a:uFillTx/>
+              <a:latin typeface="Arial"/>
+            </a:endParaRPr>
+          </a:p>
+          <a:p>
+            <a:pPr marL="2592000" lvl="5" indent="-216000">
+              <a:lnSpc>
+                <a:spcPct val="120000"/>
+              </a:lnSpc>
+              <a:spcBef>
+                <a:spcPts val="283"/>
+              </a:spcBef>
+              <a:buClr>
+                <a:srgbClr val="000000"/>
+              </a:buClr>
+              <a:buSzPct val="45000"/>
+              <a:buFont typeface="Wingdings" charset="2"/>
+              <a:buChar char=""/>
+            </a:pPr>
+            <a:r>
+              <a:rPr lang="es-ES" sz="3200" b="0" u="none" strike="noStrike">
+                <a:solidFill>
+                  <a:schemeClr val="dk2"/>
+                </a:solidFill>
+                <a:effectLst/>
+                <a:uFillTx/>
+                <a:latin typeface="Aptos Light"/>
+              </a:rPr>
+              <a:t>Sexto nivel del esquema</a:t>
+            </a:r>
+            <a:endParaRPr lang="es-ES" sz="3200" b="0" u="none" strike="noStrike">
+              <a:solidFill>
+                <a:srgbClr val="000000"/>
+              </a:solidFill>
+              <a:effectLst/>
+              <a:uFillTx/>
+              <a:latin typeface="Arial"/>
+            </a:endParaRPr>
+          </a:p>
+          <a:p>
+            <a:pPr marL="3024000" lvl="6" indent="-216000">
+              <a:lnSpc>
+                <a:spcPct val="120000"/>
+              </a:lnSpc>
+              <a:spcBef>
+                <a:spcPts val="283"/>
+              </a:spcBef>
+              <a:buClr>
+                <a:srgbClr val="000000"/>
+              </a:buClr>
+              <a:buSzPct val="45000"/>
+              <a:buFont typeface="Wingdings" charset="2"/>
+              <a:buChar char=""/>
+            </a:pPr>
+            <a:r>
+              <a:rPr lang="es-ES" sz="3200" b="0" u="none" strike="noStrike">
+                <a:solidFill>
+                  <a:schemeClr val="dk2"/>
+                </a:solidFill>
+                <a:effectLst/>
+                <a:uFillTx/>
+                <a:latin typeface="Aptos Light"/>
+              </a:rPr>
+              <a:t>Séptimo nivel del esquema</a:t>
+            </a:r>
+            <a:endParaRPr lang="es-ES" sz="3200" b="0" u="none" strike="noStrike">
+              <a:solidFill>
+                <a:srgbClr val="000000"/>
+              </a:solidFill>
+              <a:effectLst/>
+              <a:uFillTx/>
+              <a:latin typeface="Arial"/>
             </a:endParaRPr>
           </a:p>
         </p:txBody>
       </p:sp>
       <p:sp>
         <p:nvSpPr>
-          <p:cNvPr id="17" name="PlaceHolder 3"/>
+          <p:cNvPr id="16" name="PlaceHolder 3"/>
+          <p:cNvSpPr>
+            <a:spLocks noGrp="1"/>
+          </p:cNvSpPr>
+          <p:nvPr>
+            <p:ph type="body"/>
+          </p:nvPr>
+        </p:nvSpPr>
+        <p:spPr>
+          <a:xfrm>
+            <a:off x="839880" y="3000600"/>
+            <a:ext cx="3643200" cy="2867760"/>
+          </a:xfrm>
+          <a:prstGeom prst="rect">
+            <a:avLst/>
+          </a:prstGeom>
+          <a:noFill/>
+          <a:ln w="0">
+            <a:noFill/>
+          </a:ln>
+        </p:spPr>
+        <p:txBody>
+          <a:bodyPr lIns="91440" rIns="91440" tIns="45720" bIns="45720" anchor="b">
+            <a:noAutofit/>
+          </a:bodyPr>
+          <a:p>
+            <a:pPr indent="0" defTabSz="914400">
+              <a:lnSpc>
+                <a:spcPct val="120000"/>
+              </a:lnSpc>
+              <a:spcBef>
+                <a:spcPts val="1001"/>
+              </a:spcBef>
+              <a:buNone/>
+              <a:tabLst>
+                <a:tab algn="l" pos="0"/>
+              </a:tabLst>
+            </a:pPr>
+            <a:r>
+              <a:rPr lang="en-US" sz="1600" b="0" u="none" strike="noStrike">
+                <a:solidFill>
+                  <a:schemeClr val="dk2"/>
+                </a:solidFill>
+                <a:effectLst/>
+                <a:uFillTx/>
+                <a:latin typeface="Aptos Light"/>
+              </a:rPr>
+              <a:t>Click to edit Master text styles</a:t>
+            </a:r>
+            <a:endParaRPr lang="es-ES" sz="1600" b="0" u="none" strike="noStrike">
+              <a:solidFill>
+                <a:srgbClr val="000000"/>
+              </a:solidFill>
+              <a:effectLst/>
+              <a:uFillTx/>
+              <a:latin typeface="Arial"/>
+            </a:endParaRPr>
+          </a:p>
+        </p:txBody>
+      </p:sp>
+      <p:sp>
+        <p:nvSpPr>
+          <p:cNvPr id="17" name="PlaceHolder 4"/>
           <p:cNvSpPr>
             <a:spLocks noGrp="1"/>
           </p:cNvSpPr>
@@ -2831,7 +2758,7 @@
         <p:spPr>
           <a:xfrm>
             <a:off x="877680" y="6356520"/>
-            <a:ext cx="2742840" cy="364680"/>
+            <a:ext cx="2742480" cy="364320"/>
           </a:xfrm>
           <a:prstGeom prst="rect">
             <a:avLst/>
@@ -2851,6 +2778,9 @@
                 <a:spcPct val="100000"/>
               </a:lnSpc>
               <a:buNone/>
+              <a:tabLst>
+                <a:tab algn="l" pos="0"/>
+              </a:tabLst>
               <a:defRPr lang="en-US" sz="800" b="0" u="none" spc="300" strike="noStrike" cap="all">
                 <a:solidFill>
                   <a:schemeClr val="dk2"/>
@@ -2867,6 +2797,9 @@
                 <a:spcPct val="100000"/>
               </a:lnSpc>
               <a:buNone/>
+              <a:tabLst>
+                <a:tab algn="l" pos="0"/>
+              </a:tabLst>
             </a:pPr>
             <a:r>
               <a:rPr lang="en-US" sz="800" b="0" u="none" spc="300" strike="noStrike" cap="all">
@@ -2892,7 +2825,7 @@
       </p:sp>
       <p:sp>
         <p:nvSpPr>
-          <p:cNvPr id="18" name="PlaceHolder 4"/>
+          <p:cNvPr id="18" name="PlaceHolder 5"/>
           <p:cNvSpPr>
             <a:spLocks noGrp="1"/>
           </p:cNvSpPr>
@@ -2903,7 +2836,7 @@
         <p:spPr>
           <a:xfrm>
             <a:off x="7132320" y="6356520"/>
-            <a:ext cx="4297320" cy="364680"/>
+            <a:ext cx="4296960" cy="364320"/>
           </a:xfrm>
           <a:prstGeom prst="rect">
             <a:avLst/>
@@ -2919,7 +2852,13 @@
           </a:bodyPr>
           <a:lstStyle>
             <a:lvl1pPr indent="0" algn="ctr">
-              <a:buNone/>
+              <a:lnSpc>
+                <a:spcPct val="100000"/>
+              </a:lnSpc>
+              <a:buNone/>
+              <a:tabLst>
+                <a:tab algn="l" pos="0"/>
+              </a:tabLst>
               <a:defRPr lang="en-US" sz="800" b="0" u="none" spc="300" strike="noStrike" cap="all">
                 <a:solidFill>
                   <a:schemeClr val="dk2"/>
@@ -2932,7 +2871,13 @@
           </a:lstStyle>
           <a:p>
             <a:pPr indent="0" algn="ctr">
-              <a:buNone/>
+              <a:lnSpc>
+                <a:spcPct val="100000"/>
+              </a:lnSpc>
+              <a:buNone/>
+              <a:tabLst>
+                <a:tab algn="l" pos="0"/>
+              </a:tabLst>
             </a:pPr>
             <a:r>
               <a:rPr lang="en-US" sz="800" b="0" u="none" spc="300" strike="noStrike" cap="all">
@@ -2958,7 +2903,7 @@
       </p:sp>
       <p:sp>
         <p:nvSpPr>
-          <p:cNvPr id="19" name="PlaceHolder 5"/>
+          <p:cNvPr id="19" name="PlaceHolder 6"/>
           <p:cNvSpPr>
             <a:spLocks noGrp="1"/>
           </p:cNvSpPr>
@@ -2969,7 +2914,7 @@
         <p:spPr>
           <a:xfrm>
             <a:off x="11430000" y="6356520"/>
-            <a:ext cx="520920" cy="364680"/>
+            <a:ext cx="520560" cy="364320"/>
           </a:xfrm>
           <a:prstGeom prst="rect">
             <a:avLst/>
@@ -2989,6 +2934,9 @@
                 <a:spcPct val="100000"/>
               </a:lnSpc>
               <a:buNone/>
+              <a:tabLst>
+                <a:tab algn="l" pos="0"/>
+              </a:tabLst>
               <a:defRPr lang="en-US" sz="1400" b="0" u="none" strike="noStrike">
                 <a:solidFill>
                   <a:schemeClr val="dk2"/>
@@ -3005,8 +2953,11 @@
                 <a:spcPct val="100000"/>
               </a:lnSpc>
               <a:buNone/>
-            </a:pPr>
-            <a:fld id="{4FAF1E6A-2E18-4C82-96D4-6FD4782714B2}" type="slidenum">
+              <a:tabLst>
+                <a:tab algn="l" pos="0"/>
+              </a:tabLst>
+            </a:pPr>
+            <a:fld id="{9AFF2B81-5667-40CB-BB91-C6E78BEFE909}" type="slidenum">
               <a:rPr lang="en-US" sz="1400" b="0" u="none" strike="noStrike">
                 <a:solidFill>
                   <a:schemeClr val="dk2"/>
@@ -3034,8 +2985,8 @@
 </file>
 
 <file path=ppt/slideLayouts/slideLayout4.xml><?xml version="1.0" encoding="utf-8"?>
-<p:sldLayout xmlns:a="http://schemas.openxmlformats.org/drawingml/2006/main" xmlns:p="http://schemas.openxmlformats.org/presentationml/2006/main" xmlns:r="http://schemas.openxmlformats.org/officeDocument/2006/relationships" xmlns:p14="http://schemas.microsoft.com/office/powerpoint/2010/main" xmlns:p15="http://schemas.microsoft.com/office/powerpoint/2012/main" xmlns:mc="http://schemas.openxmlformats.org/markup-compatibility/2006" type="obj" preserve="1">
-  <p:cSld name="Title and Content">
+<p:sldLayout xmlns:a="http://schemas.openxmlformats.org/drawingml/2006/main" xmlns:p="http://schemas.openxmlformats.org/presentationml/2006/main" xmlns:r="http://schemas.openxmlformats.org/officeDocument/2006/relationships" xmlns:p14="http://schemas.microsoft.com/office/powerpoint/2010/main" xmlns:p15="http://schemas.microsoft.com/office/powerpoint/2012/main" xmlns:mc="http://schemas.openxmlformats.org/markup-compatibility/2006" type="title" preserve="1">
+  <p:cSld name="Title Slide">
     <p:bg>
       <p:bgPr>
         <a:solidFill>
@@ -3066,7 +3017,7 @@
         <p:spPr>
           <a:xfrm>
             <a:off x="0" y="0"/>
-            <a:ext cx="12191760" cy="6859800"/>
+            <a:ext cx="12191400" cy="6859440"/>
           </a:xfrm>
           <a:prstGeom prst="rect">
             <a:avLst/>
@@ -3100,6 +3051,11 @@
             <a:noAutofit/>
           </a:bodyPr>
           <a:p>
+            <a:pPr>
+              <a:lnSpc>
+                <a:spcPct val="100000"/>
+              </a:lnSpc>
+            </a:pPr>
             <a:endParaRPr lang="es-ES" sz="1800" b="0" u="none" strike="noStrike">
               <a:solidFill>
                 <a:srgbClr val="000000"/>
@@ -3123,8 +3079,8 @@
         </p:nvSpPr>
         <p:spPr>
           <a:xfrm>
-            <a:off x="871200" y="588240"/>
-            <a:ext cx="10449360" cy="1265400"/>
+            <a:off x="1523880" y="1122480"/>
+            <a:ext cx="9143280" cy="2208600"/>
           </a:xfrm>
           <a:prstGeom prst="rect">
             <a:avLst/>
@@ -3136,17 +3092,20 @@
         </p:spPr>
         <p:txBody>
           <a:bodyPr lIns="91440" rIns="91440" tIns="45720" bIns="45720" anchor="b">
-            <a:noAutofit/>
+            <a:normAutofit/>
           </a:bodyPr>
           <a:p>
-            <a:pPr indent="0" defTabSz="914400">
+            <a:pPr indent="0" algn="ctr" defTabSz="914400">
               <a:lnSpc>
                 <a:spcPct val="100000"/>
               </a:lnSpc>
               <a:buNone/>
-            </a:pPr>
-            <a:r>
-              <a:rPr lang="en-US" sz="3200" b="0" u="none" strike="noStrike">
+              <a:tabLst>
+                <a:tab algn="l" pos="0"/>
+              </a:tabLst>
+            </a:pPr>
+            <a:r>
+              <a:rPr lang="en-US" sz="3600" b="0" u="none" strike="noStrike">
                 <a:solidFill>
                   <a:schemeClr val="dk2"/>
                 </a:solidFill>
@@ -3156,13 +3115,13 @@
               </a:rPr>
               <a:t>Click to edit Master title style</a:t>
             </a:r>
-            <a:endParaRPr lang="es-ES" sz="3200" b="0" u="none" strike="noStrike">
-              <a:solidFill>
-                <a:schemeClr val="dk1"/>
-              </a:solidFill>
-              <a:effectLst/>
-              <a:uFillTx/>
-              <a:latin typeface="Aptos Light"/>
+            <a:endParaRPr lang="es-ES" sz="3600" b="0" u="none" strike="noStrike">
+              <a:solidFill>
+                <a:srgbClr val="000000"/>
+              </a:solidFill>
+              <a:effectLst/>
+              <a:uFillTx/>
+              <a:latin typeface="Arial"/>
             </a:endParaRPr>
           </a:p>
         </p:txBody>
@@ -3170,205 +3129,6 @@
       <p:sp>
         <p:nvSpPr>
           <p:cNvPr id="22" name="PlaceHolder 2"/>
-          <p:cNvSpPr>
-            <a:spLocks noGrp="1"/>
-          </p:cNvSpPr>
-          <p:nvPr>
-            <p:ph type="body"/>
-          </p:nvPr>
-        </p:nvSpPr>
-        <p:spPr>
-          <a:xfrm>
-            <a:off x="877680" y="2157840"/>
-            <a:ext cx="10442160" cy="3903480"/>
-          </a:xfrm>
-          <a:prstGeom prst="rect">
-            <a:avLst/>
-          </a:prstGeom>
-          <a:noFill/>
-          <a:ln w="0">
-            <a:noFill/>
-          </a:ln>
-        </p:spPr>
-        <p:txBody>
-          <a:bodyPr lIns="91440" rIns="91440" tIns="45720" bIns="45720" anchor="t">
-            <a:noAutofit/>
-          </a:bodyPr>
-          <a:p>
-            <a:pPr marL="228600" indent="-228600" defTabSz="914400">
-              <a:lnSpc>
-                <a:spcPct val="120000"/>
-              </a:lnSpc>
-              <a:spcBef>
-                <a:spcPts val="1001"/>
-              </a:spcBef>
-              <a:buClr>
-                <a:srgbClr val="35403a"/>
-              </a:buClr>
-              <a:buFont typeface="Arial"/>
-              <a:buChar char="•"/>
-            </a:pPr>
-            <a:r>
-              <a:rPr lang="en-US" sz="1600" b="0" u="none" strike="noStrike">
-                <a:solidFill>
-                  <a:schemeClr val="dk2"/>
-                </a:solidFill>
-                <a:effectLst/>
-                <a:uFillTx/>
-                <a:latin typeface="Aptos Light"/>
-              </a:rPr>
-              <a:t>Click to edit Master text styles</a:t>
-            </a:r>
-            <a:endParaRPr lang="es-ES" sz="1600" b="0" u="none" strike="noStrike">
-              <a:solidFill>
-                <a:schemeClr val="dk2"/>
-              </a:solidFill>
-              <a:effectLst/>
-              <a:uFillTx/>
-              <a:latin typeface="Aptos Light"/>
-            </a:endParaRPr>
-          </a:p>
-          <a:p>
-            <a:pPr marL="457200" lvl="1" indent="-228600" defTabSz="914400">
-              <a:lnSpc>
-                <a:spcPct val="120000"/>
-              </a:lnSpc>
-              <a:spcBef>
-                <a:spcPts val="499"/>
-              </a:spcBef>
-              <a:buClr>
-                <a:srgbClr val="35403a"/>
-              </a:buClr>
-              <a:buFont typeface="Arial"/>
-              <a:buChar char="•"/>
-            </a:pPr>
-            <a:r>
-              <a:rPr lang="en-US" sz="1400" b="0" u="none" strike="noStrike">
-                <a:solidFill>
-                  <a:schemeClr val="dk2"/>
-                </a:solidFill>
-                <a:effectLst/>
-                <a:uFillTx/>
-                <a:latin typeface="Aptos Light"/>
-              </a:rPr>
-              <a:t>Second level</a:t>
-            </a:r>
-            <a:endParaRPr lang="es-ES" sz="1400" b="0" u="none" strike="noStrike">
-              <a:solidFill>
-                <a:schemeClr val="dk2"/>
-              </a:solidFill>
-              <a:effectLst/>
-              <a:uFillTx/>
-              <a:latin typeface="Aptos Light"/>
-            </a:endParaRPr>
-          </a:p>
-          <a:p>
-            <a:pPr marL="685800" lvl="2" indent="-228600" defTabSz="914400">
-              <a:lnSpc>
-                <a:spcPct val="120000"/>
-              </a:lnSpc>
-              <a:spcBef>
-                <a:spcPts val="499"/>
-              </a:spcBef>
-              <a:buClr>
-                <a:srgbClr val="35403a"/>
-              </a:buClr>
-              <a:buFont typeface="Arial"/>
-              <a:buChar char="•"/>
-            </a:pPr>
-            <a:r>
-              <a:rPr lang="en-US" sz="1200" b="0" u="none" strike="noStrike">
-                <a:solidFill>
-                  <a:schemeClr val="dk2"/>
-                </a:solidFill>
-                <a:effectLst/>
-                <a:uFillTx/>
-                <a:latin typeface="Aptos Light"/>
-              </a:rPr>
-              <a:t>Third level</a:t>
-            </a:r>
-            <a:endParaRPr lang="es-ES" sz="1200" b="0" u="none" strike="noStrike">
-              <a:solidFill>
-                <a:schemeClr val="dk2"/>
-              </a:solidFill>
-              <a:effectLst/>
-              <a:uFillTx/>
-              <a:latin typeface="Aptos Light"/>
-            </a:endParaRPr>
-          </a:p>
-          <a:p>
-            <a:pPr marL="914400" lvl="3" indent="-228600" defTabSz="914400">
-              <a:lnSpc>
-                <a:spcPct val="120000"/>
-              </a:lnSpc>
-              <a:spcBef>
-                <a:spcPts val="499"/>
-              </a:spcBef>
-              <a:buClr>
-                <a:srgbClr val="35403a"/>
-              </a:buClr>
-              <a:buFont typeface="Arial"/>
-              <a:buChar char="•"/>
-            </a:pPr>
-            <a:r>
-              <a:rPr lang="en-US" sz="1100" b="0" u="none" strike="noStrike">
-                <a:solidFill>
-                  <a:schemeClr val="dk2"/>
-                </a:solidFill>
-                <a:effectLst/>
-                <a:uFillTx/>
-                <a:latin typeface="Aptos Light"/>
-              </a:rPr>
-              <a:t>Fourth level</a:t>
-            </a:r>
-            <a:endParaRPr lang="es-ES" sz="1100" b="0" u="none" strike="noStrike">
-              <a:solidFill>
-                <a:schemeClr val="dk2"/>
-              </a:solidFill>
-              <a:effectLst/>
-              <a:uFillTx/>
-              <a:latin typeface="Aptos Light"/>
-            </a:endParaRPr>
-          </a:p>
-          <a:p>
-            <a:pPr marL="1143000" lvl="4" indent="-228600" defTabSz="914400">
-              <a:lnSpc>
-                <a:spcPct val="120000"/>
-              </a:lnSpc>
-              <a:spcBef>
-                <a:spcPts val="499"/>
-              </a:spcBef>
-              <a:buClr>
-                <a:srgbClr val="35403a"/>
-              </a:buClr>
-              <a:buFont typeface="Arial"/>
-              <a:buChar char="•"/>
-            </a:pPr>
-            <a:r>
-              <a:rPr lang="en-US" sz="1100" b="0" u="none" strike="noStrike">
-                <a:solidFill>
-                  <a:schemeClr val="dk2"/>
-                </a:solidFill>
-                <a:effectLst/>
-                <a:uFillTx/>
-                <a:latin typeface="Aptos Light"/>
-              </a:rPr>
-              <a:t>Fifth level</a:t>
-            </a:r>
-            <a:endParaRPr lang="es-ES" sz="1100" b="0" u="none" strike="noStrike">
-              <a:solidFill>
-                <a:schemeClr val="dk2"/>
-              </a:solidFill>
-              <a:effectLst/>
-              <a:uFillTx/>
-              <a:latin typeface="Aptos Light"/>
-            </a:endParaRPr>
-          </a:p>
-        </p:txBody>
-      </p:sp>
-      <p:sp>
-        <p:nvSpPr>
-          <p:cNvPr id="23" name="PlaceHolder 3"/>
           <p:cNvSpPr>
             <a:spLocks noGrp="1"/>
           </p:cNvSpPr>
@@ -3379,7 +3139,7 @@
         <p:spPr>
           <a:xfrm>
             <a:off x="877680" y="6356520"/>
-            <a:ext cx="2742840" cy="364680"/>
+            <a:ext cx="2742480" cy="364320"/>
           </a:xfrm>
           <a:prstGeom prst="rect">
             <a:avLst/>
@@ -3399,6 +3159,9 @@
                 <a:spcPct val="100000"/>
               </a:lnSpc>
               <a:buNone/>
+              <a:tabLst>
+                <a:tab algn="l" pos="0"/>
+              </a:tabLst>
               <a:defRPr lang="en-US" sz="800" b="0" u="none" spc="300" strike="noStrike" cap="all">
                 <a:solidFill>
                   <a:schemeClr val="dk2"/>
@@ -3415,6 +3178,9 @@
                 <a:spcPct val="100000"/>
               </a:lnSpc>
               <a:buNone/>
+              <a:tabLst>
+                <a:tab algn="l" pos="0"/>
+              </a:tabLst>
             </a:pPr>
             <a:r>
               <a:rPr lang="en-US" sz="800" b="0" u="none" spc="300" strike="noStrike" cap="all">
@@ -3440,7 +3206,7 @@
       </p:sp>
       <p:sp>
         <p:nvSpPr>
-          <p:cNvPr id="24" name="PlaceHolder 4"/>
+          <p:cNvPr id="23" name="PlaceHolder 3"/>
           <p:cNvSpPr>
             <a:spLocks noGrp="1"/>
           </p:cNvSpPr>
@@ -3451,7 +3217,7 @@
         <p:spPr>
           <a:xfrm>
             <a:off x="7132320" y="6356520"/>
-            <a:ext cx="4297320" cy="364680"/>
+            <a:ext cx="4296960" cy="364320"/>
           </a:xfrm>
           <a:prstGeom prst="rect">
             <a:avLst/>
@@ -3467,7 +3233,13 @@
           </a:bodyPr>
           <a:lstStyle>
             <a:lvl1pPr indent="0" algn="ctr">
-              <a:buNone/>
+              <a:lnSpc>
+                <a:spcPct val="100000"/>
+              </a:lnSpc>
+              <a:buNone/>
+              <a:tabLst>
+                <a:tab algn="l" pos="0"/>
+              </a:tabLst>
               <a:defRPr lang="en-US" sz="800" b="0" u="none" spc="300" strike="noStrike" cap="all">
                 <a:solidFill>
                   <a:schemeClr val="dk2"/>
@@ -3480,7 +3252,13 @@
           </a:lstStyle>
           <a:p>
             <a:pPr indent="0" algn="ctr">
-              <a:buNone/>
+              <a:lnSpc>
+                <a:spcPct val="100000"/>
+              </a:lnSpc>
+              <a:buNone/>
+              <a:tabLst>
+                <a:tab algn="l" pos="0"/>
+              </a:tabLst>
             </a:pPr>
             <a:r>
               <a:rPr lang="en-US" sz="800" b="0" u="none" spc="300" strike="noStrike" cap="all">
@@ -3506,7 +3284,7 @@
       </p:sp>
       <p:sp>
         <p:nvSpPr>
-          <p:cNvPr id="25" name="PlaceHolder 5"/>
+          <p:cNvPr id="24" name="PlaceHolder 4"/>
           <p:cNvSpPr>
             <a:spLocks noGrp="1"/>
           </p:cNvSpPr>
@@ -3517,7 +3295,7 @@
         <p:spPr>
           <a:xfrm>
             <a:off x="11430000" y="6356520"/>
-            <a:ext cx="520920" cy="364680"/>
+            <a:ext cx="520560" cy="364320"/>
           </a:xfrm>
           <a:prstGeom prst="rect">
             <a:avLst/>
@@ -3537,6 +3315,9 @@
                 <a:spcPct val="100000"/>
               </a:lnSpc>
               <a:buNone/>
+              <a:tabLst>
+                <a:tab algn="l" pos="0"/>
+              </a:tabLst>
               <a:defRPr lang="en-US" sz="1400" b="0" u="none" strike="noStrike">
                 <a:solidFill>
                   <a:schemeClr val="dk2"/>
@@ -3553,8 +3334,11 @@
                 <a:spcPct val="100000"/>
               </a:lnSpc>
               <a:buNone/>
-            </a:pPr>
-            <a:fld id="{DBB4E3C8-CB94-4F3B-B989-96C6755A52A3}" type="slidenum">
+              <a:tabLst>
+                <a:tab algn="l" pos="0"/>
+              </a:tabLst>
+            </a:pPr>
+            <a:fld id="{7ED8EC8D-018A-4623-813E-C48FF00F878F}" type="slidenum">
               <a:rPr lang="en-US" sz="1400" b="0" u="none" strike="noStrike">
                 <a:solidFill>
                   <a:schemeClr val="dk2"/>
@@ -3572,6 +3356,280 @@
               <a:effectLst/>
               <a:uFillTx/>
               <a:latin typeface="Times New Roman"/>
+            </a:endParaRPr>
+          </a:p>
+        </p:txBody>
+      </p:sp>
+      <p:sp>
+        <p:nvSpPr>
+          <p:cNvPr id="25" name="PlaceHolder 5"/>
+          <p:cNvSpPr>
+            <a:spLocks noGrp="1"/>
+          </p:cNvSpPr>
+          <p:nvPr>
+            <p:ph type="body"/>
+          </p:nvPr>
+        </p:nvSpPr>
+        <p:spPr>
+          <a:xfrm>
+            <a:off x="609480" y="1604520"/>
+            <a:ext cx="10972080" cy="3976920"/>
+          </a:xfrm>
+          <a:prstGeom prst="rect">
+            <a:avLst/>
+          </a:prstGeom>
+          <a:noFill/>
+          <a:ln w="0">
+            <a:noFill/>
+          </a:ln>
+        </p:spPr>
+        <p:txBody>
+          <a:bodyPr lIns="0" rIns="0" tIns="0" bIns="0" anchor="t">
+            <a:normAutofit/>
+          </a:bodyPr>
+          <a:p>
+            <a:pPr marL="432000" indent="-324000">
+              <a:lnSpc>
+                <a:spcPct val="120000"/>
+              </a:lnSpc>
+              <a:spcBef>
+                <a:spcPts val="1417"/>
+              </a:spcBef>
+              <a:buClr>
+                <a:srgbClr val="000000"/>
+              </a:buClr>
+              <a:buSzPct val="45000"/>
+              <a:buFont typeface="Wingdings" charset="2"/>
+              <a:buChar char=""/>
+            </a:pPr>
+            <a:r>
+              <a:rPr lang="es-ES" sz="1600" b="0" u="none" strike="noStrike">
+                <a:solidFill>
+                  <a:schemeClr val="dk2"/>
+                </a:solidFill>
+                <a:effectLst/>
+                <a:uFillTx/>
+                <a:latin typeface="Aptos Light"/>
+              </a:rPr>
+              <a:t>Pulse para editar el formato de texto del esquema</a:t>
+            </a:r>
+            <a:endParaRPr lang="es-ES" sz="1600" b="0" u="none" strike="noStrike">
+              <a:solidFill>
+                <a:srgbClr val="000000"/>
+              </a:solidFill>
+              <a:effectLst/>
+              <a:uFillTx/>
+              <a:latin typeface="Arial"/>
+            </a:endParaRPr>
+          </a:p>
+          <a:p>
+            <a:pPr marL="864000" lvl="1" indent="-324000">
+              <a:lnSpc>
+                <a:spcPct val="120000"/>
+              </a:lnSpc>
+              <a:spcBef>
+                <a:spcPts val="1134"/>
+              </a:spcBef>
+              <a:buClr>
+                <a:srgbClr val="000000"/>
+              </a:buClr>
+              <a:buSzPct val="75000"/>
+              <a:buFont typeface="Symbol" charset="2"/>
+              <a:buChar char=""/>
+            </a:pPr>
+            <a:r>
+              <a:rPr lang="es-ES" sz="1200" b="0" u="none" strike="noStrike">
+                <a:solidFill>
+                  <a:schemeClr val="dk2"/>
+                </a:solidFill>
+                <a:effectLst/>
+                <a:uFillTx/>
+                <a:latin typeface="Aptos Light"/>
+              </a:rPr>
+              <a:t>Segundo nivel del esquema</a:t>
+            </a:r>
+            <a:endParaRPr lang="es-ES" sz="1200" b="0" u="none" strike="noStrike">
+              <a:solidFill>
+                <a:srgbClr val="000000"/>
+              </a:solidFill>
+              <a:effectLst/>
+              <a:uFillTx/>
+              <a:latin typeface="Arial"/>
+            </a:endParaRPr>
+          </a:p>
+          <a:p>
+            <a:pPr marL="1296000" lvl="2" indent="-288000">
+              <a:lnSpc>
+                <a:spcPct val="120000"/>
+              </a:lnSpc>
+              <a:spcBef>
+                <a:spcPts val="850"/>
+              </a:spcBef>
+              <a:buClr>
+                <a:srgbClr val="000000"/>
+              </a:buClr>
+              <a:buSzPct val="45000"/>
+              <a:buFont typeface="Wingdings" charset="2"/>
+              <a:buChar char=""/>
+            </a:pPr>
+            <a:r>
+              <a:rPr lang="es-ES" sz="1100" b="0" u="none" strike="noStrike">
+                <a:solidFill>
+                  <a:schemeClr val="dk2"/>
+                </a:solidFill>
+                <a:effectLst/>
+                <a:uFillTx/>
+                <a:latin typeface="Aptos Light"/>
+              </a:rPr>
+              <a:t>Tercer nivel del esquema</a:t>
+            </a:r>
+            <a:endParaRPr lang="es-ES" sz="1100" b="0" u="none" strike="noStrike">
+              <a:solidFill>
+                <a:srgbClr val="000000"/>
+              </a:solidFill>
+              <a:effectLst/>
+              <a:uFillTx/>
+              <a:latin typeface="Arial"/>
+            </a:endParaRPr>
+          </a:p>
+          <a:p>
+            <a:pPr marL="1728000" lvl="3" indent="-216000">
+              <a:lnSpc>
+                <a:spcPct val="120000"/>
+              </a:lnSpc>
+              <a:spcBef>
+                <a:spcPts val="567"/>
+              </a:spcBef>
+              <a:buClr>
+                <a:srgbClr val="000000"/>
+              </a:buClr>
+              <a:buSzPct val="75000"/>
+              <a:buFont typeface="Symbol" charset="2"/>
+              <a:buChar char=""/>
+            </a:pPr>
+            <a:r>
+              <a:rPr lang="es-ES" sz="1100" b="0" u="none" strike="noStrike">
+                <a:solidFill>
+                  <a:schemeClr val="dk2"/>
+                </a:solidFill>
+                <a:effectLst/>
+                <a:uFillTx/>
+                <a:latin typeface="Aptos Light"/>
+              </a:rPr>
+              <a:t>Cuarto nivel del esquema</a:t>
+            </a:r>
+            <a:endParaRPr lang="es-ES" sz="1100" b="0" u="none" strike="noStrike">
+              <a:solidFill>
+                <a:srgbClr val="000000"/>
+              </a:solidFill>
+              <a:effectLst/>
+              <a:uFillTx/>
+              <a:latin typeface="Arial"/>
+            </a:endParaRPr>
+          </a:p>
+          <a:p>
+            <a:pPr marL="2160000" lvl="4" indent="-216000">
+              <a:lnSpc>
+                <a:spcPct val="120000"/>
+              </a:lnSpc>
+              <a:spcBef>
+                <a:spcPts val="283"/>
+              </a:spcBef>
+              <a:buClr>
+                <a:srgbClr val="000000"/>
+              </a:buClr>
+              <a:buSzPct val="45000"/>
+              <a:buFont typeface="Wingdings" charset="2"/>
+              <a:buChar char=""/>
+            </a:pPr>
+            <a:r>
+              <a:rPr lang="es-ES" sz="2000" b="0" u="none" strike="noStrike">
+                <a:solidFill>
+                  <a:schemeClr val="dk2"/>
+                </a:solidFill>
+                <a:effectLst/>
+                <a:uFillTx/>
+                <a:latin typeface="Aptos Light"/>
+              </a:rPr>
+              <a:t>Quinto nivel del esquema</a:t>
+            </a:r>
+            <a:endParaRPr lang="es-ES" sz="2000" b="0" u="none" strike="noStrike">
+              <a:solidFill>
+                <a:srgbClr val="000000"/>
+              </a:solidFill>
+              <a:effectLst/>
+              <a:uFillTx/>
+              <a:latin typeface="Arial"/>
+            </a:endParaRPr>
+          </a:p>
+          <a:p>
+            <a:pPr marL="2592000" lvl="5" indent="-216000">
+              <a:lnSpc>
+                <a:spcPct val="120000"/>
+              </a:lnSpc>
+              <a:spcBef>
+                <a:spcPts val="283"/>
+              </a:spcBef>
+              <a:buClr>
+                <a:srgbClr val="000000"/>
+              </a:buClr>
+              <a:buSzPct val="45000"/>
+              <a:buFont typeface="Wingdings" charset="2"/>
+              <a:buChar char=""/>
+            </a:pPr>
+            <a:r>
+              <a:rPr lang="es-ES" sz="2000" b="0" u="none" strike="noStrike">
+                <a:solidFill>
+                  <a:schemeClr val="dk2"/>
+                </a:solidFill>
+                <a:effectLst/>
+                <a:uFillTx/>
+                <a:latin typeface="Aptos Light"/>
+              </a:rPr>
+              <a:t>Sexto nivel del esquema</a:t>
+            </a:r>
+            <a:endParaRPr lang="es-ES" sz="2000" b="0" u="none" strike="noStrike">
+              <a:solidFill>
+                <a:srgbClr val="000000"/>
+              </a:solidFill>
+              <a:effectLst/>
+              <a:uFillTx/>
+              <a:latin typeface="Arial"/>
+            </a:endParaRPr>
+          </a:p>
+          <a:p>
+            <a:pPr marL="3024000" lvl="6" indent="-216000">
+              <a:lnSpc>
+                <a:spcPct val="120000"/>
+              </a:lnSpc>
+              <a:spcBef>
+                <a:spcPts val="283"/>
+              </a:spcBef>
+              <a:buClr>
+                <a:srgbClr val="000000"/>
+              </a:buClr>
+              <a:buSzPct val="45000"/>
+              <a:buFont typeface="Wingdings" charset="2"/>
+              <a:buChar char=""/>
+            </a:pPr>
+            <a:r>
+              <a:rPr lang="es-ES" sz="2000" b="0" u="none" strike="noStrike">
+                <a:solidFill>
+                  <a:schemeClr val="dk2"/>
+                </a:solidFill>
+                <a:effectLst/>
+                <a:uFillTx/>
+                <a:latin typeface="Aptos Light"/>
+              </a:rPr>
+              <a:t>Séptimo nivel del esquema</a:t>
+            </a:r>
+            <a:endParaRPr lang="es-ES" sz="2000" b="0" u="none" strike="noStrike">
+              <a:solidFill>
+                <a:srgbClr val="000000"/>
+              </a:solidFill>
+              <a:effectLst/>
+              <a:uFillTx/>
+              <a:latin typeface="Arial"/>
             </a:endParaRPr>
           </a:p>
         </p:txBody>
@@ -3582,8 +3640,8 @@
 </file>
 
 <file path=ppt/slideLayouts/slideLayout5.xml><?xml version="1.0" encoding="utf-8"?>
-<p:sldLayout xmlns:a="http://schemas.openxmlformats.org/drawingml/2006/main" xmlns:p="http://schemas.openxmlformats.org/presentationml/2006/main" xmlns:r="http://schemas.openxmlformats.org/officeDocument/2006/relationships" xmlns:p14="http://schemas.microsoft.com/office/powerpoint/2010/main" xmlns:p15="http://schemas.microsoft.com/office/powerpoint/2012/main" xmlns:mc="http://schemas.openxmlformats.org/markup-compatibility/2006" type="blank" preserve="1">
-  <p:cSld name="Section Header">
+<p:sldLayout xmlns:a="http://schemas.openxmlformats.org/drawingml/2006/main" xmlns:p="http://schemas.openxmlformats.org/presentationml/2006/main" xmlns:r="http://schemas.openxmlformats.org/officeDocument/2006/relationships" xmlns:p14="http://schemas.microsoft.com/office/powerpoint/2010/main" xmlns:p15="http://schemas.microsoft.com/office/powerpoint/2012/main" xmlns:mc="http://schemas.openxmlformats.org/markup-compatibility/2006" type="vertTx" preserve="1">
+  <p:cSld name="Title and Vertical Text">
     <p:bg>
       <p:bgPr>
         <a:solidFill>
@@ -3614,7 +3672,7 @@
         <p:spPr>
           <a:xfrm>
             <a:off x="0" y="0"/>
-            <a:ext cx="12191760" cy="6859800"/>
+            <a:ext cx="12191400" cy="6859440"/>
           </a:xfrm>
           <a:prstGeom prst="rect">
             <a:avLst/>
@@ -3648,6 +3706,11 @@
             <a:noAutofit/>
           </a:bodyPr>
           <a:p>
+            <a:pPr>
+              <a:lnSpc>
+                <a:spcPct val="100000"/>
+              </a:lnSpc>
+            </a:pPr>
             <a:endParaRPr lang="es-ES" sz="1800" b="0" u="none" strike="noStrike">
               <a:solidFill>
                 <a:srgbClr val="000000"/>
@@ -3671,8 +3734,8 @@
         </p:nvSpPr>
         <p:spPr>
           <a:xfrm>
-            <a:off x="1474200" y="1514520"/>
-            <a:ext cx="8583840" cy="3138480"/>
+            <a:off x="871200" y="588240"/>
+            <a:ext cx="10449000" cy="1265040"/>
           </a:xfrm>
           <a:prstGeom prst="rect">
             <a:avLst/>
@@ -3684,7 +3747,7 @@
         </p:spPr>
         <p:txBody>
           <a:bodyPr lIns="91440" rIns="91440" tIns="45720" bIns="45720" anchor="b">
-            <a:normAutofit/>
+            <a:noAutofit/>
           </a:bodyPr>
           <a:p>
             <a:pPr indent="0" defTabSz="914400">
@@ -3692,9 +3755,12 @@
                 <a:spcPct val="100000"/>
               </a:lnSpc>
               <a:buNone/>
-            </a:pPr>
-            <a:r>
-              <a:rPr lang="en-US" sz="3600" b="0" u="none" spc="300" strike="noStrike" cap="all">
+              <a:tabLst>
+                <a:tab algn="l" pos="0"/>
+              </a:tabLst>
+            </a:pPr>
+            <a:r>
+              <a:rPr lang="en-US" sz="3200" b="0" u="none" strike="noStrike">
                 <a:solidFill>
                   <a:schemeClr val="dk2"/>
                 </a:solidFill>
@@ -3704,13 +3770,13 @@
               </a:rPr>
               <a:t>Click to edit Master title style</a:t>
             </a:r>
-            <a:endParaRPr lang="es-ES" sz="3600" b="0" u="none" strike="noStrike">
-              <a:solidFill>
-                <a:schemeClr val="dk1"/>
-              </a:solidFill>
-              <a:effectLst/>
-              <a:uFillTx/>
-              <a:latin typeface="Aptos Light"/>
+            <a:endParaRPr lang="es-ES" sz="3200" b="0" u="none" strike="noStrike">
+              <a:solidFill>
+                <a:srgbClr val="000000"/>
+              </a:solidFill>
+              <a:effectLst/>
+              <a:uFillTx/>
+              <a:latin typeface="Arial"/>
             </a:endParaRPr>
           </a:p>
         </p:txBody>
@@ -3727,8 +3793,8 @@
         </p:nvSpPr>
         <p:spPr>
           <a:xfrm>
-            <a:off x="1474200" y="4964040"/>
-            <a:ext cx="8583840" cy="1125360"/>
+            <a:off x="877680" y="2157840"/>
+            <a:ext cx="10441800" cy="3903120"/>
           </a:xfrm>
           <a:prstGeom prst="rect">
             <a:avLst/>
@@ -3739,24 +3805,25 @@
           </a:ln>
         </p:spPr>
         <p:txBody>
-          <a:bodyPr lIns="91440" rIns="91440" tIns="45720" bIns="45720" anchor="t">
-            <a:normAutofit/>
+          <a:bodyPr lIns="91440" rIns="91440" tIns="45720" bIns="45720" anchor="t" vert="eaVert">
+            <a:noAutofit/>
           </a:bodyPr>
           <a:p>
-            <a:pPr indent="0" defTabSz="914400">
+            <a:pPr marL="228600" indent="-228600" defTabSz="914400">
               <a:lnSpc>
                 <a:spcPct val="120000"/>
               </a:lnSpc>
               <a:spcBef>
                 <a:spcPts val="1001"/>
               </a:spcBef>
-              <a:buNone/>
-              <a:tabLst>
-                <a:tab algn="l" pos="0"/>
-              </a:tabLst>
-            </a:pPr>
-            <a:r>
-              <a:rPr lang="en-US" sz="1600" b="0" u="none" spc="300" strike="noStrike" cap="all">
+              <a:buClr>
+                <a:srgbClr val="35403a"/>
+              </a:buClr>
+              <a:buFont typeface="Arial"/>
+              <a:buChar char="•"/>
+            </a:pPr>
+            <a:r>
+              <a:rPr lang="en-US" sz="1600" b="0" u="none" strike="noStrike">
                 <a:solidFill>
                   <a:schemeClr val="dk2"/>
                 </a:solidFill>
@@ -3768,11 +3835,147 @@
             </a:r>
             <a:endParaRPr lang="es-ES" sz="1600" b="0" u="none" strike="noStrike">
               <a:solidFill>
-                <a:schemeClr val="dk2"/>
-              </a:solidFill>
-              <a:effectLst/>
-              <a:uFillTx/>
-              <a:latin typeface="Aptos Light"/>
+                <a:srgbClr val="000000"/>
+              </a:solidFill>
+              <a:effectLst/>
+              <a:uFillTx/>
+              <a:latin typeface="Arial"/>
+            </a:endParaRPr>
+          </a:p>
+          <a:p>
+            <a:pPr marL="457200" lvl="1" indent="-228600" defTabSz="914400">
+              <a:lnSpc>
+                <a:spcPct val="120000"/>
+              </a:lnSpc>
+              <a:spcBef>
+                <a:spcPts val="499"/>
+              </a:spcBef>
+              <a:buClr>
+                <a:srgbClr val="35403a"/>
+              </a:buClr>
+              <a:buFont typeface="Arial"/>
+              <a:buChar char="•"/>
+            </a:pPr>
+            <a:r>
+              <a:rPr lang="en-US" sz="1400" b="0" u="none" strike="noStrike">
+                <a:solidFill>
+                  <a:schemeClr val="dk2"/>
+                </a:solidFill>
+                <a:effectLst/>
+                <a:uFillTx/>
+                <a:latin typeface="Aptos Light"/>
+              </a:rPr>
+              <a:t>Second level</a:t>
+            </a:r>
+            <a:endParaRPr lang="es-ES" sz="1400" b="0" u="none" strike="noStrike">
+              <a:solidFill>
+                <a:srgbClr val="000000"/>
+              </a:solidFill>
+              <a:effectLst/>
+              <a:uFillTx/>
+              <a:latin typeface="Arial"/>
+            </a:endParaRPr>
+          </a:p>
+          <a:p>
+            <a:pPr marL="685800" lvl="2" indent="-228600" defTabSz="914400">
+              <a:lnSpc>
+                <a:spcPct val="120000"/>
+              </a:lnSpc>
+              <a:spcBef>
+                <a:spcPts val="499"/>
+              </a:spcBef>
+              <a:buClr>
+                <a:srgbClr val="35403a"/>
+              </a:buClr>
+              <a:buFont typeface="Arial"/>
+              <a:buChar char="•"/>
+            </a:pPr>
+            <a:r>
+              <a:rPr lang="en-US" sz="1200" b="0" u="none" strike="noStrike">
+                <a:solidFill>
+                  <a:schemeClr val="dk2"/>
+                </a:solidFill>
+                <a:effectLst/>
+                <a:uFillTx/>
+                <a:latin typeface="Aptos Light"/>
+              </a:rPr>
+              <a:t>Third level</a:t>
+            </a:r>
+            <a:endParaRPr lang="es-ES" sz="1200" b="0" u="none" strike="noStrike">
+              <a:solidFill>
+                <a:srgbClr val="000000"/>
+              </a:solidFill>
+              <a:effectLst/>
+              <a:uFillTx/>
+              <a:latin typeface="Arial"/>
+            </a:endParaRPr>
+          </a:p>
+          <a:p>
+            <a:pPr marL="914400" lvl="3" indent="-228600" defTabSz="914400">
+              <a:lnSpc>
+                <a:spcPct val="120000"/>
+              </a:lnSpc>
+              <a:spcBef>
+                <a:spcPts val="499"/>
+              </a:spcBef>
+              <a:buClr>
+                <a:srgbClr val="35403a"/>
+              </a:buClr>
+              <a:buFont typeface="Arial"/>
+              <a:buChar char="•"/>
+            </a:pPr>
+            <a:r>
+              <a:rPr lang="en-US" sz="1100" b="0" u="none" strike="noStrike">
+                <a:solidFill>
+                  <a:schemeClr val="dk2"/>
+                </a:solidFill>
+                <a:effectLst/>
+                <a:uFillTx/>
+                <a:latin typeface="Aptos Light"/>
+              </a:rPr>
+              <a:t>Fourth level</a:t>
+            </a:r>
+            <a:endParaRPr lang="es-ES" sz="1100" b="0" u="none" strike="noStrike">
+              <a:solidFill>
+                <a:srgbClr val="000000"/>
+              </a:solidFill>
+              <a:effectLst/>
+              <a:uFillTx/>
+              <a:latin typeface="Arial"/>
+            </a:endParaRPr>
+          </a:p>
+          <a:p>
+            <a:pPr marL="1143000" lvl="4" indent="-228600" defTabSz="914400">
+              <a:lnSpc>
+                <a:spcPct val="120000"/>
+              </a:lnSpc>
+              <a:spcBef>
+                <a:spcPts val="499"/>
+              </a:spcBef>
+              <a:buClr>
+                <a:srgbClr val="35403a"/>
+              </a:buClr>
+              <a:buFont typeface="Arial"/>
+              <a:buChar char="•"/>
+            </a:pPr>
+            <a:r>
+              <a:rPr lang="en-US" sz="1100" b="0" u="none" strike="noStrike">
+                <a:solidFill>
+                  <a:schemeClr val="dk2"/>
+                </a:solidFill>
+                <a:effectLst/>
+                <a:uFillTx/>
+                <a:latin typeface="Aptos Light"/>
+              </a:rPr>
+              <a:t>Fifth level</a:t>
+            </a:r>
+            <a:endParaRPr lang="es-ES" sz="1100" b="0" u="none" strike="noStrike">
+              <a:solidFill>
+                <a:srgbClr val="000000"/>
+              </a:solidFill>
+              <a:effectLst/>
+              <a:uFillTx/>
+              <a:latin typeface="Arial"/>
             </a:endParaRPr>
           </a:p>
         </p:txBody>
@@ -3790,7 +3993,7 @@
         <p:spPr>
           <a:xfrm>
             <a:off x="877680" y="6356520"/>
-            <a:ext cx="2742840" cy="364680"/>
+            <a:ext cx="2742480" cy="364320"/>
           </a:xfrm>
           <a:prstGeom prst="rect">
             <a:avLst/>
@@ -3810,6 +4013,9 @@
                 <a:spcPct val="100000"/>
               </a:lnSpc>
               <a:buNone/>
+              <a:tabLst>
+                <a:tab algn="l" pos="0"/>
+              </a:tabLst>
               <a:defRPr lang="en-US" sz="800" b="0" u="none" spc="300" strike="noStrike" cap="all">
                 <a:solidFill>
                   <a:schemeClr val="dk2"/>
@@ -3826,6 +4032,9 @@
                 <a:spcPct val="100000"/>
               </a:lnSpc>
               <a:buNone/>
+              <a:tabLst>
+                <a:tab algn="l" pos="0"/>
+              </a:tabLst>
             </a:pPr>
             <a:r>
               <a:rPr lang="en-US" sz="800" b="0" u="none" spc="300" strike="noStrike" cap="all">
@@ -3862,7 +4071,7 @@
         <p:spPr>
           <a:xfrm>
             <a:off x="7132320" y="6356520"/>
-            <a:ext cx="4297320" cy="364680"/>
+            <a:ext cx="4296960" cy="364320"/>
           </a:xfrm>
           <a:prstGeom prst="rect">
             <a:avLst/>
@@ -3878,7 +4087,13 @@
           </a:bodyPr>
           <a:lstStyle>
             <a:lvl1pPr indent="0" algn="ctr">
-              <a:buNone/>
+              <a:lnSpc>
+                <a:spcPct val="100000"/>
+              </a:lnSpc>
+              <a:buNone/>
+              <a:tabLst>
+                <a:tab algn="l" pos="0"/>
+              </a:tabLst>
               <a:defRPr lang="en-US" sz="800" b="0" u="none" spc="300" strike="noStrike" cap="all">
                 <a:solidFill>
                   <a:schemeClr val="dk2"/>
@@ -3891,7 +4106,13 @@
           </a:lstStyle>
           <a:p>
             <a:pPr indent="0" algn="ctr">
-              <a:buNone/>
+              <a:lnSpc>
+                <a:spcPct val="100000"/>
+              </a:lnSpc>
+              <a:buNone/>
+              <a:tabLst>
+                <a:tab algn="l" pos="0"/>
+              </a:tabLst>
             </a:pPr>
             <a:r>
               <a:rPr lang="en-US" sz="800" b="0" u="none" spc="300" strike="noStrike" cap="all">
@@ -3928,7 +4149,7 @@
         <p:spPr>
           <a:xfrm>
             <a:off x="11430000" y="6356520"/>
-            <a:ext cx="520920" cy="364680"/>
+            <a:ext cx="520560" cy="364320"/>
           </a:xfrm>
           <a:prstGeom prst="rect">
             <a:avLst/>
@@ -3948,6 +4169,9 @@
                 <a:spcPct val="100000"/>
               </a:lnSpc>
               <a:buNone/>
+              <a:tabLst>
+                <a:tab algn="l" pos="0"/>
+              </a:tabLst>
               <a:defRPr lang="en-US" sz="1400" b="0" u="none" strike="noStrike">
                 <a:solidFill>
                   <a:schemeClr val="dk2"/>
@@ -3964,8 +4188,11 @@
                 <a:spcPct val="100000"/>
               </a:lnSpc>
               <a:buNone/>
-            </a:pPr>
-            <a:fld id="{811BF034-1370-4C31-8F0B-3093AFCDB786}" type="slidenum">
+              <a:tabLst>
+                <a:tab algn="l" pos="0"/>
+              </a:tabLst>
+            </a:pPr>
+            <a:fld id="{4DF6AC2C-2EC0-4611-8CDE-53A2D6BB6764}" type="slidenum">
               <a:rPr lang="en-US" sz="1400" b="0" u="none" strike="noStrike">
                 <a:solidFill>
                   <a:schemeClr val="dk2"/>
@@ -3993,8 +4220,8 @@
 </file>
 
 <file path=ppt/slideLayouts/slideLayout6.xml><?xml version="1.0" encoding="utf-8"?>
-<p:sldLayout xmlns:a="http://schemas.openxmlformats.org/drawingml/2006/main" xmlns:p="http://schemas.openxmlformats.org/presentationml/2006/main" xmlns:r="http://schemas.openxmlformats.org/officeDocument/2006/relationships" xmlns:p14="http://schemas.microsoft.com/office/powerpoint/2010/main" xmlns:p15="http://schemas.microsoft.com/office/powerpoint/2012/main" xmlns:mc="http://schemas.openxmlformats.org/markup-compatibility/2006" type="twoObj" preserve="1">
-  <p:cSld name="Two Content">
+<p:sldLayout xmlns:a="http://schemas.openxmlformats.org/drawingml/2006/main" xmlns:p="http://schemas.openxmlformats.org/presentationml/2006/main" xmlns:r="http://schemas.openxmlformats.org/officeDocument/2006/relationships" xmlns:p14="http://schemas.microsoft.com/office/powerpoint/2010/main" xmlns:p15="http://schemas.microsoft.com/office/powerpoint/2012/main" xmlns:mc="http://schemas.openxmlformats.org/markup-compatibility/2006" type="vertTitleAndTx" preserve="1">
+  <p:cSld name="Vertical Title and Text">
     <p:bg>
       <p:bgPr>
         <a:solidFill>
@@ -4025,7 +4252,7 @@
         <p:spPr>
           <a:xfrm>
             <a:off x="0" y="0"/>
-            <a:ext cx="12191760" cy="6859800"/>
+            <a:ext cx="12191400" cy="6859440"/>
           </a:xfrm>
           <a:prstGeom prst="rect">
             <a:avLst/>
@@ -4059,6 +4286,11 @@
             <a:noAutofit/>
           </a:bodyPr>
           <a:p>
+            <a:pPr>
+              <a:lnSpc>
+                <a:spcPct val="100000"/>
+              </a:lnSpc>
+            </a:pPr>
             <a:endParaRPr lang="es-ES" sz="1800" b="0" u="none" strike="noStrike">
               <a:solidFill>
                 <a:srgbClr val="000000"/>
@@ -4082,8 +4314,8 @@
         </p:nvSpPr>
         <p:spPr>
           <a:xfrm>
-            <a:off x="871200" y="588240"/>
-            <a:ext cx="10449360" cy="1265400"/>
+            <a:off x="8724960" y="592200"/>
+            <a:ext cx="2628360" cy="5583960"/>
           </a:xfrm>
           <a:prstGeom prst="rect">
             <a:avLst/>
@@ -4094,7 +4326,7 @@
           </a:ln>
         </p:spPr>
         <p:txBody>
-          <a:bodyPr lIns="91440" rIns="91440" tIns="45720" bIns="45720" anchor="b">
+          <a:bodyPr lIns="91440" rIns="91440" tIns="45720" bIns="45720" anchor="b" vert="eaVert">
             <a:noAutofit/>
           </a:bodyPr>
           <a:p>
@@ -4103,6 +4335,9 @@
                 <a:spcPct val="100000"/>
               </a:lnSpc>
               <a:buNone/>
+              <a:tabLst>
+                <a:tab algn="l" pos="0"/>
+              </a:tabLst>
             </a:pPr>
             <a:r>
               <a:rPr lang="en-US" sz="3200" b="0" u="none" strike="noStrike">
@@ -4117,11 +4352,11 @@
             </a:r>
             <a:endParaRPr lang="es-ES" sz="3200" b="0" u="none" strike="noStrike">
               <a:solidFill>
-                <a:schemeClr val="dk1"/>
-              </a:solidFill>
-              <a:effectLst/>
-              <a:uFillTx/>
-              <a:latin typeface="Aptos Light"/>
+                <a:srgbClr val="000000"/>
+              </a:solidFill>
+              <a:effectLst/>
+              <a:uFillTx/>
+              <a:latin typeface="Arial"/>
             </a:endParaRPr>
           </a:p>
         </p:txBody>
@@ -4138,8 +4373,8 @@
         </p:nvSpPr>
         <p:spPr>
           <a:xfrm>
-            <a:off x="877680" y="2159280"/>
-            <a:ext cx="4977000" cy="4017600"/>
+            <a:off x="838080" y="592200"/>
+            <a:ext cx="7733520" cy="5583960"/>
           </a:xfrm>
           <a:prstGeom prst="rect">
             <a:avLst/>
@@ -4150,7 +4385,7 @@
           </a:ln>
         </p:spPr>
         <p:txBody>
-          <a:bodyPr lIns="91440" rIns="91440" tIns="45720" bIns="45720" anchor="t">
+          <a:bodyPr lIns="91440" rIns="91440" tIns="45720" bIns="45720" anchor="t" vert="eaVert">
             <a:noAutofit/>
           </a:bodyPr>
           <a:p>
@@ -4180,11 +4415,11 @@
             </a:r>
             <a:endParaRPr lang="es-ES" sz="1600" b="0" u="none" strike="noStrike">
               <a:solidFill>
-                <a:schemeClr val="dk2"/>
-              </a:solidFill>
-              <a:effectLst/>
-              <a:uFillTx/>
-              <a:latin typeface="Aptos Light"/>
+                <a:srgbClr val="000000"/>
+              </a:solidFill>
+              <a:effectLst/>
+              <a:uFillTx/>
+              <a:latin typeface="Arial"/>
             </a:endParaRPr>
           </a:p>
           <a:p>
@@ -4214,11 +4449,11 @@
             </a:r>
             <a:endParaRPr lang="es-ES" sz="1400" b="0" u="none" strike="noStrike">
               <a:solidFill>
-                <a:schemeClr val="dk2"/>
-              </a:solidFill>
-              <a:effectLst/>
-              <a:uFillTx/>
-              <a:latin typeface="Aptos Light"/>
+                <a:srgbClr val="000000"/>
+              </a:solidFill>
+              <a:effectLst/>
+              <a:uFillTx/>
+              <a:latin typeface="Arial"/>
             </a:endParaRPr>
           </a:p>
           <a:p>
@@ -4248,11 +4483,11 @@
             </a:r>
             <a:endParaRPr lang="es-ES" sz="1200" b="0" u="none" strike="noStrike">
               <a:solidFill>
-                <a:schemeClr val="dk2"/>
-              </a:solidFill>
-              <a:effectLst/>
-              <a:uFillTx/>
-              <a:latin typeface="Aptos Light"/>
+                <a:srgbClr val="000000"/>
+              </a:solidFill>
+              <a:effectLst/>
+              <a:uFillTx/>
+              <a:latin typeface="Arial"/>
             </a:endParaRPr>
           </a:p>
           <a:p>
@@ -4282,11 +4517,11 @@
             </a:r>
             <a:endParaRPr lang="es-ES" sz="1100" b="0" u="none" strike="noStrike">
               <a:solidFill>
-                <a:schemeClr val="dk2"/>
-              </a:solidFill>
-              <a:effectLst/>
-              <a:uFillTx/>
-              <a:latin typeface="Aptos Light"/>
+                <a:srgbClr val="000000"/>
+              </a:solidFill>
+              <a:effectLst/>
+              <a:uFillTx/>
+              <a:latin typeface="Arial"/>
             </a:endParaRPr>
           </a:p>
           <a:p>
@@ -4316,11 +4551,11 @@
             </a:r>
             <a:endParaRPr lang="es-ES" sz="1100" b="0" u="none" strike="noStrike">
               <a:solidFill>
-                <a:schemeClr val="dk2"/>
-              </a:solidFill>
-              <a:effectLst/>
-              <a:uFillTx/>
-              <a:latin typeface="Aptos Light"/>
+                <a:srgbClr val="000000"/>
+              </a:solidFill>
+              <a:effectLst/>
+              <a:uFillTx/>
+              <a:latin typeface="Arial"/>
             </a:endParaRPr>
           </a:p>
         </p:txBody>
@@ -4328,205 +4563,6 @@
       <p:sp>
         <p:nvSpPr>
           <p:cNvPr id="35" name="PlaceHolder 3"/>
-          <p:cNvSpPr>
-            <a:spLocks noGrp="1"/>
-          </p:cNvSpPr>
-          <p:nvPr>
-            <p:ph type="body"/>
-          </p:nvPr>
-        </p:nvSpPr>
-        <p:spPr>
-          <a:xfrm>
-            <a:off x="6328440" y="2159280"/>
-            <a:ext cx="4985280" cy="4017600"/>
-          </a:xfrm>
-          <a:prstGeom prst="rect">
-            <a:avLst/>
-          </a:prstGeom>
-          <a:noFill/>
-          <a:ln w="0">
-            <a:noFill/>
-          </a:ln>
-        </p:spPr>
-        <p:txBody>
-          <a:bodyPr lIns="91440" rIns="91440" tIns="45720" bIns="45720" anchor="t">
-            <a:noAutofit/>
-          </a:bodyPr>
-          <a:p>
-            <a:pPr marL="228600" indent="-228600" defTabSz="914400">
-              <a:lnSpc>
-                <a:spcPct val="120000"/>
-              </a:lnSpc>
-              <a:spcBef>
-                <a:spcPts val="1001"/>
-              </a:spcBef>
-              <a:buClr>
-                <a:srgbClr val="35403a"/>
-              </a:buClr>
-              <a:buFont typeface="Arial"/>
-              <a:buChar char="•"/>
-            </a:pPr>
-            <a:r>
-              <a:rPr lang="en-US" sz="1600" b="0" u="none" strike="noStrike">
-                <a:solidFill>
-                  <a:schemeClr val="dk2"/>
-                </a:solidFill>
-                <a:effectLst/>
-                <a:uFillTx/>
-                <a:latin typeface="Aptos Light"/>
-              </a:rPr>
-              <a:t>Click to edit Master text styles</a:t>
-            </a:r>
-            <a:endParaRPr lang="es-ES" sz="1600" b="0" u="none" strike="noStrike">
-              <a:solidFill>
-                <a:schemeClr val="dk2"/>
-              </a:solidFill>
-              <a:effectLst/>
-              <a:uFillTx/>
-              <a:latin typeface="Aptos Light"/>
-            </a:endParaRPr>
-          </a:p>
-          <a:p>
-            <a:pPr marL="457200" lvl="1" indent="-228600" defTabSz="914400">
-              <a:lnSpc>
-                <a:spcPct val="120000"/>
-              </a:lnSpc>
-              <a:spcBef>
-                <a:spcPts val="499"/>
-              </a:spcBef>
-              <a:buClr>
-                <a:srgbClr val="35403a"/>
-              </a:buClr>
-              <a:buFont typeface="Arial"/>
-              <a:buChar char="•"/>
-            </a:pPr>
-            <a:r>
-              <a:rPr lang="en-US" sz="1400" b="0" u="none" strike="noStrike">
-                <a:solidFill>
-                  <a:schemeClr val="dk2"/>
-                </a:solidFill>
-                <a:effectLst/>
-                <a:uFillTx/>
-                <a:latin typeface="Aptos Light"/>
-              </a:rPr>
-              <a:t>Second level</a:t>
-            </a:r>
-            <a:endParaRPr lang="es-ES" sz="1400" b="0" u="none" strike="noStrike">
-              <a:solidFill>
-                <a:schemeClr val="dk2"/>
-              </a:solidFill>
-              <a:effectLst/>
-              <a:uFillTx/>
-              <a:latin typeface="Aptos Light"/>
-            </a:endParaRPr>
-          </a:p>
-          <a:p>
-            <a:pPr marL="685800" lvl="2" indent="-228600" defTabSz="914400">
-              <a:lnSpc>
-                <a:spcPct val="120000"/>
-              </a:lnSpc>
-              <a:spcBef>
-                <a:spcPts val="499"/>
-              </a:spcBef>
-              <a:buClr>
-                <a:srgbClr val="35403a"/>
-              </a:buClr>
-              <a:buFont typeface="Arial"/>
-              <a:buChar char="•"/>
-            </a:pPr>
-            <a:r>
-              <a:rPr lang="en-US" sz="1200" b="0" u="none" strike="noStrike">
-                <a:solidFill>
-                  <a:schemeClr val="dk2"/>
-                </a:solidFill>
-                <a:effectLst/>
-                <a:uFillTx/>
-                <a:latin typeface="Aptos Light"/>
-              </a:rPr>
-              <a:t>Third level</a:t>
-            </a:r>
-            <a:endParaRPr lang="es-ES" sz="1200" b="0" u="none" strike="noStrike">
-              <a:solidFill>
-                <a:schemeClr val="dk2"/>
-              </a:solidFill>
-              <a:effectLst/>
-              <a:uFillTx/>
-              <a:latin typeface="Aptos Light"/>
-            </a:endParaRPr>
-          </a:p>
-          <a:p>
-            <a:pPr marL="914400" lvl="3" indent="-228600" defTabSz="914400">
-              <a:lnSpc>
-                <a:spcPct val="120000"/>
-              </a:lnSpc>
-              <a:spcBef>
-                <a:spcPts val="499"/>
-              </a:spcBef>
-              <a:buClr>
-                <a:srgbClr val="35403a"/>
-              </a:buClr>
-              <a:buFont typeface="Arial"/>
-              <a:buChar char="•"/>
-            </a:pPr>
-            <a:r>
-              <a:rPr lang="en-US" sz="1100" b="0" u="none" strike="noStrike">
-                <a:solidFill>
-                  <a:schemeClr val="dk2"/>
-                </a:solidFill>
-                <a:effectLst/>
-                <a:uFillTx/>
-                <a:latin typeface="Aptos Light"/>
-              </a:rPr>
-              <a:t>Fourth level</a:t>
-            </a:r>
-            <a:endParaRPr lang="es-ES" sz="1100" b="0" u="none" strike="noStrike">
-              <a:solidFill>
-                <a:schemeClr val="dk2"/>
-              </a:solidFill>
-              <a:effectLst/>
-              <a:uFillTx/>
-              <a:latin typeface="Aptos Light"/>
-            </a:endParaRPr>
-          </a:p>
-          <a:p>
-            <a:pPr marL="1143000" lvl="4" indent="-228600" defTabSz="914400">
-              <a:lnSpc>
-                <a:spcPct val="120000"/>
-              </a:lnSpc>
-              <a:spcBef>
-                <a:spcPts val="499"/>
-              </a:spcBef>
-              <a:buClr>
-                <a:srgbClr val="35403a"/>
-              </a:buClr>
-              <a:buFont typeface="Arial"/>
-              <a:buChar char="•"/>
-            </a:pPr>
-            <a:r>
-              <a:rPr lang="en-US" sz="1100" b="0" u="none" strike="noStrike">
-                <a:solidFill>
-                  <a:schemeClr val="dk2"/>
-                </a:solidFill>
-                <a:effectLst/>
-                <a:uFillTx/>
-                <a:latin typeface="Aptos Light"/>
-              </a:rPr>
-              <a:t>Fifth level</a:t>
-            </a:r>
-            <a:endParaRPr lang="es-ES" sz="1100" b="0" u="none" strike="noStrike">
-              <a:solidFill>
-                <a:schemeClr val="dk2"/>
-              </a:solidFill>
-              <a:effectLst/>
-              <a:uFillTx/>
-              <a:latin typeface="Aptos Light"/>
-            </a:endParaRPr>
-          </a:p>
-        </p:txBody>
-      </p:sp>
-      <p:sp>
-        <p:nvSpPr>
-          <p:cNvPr id="36" name="PlaceHolder 4"/>
           <p:cNvSpPr>
             <a:spLocks noGrp="1"/>
           </p:cNvSpPr>
@@ -4537,7 +4573,7 @@
         <p:spPr>
           <a:xfrm>
             <a:off x="877680" y="6356520"/>
-            <a:ext cx="2742840" cy="364680"/>
+            <a:ext cx="2742480" cy="364320"/>
           </a:xfrm>
           <a:prstGeom prst="rect">
             <a:avLst/>
@@ -4557,6 +4593,9 @@
                 <a:spcPct val="100000"/>
               </a:lnSpc>
               <a:buNone/>
+              <a:tabLst>
+                <a:tab algn="l" pos="0"/>
+              </a:tabLst>
               <a:defRPr lang="en-US" sz="800" b="0" u="none" spc="300" strike="noStrike" cap="all">
                 <a:solidFill>
                   <a:schemeClr val="dk2"/>
@@ -4573,6 +4612,9 @@
                 <a:spcPct val="100000"/>
               </a:lnSpc>
               <a:buNone/>
+              <a:tabLst>
+                <a:tab algn="l" pos="0"/>
+              </a:tabLst>
             </a:pPr>
             <a:r>
               <a:rPr lang="en-US" sz="800" b="0" u="none" spc="300" strike="noStrike" cap="all">
@@ -4598,7 +4640,7 @@
       </p:sp>
       <p:sp>
         <p:nvSpPr>
-          <p:cNvPr id="37" name="PlaceHolder 5"/>
+          <p:cNvPr id="36" name="PlaceHolder 4"/>
           <p:cNvSpPr>
             <a:spLocks noGrp="1"/>
           </p:cNvSpPr>
@@ -4609,7 +4651,7 @@
         <p:spPr>
           <a:xfrm>
             <a:off x="7132320" y="6356520"/>
-            <a:ext cx="4297320" cy="364680"/>
+            <a:ext cx="4296960" cy="364320"/>
           </a:xfrm>
           <a:prstGeom prst="rect">
             <a:avLst/>
@@ -4625,7 +4667,13 @@
           </a:bodyPr>
           <a:lstStyle>
             <a:lvl1pPr indent="0" algn="ctr">
-              <a:buNone/>
+              <a:lnSpc>
+                <a:spcPct val="100000"/>
+              </a:lnSpc>
+              <a:buNone/>
+              <a:tabLst>
+                <a:tab algn="l" pos="0"/>
+              </a:tabLst>
               <a:defRPr lang="en-US" sz="800" b="0" u="none" spc="300" strike="noStrike" cap="all">
                 <a:solidFill>
                   <a:schemeClr val="dk2"/>
@@ -4638,7 +4686,13 @@
           </a:lstStyle>
           <a:p>
             <a:pPr indent="0" algn="ctr">
-              <a:buNone/>
+              <a:lnSpc>
+                <a:spcPct val="100000"/>
+              </a:lnSpc>
+              <a:buNone/>
+              <a:tabLst>
+                <a:tab algn="l" pos="0"/>
+              </a:tabLst>
             </a:pPr>
             <a:r>
               <a:rPr lang="en-US" sz="800" b="0" u="none" spc="300" strike="noStrike" cap="all">
@@ -4664,7 +4718,7 @@
       </p:sp>
       <p:sp>
         <p:nvSpPr>
-          <p:cNvPr id="38" name="PlaceHolder 6"/>
+          <p:cNvPr id="37" name="PlaceHolder 5"/>
           <p:cNvSpPr>
             <a:spLocks noGrp="1"/>
           </p:cNvSpPr>
@@ -4675,7 +4729,7 @@
         <p:spPr>
           <a:xfrm>
             <a:off x="11430000" y="6356520"/>
-            <a:ext cx="520920" cy="364680"/>
+            <a:ext cx="520560" cy="364320"/>
           </a:xfrm>
           <a:prstGeom prst="rect">
             <a:avLst/>
@@ -4695,6 +4749,9 @@
                 <a:spcPct val="100000"/>
               </a:lnSpc>
               <a:buNone/>
+              <a:tabLst>
+                <a:tab algn="l" pos="0"/>
+              </a:tabLst>
               <a:defRPr lang="en-US" sz="1400" b="0" u="none" strike="noStrike">
                 <a:solidFill>
                   <a:schemeClr val="dk2"/>
@@ -4711,8 +4768,11 @@
                 <a:spcPct val="100000"/>
               </a:lnSpc>
               <a:buNone/>
-            </a:pPr>
-            <a:fld id="{E41038EF-4B54-4F0E-AD86-31DB4B5F67CB}" type="slidenum">
+              <a:tabLst>
+                <a:tab algn="l" pos="0"/>
+              </a:tabLst>
+            </a:pPr>
+            <a:fld id="{A0A1127A-1FD7-4CA0-A77A-9CD29EECBD04}" type="slidenum">
               <a:rPr lang="en-US" sz="1400" b="0" u="none" strike="noStrike">
                 <a:solidFill>
                   <a:schemeClr val="dk2"/>
@@ -4740,8 +4800,8 @@
 </file>
 
 <file path=ppt/slideLayouts/slideLayout7.xml><?xml version="1.0" encoding="utf-8"?>
-<p:sldLayout xmlns:a="http://schemas.openxmlformats.org/drawingml/2006/main" xmlns:p="http://schemas.openxmlformats.org/presentationml/2006/main" xmlns:r="http://schemas.openxmlformats.org/officeDocument/2006/relationships" xmlns:p14="http://schemas.microsoft.com/office/powerpoint/2010/main" xmlns:p15="http://schemas.microsoft.com/office/powerpoint/2012/main" xmlns:mc="http://schemas.openxmlformats.org/markup-compatibility/2006" type="blank" preserve="1">
-  <p:cSld name="Comparison">
+<p:sldLayout xmlns:a="http://schemas.openxmlformats.org/drawingml/2006/main" xmlns:p="http://schemas.openxmlformats.org/presentationml/2006/main" xmlns:r="http://schemas.openxmlformats.org/officeDocument/2006/relationships" xmlns:p14="http://schemas.microsoft.com/office/powerpoint/2010/main" xmlns:p15="http://schemas.microsoft.com/office/powerpoint/2012/main" xmlns:mc="http://schemas.openxmlformats.org/markup-compatibility/2006" type="obj" preserve="1">
+  <p:cSld name="Title and Content">
     <p:bg>
       <p:bgPr>
         <a:solidFill>
@@ -4765,14 +4825,14 @@
       </p:grpSpPr>
       <p:sp>
         <p:nvSpPr>
-          <p:cNvPr id="39" name="Rectangle 6"/>
+          <p:cNvPr id="38" name="Rectangle 6"/>
           <p:cNvSpPr/>
           <p:nvPr/>
         </p:nvSpPr>
         <p:spPr>
           <a:xfrm>
             <a:off x="0" y="0"/>
-            <a:ext cx="12191760" cy="6859800"/>
+            <a:ext cx="12191400" cy="6859440"/>
           </a:xfrm>
           <a:prstGeom prst="rect">
             <a:avLst/>
@@ -4806,6 +4866,11 @@
             <a:noAutofit/>
           </a:bodyPr>
           <a:p>
+            <a:pPr>
+              <a:lnSpc>
+                <a:spcPct val="100000"/>
+              </a:lnSpc>
+            </a:pPr>
             <a:endParaRPr lang="es-ES" sz="1800" b="0" u="none" strike="noStrike">
               <a:solidFill>
                 <a:srgbClr val="000000"/>
@@ -4819,7 +4884,7 @@
       </p:sp>
       <p:sp>
         <p:nvSpPr>
-          <p:cNvPr id="40" name="PlaceHolder 1"/>
+          <p:cNvPr id="39" name="PlaceHolder 1"/>
           <p:cNvSpPr>
             <a:spLocks noGrp="1"/>
           </p:cNvSpPr>
@@ -4829,8 +4894,8 @@
         </p:nvSpPr>
         <p:spPr>
           <a:xfrm>
-            <a:off x="881280" y="602640"/>
-            <a:ext cx="10428840" cy="768600"/>
+            <a:off x="871200" y="588240"/>
+            <a:ext cx="10449000" cy="1265040"/>
           </a:xfrm>
           <a:prstGeom prst="rect">
             <a:avLst/>
@@ -4850,6 +4915,9 @@
                 <a:spcPct val="100000"/>
               </a:lnSpc>
               <a:buNone/>
+              <a:tabLst>
+                <a:tab algn="l" pos="0"/>
+              </a:tabLst>
             </a:pPr>
             <a:r>
               <a:rPr lang="en-US" sz="3200" b="0" u="none" strike="noStrike">
@@ -4864,18 +4932,18 @@
             </a:r>
             <a:endParaRPr lang="es-ES" sz="3200" b="0" u="none" strike="noStrike">
               <a:solidFill>
-                <a:schemeClr val="dk1"/>
-              </a:solidFill>
-              <a:effectLst/>
-              <a:uFillTx/>
-              <a:latin typeface="Aptos Light"/>
+                <a:srgbClr val="000000"/>
+              </a:solidFill>
+              <a:effectLst/>
+              <a:uFillTx/>
+              <a:latin typeface="Arial"/>
             </a:endParaRPr>
           </a:p>
         </p:txBody>
       </p:sp>
       <p:sp>
         <p:nvSpPr>
-          <p:cNvPr id="41" name="PlaceHolder 2"/>
+          <p:cNvPr id="40" name="PlaceHolder 2"/>
           <p:cNvSpPr>
             <a:spLocks noGrp="1"/>
           </p:cNvSpPr>
@@ -4885,70 +4953,8 @@
         </p:nvSpPr>
         <p:spPr>
           <a:xfrm>
-            <a:off x="881280" y="1696320"/>
-            <a:ext cx="4963320" cy="647280"/>
-          </a:xfrm>
-          <a:prstGeom prst="rect">
-            <a:avLst/>
-          </a:prstGeom>
-          <a:noFill/>
-          <a:ln w="0">
-            <a:noFill/>
-          </a:ln>
-        </p:spPr>
-        <p:txBody>
-          <a:bodyPr lIns="91440" rIns="91440" tIns="45720" bIns="45720" anchor="b">
-            <a:noAutofit/>
-          </a:bodyPr>
-          <a:p>
-            <a:pPr indent="0" defTabSz="914400">
-              <a:lnSpc>
-                <a:spcPct val="120000"/>
-              </a:lnSpc>
-              <a:spcBef>
-                <a:spcPts val="1001"/>
-              </a:spcBef>
-              <a:buNone/>
-              <a:tabLst>
-                <a:tab algn="l" pos="0"/>
-              </a:tabLst>
-            </a:pPr>
-            <a:r>
-              <a:rPr lang="en-US" sz="1400" b="1" u="none" spc="300" strike="noStrike" cap="all">
-                <a:solidFill>
-                  <a:schemeClr val="dk2"/>
-                </a:solidFill>
-                <a:effectLst/>
-                <a:uFillTx/>
-                <a:latin typeface="Aptos Light"/>
-              </a:rPr>
-              <a:t>Click to edit Master text styles</a:t>
-            </a:r>
-            <a:endParaRPr lang="es-ES" sz="1400" b="0" u="none" strike="noStrike">
-              <a:solidFill>
-                <a:schemeClr val="dk2"/>
-              </a:solidFill>
-              <a:effectLst/>
-              <a:uFillTx/>
-              <a:latin typeface="Aptos Light"/>
-            </a:endParaRPr>
-          </a:p>
-        </p:txBody>
-      </p:sp>
-      <p:sp>
-        <p:nvSpPr>
-          <p:cNvPr id="42" name="PlaceHolder 3"/>
-          <p:cNvSpPr>
-            <a:spLocks noGrp="1"/>
-          </p:cNvSpPr>
-          <p:nvPr>
-            <p:ph type="body"/>
-          </p:nvPr>
-        </p:nvSpPr>
-        <p:spPr>
-          <a:xfrm>
-            <a:off x="881280" y="2343960"/>
-            <a:ext cx="4963320" cy="3832920"/>
+            <a:off x="877680" y="2157840"/>
+            <a:ext cx="10441800" cy="3903120"/>
           </a:xfrm>
           <a:prstGeom prst="rect">
             <a:avLst/>
@@ -4989,11 +4995,11 @@
             </a:r>
             <a:endParaRPr lang="es-ES" sz="1600" b="0" u="none" strike="noStrike">
               <a:solidFill>
-                <a:schemeClr val="dk2"/>
-              </a:solidFill>
-              <a:effectLst/>
-              <a:uFillTx/>
-              <a:latin typeface="Aptos Light"/>
+                <a:srgbClr val="000000"/>
+              </a:solidFill>
+              <a:effectLst/>
+              <a:uFillTx/>
+              <a:latin typeface="Arial"/>
             </a:endParaRPr>
           </a:p>
           <a:p>
@@ -5023,11 +5029,11 @@
             </a:r>
             <a:endParaRPr lang="es-ES" sz="1400" b="0" u="none" strike="noStrike">
               <a:solidFill>
-                <a:schemeClr val="dk2"/>
-              </a:solidFill>
-              <a:effectLst/>
-              <a:uFillTx/>
-              <a:latin typeface="Aptos Light"/>
+                <a:srgbClr val="000000"/>
+              </a:solidFill>
+              <a:effectLst/>
+              <a:uFillTx/>
+              <a:latin typeface="Arial"/>
             </a:endParaRPr>
           </a:p>
           <a:p>
@@ -5057,11 +5063,11 @@
             </a:r>
             <a:endParaRPr lang="es-ES" sz="1200" b="0" u="none" strike="noStrike">
               <a:solidFill>
-                <a:schemeClr val="dk2"/>
-              </a:solidFill>
-              <a:effectLst/>
-              <a:uFillTx/>
-              <a:latin typeface="Aptos Light"/>
+                <a:srgbClr val="000000"/>
+              </a:solidFill>
+              <a:effectLst/>
+              <a:uFillTx/>
+              <a:latin typeface="Arial"/>
             </a:endParaRPr>
           </a:p>
           <a:p>
@@ -5091,11 +5097,11 @@
             </a:r>
             <a:endParaRPr lang="es-ES" sz="1100" b="0" u="none" strike="noStrike">
               <a:solidFill>
-                <a:schemeClr val="dk2"/>
-              </a:solidFill>
-              <a:effectLst/>
-              <a:uFillTx/>
-              <a:latin typeface="Aptos Light"/>
+                <a:srgbClr val="000000"/>
+              </a:solidFill>
+              <a:effectLst/>
+              <a:uFillTx/>
+              <a:latin typeface="Arial"/>
             </a:endParaRPr>
           </a:p>
           <a:p>
@@ -5125,279 +5131,18 @@
             </a:r>
             <a:endParaRPr lang="es-ES" sz="1100" b="0" u="none" strike="noStrike">
               <a:solidFill>
-                <a:schemeClr val="dk2"/>
-              </a:solidFill>
-              <a:effectLst/>
-              <a:uFillTx/>
-              <a:latin typeface="Aptos Light"/>
+                <a:srgbClr val="000000"/>
+              </a:solidFill>
+              <a:effectLst/>
+              <a:uFillTx/>
+              <a:latin typeface="Arial"/>
             </a:endParaRPr>
           </a:p>
         </p:txBody>
       </p:sp>
       <p:sp>
         <p:nvSpPr>
-          <p:cNvPr id="43" name="PlaceHolder 4"/>
-          <p:cNvSpPr>
-            <a:spLocks noGrp="1"/>
-          </p:cNvSpPr>
-          <p:nvPr>
-            <p:ph type="body"/>
-          </p:nvPr>
-        </p:nvSpPr>
-        <p:spPr>
-          <a:xfrm>
-            <a:off x="6322680" y="1696320"/>
-            <a:ext cx="4987800" cy="647280"/>
-          </a:xfrm>
-          <a:prstGeom prst="rect">
-            <a:avLst/>
-          </a:prstGeom>
-          <a:noFill/>
-          <a:ln w="0">
-            <a:noFill/>
-          </a:ln>
-        </p:spPr>
-        <p:txBody>
-          <a:bodyPr lIns="91440" rIns="91440" tIns="45720" bIns="45720" anchor="b">
-            <a:noAutofit/>
-          </a:bodyPr>
-          <a:p>
-            <a:pPr indent="0" defTabSz="914400">
-              <a:lnSpc>
-                <a:spcPct val="120000"/>
-              </a:lnSpc>
-              <a:spcBef>
-                <a:spcPts val="1001"/>
-              </a:spcBef>
-              <a:buNone/>
-              <a:tabLst>
-                <a:tab algn="l" pos="0"/>
-              </a:tabLst>
-            </a:pPr>
-            <a:r>
-              <a:rPr lang="en-US" sz="1400" b="1" u="none" spc="300" strike="noStrike" cap="all">
-                <a:solidFill>
-                  <a:schemeClr val="dk2"/>
-                </a:solidFill>
-                <a:effectLst/>
-                <a:uFillTx/>
-                <a:latin typeface="Aptos Light"/>
-              </a:rPr>
-              <a:t>Click to edit Master text styles</a:t>
-            </a:r>
-            <a:endParaRPr lang="es-ES" sz="1400" b="0" u="none" strike="noStrike">
-              <a:solidFill>
-                <a:schemeClr val="dk2"/>
-              </a:solidFill>
-              <a:effectLst/>
-              <a:uFillTx/>
-              <a:latin typeface="Aptos Light"/>
-            </a:endParaRPr>
-          </a:p>
-        </p:txBody>
-      </p:sp>
-      <p:sp>
-        <p:nvSpPr>
-          <p:cNvPr id="44" name="PlaceHolder 5"/>
-          <p:cNvSpPr>
-            <a:spLocks noGrp="1"/>
-          </p:cNvSpPr>
-          <p:nvPr>
-            <p:ph type="body"/>
-          </p:nvPr>
-        </p:nvSpPr>
-        <p:spPr>
-          <a:xfrm>
-            <a:off x="6322680" y="2343960"/>
-            <a:ext cx="4987800" cy="3832920"/>
-          </a:xfrm>
-          <a:prstGeom prst="rect">
-            <a:avLst/>
-          </a:prstGeom>
-          <a:noFill/>
-          <a:ln w="0">
-            <a:noFill/>
-          </a:ln>
-        </p:spPr>
-        <p:txBody>
-          <a:bodyPr lIns="91440" rIns="91440" tIns="45720" bIns="45720" anchor="t">
-            <a:noAutofit/>
-          </a:bodyPr>
-          <a:p>
-            <a:pPr marL="228600" indent="-228600" defTabSz="914400">
-              <a:lnSpc>
-                <a:spcPct val="120000"/>
-              </a:lnSpc>
-              <a:spcBef>
-                <a:spcPts val="1001"/>
-              </a:spcBef>
-              <a:buClr>
-                <a:srgbClr val="35403a"/>
-              </a:buClr>
-              <a:buFont typeface="Arial"/>
-              <a:buChar char="•"/>
-            </a:pPr>
-            <a:r>
-              <a:rPr lang="en-US" sz="1600" b="0" u="none" strike="noStrike">
-                <a:solidFill>
-                  <a:schemeClr val="dk2"/>
-                </a:solidFill>
-                <a:effectLst/>
-                <a:uFillTx/>
-                <a:latin typeface="Aptos Light"/>
-              </a:rPr>
-              <a:t>Click to edit Master text styles</a:t>
-            </a:r>
-            <a:endParaRPr lang="es-ES" sz="1600" b="0" u="none" strike="noStrike">
-              <a:solidFill>
-                <a:schemeClr val="dk2"/>
-              </a:solidFill>
-              <a:effectLst/>
-              <a:uFillTx/>
-              <a:latin typeface="Aptos Light"/>
-            </a:endParaRPr>
-          </a:p>
-          <a:p>
-            <a:pPr marL="457200" lvl="1" indent="-228600" defTabSz="914400">
-              <a:lnSpc>
-                <a:spcPct val="120000"/>
-              </a:lnSpc>
-              <a:spcBef>
-                <a:spcPts val="499"/>
-              </a:spcBef>
-              <a:buClr>
-                <a:srgbClr val="35403a"/>
-              </a:buClr>
-              <a:buFont typeface="Arial"/>
-              <a:buChar char="•"/>
-            </a:pPr>
-            <a:r>
-              <a:rPr lang="en-US" sz="1400" b="0" u="none" strike="noStrike">
-                <a:solidFill>
-                  <a:schemeClr val="dk2"/>
-                </a:solidFill>
-                <a:effectLst/>
-                <a:uFillTx/>
-                <a:latin typeface="Aptos Light"/>
-              </a:rPr>
-              <a:t>Second level</a:t>
-            </a:r>
-            <a:endParaRPr lang="es-ES" sz="1400" b="0" u="none" strike="noStrike">
-              <a:solidFill>
-                <a:schemeClr val="dk2"/>
-              </a:solidFill>
-              <a:effectLst/>
-              <a:uFillTx/>
-              <a:latin typeface="Aptos Light"/>
-            </a:endParaRPr>
-          </a:p>
-          <a:p>
-            <a:pPr marL="685800" lvl="2" indent="-228600" defTabSz="914400">
-              <a:lnSpc>
-                <a:spcPct val="120000"/>
-              </a:lnSpc>
-              <a:spcBef>
-                <a:spcPts val="499"/>
-              </a:spcBef>
-              <a:buClr>
-                <a:srgbClr val="35403a"/>
-              </a:buClr>
-              <a:buFont typeface="Arial"/>
-              <a:buChar char="•"/>
-            </a:pPr>
-            <a:r>
-              <a:rPr lang="en-US" sz="1200" b="0" u="none" strike="noStrike">
-                <a:solidFill>
-                  <a:schemeClr val="dk2"/>
-                </a:solidFill>
-                <a:effectLst/>
-                <a:uFillTx/>
-                <a:latin typeface="Aptos Light"/>
-              </a:rPr>
-              <a:t>Third level</a:t>
-            </a:r>
-            <a:endParaRPr lang="es-ES" sz="1200" b="0" u="none" strike="noStrike">
-              <a:solidFill>
-                <a:schemeClr val="dk2"/>
-              </a:solidFill>
-              <a:effectLst/>
-              <a:uFillTx/>
-              <a:latin typeface="Aptos Light"/>
-            </a:endParaRPr>
-          </a:p>
-          <a:p>
-            <a:pPr marL="914400" lvl="3" indent="-228600" defTabSz="914400">
-              <a:lnSpc>
-                <a:spcPct val="120000"/>
-              </a:lnSpc>
-              <a:spcBef>
-                <a:spcPts val="499"/>
-              </a:spcBef>
-              <a:buClr>
-                <a:srgbClr val="35403a"/>
-              </a:buClr>
-              <a:buFont typeface="Arial"/>
-              <a:buChar char="•"/>
-            </a:pPr>
-            <a:r>
-              <a:rPr lang="en-US" sz="1100" b="0" u="none" strike="noStrike">
-                <a:solidFill>
-                  <a:schemeClr val="dk2"/>
-                </a:solidFill>
-                <a:effectLst/>
-                <a:uFillTx/>
-                <a:latin typeface="Aptos Light"/>
-              </a:rPr>
-              <a:t>Fourth level</a:t>
-            </a:r>
-            <a:endParaRPr lang="es-ES" sz="1100" b="0" u="none" strike="noStrike">
-              <a:solidFill>
-                <a:schemeClr val="dk2"/>
-              </a:solidFill>
-              <a:effectLst/>
-              <a:uFillTx/>
-              <a:latin typeface="Aptos Light"/>
-            </a:endParaRPr>
-          </a:p>
-          <a:p>
-            <a:pPr marL="1143000" lvl="4" indent="-228600" defTabSz="914400">
-              <a:lnSpc>
-                <a:spcPct val="120000"/>
-              </a:lnSpc>
-              <a:spcBef>
-                <a:spcPts val="499"/>
-              </a:spcBef>
-              <a:buClr>
-                <a:srgbClr val="35403a"/>
-              </a:buClr>
-              <a:buFont typeface="Arial"/>
-              <a:buChar char="•"/>
-            </a:pPr>
-            <a:r>
-              <a:rPr lang="en-US" sz="1100" b="0" u="none" strike="noStrike">
-                <a:solidFill>
-                  <a:schemeClr val="dk2"/>
-                </a:solidFill>
-                <a:effectLst/>
-                <a:uFillTx/>
-                <a:latin typeface="Aptos Light"/>
-              </a:rPr>
-              <a:t>Fifth level</a:t>
-            </a:r>
-            <a:endParaRPr lang="es-ES" sz="1100" b="0" u="none" strike="noStrike">
-              <a:solidFill>
-                <a:schemeClr val="dk2"/>
-              </a:solidFill>
-              <a:effectLst/>
-              <a:uFillTx/>
-              <a:latin typeface="Aptos Light"/>
-            </a:endParaRPr>
-          </a:p>
-        </p:txBody>
-      </p:sp>
-      <p:sp>
-        <p:nvSpPr>
-          <p:cNvPr id="45" name="PlaceHolder 6"/>
+          <p:cNvPr id="41" name="PlaceHolder 3"/>
           <p:cNvSpPr>
             <a:spLocks noGrp="1"/>
           </p:cNvSpPr>
@@ -5408,7 +5153,7 @@
         <p:spPr>
           <a:xfrm>
             <a:off x="877680" y="6356520"/>
-            <a:ext cx="2742840" cy="364680"/>
+            <a:ext cx="2742480" cy="364320"/>
           </a:xfrm>
           <a:prstGeom prst="rect">
             <a:avLst/>
@@ -5428,6 +5173,9 @@
                 <a:spcPct val="100000"/>
               </a:lnSpc>
               <a:buNone/>
+              <a:tabLst>
+                <a:tab algn="l" pos="0"/>
+              </a:tabLst>
               <a:defRPr lang="en-US" sz="800" b="0" u="none" spc="300" strike="noStrike" cap="all">
                 <a:solidFill>
                   <a:schemeClr val="dk2"/>
@@ -5444,6 +5192,9 @@
                 <a:spcPct val="100000"/>
               </a:lnSpc>
               <a:buNone/>
+              <a:tabLst>
+                <a:tab algn="l" pos="0"/>
+              </a:tabLst>
             </a:pPr>
             <a:r>
               <a:rPr lang="en-US" sz="800" b="0" u="none" spc="300" strike="noStrike" cap="all">
@@ -5469,7 +5220,7 @@
       </p:sp>
       <p:sp>
         <p:nvSpPr>
-          <p:cNvPr id="46" name="PlaceHolder 7"/>
+          <p:cNvPr id="42" name="PlaceHolder 4"/>
           <p:cNvSpPr>
             <a:spLocks noGrp="1"/>
           </p:cNvSpPr>
@@ -5480,7 +5231,7 @@
         <p:spPr>
           <a:xfrm>
             <a:off x="7132320" y="6356520"/>
-            <a:ext cx="4297320" cy="364680"/>
+            <a:ext cx="4296960" cy="364320"/>
           </a:xfrm>
           <a:prstGeom prst="rect">
             <a:avLst/>
@@ -5496,7 +5247,13 @@
           </a:bodyPr>
           <a:lstStyle>
             <a:lvl1pPr indent="0" algn="ctr">
-              <a:buNone/>
+              <a:lnSpc>
+                <a:spcPct val="100000"/>
+              </a:lnSpc>
+              <a:buNone/>
+              <a:tabLst>
+                <a:tab algn="l" pos="0"/>
+              </a:tabLst>
               <a:defRPr lang="en-US" sz="800" b="0" u="none" spc="300" strike="noStrike" cap="all">
                 <a:solidFill>
                   <a:schemeClr val="dk2"/>
@@ -5509,7 +5266,13 @@
           </a:lstStyle>
           <a:p>
             <a:pPr indent="0" algn="ctr">
-              <a:buNone/>
+              <a:lnSpc>
+                <a:spcPct val="100000"/>
+              </a:lnSpc>
+              <a:buNone/>
+              <a:tabLst>
+                <a:tab algn="l" pos="0"/>
+              </a:tabLst>
             </a:pPr>
             <a:r>
               <a:rPr lang="en-US" sz="800" b="0" u="none" spc="300" strike="noStrike" cap="all">
@@ -5535,7 +5298,7 @@
       </p:sp>
       <p:sp>
         <p:nvSpPr>
-          <p:cNvPr id="47" name="PlaceHolder 8"/>
+          <p:cNvPr id="43" name="PlaceHolder 5"/>
           <p:cNvSpPr>
             <a:spLocks noGrp="1"/>
           </p:cNvSpPr>
@@ -5546,7 +5309,7 @@
         <p:spPr>
           <a:xfrm>
             <a:off x="11430000" y="6356520"/>
-            <a:ext cx="520920" cy="364680"/>
+            <a:ext cx="520560" cy="364320"/>
           </a:xfrm>
           <a:prstGeom prst="rect">
             <a:avLst/>
@@ -5566,6 +5329,9 @@
                 <a:spcPct val="100000"/>
               </a:lnSpc>
               <a:buNone/>
+              <a:tabLst>
+                <a:tab algn="l" pos="0"/>
+              </a:tabLst>
               <a:defRPr lang="en-US" sz="1400" b="0" u="none" strike="noStrike">
                 <a:solidFill>
                   <a:schemeClr val="dk2"/>
@@ -5582,8 +5348,11 @@
                 <a:spcPct val="100000"/>
               </a:lnSpc>
               <a:buNone/>
-            </a:pPr>
-            <a:fld id="{E0C30B06-DA4E-41EB-B818-2A13BAE254EA}" type="slidenum">
+              <a:tabLst>
+                <a:tab algn="l" pos="0"/>
+              </a:tabLst>
+            </a:pPr>
+            <a:fld id="{D1E0DE1F-A32D-4015-BD8D-6DCCB0B1BA25}" type="slidenum">
               <a:rPr lang="en-US" sz="1400" b="0" u="none" strike="noStrike">
                 <a:solidFill>
                   <a:schemeClr val="dk2"/>
@@ -5611,8 +5380,8 @@
 </file>
 
 <file path=ppt/slideLayouts/slideLayout8.xml><?xml version="1.0" encoding="utf-8"?>
-<p:sldLayout xmlns:a="http://schemas.openxmlformats.org/drawingml/2006/main" xmlns:p="http://schemas.openxmlformats.org/presentationml/2006/main" xmlns:r="http://schemas.openxmlformats.org/officeDocument/2006/relationships" xmlns:p14="http://schemas.microsoft.com/office/powerpoint/2010/main" xmlns:p15="http://schemas.microsoft.com/office/powerpoint/2012/main" xmlns:mc="http://schemas.openxmlformats.org/markup-compatibility/2006" type="titleOnly" preserve="1">
-  <p:cSld name="Title Only">
+<p:sldLayout xmlns:a="http://schemas.openxmlformats.org/drawingml/2006/main" xmlns:p="http://schemas.openxmlformats.org/presentationml/2006/main" xmlns:r="http://schemas.openxmlformats.org/officeDocument/2006/relationships" xmlns:p14="http://schemas.microsoft.com/office/powerpoint/2010/main" xmlns:p15="http://schemas.microsoft.com/office/powerpoint/2012/main" xmlns:mc="http://schemas.openxmlformats.org/markup-compatibility/2006" type="blank" preserve="1">
+  <p:cSld name="Section Header">
     <p:bg>
       <p:bgPr>
         <a:solidFill>
@@ -5636,14 +5405,14 @@
       </p:grpSpPr>
       <p:sp>
         <p:nvSpPr>
-          <p:cNvPr id="48" name="Rectangle 6"/>
+          <p:cNvPr id="44" name="Rectangle 6"/>
           <p:cNvSpPr/>
           <p:nvPr/>
         </p:nvSpPr>
         <p:spPr>
           <a:xfrm>
             <a:off x="0" y="0"/>
-            <a:ext cx="12191760" cy="6859800"/>
+            <a:ext cx="12191400" cy="6859440"/>
           </a:xfrm>
           <a:prstGeom prst="rect">
             <a:avLst/>
@@ -5677,6 +5446,11 @@
             <a:noAutofit/>
           </a:bodyPr>
           <a:p>
+            <a:pPr>
+              <a:lnSpc>
+                <a:spcPct val="100000"/>
+              </a:lnSpc>
+            </a:pPr>
             <a:endParaRPr lang="es-ES" sz="1800" b="0" u="none" strike="noStrike">
               <a:solidFill>
                 <a:srgbClr val="000000"/>
@@ -5690,7 +5464,7 @@
       </p:sp>
       <p:sp>
         <p:nvSpPr>
-          <p:cNvPr id="49" name="PlaceHolder 1"/>
+          <p:cNvPr id="45" name="PlaceHolder 1"/>
           <p:cNvSpPr>
             <a:spLocks noGrp="1"/>
           </p:cNvSpPr>
@@ -5700,8 +5474,8 @@
         </p:nvSpPr>
         <p:spPr>
           <a:xfrm>
-            <a:off x="871200" y="588240"/>
-            <a:ext cx="10449360" cy="1265400"/>
+            <a:off x="1474200" y="1514520"/>
+            <a:ext cx="8583480" cy="3138120"/>
           </a:xfrm>
           <a:prstGeom prst="rect">
             <a:avLst/>
@@ -5713,7 +5487,7 @@
         </p:spPr>
         <p:txBody>
           <a:bodyPr lIns="91440" rIns="91440" tIns="45720" bIns="45720" anchor="b">
-            <a:noAutofit/>
+            <a:normAutofit/>
           </a:bodyPr>
           <a:p>
             <a:pPr indent="0" defTabSz="914400">
@@ -5721,9 +5495,12 @@
                 <a:spcPct val="100000"/>
               </a:lnSpc>
               <a:buNone/>
-            </a:pPr>
-            <a:r>
-              <a:rPr lang="en-US" sz="3200" b="0" u="none" strike="noStrike">
+              <a:tabLst>
+                <a:tab algn="l" pos="0"/>
+              </a:tabLst>
+            </a:pPr>
+            <a:r>
+              <a:rPr lang="en-US" sz="3600" b="0" u="none" spc="300" strike="noStrike" cap="all">
                 <a:solidFill>
                   <a:schemeClr val="dk2"/>
                 </a:solidFill>
@@ -5733,20 +5510,82 @@
               </a:rPr>
               <a:t>Click to edit Master title style</a:t>
             </a:r>
-            <a:endParaRPr lang="es-ES" sz="3200" b="0" u="none" strike="noStrike">
-              <a:solidFill>
-                <a:schemeClr val="dk1"/>
-              </a:solidFill>
-              <a:effectLst/>
-              <a:uFillTx/>
-              <a:latin typeface="Aptos Light"/>
+            <a:endParaRPr lang="es-ES" sz="3600" b="0" u="none" strike="noStrike">
+              <a:solidFill>
+                <a:srgbClr val="000000"/>
+              </a:solidFill>
+              <a:effectLst/>
+              <a:uFillTx/>
+              <a:latin typeface="Arial"/>
             </a:endParaRPr>
           </a:p>
         </p:txBody>
       </p:sp>
       <p:sp>
         <p:nvSpPr>
-          <p:cNvPr id="50" name="PlaceHolder 2"/>
+          <p:cNvPr id="46" name="PlaceHolder 2"/>
+          <p:cNvSpPr>
+            <a:spLocks noGrp="1"/>
+          </p:cNvSpPr>
+          <p:nvPr>
+            <p:ph type="body"/>
+          </p:nvPr>
+        </p:nvSpPr>
+        <p:spPr>
+          <a:xfrm>
+            <a:off x="1474200" y="4964040"/>
+            <a:ext cx="8583480" cy="1125000"/>
+          </a:xfrm>
+          <a:prstGeom prst="rect">
+            <a:avLst/>
+          </a:prstGeom>
+          <a:noFill/>
+          <a:ln w="0">
+            <a:noFill/>
+          </a:ln>
+        </p:spPr>
+        <p:txBody>
+          <a:bodyPr lIns="91440" rIns="91440" tIns="45720" bIns="45720" anchor="t">
+            <a:normAutofit/>
+          </a:bodyPr>
+          <a:p>
+            <a:pPr indent="0" defTabSz="914400">
+              <a:lnSpc>
+                <a:spcPct val="120000"/>
+              </a:lnSpc>
+              <a:spcBef>
+                <a:spcPts val="1001"/>
+              </a:spcBef>
+              <a:buNone/>
+              <a:tabLst>
+                <a:tab algn="l" pos="0"/>
+              </a:tabLst>
+            </a:pPr>
+            <a:r>
+              <a:rPr lang="en-US" sz="1600" b="0" u="none" spc="300" strike="noStrike" cap="all">
+                <a:solidFill>
+                  <a:schemeClr val="dk2"/>
+                </a:solidFill>
+                <a:effectLst/>
+                <a:uFillTx/>
+                <a:latin typeface="Aptos Light"/>
+              </a:rPr>
+              <a:t>Click to edit Master text styles</a:t>
+            </a:r>
+            <a:endParaRPr lang="es-ES" sz="1600" b="0" u="none" strike="noStrike">
+              <a:solidFill>
+                <a:srgbClr val="000000"/>
+              </a:solidFill>
+              <a:effectLst/>
+              <a:uFillTx/>
+              <a:latin typeface="Arial"/>
+            </a:endParaRPr>
+          </a:p>
+        </p:txBody>
+      </p:sp>
+      <p:sp>
+        <p:nvSpPr>
+          <p:cNvPr id="47" name="PlaceHolder 3"/>
           <p:cNvSpPr>
             <a:spLocks noGrp="1"/>
           </p:cNvSpPr>
@@ -5757,7 +5596,7 @@
         <p:spPr>
           <a:xfrm>
             <a:off x="877680" y="6356520"/>
-            <a:ext cx="2742840" cy="364680"/>
+            <a:ext cx="2742480" cy="364320"/>
           </a:xfrm>
           <a:prstGeom prst="rect">
             <a:avLst/>
@@ -5777,6 +5616,9 @@
                 <a:spcPct val="100000"/>
               </a:lnSpc>
               <a:buNone/>
+              <a:tabLst>
+                <a:tab algn="l" pos="0"/>
+              </a:tabLst>
               <a:defRPr lang="en-US" sz="800" b="0" u="none" spc="300" strike="noStrike" cap="all">
                 <a:solidFill>
                   <a:schemeClr val="dk2"/>
@@ -5793,6 +5635,9 @@
                 <a:spcPct val="100000"/>
               </a:lnSpc>
               <a:buNone/>
+              <a:tabLst>
+                <a:tab algn="l" pos="0"/>
+              </a:tabLst>
             </a:pPr>
             <a:r>
               <a:rPr lang="en-US" sz="800" b="0" u="none" spc="300" strike="noStrike" cap="all">
@@ -5818,7 +5663,7 @@
       </p:sp>
       <p:sp>
         <p:nvSpPr>
-          <p:cNvPr id="51" name="PlaceHolder 3"/>
+          <p:cNvPr id="48" name="PlaceHolder 4"/>
           <p:cNvSpPr>
             <a:spLocks noGrp="1"/>
           </p:cNvSpPr>
@@ -5829,7 +5674,7 @@
         <p:spPr>
           <a:xfrm>
             <a:off x="7132320" y="6356520"/>
-            <a:ext cx="4297320" cy="364680"/>
+            <a:ext cx="4296960" cy="364320"/>
           </a:xfrm>
           <a:prstGeom prst="rect">
             <a:avLst/>
@@ -5845,7 +5690,13 @@
           </a:bodyPr>
           <a:lstStyle>
             <a:lvl1pPr indent="0" algn="ctr">
-              <a:buNone/>
+              <a:lnSpc>
+                <a:spcPct val="100000"/>
+              </a:lnSpc>
+              <a:buNone/>
+              <a:tabLst>
+                <a:tab algn="l" pos="0"/>
+              </a:tabLst>
               <a:defRPr lang="en-US" sz="800" b="0" u="none" spc="300" strike="noStrike" cap="all">
                 <a:solidFill>
                   <a:schemeClr val="dk2"/>
@@ -5858,7 +5709,13 @@
           </a:lstStyle>
           <a:p>
             <a:pPr indent="0" algn="ctr">
-              <a:buNone/>
+              <a:lnSpc>
+                <a:spcPct val="100000"/>
+              </a:lnSpc>
+              <a:buNone/>
+              <a:tabLst>
+                <a:tab algn="l" pos="0"/>
+              </a:tabLst>
             </a:pPr>
             <a:r>
               <a:rPr lang="en-US" sz="800" b="0" u="none" spc="300" strike="noStrike" cap="all">
@@ -5884,7 +5741,7 @@
       </p:sp>
       <p:sp>
         <p:nvSpPr>
-          <p:cNvPr id="52" name="PlaceHolder 4"/>
+          <p:cNvPr id="49" name="PlaceHolder 5"/>
           <p:cNvSpPr>
             <a:spLocks noGrp="1"/>
           </p:cNvSpPr>
@@ -5895,7 +5752,7 @@
         <p:spPr>
           <a:xfrm>
             <a:off x="11430000" y="6356520"/>
-            <a:ext cx="520920" cy="364680"/>
+            <a:ext cx="520560" cy="364320"/>
           </a:xfrm>
           <a:prstGeom prst="rect">
             <a:avLst/>
@@ -5915,6 +5772,9 @@
                 <a:spcPct val="100000"/>
               </a:lnSpc>
               <a:buNone/>
+              <a:tabLst>
+                <a:tab algn="l" pos="0"/>
+              </a:tabLst>
               <a:defRPr lang="en-US" sz="1400" b="0" u="none" strike="noStrike">
                 <a:solidFill>
                   <a:schemeClr val="dk2"/>
@@ -5931,8 +5791,11 @@
                 <a:spcPct val="100000"/>
               </a:lnSpc>
               <a:buNone/>
-            </a:pPr>
-            <a:fld id="{0273A7A3-0FFF-42A1-BCA1-3A21ABC6064D}" type="slidenum">
+              <a:tabLst>
+                <a:tab algn="l" pos="0"/>
+              </a:tabLst>
+            </a:pPr>
+            <a:fld id="{3BE9EFF3-1C1F-4FE8-BCC3-38C7F5453A45}" type="slidenum">
               <a:rPr lang="en-US" sz="1400" b="0" u="none" strike="noStrike">
                 <a:solidFill>
                   <a:schemeClr val="dk2"/>
@@ -5960,8 +5823,8 @@
 </file>
 
 <file path=ppt/slideLayouts/slideLayout9.xml><?xml version="1.0" encoding="utf-8"?>
-<p:sldLayout xmlns:a="http://schemas.openxmlformats.org/drawingml/2006/main" xmlns:p="http://schemas.openxmlformats.org/presentationml/2006/main" xmlns:r="http://schemas.openxmlformats.org/officeDocument/2006/relationships" xmlns:p14="http://schemas.microsoft.com/office/powerpoint/2010/main" xmlns:p15="http://schemas.microsoft.com/office/powerpoint/2012/main" xmlns:mc="http://schemas.openxmlformats.org/markup-compatibility/2006" type="blank" preserve="1">
-  <p:cSld name="Blank">
+<p:sldLayout xmlns:a="http://schemas.openxmlformats.org/drawingml/2006/main" xmlns:p="http://schemas.openxmlformats.org/presentationml/2006/main" xmlns:r="http://schemas.openxmlformats.org/officeDocument/2006/relationships" xmlns:p14="http://schemas.microsoft.com/office/powerpoint/2010/main" xmlns:p15="http://schemas.microsoft.com/office/powerpoint/2012/main" xmlns:mc="http://schemas.openxmlformats.org/markup-compatibility/2006" type="twoObj" preserve="1">
+  <p:cSld name="Two Content">
     <p:bg>
       <p:bgPr>
         <a:solidFill>
@@ -5985,14 +5848,14 @@
       </p:grpSpPr>
       <p:sp>
         <p:nvSpPr>
-          <p:cNvPr id="53" name="Rectangle 6"/>
+          <p:cNvPr id="50" name="Rectangle 6"/>
           <p:cNvSpPr/>
           <p:nvPr/>
         </p:nvSpPr>
         <p:spPr>
           <a:xfrm>
             <a:off x="0" y="0"/>
-            <a:ext cx="12191760" cy="6859800"/>
+            <a:ext cx="12191400" cy="6859440"/>
           </a:xfrm>
           <a:prstGeom prst="rect">
             <a:avLst/>
@@ -6026,6 +5889,11 @@
             <a:noAutofit/>
           </a:bodyPr>
           <a:p>
+            <a:pPr>
+              <a:lnSpc>
+                <a:spcPct val="100000"/>
+              </a:lnSpc>
+            </a:pPr>
             <a:endParaRPr lang="es-ES" sz="1800" b="0" u="none" strike="noStrike">
               <a:solidFill>
                 <a:srgbClr val="000000"/>
@@ -6039,7 +5907,464 @@
       </p:sp>
       <p:sp>
         <p:nvSpPr>
-          <p:cNvPr id="54" name="PlaceHolder 1"/>
+          <p:cNvPr id="51" name="PlaceHolder 1"/>
+          <p:cNvSpPr>
+            <a:spLocks noGrp="1"/>
+          </p:cNvSpPr>
+          <p:nvPr>
+            <p:ph type="title"/>
+          </p:nvPr>
+        </p:nvSpPr>
+        <p:spPr>
+          <a:xfrm>
+            <a:off x="871200" y="588240"/>
+            <a:ext cx="10449000" cy="1265040"/>
+          </a:xfrm>
+          <a:prstGeom prst="rect">
+            <a:avLst/>
+          </a:prstGeom>
+          <a:noFill/>
+          <a:ln w="0">
+            <a:noFill/>
+          </a:ln>
+        </p:spPr>
+        <p:txBody>
+          <a:bodyPr lIns="91440" rIns="91440" tIns="45720" bIns="45720" anchor="b">
+            <a:noAutofit/>
+          </a:bodyPr>
+          <a:p>
+            <a:pPr indent="0" defTabSz="914400">
+              <a:lnSpc>
+                <a:spcPct val="100000"/>
+              </a:lnSpc>
+              <a:buNone/>
+              <a:tabLst>
+                <a:tab algn="l" pos="0"/>
+              </a:tabLst>
+            </a:pPr>
+            <a:r>
+              <a:rPr lang="en-US" sz="3200" b="0" u="none" strike="noStrike">
+                <a:solidFill>
+                  <a:schemeClr val="dk2"/>
+                </a:solidFill>
+                <a:effectLst/>
+                <a:uFillTx/>
+                <a:latin typeface="Walbaum Display"/>
+              </a:rPr>
+              <a:t>Click to edit Master title style</a:t>
+            </a:r>
+            <a:endParaRPr lang="es-ES" sz="3200" b="0" u="none" strike="noStrike">
+              <a:solidFill>
+                <a:srgbClr val="000000"/>
+              </a:solidFill>
+              <a:effectLst/>
+              <a:uFillTx/>
+              <a:latin typeface="Arial"/>
+            </a:endParaRPr>
+          </a:p>
+        </p:txBody>
+      </p:sp>
+      <p:sp>
+        <p:nvSpPr>
+          <p:cNvPr id="52" name="PlaceHolder 2"/>
+          <p:cNvSpPr>
+            <a:spLocks noGrp="1"/>
+          </p:cNvSpPr>
+          <p:nvPr>
+            <p:ph type="body"/>
+          </p:nvPr>
+        </p:nvSpPr>
+        <p:spPr>
+          <a:xfrm>
+            <a:off x="877680" y="2159280"/>
+            <a:ext cx="4976640" cy="4017240"/>
+          </a:xfrm>
+          <a:prstGeom prst="rect">
+            <a:avLst/>
+          </a:prstGeom>
+          <a:noFill/>
+          <a:ln w="0">
+            <a:noFill/>
+          </a:ln>
+        </p:spPr>
+        <p:txBody>
+          <a:bodyPr lIns="91440" rIns="91440" tIns="45720" bIns="45720" anchor="t">
+            <a:noAutofit/>
+          </a:bodyPr>
+          <a:p>
+            <a:pPr marL="228600" indent="-228600" defTabSz="914400">
+              <a:lnSpc>
+                <a:spcPct val="120000"/>
+              </a:lnSpc>
+              <a:spcBef>
+                <a:spcPts val="1001"/>
+              </a:spcBef>
+              <a:buClr>
+                <a:srgbClr val="35403a"/>
+              </a:buClr>
+              <a:buFont typeface="Arial"/>
+              <a:buChar char="•"/>
+            </a:pPr>
+            <a:r>
+              <a:rPr lang="en-US" sz="1600" b="0" u="none" strike="noStrike">
+                <a:solidFill>
+                  <a:schemeClr val="dk2"/>
+                </a:solidFill>
+                <a:effectLst/>
+                <a:uFillTx/>
+                <a:latin typeface="Aptos Light"/>
+              </a:rPr>
+              <a:t>Click to edit Master text styles</a:t>
+            </a:r>
+            <a:endParaRPr lang="es-ES" sz="1600" b="0" u="none" strike="noStrike">
+              <a:solidFill>
+                <a:srgbClr val="000000"/>
+              </a:solidFill>
+              <a:effectLst/>
+              <a:uFillTx/>
+              <a:latin typeface="Arial"/>
+            </a:endParaRPr>
+          </a:p>
+          <a:p>
+            <a:pPr marL="457200" lvl="1" indent="-228600" defTabSz="914400">
+              <a:lnSpc>
+                <a:spcPct val="120000"/>
+              </a:lnSpc>
+              <a:spcBef>
+                <a:spcPts val="499"/>
+              </a:spcBef>
+              <a:buClr>
+                <a:srgbClr val="35403a"/>
+              </a:buClr>
+              <a:buFont typeface="Arial"/>
+              <a:buChar char="•"/>
+            </a:pPr>
+            <a:r>
+              <a:rPr lang="en-US" sz="1400" b="0" u="none" strike="noStrike">
+                <a:solidFill>
+                  <a:schemeClr val="dk2"/>
+                </a:solidFill>
+                <a:effectLst/>
+                <a:uFillTx/>
+                <a:latin typeface="Aptos Light"/>
+              </a:rPr>
+              <a:t>Second level</a:t>
+            </a:r>
+            <a:endParaRPr lang="es-ES" sz="1400" b="0" u="none" strike="noStrike">
+              <a:solidFill>
+                <a:srgbClr val="000000"/>
+              </a:solidFill>
+              <a:effectLst/>
+              <a:uFillTx/>
+              <a:latin typeface="Arial"/>
+            </a:endParaRPr>
+          </a:p>
+          <a:p>
+            <a:pPr marL="685800" lvl="2" indent="-228600" defTabSz="914400">
+              <a:lnSpc>
+                <a:spcPct val="120000"/>
+              </a:lnSpc>
+              <a:spcBef>
+                <a:spcPts val="499"/>
+              </a:spcBef>
+              <a:buClr>
+                <a:srgbClr val="35403a"/>
+              </a:buClr>
+              <a:buFont typeface="Arial"/>
+              <a:buChar char="•"/>
+            </a:pPr>
+            <a:r>
+              <a:rPr lang="en-US" sz="1200" b="0" u="none" strike="noStrike">
+                <a:solidFill>
+                  <a:schemeClr val="dk2"/>
+                </a:solidFill>
+                <a:effectLst/>
+                <a:uFillTx/>
+                <a:latin typeface="Aptos Light"/>
+              </a:rPr>
+              <a:t>Third level</a:t>
+            </a:r>
+            <a:endParaRPr lang="es-ES" sz="1200" b="0" u="none" strike="noStrike">
+              <a:solidFill>
+                <a:srgbClr val="000000"/>
+              </a:solidFill>
+              <a:effectLst/>
+              <a:uFillTx/>
+              <a:latin typeface="Arial"/>
+            </a:endParaRPr>
+          </a:p>
+          <a:p>
+            <a:pPr marL="914400" lvl="3" indent="-228600" defTabSz="914400">
+              <a:lnSpc>
+                <a:spcPct val="120000"/>
+              </a:lnSpc>
+              <a:spcBef>
+                <a:spcPts val="499"/>
+              </a:spcBef>
+              <a:buClr>
+                <a:srgbClr val="35403a"/>
+              </a:buClr>
+              <a:buFont typeface="Arial"/>
+              <a:buChar char="•"/>
+            </a:pPr>
+            <a:r>
+              <a:rPr lang="en-US" sz="1100" b="0" u="none" strike="noStrike">
+                <a:solidFill>
+                  <a:schemeClr val="dk2"/>
+                </a:solidFill>
+                <a:effectLst/>
+                <a:uFillTx/>
+                <a:latin typeface="Aptos Light"/>
+              </a:rPr>
+              <a:t>Fourth level</a:t>
+            </a:r>
+            <a:endParaRPr lang="es-ES" sz="1100" b="0" u="none" strike="noStrike">
+              <a:solidFill>
+                <a:srgbClr val="000000"/>
+              </a:solidFill>
+              <a:effectLst/>
+              <a:uFillTx/>
+              <a:latin typeface="Arial"/>
+            </a:endParaRPr>
+          </a:p>
+          <a:p>
+            <a:pPr marL="1143000" lvl="4" indent="-228600" defTabSz="914400">
+              <a:lnSpc>
+                <a:spcPct val="120000"/>
+              </a:lnSpc>
+              <a:spcBef>
+                <a:spcPts val="499"/>
+              </a:spcBef>
+              <a:buClr>
+                <a:srgbClr val="35403a"/>
+              </a:buClr>
+              <a:buFont typeface="Arial"/>
+              <a:buChar char="•"/>
+            </a:pPr>
+            <a:r>
+              <a:rPr lang="en-US" sz="1100" b="0" u="none" strike="noStrike">
+                <a:solidFill>
+                  <a:schemeClr val="dk2"/>
+                </a:solidFill>
+                <a:effectLst/>
+                <a:uFillTx/>
+                <a:latin typeface="Aptos Light"/>
+              </a:rPr>
+              <a:t>Fifth level</a:t>
+            </a:r>
+            <a:endParaRPr lang="es-ES" sz="1100" b="0" u="none" strike="noStrike">
+              <a:solidFill>
+                <a:srgbClr val="000000"/>
+              </a:solidFill>
+              <a:effectLst/>
+              <a:uFillTx/>
+              <a:latin typeface="Arial"/>
+            </a:endParaRPr>
+          </a:p>
+        </p:txBody>
+      </p:sp>
+      <p:sp>
+        <p:nvSpPr>
+          <p:cNvPr id="53" name="PlaceHolder 3"/>
+          <p:cNvSpPr>
+            <a:spLocks noGrp="1"/>
+          </p:cNvSpPr>
+          <p:nvPr>
+            <p:ph type="body"/>
+          </p:nvPr>
+        </p:nvSpPr>
+        <p:spPr>
+          <a:xfrm>
+            <a:off x="6328440" y="2159280"/>
+            <a:ext cx="4984920" cy="4017240"/>
+          </a:xfrm>
+          <a:prstGeom prst="rect">
+            <a:avLst/>
+          </a:prstGeom>
+          <a:noFill/>
+          <a:ln w="0">
+            <a:noFill/>
+          </a:ln>
+        </p:spPr>
+        <p:txBody>
+          <a:bodyPr lIns="91440" rIns="91440" tIns="45720" bIns="45720" anchor="t">
+            <a:noAutofit/>
+          </a:bodyPr>
+          <a:p>
+            <a:pPr marL="228600" indent="-228600" defTabSz="914400">
+              <a:lnSpc>
+                <a:spcPct val="120000"/>
+              </a:lnSpc>
+              <a:spcBef>
+                <a:spcPts val="1001"/>
+              </a:spcBef>
+              <a:buClr>
+                <a:srgbClr val="35403a"/>
+              </a:buClr>
+              <a:buFont typeface="Arial"/>
+              <a:buChar char="•"/>
+            </a:pPr>
+            <a:r>
+              <a:rPr lang="en-US" sz="1600" b="0" u="none" strike="noStrike">
+                <a:solidFill>
+                  <a:schemeClr val="dk2"/>
+                </a:solidFill>
+                <a:effectLst/>
+                <a:uFillTx/>
+                <a:latin typeface="Aptos Light"/>
+              </a:rPr>
+              <a:t>Click to edit Master text styles</a:t>
+            </a:r>
+            <a:endParaRPr lang="es-ES" sz="1600" b="0" u="none" strike="noStrike">
+              <a:solidFill>
+                <a:srgbClr val="000000"/>
+              </a:solidFill>
+              <a:effectLst/>
+              <a:uFillTx/>
+              <a:latin typeface="Arial"/>
+            </a:endParaRPr>
+          </a:p>
+          <a:p>
+            <a:pPr marL="457200" lvl="1" indent="-228600" defTabSz="914400">
+              <a:lnSpc>
+                <a:spcPct val="120000"/>
+              </a:lnSpc>
+              <a:spcBef>
+                <a:spcPts val="499"/>
+              </a:spcBef>
+              <a:buClr>
+                <a:srgbClr val="35403a"/>
+              </a:buClr>
+              <a:buFont typeface="Arial"/>
+              <a:buChar char="•"/>
+            </a:pPr>
+            <a:r>
+              <a:rPr lang="en-US" sz="1400" b="0" u="none" strike="noStrike">
+                <a:solidFill>
+                  <a:schemeClr val="dk2"/>
+                </a:solidFill>
+                <a:effectLst/>
+                <a:uFillTx/>
+                <a:latin typeface="Aptos Light"/>
+              </a:rPr>
+              <a:t>Second level</a:t>
+            </a:r>
+            <a:endParaRPr lang="es-ES" sz="1400" b="0" u="none" strike="noStrike">
+              <a:solidFill>
+                <a:srgbClr val="000000"/>
+              </a:solidFill>
+              <a:effectLst/>
+              <a:uFillTx/>
+              <a:latin typeface="Arial"/>
+            </a:endParaRPr>
+          </a:p>
+          <a:p>
+            <a:pPr marL="685800" lvl="2" indent="-228600" defTabSz="914400">
+              <a:lnSpc>
+                <a:spcPct val="120000"/>
+              </a:lnSpc>
+              <a:spcBef>
+                <a:spcPts val="499"/>
+              </a:spcBef>
+              <a:buClr>
+                <a:srgbClr val="35403a"/>
+              </a:buClr>
+              <a:buFont typeface="Arial"/>
+              <a:buChar char="•"/>
+            </a:pPr>
+            <a:r>
+              <a:rPr lang="en-US" sz="1200" b="0" u="none" strike="noStrike">
+                <a:solidFill>
+                  <a:schemeClr val="dk2"/>
+                </a:solidFill>
+                <a:effectLst/>
+                <a:uFillTx/>
+                <a:latin typeface="Aptos Light"/>
+              </a:rPr>
+              <a:t>Third level</a:t>
+            </a:r>
+            <a:endParaRPr lang="es-ES" sz="1200" b="0" u="none" strike="noStrike">
+              <a:solidFill>
+                <a:srgbClr val="000000"/>
+              </a:solidFill>
+              <a:effectLst/>
+              <a:uFillTx/>
+              <a:latin typeface="Arial"/>
+            </a:endParaRPr>
+          </a:p>
+          <a:p>
+            <a:pPr marL="914400" lvl="3" indent="-228600" defTabSz="914400">
+              <a:lnSpc>
+                <a:spcPct val="120000"/>
+              </a:lnSpc>
+              <a:spcBef>
+                <a:spcPts val="499"/>
+              </a:spcBef>
+              <a:buClr>
+                <a:srgbClr val="35403a"/>
+              </a:buClr>
+              <a:buFont typeface="Arial"/>
+              <a:buChar char="•"/>
+            </a:pPr>
+            <a:r>
+              <a:rPr lang="en-US" sz="1100" b="0" u="none" strike="noStrike">
+                <a:solidFill>
+                  <a:schemeClr val="dk2"/>
+                </a:solidFill>
+                <a:effectLst/>
+                <a:uFillTx/>
+                <a:latin typeface="Aptos Light"/>
+              </a:rPr>
+              <a:t>Fourth level</a:t>
+            </a:r>
+            <a:endParaRPr lang="es-ES" sz="1100" b="0" u="none" strike="noStrike">
+              <a:solidFill>
+                <a:srgbClr val="000000"/>
+              </a:solidFill>
+              <a:effectLst/>
+              <a:uFillTx/>
+              <a:latin typeface="Arial"/>
+            </a:endParaRPr>
+          </a:p>
+          <a:p>
+            <a:pPr marL="1143000" lvl="4" indent="-228600" defTabSz="914400">
+              <a:lnSpc>
+                <a:spcPct val="120000"/>
+              </a:lnSpc>
+              <a:spcBef>
+                <a:spcPts val="499"/>
+              </a:spcBef>
+              <a:buClr>
+                <a:srgbClr val="35403a"/>
+              </a:buClr>
+              <a:buFont typeface="Arial"/>
+              <a:buChar char="•"/>
+            </a:pPr>
+            <a:r>
+              <a:rPr lang="en-US" sz="1100" b="0" u="none" strike="noStrike">
+                <a:solidFill>
+                  <a:schemeClr val="dk2"/>
+                </a:solidFill>
+                <a:effectLst/>
+                <a:uFillTx/>
+                <a:latin typeface="Aptos Light"/>
+              </a:rPr>
+              <a:t>Fifth level</a:t>
+            </a:r>
+            <a:endParaRPr lang="es-ES" sz="1100" b="0" u="none" strike="noStrike">
+              <a:solidFill>
+                <a:srgbClr val="000000"/>
+              </a:solidFill>
+              <a:effectLst/>
+              <a:uFillTx/>
+              <a:latin typeface="Arial"/>
+            </a:endParaRPr>
+          </a:p>
+        </p:txBody>
+      </p:sp>
+      <p:sp>
+        <p:nvSpPr>
+          <p:cNvPr id="54" name="PlaceHolder 4"/>
           <p:cNvSpPr>
             <a:spLocks noGrp="1"/>
           </p:cNvSpPr>
@@ -6050,7 +6375,7 @@
         <p:spPr>
           <a:xfrm>
             <a:off x="877680" y="6356520"/>
-            <a:ext cx="2742840" cy="364680"/>
+            <a:ext cx="2742480" cy="364320"/>
           </a:xfrm>
           <a:prstGeom prst="rect">
             <a:avLst/>
@@ -6070,6 +6395,9 @@
                 <a:spcPct val="100000"/>
               </a:lnSpc>
               <a:buNone/>
+              <a:tabLst>
+                <a:tab algn="l" pos="0"/>
+              </a:tabLst>
               <a:defRPr lang="en-US" sz="800" b="0" u="none" spc="300" strike="noStrike" cap="all">
                 <a:solidFill>
                   <a:schemeClr val="dk2"/>
@@ -6086,6 +6414,9 @@
                 <a:spcPct val="100000"/>
               </a:lnSpc>
               <a:buNone/>
+              <a:tabLst>
+                <a:tab algn="l" pos="0"/>
+              </a:tabLst>
             </a:pPr>
             <a:r>
               <a:rPr lang="en-US" sz="800" b="0" u="none" spc="300" strike="noStrike" cap="all">
@@ -6111,7 +6442,7 @@
       </p:sp>
       <p:sp>
         <p:nvSpPr>
-          <p:cNvPr id="55" name="PlaceHolder 2"/>
+          <p:cNvPr id="55" name="PlaceHolder 5"/>
           <p:cNvSpPr>
             <a:spLocks noGrp="1"/>
           </p:cNvSpPr>
@@ -6122,7 +6453,7 @@
         <p:spPr>
           <a:xfrm>
             <a:off x="7132320" y="6356520"/>
-            <a:ext cx="4297320" cy="364680"/>
+            <a:ext cx="4296960" cy="364320"/>
           </a:xfrm>
           <a:prstGeom prst="rect">
             <a:avLst/>
@@ -6138,7 +6469,13 @@
           </a:bodyPr>
           <a:lstStyle>
             <a:lvl1pPr indent="0" algn="ctr">
-              <a:buNone/>
+              <a:lnSpc>
+                <a:spcPct val="100000"/>
+              </a:lnSpc>
+              <a:buNone/>
+              <a:tabLst>
+                <a:tab algn="l" pos="0"/>
+              </a:tabLst>
               <a:defRPr lang="en-US" sz="800" b="0" u="none" spc="300" strike="noStrike" cap="all">
                 <a:solidFill>
                   <a:schemeClr val="dk2"/>
@@ -6151,7 +6488,13 @@
           </a:lstStyle>
           <a:p>
             <a:pPr indent="0" algn="ctr">
-              <a:buNone/>
+              <a:lnSpc>
+                <a:spcPct val="100000"/>
+              </a:lnSpc>
+              <a:buNone/>
+              <a:tabLst>
+                <a:tab algn="l" pos="0"/>
+              </a:tabLst>
             </a:pPr>
             <a:r>
               <a:rPr lang="en-US" sz="800" b="0" u="none" spc="300" strike="noStrike" cap="all">
@@ -6177,7 +6520,7 @@
       </p:sp>
       <p:sp>
         <p:nvSpPr>
-          <p:cNvPr id="56" name="PlaceHolder 3"/>
+          <p:cNvPr id="56" name="PlaceHolder 6"/>
           <p:cNvSpPr>
             <a:spLocks noGrp="1"/>
           </p:cNvSpPr>
@@ -6188,7 +6531,7 @@
         <p:spPr>
           <a:xfrm>
             <a:off x="11430000" y="6356520"/>
-            <a:ext cx="520920" cy="364680"/>
+            <a:ext cx="520560" cy="364320"/>
           </a:xfrm>
           <a:prstGeom prst="rect">
             <a:avLst/>
@@ -6208,6 +6551,9 @@
                 <a:spcPct val="100000"/>
               </a:lnSpc>
               <a:buNone/>
+              <a:tabLst>
+                <a:tab algn="l" pos="0"/>
+              </a:tabLst>
               <a:defRPr lang="en-US" sz="1400" b="0" u="none" strike="noStrike">
                 <a:solidFill>
                   <a:schemeClr val="dk2"/>
@@ -6224,8 +6570,11 @@
                 <a:spcPct val="100000"/>
               </a:lnSpc>
               <a:buNone/>
-            </a:pPr>
-            <a:fld id="{F0420266-DE9A-4C7D-9069-462F3240E007}" type="slidenum">
+              <a:tabLst>
+                <a:tab algn="l" pos="0"/>
+              </a:tabLst>
+            </a:pPr>
+            <a:fld id="{D1EAD038-B482-4671-B8FB-B30A5FBF8585}" type="slidenum">
               <a:rPr lang="en-US" sz="1400" b="0" u="none" strike="noStrike">
                 <a:solidFill>
                   <a:schemeClr val="dk2"/>
@@ -6318,7 +6667,7 @@
         <p:spPr>
           <a:xfrm>
             <a:off x="5040" y="745560"/>
-            <a:ext cx="12190320" cy="2247480"/>
+            <a:ext cx="12189960" cy="2247120"/>
           </a:xfrm>
           <a:prstGeom prst="rect">
             <a:avLst/>
@@ -6338,6 +6687,9 @@
                 <a:spcPct val="100000"/>
               </a:lnSpc>
               <a:buNone/>
+              <a:tabLst>
+                <a:tab algn="l" pos="0"/>
+              </a:tabLst>
             </a:pPr>
             <a:r>
               <a:rPr lang="es-ES" sz="4800" b="1" u="none" strike="noStrike">
@@ -6353,11 +6705,11 @@
             </a:r>
             <a:endParaRPr lang="es-ES" sz="4800" b="0" u="none" strike="noStrike">
               <a:solidFill>
-                <a:schemeClr val="dk1"/>
-              </a:solidFill>
-              <a:effectLst/>
-              <a:uFillTx/>
-              <a:latin typeface="Aptos Light"/>
+                <a:srgbClr val="000000"/>
+              </a:solidFill>
+              <a:effectLst/>
+              <a:uFillTx/>
+              <a:latin typeface="Arial"/>
             </a:endParaRPr>
           </a:p>
         </p:txBody>
@@ -6375,7 +6727,7 @@
         <p:spPr>
           <a:xfrm>
             <a:off x="1523880" y="4012920"/>
-            <a:ext cx="9143640" cy="1400400"/>
+            <a:ext cx="9143280" cy="1400040"/>
           </a:xfrm>
           <a:prstGeom prst="rect">
             <a:avLst/>
@@ -6533,7 +6885,7 @@
         <p:spPr>
           <a:xfrm>
             <a:off x="871200" y="442080"/>
-            <a:ext cx="10438920" cy="973440"/>
+            <a:ext cx="10438560" cy="973080"/>
           </a:xfrm>
           <a:prstGeom prst="rect">
             <a:avLst/>
@@ -6553,6 +6905,9 @@
                 <a:spcPct val="100000"/>
               </a:lnSpc>
               <a:buNone/>
+              <a:tabLst>
+                <a:tab algn="l" pos="0"/>
+              </a:tabLst>
             </a:pPr>
             <a:r>
               <a:rPr lang="es-ES" sz="4000" b="0" u="none" strike="noStrike">
@@ -6567,11 +6922,11 @@
             </a:r>
             <a:endParaRPr lang="es-ES" sz="4000" b="0" u="none" strike="noStrike">
               <a:solidFill>
-                <a:schemeClr val="dk1"/>
-              </a:solidFill>
-              <a:effectLst/>
-              <a:uFillTx/>
-              <a:latin typeface="Aptos Light"/>
+                <a:srgbClr val="000000"/>
+              </a:solidFill>
+              <a:effectLst/>
+              <a:uFillTx/>
+              <a:latin typeface="Arial"/>
             </a:endParaRPr>
           </a:p>
         </p:txBody>
@@ -6589,7 +6944,7 @@
         <p:spPr>
           <a:xfrm>
             <a:off x="877680" y="2157840"/>
-            <a:ext cx="10442160" cy="3903480"/>
+            <a:ext cx="10441800" cy="3903120"/>
           </a:xfrm>
           <a:prstGeom prst="rect">
             <a:avLst/>
@@ -6629,11 +6984,11 @@
             </a:r>
             <a:endParaRPr lang="es-ES" sz="2800" b="0" u="none" strike="noStrike">
               <a:solidFill>
-                <a:schemeClr val="dk2"/>
-              </a:solidFill>
-              <a:effectLst/>
-              <a:uFillTx/>
-              <a:latin typeface="Aptos Light"/>
+                <a:srgbClr val="000000"/>
+              </a:solidFill>
+              <a:effectLst/>
+              <a:uFillTx/>
+              <a:latin typeface="Arial"/>
             </a:endParaRPr>
           </a:p>
           <a:p>
@@ -6662,11 +7017,11 @@
             </a:r>
             <a:endParaRPr lang="es-ES" sz="2800" b="0" u="none" strike="noStrike">
               <a:solidFill>
-                <a:schemeClr val="dk2"/>
-              </a:solidFill>
-              <a:effectLst/>
-              <a:uFillTx/>
-              <a:latin typeface="Aptos Light"/>
+                <a:srgbClr val="000000"/>
+              </a:solidFill>
+              <a:effectLst/>
+              <a:uFillTx/>
+              <a:latin typeface="Arial"/>
             </a:endParaRPr>
           </a:p>
           <a:p>
@@ -6695,11 +7050,11 @@
             </a:r>
             <a:endParaRPr lang="es-ES" sz="2800" b="0" u="none" strike="noStrike">
               <a:solidFill>
-                <a:schemeClr val="dk2"/>
-              </a:solidFill>
-              <a:effectLst/>
-              <a:uFillTx/>
-              <a:latin typeface="Aptos Light"/>
+                <a:srgbClr val="000000"/>
+              </a:solidFill>
+              <a:effectLst/>
+              <a:uFillTx/>
+              <a:latin typeface="Arial"/>
             </a:endParaRPr>
           </a:p>
           <a:p>
@@ -6728,11 +7083,11 @@
             </a:r>
             <a:endParaRPr lang="es-ES" sz="2800" b="0" u="none" strike="noStrike">
               <a:solidFill>
-                <a:schemeClr val="dk2"/>
-              </a:solidFill>
-              <a:effectLst/>
-              <a:uFillTx/>
-              <a:latin typeface="Aptos Light"/>
+                <a:srgbClr val="000000"/>
+              </a:solidFill>
+              <a:effectLst/>
+              <a:uFillTx/>
+              <a:latin typeface="Arial"/>
             </a:endParaRPr>
           </a:p>
           <a:p>
@@ -6761,11 +7116,11 @@
             </a:r>
             <a:endParaRPr lang="es-ES" sz="2800" b="0" u="none" strike="noStrike">
               <a:solidFill>
-                <a:schemeClr val="dk2"/>
-              </a:solidFill>
-              <a:effectLst/>
-              <a:uFillTx/>
-              <a:latin typeface="Aptos Light"/>
+                <a:srgbClr val="000000"/>
+              </a:solidFill>
+              <a:effectLst/>
+              <a:uFillTx/>
+              <a:latin typeface="Arial"/>
             </a:endParaRPr>
           </a:p>
           <a:p>
@@ -6794,11 +7149,11 @@
             </a:r>
             <a:endParaRPr lang="es-ES" sz="2800" b="0" u="none" strike="noStrike">
               <a:solidFill>
-                <a:schemeClr val="dk2"/>
-              </a:solidFill>
-              <a:effectLst/>
-              <a:uFillTx/>
-              <a:latin typeface="Aptos Light"/>
+                <a:srgbClr val="000000"/>
+              </a:solidFill>
+              <a:effectLst/>
+              <a:uFillTx/>
+              <a:latin typeface="Arial"/>
             </a:endParaRPr>
           </a:p>
         </p:txBody>
@@ -6838,7 +7193,7 @@
         <p:txBody>
           <a:bodyPr/>
           <a:p>
-            <a:fld id="{B6FF61FD-8FF7-4343-A1C1-F4F411C10DFA}" type="slidenum">
+            <a:fld id="{7B27FC7C-BBE2-4C47-B0A5-F0258A9DD2CC}" type="slidenum">
               <a:t>2</a:t>
             </a:fld>
           </a:p>
@@ -6858,7 +7213,7 @@
         <p:txBody>
           <a:bodyPr/>
           <a:p>
-            <a:fld id="{8593FE88-B8F7-4E78-A6AF-4318BFC297B4}" type="datetime1">
+            <a:fld id="{EAE327A7-ED8C-40E1-B25A-65767EA5C336}" type="datetime1">
               <a:rPr lang="es-ES"/>
               <a:t>10/03/2026</a:t>
             </a:fld>
@@ -6908,7 +7263,7 @@
         <p:spPr>
           <a:xfrm>
             <a:off x="871200" y="229680"/>
-            <a:ext cx="10449360" cy="951840"/>
+            <a:ext cx="10449000" cy="951480"/>
           </a:xfrm>
           <a:prstGeom prst="rect">
             <a:avLst/>
@@ -6928,6 +7283,9 @@
                 <a:spcPct val="100000"/>
               </a:lnSpc>
               <a:buNone/>
+              <a:tabLst>
+                <a:tab algn="l" pos="0"/>
+              </a:tabLst>
             </a:pPr>
             <a:r>
               <a:rPr lang="es-ES" sz="4000" b="0" u="none" strike="noStrike">
@@ -6942,11 +7300,11 @@
             </a:r>
             <a:endParaRPr lang="es-ES" sz="4000" b="0" u="none" strike="noStrike">
               <a:solidFill>
-                <a:schemeClr val="dk1"/>
-              </a:solidFill>
-              <a:effectLst/>
-              <a:uFillTx/>
-              <a:latin typeface="Aptos Light"/>
+                <a:srgbClr val="000000"/>
+              </a:solidFill>
+              <a:effectLst/>
+              <a:uFillTx/>
+              <a:latin typeface="Arial"/>
             </a:endParaRPr>
           </a:p>
         </p:txBody>
@@ -6964,7 +7322,7 @@
         <p:spPr>
           <a:xfrm>
             <a:off x="877680" y="1373400"/>
-            <a:ext cx="10442160" cy="5236920"/>
+            <a:ext cx="10441800" cy="5236560"/>
           </a:xfrm>
           <a:prstGeom prst="rect">
             <a:avLst/>
@@ -7017,11 +7375,11 @@
             </a:r>
             <a:endParaRPr lang="es-ES" sz="2400" b="0" u="none" strike="noStrike">
               <a:solidFill>
-                <a:schemeClr val="dk2"/>
-              </a:solidFill>
-              <a:effectLst/>
-              <a:uFillTx/>
-              <a:latin typeface="Aptos Light"/>
+                <a:srgbClr val="000000"/>
+              </a:solidFill>
+              <a:effectLst/>
+              <a:uFillTx/>
+              <a:latin typeface="Arial"/>
             </a:endParaRPr>
           </a:p>
           <a:p>
@@ -7063,11 +7421,11 @@
             </a:r>
             <a:endParaRPr lang="es-ES" sz="2400" b="0" u="none" strike="noStrike">
               <a:solidFill>
-                <a:schemeClr val="dk2"/>
-              </a:solidFill>
-              <a:effectLst/>
-              <a:uFillTx/>
-              <a:latin typeface="Aptos Light"/>
+                <a:srgbClr val="000000"/>
+              </a:solidFill>
+              <a:effectLst/>
+              <a:uFillTx/>
+              <a:latin typeface="Arial"/>
             </a:endParaRPr>
           </a:p>
           <a:p>
@@ -7110,11 +7468,11 @@
             </a:r>
             <a:endParaRPr lang="es-ES" sz="2400" b="0" u="none" strike="noStrike">
               <a:solidFill>
-                <a:schemeClr val="dk2"/>
-              </a:solidFill>
-              <a:effectLst/>
-              <a:uFillTx/>
-              <a:latin typeface="Aptos Light"/>
+                <a:srgbClr val="000000"/>
+              </a:solidFill>
+              <a:effectLst/>
+              <a:uFillTx/>
+              <a:latin typeface="Arial"/>
             </a:endParaRPr>
           </a:p>
           <a:p>
@@ -7132,11 +7490,11 @@
             </a:pPr>
             <a:endParaRPr lang="es-ES" sz="2400" b="0" u="none" strike="noStrike">
               <a:solidFill>
-                <a:schemeClr val="dk2"/>
-              </a:solidFill>
-              <a:effectLst/>
-              <a:uFillTx/>
-              <a:latin typeface="Aptos Light"/>
+                <a:srgbClr val="000000"/>
+              </a:solidFill>
+              <a:effectLst/>
+              <a:uFillTx/>
+              <a:latin typeface="Arial"/>
             </a:endParaRPr>
           </a:p>
           <a:p>
@@ -7166,11 +7524,11 @@
             </a:r>
             <a:endParaRPr lang="es-ES" sz="2400" b="0" u="none" strike="noStrike">
               <a:solidFill>
-                <a:schemeClr val="dk2"/>
-              </a:solidFill>
-              <a:effectLst/>
-              <a:uFillTx/>
-              <a:latin typeface="Aptos Light"/>
+                <a:srgbClr val="000000"/>
+              </a:solidFill>
+              <a:effectLst/>
+              <a:uFillTx/>
+              <a:latin typeface="Arial"/>
             </a:endParaRPr>
           </a:p>
           <a:p>
@@ -7200,11 +7558,11 @@
             </a:r>
             <a:endParaRPr lang="es-ES" sz="2400" b="0" u="none" strike="noStrike">
               <a:solidFill>
-                <a:schemeClr val="dk2"/>
-              </a:solidFill>
-              <a:effectLst/>
-              <a:uFillTx/>
-              <a:latin typeface="Aptos Light"/>
+                <a:srgbClr val="000000"/>
+              </a:solidFill>
+              <a:effectLst/>
+              <a:uFillTx/>
+              <a:latin typeface="Arial"/>
             </a:endParaRPr>
           </a:p>
           <a:p>
@@ -7234,11 +7592,11 @@
             </a:r>
             <a:endParaRPr lang="es-ES" sz="2400" b="0" u="none" strike="noStrike">
               <a:solidFill>
-                <a:schemeClr val="dk2"/>
-              </a:solidFill>
-              <a:effectLst/>
-              <a:uFillTx/>
-              <a:latin typeface="Aptos Light"/>
+                <a:srgbClr val="000000"/>
+              </a:solidFill>
+              <a:effectLst/>
+              <a:uFillTx/>
+              <a:latin typeface="Arial"/>
             </a:endParaRPr>
           </a:p>
           <a:p>
@@ -7268,11 +7626,11 @@
             </a:r>
             <a:endParaRPr lang="es-ES" sz="2400" b="0" u="none" strike="noStrike">
               <a:solidFill>
-                <a:schemeClr val="dk2"/>
-              </a:solidFill>
-              <a:effectLst/>
-              <a:uFillTx/>
-              <a:latin typeface="Aptos Light"/>
+                <a:srgbClr val="000000"/>
+              </a:solidFill>
+              <a:effectLst/>
+              <a:uFillTx/>
+              <a:latin typeface="Arial"/>
             </a:endParaRPr>
           </a:p>
           <a:p>
@@ -7290,11 +7648,11 @@
             </a:pPr>
             <a:endParaRPr lang="es-ES" sz="2000" b="0" u="none" strike="noStrike">
               <a:solidFill>
-                <a:schemeClr val="dk2"/>
-              </a:solidFill>
-              <a:effectLst/>
-              <a:uFillTx/>
-              <a:latin typeface="Aptos Light"/>
+                <a:srgbClr val="000000"/>
+              </a:solidFill>
+              <a:effectLst/>
+              <a:uFillTx/>
+              <a:latin typeface="Arial"/>
             </a:endParaRPr>
           </a:p>
         </p:txBody>
@@ -7334,7 +7692,7 @@
         <p:txBody>
           <a:bodyPr/>
           <a:p>
-            <a:fld id="{B580FFC7-F7FD-4DA7-9480-1B622A01E2D0}" type="slidenum">
+            <a:fld id="{C43F5DD8-2DEE-416C-ABDB-CDB8FB928192}" type="slidenum">
               <a:t>3</a:t>
             </a:fld>
           </a:p>
@@ -7354,7 +7712,7 @@
         <p:txBody>
           <a:bodyPr/>
           <a:p>
-            <a:fld id="{BFE4198E-3C63-4555-A08E-45BFB6D00C6E}" type="datetime1">
+            <a:fld id="{B4E4A10E-E78F-43AD-9422-DD4B991D1F0C}" type="datetime1">
               <a:rPr lang="es-ES"/>
               <a:t>10/03/2026</a:t>
             </a:fld>
@@ -7404,7 +7762,7 @@
         <p:spPr>
           <a:xfrm>
             <a:off x="871200" y="588240"/>
-            <a:ext cx="10449360" cy="503640"/>
+            <a:ext cx="10449000" cy="503280"/>
           </a:xfrm>
           <a:prstGeom prst="rect">
             <a:avLst/>
@@ -7424,6 +7782,9 @@
                 <a:spcPct val="100000"/>
               </a:lnSpc>
               <a:buNone/>
+              <a:tabLst>
+                <a:tab algn="l" pos="0"/>
+              </a:tabLst>
             </a:pPr>
             <a:r>
               <a:rPr lang="es-ES" sz="4000" b="0" u="none" strike="noStrike">
@@ -7439,11 +7800,11 @@
             </a:r>
             <a:endParaRPr lang="es-ES" sz="4000" b="0" u="none" strike="noStrike">
               <a:solidFill>
-                <a:schemeClr val="dk1"/>
-              </a:solidFill>
-              <a:effectLst/>
-              <a:uFillTx/>
-              <a:latin typeface="Aptos Light"/>
+                <a:srgbClr val="000000"/>
+              </a:solidFill>
+              <a:effectLst/>
+              <a:uFillTx/>
+              <a:latin typeface="Arial"/>
             </a:endParaRPr>
           </a:p>
         </p:txBody>
@@ -7461,7 +7822,7 @@
         <p:spPr>
           <a:xfrm>
             <a:off x="877680" y="1272600"/>
-            <a:ext cx="10442160" cy="4788720"/>
+            <a:ext cx="10441800" cy="4788360"/>
           </a:xfrm>
           <a:prstGeom prst="rect">
             <a:avLst/>
@@ -7502,11 +7863,11 @@
             </a:r>
             <a:endParaRPr lang="es-ES" sz="2000" b="0" u="none" strike="noStrike">
               <a:solidFill>
-                <a:schemeClr val="dk2"/>
-              </a:solidFill>
-              <a:effectLst/>
-              <a:uFillTx/>
-              <a:latin typeface="Aptos Light"/>
+                <a:srgbClr val="000000"/>
+              </a:solidFill>
+              <a:effectLst/>
+              <a:uFillTx/>
+              <a:latin typeface="Arial"/>
             </a:endParaRPr>
           </a:p>
           <a:p>
@@ -7548,11 +7909,11 @@
             </a:r>
             <a:endParaRPr lang="es-ES" sz="2000" b="0" u="none" strike="noStrike">
               <a:solidFill>
-                <a:schemeClr val="dk2"/>
-              </a:solidFill>
-              <a:effectLst/>
-              <a:uFillTx/>
-              <a:latin typeface="Aptos Light"/>
+                <a:srgbClr val="000000"/>
+              </a:solidFill>
+              <a:effectLst/>
+              <a:uFillTx/>
+              <a:latin typeface="Arial"/>
             </a:endParaRPr>
           </a:p>
           <a:p>
@@ -7594,11 +7955,11 @@
             </a:r>
             <a:endParaRPr lang="es-ES" sz="2000" b="0" u="none" strike="noStrike">
               <a:solidFill>
-                <a:schemeClr val="dk2"/>
-              </a:solidFill>
-              <a:effectLst/>
-              <a:uFillTx/>
-              <a:latin typeface="Aptos Light"/>
+                <a:srgbClr val="000000"/>
+              </a:solidFill>
+              <a:effectLst/>
+              <a:uFillTx/>
+              <a:latin typeface="Arial"/>
             </a:endParaRPr>
           </a:p>
           <a:p>
@@ -7653,11 +8014,11 @@
             </a:r>
             <a:endParaRPr lang="es-ES" sz="2000" b="0" u="none" strike="noStrike">
               <a:solidFill>
-                <a:schemeClr val="dk2"/>
-              </a:solidFill>
-              <a:effectLst/>
-              <a:uFillTx/>
-              <a:latin typeface="Aptos Light"/>
+                <a:srgbClr val="000000"/>
+              </a:solidFill>
+              <a:effectLst/>
+              <a:uFillTx/>
+              <a:latin typeface="Arial"/>
             </a:endParaRPr>
           </a:p>
           <a:p>
@@ -7687,11 +8048,11 @@
             </a:r>
             <a:endParaRPr lang="es-ES" sz="2000" b="0" u="none" strike="noStrike">
               <a:solidFill>
-                <a:schemeClr val="dk2"/>
-              </a:solidFill>
-              <a:effectLst/>
-              <a:uFillTx/>
-              <a:latin typeface="Aptos Light"/>
+                <a:srgbClr val="000000"/>
+              </a:solidFill>
+              <a:effectLst/>
+              <a:uFillTx/>
+              <a:latin typeface="Arial"/>
             </a:endParaRPr>
           </a:p>
           <a:p>
@@ -7721,11 +8082,11 @@
             </a:r>
             <a:endParaRPr lang="es-ES" sz="2000" b="0" u="none" strike="noStrike">
               <a:solidFill>
-                <a:schemeClr val="dk2"/>
-              </a:solidFill>
-              <a:effectLst/>
-              <a:uFillTx/>
-              <a:latin typeface="Aptos Light"/>
+                <a:srgbClr val="000000"/>
+              </a:solidFill>
+              <a:effectLst/>
+              <a:uFillTx/>
+              <a:latin typeface="Arial"/>
             </a:endParaRPr>
           </a:p>
           <a:p>
@@ -7767,11 +8128,11 @@
             </a:r>
             <a:endParaRPr lang="es-ES" sz="2000" b="0" u="none" strike="noStrike">
               <a:solidFill>
-                <a:schemeClr val="dk2"/>
-              </a:solidFill>
-              <a:effectLst/>
-              <a:uFillTx/>
-              <a:latin typeface="Aptos Light"/>
+                <a:srgbClr val="000000"/>
+              </a:solidFill>
+              <a:effectLst/>
+              <a:uFillTx/>
+              <a:latin typeface="Arial"/>
             </a:endParaRPr>
           </a:p>
           <a:p>
@@ -7813,11 +8174,11 @@
             </a:r>
             <a:endParaRPr lang="es-ES" sz="2000" b="0" u="none" strike="noStrike">
               <a:solidFill>
-                <a:schemeClr val="dk2"/>
-              </a:solidFill>
-              <a:effectLst/>
-              <a:uFillTx/>
-              <a:latin typeface="Aptos Light"/>
+                <a:srgbClr val="000000"/>
+              </a:solidFill>
+              <a:effectLst/>
+              <a:uFillTx/>
+              <a:latin typeface="Arial"/>
             </a:endParaRPr>
           </a:p>
           <a:p>
@@ -7860,11 +8221,11 @@
             </a:r>
             <a:endParaRPr lang="es-ES" sz="2000" b="0" u="none" strike="noStrike">
               <a:solidFill>
-                <a:schemeClr val="dk2"/>
-              </a:solidFill>
-              <a:effectLst/>
-              <a:uFillTx/>
-              <a:latin typeface="Aptos Light"/>
+                <a:srgbClr val="000000"/>
+              </a:solidFill>
+              <a:effectLst/>
+              <a:uFillTx/>
+              <a:latin typeface="Arial"/>
             </a:endParaRPr>
           </a:p>
           <a:p>
@@ -7906,11 +8267,11 @@
             </a:r>
             <a:endParaRPr lang="es-ES" sz="2000" b="0" u="none" strike="noStrike">
               <a:solidFill>
-                <a:schemeClr val="dk2"/>
-              </a:solidFill>
-              <a:effectLst/>
-              <a:uFillTx/>
-              <a:latin typeface="Aptos Light"/>
+                <a:srgbClr val="000000"/>
+              </a:solidFill>
+              <a:effectLst/>
+              <a:uFillTx/>
+              <a:latin typeface="Arial"/>
             </a:endParaRPr>
           </a:p>
           <a:p>
@@ -7928,11 +8289,11 @@
             </a:pPr>
             <a:endParaRPr lang="es-ES" sz="1600" b="0" u="none" strike="noStrike">
               <a:solidFill>
-                <a:schemeClr val="dk2"/>
-              </a:solidFill>
-              <a:effectLst/>
-              <a:uFillTx/>
-              <a:latin typeface="Aptos Light"/>
+                <a:srgbClr val="000000"/>
+              </a:solidFill>
+              <a:effectLst/>
+              <a:uFillTx/>
+              <a:latin typeface="Arial"/>
             </a:endParaRPr>
           </a:p>
         </p:txBody>
@@ -7972,7 +8333,7 @@
         <p:txBody>
           <a:bodyPr/>
           <a:p>
-            <a:fld id="{BD13F0BC-963E-4403-AEC3-6C45F0DED654}" type="slidenum">
+            <a:fld id="{B6BBB01F-75E2-444D-A316-2B467A989B87}" type="slidenum">
               <a:t>4</a:t>
             </a:fld>
           </a:p>
@@ -7992,7 +8353,7 @@
         <p:txBody>
           <a:bodyPr/>
           <a:p>
-            <a:fld id="{AB32B374-1681-4E69-9CC7-62EE5905D195}" type="datetime1">
+            <a:fld id="{737CEA08-4160-414B-9A89-BF58A29549B2}" type="datetime1">
               <a:rPr lang="es-ES"/>
               <a:t>10/03/2026</a:t>
             </a:fld>
@@ -8042,7 +8403,7 @@
         <p:spPr>
           <a:xfrm>
             <a:off x="871200" y="5400"/>
-            <a:ext cx="10449360" cy="727560"/>
+            <a:ext cx="10449000" cy="727200"/>
           </a:xfrm>
           <a:prstGeom prst="rect">
             <a:avLst/>
@@ -8062,6 +8423,9 @@
                 <a:spcPct val="100000"/>
               </a:lnSpc>
               <a:buNone/>
+              <a:tabLst>
+                <a:tab algn="l" pos="0"/>
+              </a:tabLst>
             </a:pPr>
             <a:r>
               <a:rPr lang="es-ES" sz="4000" b="0" u="none" strike="noStrike">
@@ -8077,11 +8441,11 @@
             </a:r>
             <a:endParaRPr lang="es-ES" sz="4000" b="0" u="none" strike="noStrike">
               <a:solidFill>
-                <a:schemeClr val="dk1"/>
-              </a:solidFill>
-              <a:effectLst/>
-              <a:uFillTx/>
-              <a:latin typeface="Aptos Light"/>
+                <a:srgbClr val="000000"/>
+              </a:solidFill>
+              <a:effectLst/>
+              <a:uFillTx/>
+              <a:latin typeface="Arial"/>
             </a:endParaRPr>
           </a:p>
         </p:txBody>
@@ -8099,7 +8463,7 @@
         <p:spPr>
           <a:xfrm>
             <a:off x="877680" y="745920"/>
-            <a:ext cx="10442160" cy="5315400"/>
+            <a:ext cx="10441800" cy="5315040"/>
           </a:xfrm>
           <a:prstGeom prst="rect">
             <a:avLst/>
@@ -8140,11 +8504,11 @@
             </a:r>
             <a:endParaRPr lang="es-ES" sz="1800" b="0" u="none" strike="noStrike">
               <a:solidFill>
-                <a:schemeClr val="dk2"/>
-              </a:solidFill>
-              <a:effectLst/>
-              <a:uFillTx/>
-              <a:latin typeface="Aptos Light"/>
+                <a:srgbClr val="000000"/>
+              </a:solidFill>
+              <a:effectLst/>
+              <a:uFillTx/>
+              <a:latin typeface="Arial"/>
             </a:endParaRPr>
           </a:p>
           <a:p>
@@ -8174,11 +8538,11 @@
             </a:r>
             <a:endParaRPr lang="es-ES" sz="1800" b="0" u="none" strike="noStrike">
               <a:solidFill>
-                <a:schemeClr val="dk2"/>
-              </a:solidFill>
-              <a:effectLst/>
-              <a:uFillTx/>
-              <a:latin typeface="Aptos Light"/>
+                <a:srgbClr val="000000"/>
+              </a:solidFill>
+              <a:effectLst/>
+              <a:uFillTx/>
+              <a:latin typeface="Arial"/>
             </a:endParaRPr>
           </a:p>
           <a:p>
@@ -8221,11 +8585,11 @@
             </a:r>
             <a:endParaRPr lang="es-ES" sz="1800" b="0" u="none" strike="noStrike">
               <a:solidFill>
-                <a:schemeClr val="dk2"/>
-              </a:solidFill>
-              <a:effectLst/>
-              <a:uFillTx/>
-              <a:latin typeface="Aptos Light"/>
+                <a:srgbClr val="000000"/>
+              </a:solidFill>
+              <a:effectLst/>
+              <a:uFillTx/>
+              <a:latin typeface="Arial"/>
             </a:endParaRPr>
           </a:p>
           <a:p>
@@ -8255,11 +8619,11 @@
             </a:r>
             <a:endParaRPr lang="es-ES" sz="1800" b="0" u="none" strike="noStrike">
               <a:solidFill>
-                <a:schemeClr val="dk2"/>
-              </a:solidFill>
-              <a:effectLst/>
-              <a:uFillTx/>
-              <a:latin typeface="Aptos Light"/>
+                <a:srgbClr val="000000"/>
+              </a:solidFill>
+              <a:effectLst/>
+              <a:uFillTx/>
+              <a:latin typeface="Arial"/>
             </a:endParaRPr>
           </a:p>
           <a:p>
@@ -8289,11 +8653,11 @@
             </a:r>
             <a:endParaRPr lang="es-ES" sz="1800" b="0" u="none" strike="noStrike">
               <a:solidFill>
-                <a:schemeClr val="dk2"/>
-              </a:solidFill>
-              <a:effectLst/>
-              <a:uFillTx/>
-              <a:latin typeface="Aptos Light"/>
+                <a:srgbClr val="000000"/>
+              </a:solidFill>
+              <a:effectLst/>
+              <a:uFillTx/>
+              <a:latin typeface="Arial"/>
             </a:endParaRPr>
           </a:p>
           <a:p>
@@ -8323,11 +8687,11 @@
             </a:r>
             <a:endParaRPr lang="es-ES" sz="1800" b="0" u="none" strike="noStrike">
               <a:solidFill>
-                <a:schemeClr val="dk2"/>
-              </a:solidFill>
-              <a:effectLst/>
-              <a:uFillTx/>
-              <a:latin typeface="Aptos Light"/>
+                <a:srgbClr val="000000"/>
+              </a:solidFill>
+              <a:effectLst/>
+              <a:uFillTx/>
+              <a:latin typeface="Arial"/>
             </a:endParaRPr>
           </a:p>
           <a:p>
@@ -8370,11 +8734,11 @@
             </a:r>
             <a:endParaRPr lang="es-ES" sz="1800" b="0" u="none" strike="noStrike">
               <a:solidFill>
-                <a:schemeClr val="dk2"/>
-              </a:solidFill>
-              <a:effectLst/>
-              <a:uFillTx/>
-              <a:latin typeface="Aptos Light"/>
+                <a:srgbClr val="000000"/>
+              </a:solidFill>
+              <a:effectLst/>
+              <a:uFillTx/>
+              <a:latin typeface="Arial"/>
             </a:endParaRPr>
           </a:p>
           <a:p>
@@ -8404,11 +8768,11 @@
             </a:r>
             <a:endParaRPr lang="es-ES" sz="1800" b="0" u="none" strike="noStrike">
               <a:solidFill>
-                <a:schemeClr val="dk2"/>
-              </a:solidFill>
-              <a:effectLst/>
-              <a:uFillTx/>
-              <a:latin typeface="Aptos Light"/>
+                <a:srgbClr val="000000"/>
+              </a:solidFill>
+              <a:effectLst/>
+              <a:uFillTx/>
+              <a:latin typeface="Arial"/>
             </a:endParaRPr>
           </a:p>
           <a:p>
@@ -8438,11 +8802,11 @@
             </a:r>
             <a:endParaRPr lang="es-ES" sz="1800" b="0" u="none" strike="noStrike">
               <a:solidFill>
-                <a:schemeClr val="dk2"/>
-              </a:solidFill>
-              <a:effectLst/>
-              <a:uFillTx/>
-              <a:latin typeface="Aptos Light"/>
+                <a:srgbClr val="000000"/>
+              </a:solidFill>
+              <a:effectLst/>
+              <a:uFillTx/>
+              <a:latin typeface="Arial"/>
             </a:endParaRPr>
           </a:p>
           <a:p>
@@ -8472,11 +8836,11 @@
             </a:r>
             <a:endParaRPr lang="es-ES" sz="1800" b="0" u="none" strike="noStrike">
               <a:solidFill>
-                <a:schemeClr val="dk2"/>
-              </a:solidFill>
-              <a:effectLst/>
-              <a:uFillTx/>
-              <a:latin typeface="Aptos Light"/>
+                <a:srgbClr val="000000"/>
+              </a:solidFill>
+              <a:effectLst/>
+              <a:uFillTx/>
+              <a:latin typeface="Arial"/>
             </a:endParaRPr>
           </a:p>
           <a:p>
@@ -8519,11 +8883,11 @@
             </a:r>
             <a:endParaRPr lang="es-ES" sz="1800" b="0" u="none" strike="noStrike">
               <a:solidFill>
-                <a:schemeClr val="dk2"/>
-              </a:solidFill>
-              <a:effectLst/>
-              <a:uFillTx/>
-              <a:latin typeface="Aptos Light"/>
+                <a:srgbClr val="000000"/>
+              </a:solidFill>
+              <a:effectLst/>
+              <a:uFillTx/>
+              <a:latin typeface="Arial"/>
             </a:endParaRPr>
           </a:p>
           <a:p>
@@ -8553,11 +8917,11 @@
             </a:r>
             <a:endParaRPr lang="es-ES" sz="1800" b="0" u="none" strike="noStrike">
               <a:solidFill>
-                <a:schemeClr val="dk2"/>
-              </a:solidFill>
-              <a:effectLst/>
-              <a:uFillTx/>
-              <a:latin typeface="Aptos Light"/>
+                <a:srgbClr val="000000"/>
+              </a:solidFill>
+              <a:effectLst/>
+              <a:uFillTx/>
+              <a:latin typeface="Arial"/>
             </a:endParaRPr>
           </a:p>
           <a:p>
@@ -8575,11 +8939,11 @@
             </a:pPr>
             <a:endParaRPr lang="es-ES" sz="1600" b="0" u="none" strike="noStrike">
               <a:solidFill>
-                <a:schemeClr val="dk2"/>
-              </a:solidFill>
-              <a:effectLst/>
-              <a:uFillTx/>
-              <a:latin typeface="Aptos Light"/>
+                <a:srgbClr val="000000"/>
+              </a:solidFill>
+              <a:effectLst/>
+              <a:uFillTx/>
+              <a:latin typeface="Arial"/>
             </a:endParaRPr>
           </a:p>
         </p:txBody>
@@ -8619,7 +8983,7 @@
         <p:txBody>
           <a:bodyPr/>
           <a:p>
-            <a:fld id="{A9BEADB8-9A8D-438C-BCDE-D548EDC284D0}" type="slidenum">
+            <a:fld id="{8AC39D2A-9116-4407-A8B3-2A91D3EDF0E0}" type="slidenum">
               <a:t>5</a:t>
             </a:fld>
           </a:p>
@@ -8639,7 +9003,7 @@
         <p:txBody>
           <a:bodyPr/>
           <a:p>
-            <a:fld id="{82BABF80-E60A-485E-9793-0406FA73A8E4}" type="datetime1">
+            <a:fld id="{3B3D8515-3190-4848-81C7-CB85B854E816}" type="datetime1">
               <a:rPr lang="es-ES"/>
               <a:t>10/03/2026</a:t>
             </a:fld>
@@ -8689,7 +9053,7 @@
         <p:spPr>
           <a:xfrm>
             <a:off x="871200" y="128880"/>
-            <a:ext cx="10449360" cy="750240"/>
+            <a:ext cx="10449000" cy="749880"/>
           </a:xfrm>
           <a:prstGeom prst="rect">
             <a:avLst/>
@@ -8709,6 +9073,9 @@
                 <a:spcPct val="100000"/>
               </a:lnSpc>
               <a:buNone/>
+              <a:tabLst>
+                <a:tab algn="l" pos="0"/>
+              </a:tabLst>
             </a:pPr>
             <a:r>
               <a:rPr lang="es-ES" sz="4000" b="0" u="none" strike="noStrike">
@@ -8724,11 +9091,11 @@
             </a:r>
             <a:endParaRPr lang="es-ES" sz="4000" b="0" u="none" strike="noStrike">
               <a:solidFill>
-                <a:schemeClr val="dk1"/>
-              </a:solidFill>
-              <a:effectLst/>
-              <a:uFillTx/>
-              <a:latin typeface="Aptos Light"/>
+                <a:srgbClr val="000000"/>
+              </a:solidFill>
+              <a:effectLst/>
+              <a:uFillTx/>
+              <a:latin typeface="Arial"/>
             </a:endParaRPr>
           </a:p>
         </p:txBody>
@@ -8741,7 +9108,7 @@
         </p:nvGraphicFramePr>
         <p:xfrm>
           <a:off x="347400" y="986040"/>
-          <a:ext cx="11479320" cy="5250240"/>
+          <a:ext cx="11477880" cy="5250240"/>
         </p:xfrm>
         <a:graphic>
           <a:graphicData uri="http://schemas.openxmlformats.org/drawingml/2006/table">
@@ -9930,18 +10297,7 @@
                           <a:latin typeface="Aptos Light"/>
                           <a:ea typeface="Noto Sans CJK SC"/>
                         </a:rPr>
-                        <a:t>44 </a:t>
-                      </a:r>
-                      <a:r>
-                        <a:rPr lang="es-ES" sz="1800" b="0" u="none" strike="noStrike">
-                          <a:solidFill>
-                            <a:schemeClr val="dk1"/>
-                          </a:solidFill>
-                          <a:effectLst/>
-                          <a:uFillTx/>
-                          <a:latin typeface="Aptos Light"/>
-                        </a:rPr>
-                        <a:t>€</a:t>
+                        <a:t>44 €</a:t>
                       </a:r>
                       <a:endParaRPr lang="es-ES" sz="1800" b="0" u="none" strike="noStrike">
                         <a:solidFill>
@@ -10640,6 +10996,11 @@
                       <a:noAutofit/>
                     </a:bodyPr>
                     <a:p>
+                      <a:pPr>
+                        <a:lnSpc>
+                          <a:spcPct val="100000"/>
+                        </a:lnSpc>
+                      </a:pPr>
                       <a:endParaRPr lang="es-ES" sz="1800" b="0" u="none" strike="noStrike">
                         <a:solidFill>
                           <a:schemeClr val="dk1"/>
@@ -10752,6 +11113,11 @@
                       <a:noAutofit/>
                     </a:bodyPr>
                     <a:p>
+                      <a:pPr>
+                        <a:lnSpc>
+                          <a:spcPct val="100000"/>
+                        </a:lnSpc>
+                      </a:pPr>
                       <a:endParaRPr lang="es-ES" sz="1800" b="0" u="none" strike="noStrike">
                         <a:solidFill>
                           <a:schemeClr val="dk1"/>
@@ -10834,7 +11200,7 @@
         <p:txBody>
           <a:bodyPr/>
           <a:p>
-            <a:fld id="{CD9AB539-6797-44F2-AA2F-D9B6CDE2E10F}" type="slidenum">
+            <a:fld id="{87A258E7-578C-4965-A2CF-F878D426247D}" type="slidenum">
               <a:t>6</a:t>
             </a:fld>
           </a:p>
@@ -10854,7 +11220,7 @@
         <p:txBody>
           <a:bodyPr/>
           <a:p>
-            <a:fld id="{C2FC5C04-430F-4A0C-B2D7-8F4BAE0CCB92}" type="datetime1">
+            <a:fld id="{FCE980F6-0A31-4A15-8930-2CA62ED87960}" type="datetime1">
               <a:rPr lang="es-ES"/>
               <a:t>10/03/2026</a:t>
             </a:fld>
@@ -10904,7 +11270,7 @@
         <p:spPr>
           <a:xfrm>
             <a:off x="871200" y="5400"/>
-            <a:ext cx="10449360" cy="862200"/>
+            <a:ext cx="10449000" cy="861840"/>
           </a:xfrm>
           <a:prstGeom prst="rect">
             <a:avLst/>
@@ -10924,6 +11290,9 @@
                 <a:spcPct val="100000"/>
               </a:lnSpc>
               <a:buNone/>
+              <a:tabLst>
+                <a:tab algn="l" pos="0"/>
+              </a:tabLst>
             </a:pPr>
             <a:r>
               <a:rPr lang="es-ES" sz="4000" b="0" u="none" strike="noStrike">
@@ -10939,11 +11308,11 @@
             </a:r>
             <a:endParaRPr lang="es-ES" sz="4000" b="0" u="none" strike="noStrike">
               <a:solidFill>
-                <a:schemeClr val="dk1"/>
-              </a:solidFill>
-              <a:effectLst/>
-              <a:uFillTx/>
-              <a:latin typeface="Aptos Light"/>
+                <a:srgbClr val="000000"/>
+              </a:solidFill>
+              <a:effectLst/>
+              <a:uFillTx/>
+              <a:latin typeface="Arial"/>
             </a:endParaRPr>
           </a:p>
         </p:txBody>
@@ -10961,7 +11330,7 @@
         <p:spPr>
           <a:xfrm>
             <a:off x="866520" y="1127160"/>
-            <a:ext cx="10442160" cy="5236920"/>
+            <a:ext cx="10441800" cy="5236560"/>
           </a:xfrm>
           <a:prstGeom prst="rect">
             <a:avLst/>
@@ -11014,11 +11383,11 @@
             </a:r>
             <a:endParaRPr lang="es-ES" sz="1800" b="0" u="none" strike="noStrike">
               <a:solidFill>
-                <a:schemeClr val="dk2"/>
-              </a:solidFill>
-              <a:effectLst/>
-              <a:uFillTx/>
-              <a:latin typeface="Aptos Light"/>
+                <a:srgbClr val="000000"/>
+              </a:solidFill>
+              <a:effectLst/>
+              <a:uFillTx/>
+              <a:latin typeface="Arial"/>
             </a:endParaRPr>
           </a:p>
           <a:p>
@@ -11060,11 +11429,11 @@
             </a:r>
             <a:endParaRPr lang="es-ES" sz="1800" b="0" u="none" strike="noStrike">
               <a:solidFill>
-                <a:schemeClr val="dk2"/>
-              </a:solidFill>
-              <a:effectLst/>
-              <a:uFillTx/>
-              <a:latin typeface="Aptos Light"/>
+                <a:srgbClr val="000000"/>
+              </a:solidFill>
+              <a:effectLst/>
+              <a:uFillTx/>
+              <a:latin typeface="Arial"/>
             </a:endParaRPr>
           </a:p>
           <a:p>
@@ -11119,11 +11488,11 @@
             </a:r>
             <a:endParaRPr lang="es-ES" sz="1800" b="0" u="none" strike="noStrike">
               <a:solidFill>
-                <a:schemeClr val="dk2"/>
-              </a:solidFill>
-              <a:effectLst/>
-              <a:uFillTx/>
-              <a:latin typeface="Aptos Light"/>
+                <a:srgbClr val="000000"/>
+              </a:solidFill>
+              <a:effectLst/>
+              <a:uFillTx/>
+              <a:latin typeface="Arial"/>
             </a:endParaRPr>
           </a:p>
           <a:p>
@@ -11153,11 +11522,11 @@
             </a:r>
             <a:endParaRPr lang="es-ES" sz="1800" b="0" u="none" strike="noStrike">
               <a:solidFill>
-                <a:schemeClr val="dk2"/>
-              </a:solidFill>
-              <a:effectLst/>
-              <a:uFillTx/>
-              <a:latin typeface="Aptos Light"/>
+                <a:srgbClr val="000000"/>
+              </a:solidFill>
+              <a:effectLst/>
+              <a:uFillTx/>
+              <a:latin typeface="Arial"/>
             </a:endParaRPr>
           </a:p>
           <a:p>
@@ -11183,15 +11552,15 @@
                 <a:latin typeface="Aptos Light"/>
                 <a:ea typeface="Aptos Light"/>
               </a:rPr>
-              <a:t> Formato ultra compacto (se puede montar detrás del monitor).</a:t>
+              <a:t> Formato ultra compacto.</a:t>
             </a:r>
             <a:endParaRPr lang="es-ES" sz="1800" b="0" u="none" strike="noStrike">
               <a:solidFill>
-                <a:schemeClr val="dk2"/>
-              </a:solidFill>
-              <a:effectLst/>
-              <a:uFillTx/>
-              <a:latin typeface="Aptos Light"/>
+                <a:srgbClr val="000000"/>
+              </a:solidFill>
+              <a:effectLst/>
+              <a:uFillTx/>
+              <a:latin typeface="Arial"/>
             </a:endParaRPr>
           </a:p>
           <a:p>
@@ -11221,11 +11590,11 @@
             </a:r>
             <a:endParaRPr lang="es-ES" sz="1800" b="0" u="none" strike="noStrike">
               <a:solidFill>
-                <a:schemeClr val="dk2"/>
-              </a:solidFill>
-              <a:effectLst/>
-              <a:uFillTx/>
-              <a:latin typeface="Aptos Light"/>
+                <a:srgbClr val="000000"/>
+              </a:solidFill>
+              <a:effectLst/>
+              <a:uFillTx/>
+              <a:latin typeface="Arial"/>
             </a:endParaRPr>
           </a:p>
           <a:p>
@@ -11255,11 +11624,11 @@
             </a:r>
             <a:endParaRPr lang="es-ES" sz="1800" b="0" u="none" strike="noStrike">
               <a:solidFill>
-                <a:schemeClr val="dk2"/>
-              </a:solidFill>
-              <a:effectLst/>
-              <a:uFillTx/>
-              <a:latin typeface="Aptos Light"/>
+                <a:srgbClr val="000000"/>
+              </a:solidFill>
+              <a:effectLst/>
+              <a:uFillTx/>
+              <a:latin typeface="Arial"/>
             </a:endParaRPr>
           </a:p>
           <a:p>
@@ -11301,11 +11670,11 @@
             </a:r>
             <a:endParaRPr lang="es-ES" sz="1800" b="0" u="none" strike="noStrike">
               <a:solidFill>
-                <a:schemeClr val="dk2"/>
-              </a:solidFill>
-              <a:effectLst/>
-              <a:uFillTx/>
-              <a:latin typeface="Aptos Light"/>
+                <a:srgbClr val="000000"/>
+              </a:solidFill>
+              <a:effectLst/>
+              <a:uFillTx/>
+              <a:latin typeface="Arial"/>
             </a:endParaRPr>
           </a:p>
           <a:p>
@@ -11335,11 +11704,11 @@
             </a:r>
             <a:endParaRPr lang="es-ES" sz="1800" b="0" u="none" strike="noStrike">
               <a:solidFill>
-                <a:schemeClr val="dk2"/>
-              </a:solidFill>
-              <a:effectLst/>
-              <a:uFillTx/>
-              <a:latin typeface="Aptos Light"/>
+                <a:srgbClr val="000000"/>
+              </a:solidFill>
+              <a:effectLst/>
+              <a:uFillTx/>
+              <a:latin typeface="Arial"/>
             </a:endParaRPr>
           </a:p>
           <a:p>
@@ -11369,11 +11738,11 @@
             </a:r>
             <a:endParaRPr lang="es-ES" sz="1800" b="0" u="none" strike="noStrike">
               <a:solidFill>
-                <a:schemeClr val="dk2"/>
-              </a:solidFill>
-              <a:effectLst/>
-              <a:uFillTx/>
-              <a:latin typeface="Aptos Light"/>
+                <a:srgbClr val="000000"/>
+              </a:solidFill>
+              <a:effectLst/>
+              <a:uFillTx/>
+              <a:latin typeface="Arial"/>
             </a:endParaRPr>
           </a:p>
           <a:p>
@@ -11403,11 +11772,11 @@
             </a:r>
             <a:endParaRPr lang="es-ES" sz="1800" b="0" u="none" strike="noStrike">
               <a:solidFill>
-                <a:schemeClr val="dk2"/>
-              </a:solidFill>
-              <a:effectLst/>
-              <a:uFillTx/>
-              <a:latin typeface="Aptos Light"/>
+                <a:srgbClr val="000000"/>
+              </a:solidFill>
+              <a:effectLst/>
+              <a:uFillTx/>
+              <a:latin typeface="Arial"/>
             </a:endParaRPr>
           </a:p>
           <a:p>
@@ -11425,11 +11794,11 @@
             </a:pPr>
             <a:endParaRPr lang="es-ES" sz="1600" b="0" u="none" strike="noStrike">
               <a:solidFill>
-                <a:schemeClr val="dk2"/>
-              </a:solidFill>
-              <a:effectLst/>
-              <a:uFillTx/>
-              <a:latin typeface="Aptos Light"/>
+                <a:srgbClr val="000000"/>
+              </a:solidFill>
+              <a:effectLst/>
+              <a:uFillTx/>
+              <a:latin typeface="Arial"/>
             </a:endParaRPr>
           </a:p>
         </p:txBody>
@@ -11469,7 +11838,7 @@
         <p:txBody>
           <a:bodyPr/>
           <a:p>
-            <a:fld id="{E28532DF-1D8D-4DFC-BB6D-AEA681C48837}" type="slidenum">
+            <a:fld id="{241B81D5-6770-4F74-A863-7CEE25AAC2DF}" type="slidenum">
               <a:t>7</a:t>
             </a:fld>
           </a:p>
@@ -11489,7 +11858,7 @@
         <p:txBody>
           <a:bodyPr/>
           <a:p>
-            <a:fld id="{2ABC3578-0B3C-4B04-B0EC-2FC24B292C3B}" type="datetime1">
+            <a:fld id="{652F67C1-E71B-4F1E-942E-166F3D420C40}" type="datetime1">
               <a:rPr lang="es-ES"/>
               <a:t>10/03/2026</a:t>
             </a:fld>
@@ -11539,7 +11908,7 @@
         <p:spPr>
           <a:xfrm>
             <a:off x="871200" y="-5760"/>
-            <a:ext cx="10449360" cy="806040"/>
+            <a:ext cx="10449000" cy="805680"/>
           </a:xfrm>
           <a:prstGeom prst="rect">
             <a:avLst/>
@@ -11559,6 +11928,9 @@
                 <a:spcPct val="100000"/>
               </a:lnSpc>
               <a:buNone/>
+              <a:tabLst>
+                <a:tab algn="l" pos="0"/>
+              </a:tabLst>
             </a:pPr>
             <a:r>
               <a:rPr lang="es-ES" sz="4000" b="0" u="none" strike="noStrike">
@@ -11574,11 +11946,11 @@
             </a:r>
             <a:endParaRPr lang="es-ES" sz="4000" b="0" u="none" strike="noStrike">
               <a:solidFill>
-                <a:schemeClr val="dk1"/>
-              </a:solidFill>
-              <a:effectLst/>
-              <a:uFillTx/>
-              <a:latin typeface="Aptos Light"/>
+                <a:srgbClr val="000000"/>
+              </a:solidFill>
+              <a:effectLst/>
+              <a:uFillTx/>
+              <a:latin typeface="Arial"/>
             </a:endParaRPr>
           </a:p>
         </p:txBody>
@@ -11596,7 +11968,7 @@
         <p:spPr>
           <a:xfrm>
             <a:off x="877680" y="1104480"/>
-            <a:ext cx="10442160" cy="4956840"/>
+            <a:ext cx="10441800" cy="4956480"/>
           </a:xfrm>
           <a:prstGeom prst="rect">
             <a:avLst/>
@@ -11637,11 +12009,11 @@
             </a:r>
             <a:endParaRPr lang="es-ES" sz="2000" b="0" u="none" strike="noStrike">
               <a:solidFill>
-                <a:schemeClr val="dk2"/>
-              </a:solidFill>
-              <a:effectLst/>
-              <a:uFillTx/>
-              <a:latin typeface="Aptos Light"/>
+                <a:srgbClr val="000000"/>
+              </a:solidFill>
+              <a:effectLst/>
+              <a:uFillTx/>
+              <a:latin typeface="Arial"/>
             </a:endParaRPr>
           </a:p>
           <a:p>
@@ -11683,11 +12055,11 @@
             </a:r>
             <a:endParaRPr lang="es-ES" sz="2000" b="0" u="none" strike="noStrike">
               <a:solidFill>
-                <a:schemeClr val="dk2"/>
-              </a:solidFill>
-              <a:effectLst/>
-              <a:uFillTx/>
-              <a:latin typeface="Aptos Light"/>
+                <a:srgbClr val="000000"/>
+              </a:solidFill>
+              <a:effectLst/>
+              <a:uFillTx/>
+              <a:latin typeface="Arial"/>
             </a:endParaRPr>
           </a:p>
           <a:p>
@@ -11729,11 +12101,11 @@
             </a:r>
             <a:endParaRPr lang="es-ES" sz="2000" b="0" u="none" strike="noStrike">
               <a:solidFill>
-                <a:schemeClr val="dk2"/>
-              </a:solidFill>
-              <a:effectLst/>
-              <a:uFillTx/>
-              <a:latin typeface="Aptos Light"/>
+                <a:srgbClr val="000000"/>
+              </a:solidFill>
+              <a:effectLst/>
+              <a:uFillTx/>
+              <a:latin typeface="Arial"/>
             </a:endParaRPr>
           </a:p>
           <a:p>
@@ -11751,11 +12123,11 @@
             </a:pPr>
             <a:endParaRPr lang="es-ES" sz="2000" b="0" u="none" strike="noStrike">
               <a:solidFill>
-                <a:schemeClr val="dk2"/>
-              </a:solidFill>
-              <a:effectLst/>
-              <a:uFillTx/>
-              <a:latin typeface="Aptos Light"/>
+                <a:srgbClr val="000000"/>
+              </a:solidFill>
+              <a:effectLst/>
+              <a:uFillTx/>
+              <a:latin typeface="Arial"/>
             </a:endParaRPr>
           </a:p>
           <a:p>
@@ -11785,11 +12157,11 @@
             </a:r>
             <a:endParaRPr lang="es-ES" sz="2000" b="0" u="none" strike="noStrike">
               <a:solidFill>
-                <a:schemeClr val="dk2"/>
-              </a:solidFill>
-              <a:effectLst/>
-              <a:uFillTx/>
-              <a:latin typeface="Aptos Light"/>
+                <a:srgbClr val="000000"/>
+              </a:solidFill>
+              <a:effectLst/>
+              <a:uFillTx/>
+              <a:latin typeface="Arial"/>
             </a:endParaRPr>
           </a:p>
           <a:p>
@@ -11819,11 +12191,11 @@
             </a:r>
             <a:endParaRPr lang="es-ES" sz="2000" b="0" u="none" strike="noStrike">
               <a:solidFill>
-                <a:schemeClr val="dk2"/>
-              </a:solidFill>
-              <a:effectLst/>
-              <a:uFillTx/>
-              <a:latin typeface="Aptos Light"/>
+                <a:srgbClr val="000000"/>
+              </a:solidFill>
+              <a:effectLst/>
+              <a:uFillTx/>
+              <a:latin typeface="Arial"/>
             </a:endParaRPr>
           </a:p>
           <a:p>
@@ -11853,11 +12225,11 @@
             </a:r>
             <a:endParaRPr lang="es-ES" sz="2000" b="0" u="none" strike="noStrike">
               <a:solidFill>
-                <a:schemeClr val="dk2"/>
-              </a:solidFill>
-              <a:effectLst/>
-              <a:uFillTx/>
-              <a:latin typeface="Aptos Light"/>
+                <a:srgbClr val="000000"/>
+              </a:solidFill>
+              <a:effectLst/>
+              <a:uFillTx/>
+              <a:latin typeface="Arial"/>
             </a:endParaRPr>
           </a:p>
           <a:p>
@@ -11875,11 +12247,11 @@
             </a:pPr>
             <a:endParaRPr lang="es-ES" sz="2000" b="0" u="none" strike="noStrike">
               <a:solidFill>
-                <a:schemeClr val="dk2"/>
-              </a:solidFill>
-              <a:effectLst/>
-              <a:uFillTx/>
-              <a:latin typeface="Aptos Light"/>
+                <a:srgbClr val="000000"/>
+              </a:solidFill>
+              <a:effectLst/>
+              <a:uFillTx/>
+              <a:latin typeface="Arial"/>
             </a:endParaRPr>
           </a:p>
           <a:p>
@@ -11897,11 +12269,11 @@
             </a:pPr>
             <a:endParaRPr lang="es-ES" sz="2000" b="0" u="none" strike="noStrike">
               <a:solidFill>
-                <a:schemeClr val="dk2"/>
-              </a:solidFill>
-              <a:effectLst/>
-              <a:uFillTx/>
-              <a:latin typeface="Aptos Light"/>
+                <a:srgbClr val="000000"/>
+              </a:solidFill>
+              <a:effectLst/>
+              <a:uFillTx/>
+              <a:latin typeface="Arial"/>
             </a:endParaRPr>
           </a:p>
         </p:txBody>
@@ -11941,7 +12313,7 @@
         <p:txBody>
           <a:bodyPr/>
           <a:p>
-            <a:fld id="{DE80C852-BA02-42B4-BA7D-323B0BF739E6}" type="slidenum">
+            <a:fld id="{0D049D8E-CB18-4D83-9016-EEA8FAF7095A}" type="slidenum">
               <a:t>8</a:t>
             </a:fld>
           </a:p>
@@ -11961,7 +12333,7 @@
         <p:txBody>
           <a:bodyPr/>
           <a:p>
-            <a:fld id="{339069B8-1727-4A34-A6D4-5782B0F0CFC6}" type="datetime1">
+            <a:fld id="{FD3EC390-5431-47FD-8DC2-42675B097BD2}" type="datetime1">
               <a:rPr lang="es-ES"/>
               <a:t>10/03/2026</a:t>
             </a:fld>

--- a/retos/Reto_03_UT3_PC_Oficina_y_MiniPC/docs/Javier_Borrueco_Lorite_FHW_UT3_Reto_03.pptx
+++ b/retos/Reto_03_UT3_PC_Oficina_y_MiniPC/docs/Javier_Borrueco_Lorite_FHW_UT3_Reto_03.pptx
@@ -20,8 +20,8 @@
 </file>
 
 <file path=ppt/slideLayouts/slideLayout1.xml><?xml version="1.0" encoding="utf-8"?>
-<p:sldLayout xmlns:a="http://schemas.openxmlformats.org/drawingml/2006/main" xmlns:p="http://schemas.openxmlformats.org/presentationml/2006/main" xmlns:r="http://schemas.openxmlformats.org/officeDocument/2006/relationships" xmlns:p14="http://schemas.microsoft.com/office/powerpoint/2010/main" xmlns:p15="http://schemas.microsoft.com/office/powerpoint/2012/main" xmlns:mc="http://schemas.openxmlformats.org/markup-compatibility/2006" type="blank" preserve="1">
-  <p:cSld name="Blank">
+<p:sldLayout xmlns:a="http://schemas.openxmlformats.org/drawingml/2006/main" xmlns:p="http://schemas.openxmlformats.org/presentationml/2006/main" xmlns:r="http://schemas.openxmlformats.org/officeDocument/2006/relationships" xmlns:p14="http://schemas.microsoft.com/office/powerpoint/2010/main" xmlns:p15="http://schemas.microsoft.com/office/powerpoint/2012/main" xmlns:mc="http://schemas.openxmlformats.org/markup-compatibility/2006" type="twoObj" preserve="1">
+  <p:cSld name="Two Content">
     <p:bg>
       <p:bgPr>
         <a:solidFill>
@@ -52,7 +52,7 @@
         <p:spPr>
           <a:xfrm>
             <a:off x="0" y="0"/>
-            <a:ext cx="12191400" cy="6859440"/>
+            <a:ext cx="12191040" cy="6859080"/>
           </a:xfrm>
           <a:prstGeom prst="rect">
             <a:avLst/>
@@ -109,13 +109,492 @@
             <a:spLocks noGrp="1"/>
           </p:cNvSpPr>
           <p:nvPr>
+            <p:ph type="title"/>
+          </p:nvPr>
+        </p:nvSpPr>
+        <p:spPr>
+          <a:xfrm>
+            <a:off x="871200" y="588240"/>
+            <a:ext cx="10448640" cy="1264680"/>
+          </a:xfrm>
+          <a:prstGeom prst="rect">
+            <a:avLst/>
+          </a:prstGeom>
+          <a:noFill/>
+          <a:ln w="0">
+            <a:noFill/>
+          </a:ln>
+        </p:spPr>
+        <p:txBody>
+          <a:bodyPr lIns="91440" rIns="91440" tIns="45720" bIns="45720" anchor="b">
+            <a:noAutofit/>
+          </a:bodyPr>
+          <a:p>
+            <a:pPr indent="0" defTabSz="914400">
+              <a:lnSpc>
+                <a:spcPct val="100000"/>
+              </a:lnSpc>
+              <a:buNone/>
+              <a:tabLst>
+                <a:tab algn="l" pos="0"/>
+              </a:tabLst>
+            </a:pPr>
+            <a:r>
+              <a:rPr lang="en-US" sz="3200" b="0" u="none" strike="noStrike">
+                <a:solidFill>
+                  <a:schemeClr val="dk2"/>
+                </a:solidFill>
+                <a:effectLst/>
+                <a:uFillTx/>
+                <a:latin typeface="Walbaum Display"/>
+              </a:rPr>
+              <a:t>Click to edit </a:t>
+            </a:r>
+            <a:r>
+              <a:rPr lang="en-US" sz="3200" b="0" u="none" strike="noStrike">
+                <a:solidFill>
+                  <a:schemeClr val="dk2"/>
+                </a:solidFill>
+                <a:effectLst/>
+                <a:uFillTx/>
+                <a:latin typeface="Walbaum Display"/>
+              </a:rPr>
+              <a:t>Master title </a:t>
+            </a:r>
+            <a:r>
+              <a:rPr lang="en-US" sz="3200" b="0" u="none" strike="noStrike">
+                <a:solidFill>
+                  <a:schemeClr val="dk2"/>
+                </a:solidFill>
+                <a:effectLst/>
+                <a:uFillTx/>
+                <a:latin typeface="Walbaum Display"/>
+              </a:rPr>
+              <a:t>style</a:t>
+            </a:r>
+            <a:endParaRPr lang="es-ES" sz="3200" b="0" u="none" strike="noStrike">
+              <a:solidFill>
+                <a:srgbClr val="000000"/>
+              </a:solidFill>
+              <a:effectLst/>
+              <a:uFillTx/>
+              <a:latin typeface="Arial"/>
+            </a:endParaRPr>
+          </a:p>
+        </p:txBody>
+      </p:sp>
+      <p:sp>
+        <p:nvSpPr>
+          <p:cNvPr id="4" name="PlaceHolder 2"/>
+          <p:cNvSpPr>
+            <a:spLocks noGrp="1"/>
+          </p:cNvSpPr>
+          <p:nvPr>
+            <p:ph type="body"/>
+          </p:nvPr>
+        </p:nvSpPr>
+        <p:spPr>
+          <a:xfrm>
+            <a:off x="877680" y="2159280"/>
+            <a:ext cx="4976280" cy="4016880"/>
+          </a:xfrm>
+          <a:prstGeom prst="rect">
+            <a:avLst/>
+          </a:prstGeom>
+          <a:noFill/>
+          <a:ln w="0">
+            <a:noFill/>
+          </a:ln>
+        </p:spPr>
+        <p:txBody>
+          <a:bodyPr lIns="91440" rIns="91440" tIns="45720" bIns="45720" anchor="t">
+            <a:noAutofit/>
+          </a:bodyPr>
+          <a:p>
+            <a:pPr marL="228600" indent="-228600" defTabSz="914400">
+              <a:lnSpc>
+                <a:spcPct val="120000"/>
+              </a:lnSpc>
+              <a:spcBef>
+                <a:spcPts val="1001"/>
+              </a:spcBef>
+              <a:buClr>
+                <a:srgbClr val="35403a"/>
+              </a:buClr>
+              <a:buFont typeface="Arial"/>
+              <a:buChar char="•"/>
+            </a:pPr>
+            <a:r>
+              <a:rPr lang="en-US" sz="1600" b="0" u="none" strike="noStrike">
+                <a:solidFill>
+                  <a:schemeClr val="dk2"/>
+                </a:solidFill>
+                <a:effectLst/>
+                <a:uFillTx/>
+                <a:latin typeface="Aptos Light"/>
+              </a:rPr>
+              <a:t>Click to edit Master text styles</a:t>
+            </a:r>
+            <a:endParaRPr lang="es-ES" sz="1600" b="0" u="none" strike="noStrike">
+              <a:solidFill>
+                <a:srgbClr val="000000"/>
+              </a:solidFill>
+              <a:effectLst/>
+              <a:uFillTx/>
+              <a:latin typeface="Arial"/>
+            </a:endParaRPr>
+          </a:p>
+          <a:p>
+            <a:pPr marL="457200" lvl="1" indent="-228600" defTabSz="914400">
+              <a:lnSpc>
+                <a:spcPct val="120000"/>
+              </a:lnSpc>
+              <a:spcBef>
+                <a:spcPts val="499"/>
+              </a:spcBef>
+              <a:buClr>
+                <a:srgbClr val="35403a"/>
+              </a:buClr>
+              <a:buFont typeface="Arial"/>
+              <a:buChar char="•"/>
+            </a:pPr>
+            <a:r>
+              <a:rPr lang="en-US" sz="1400" b="0" u="none" strike="noStrike">
+                <a:solidFill>
+                  <a:schemeClr val="dk2"/>
+                </a:solidFill>
+                <a:effectLst/>
+                <a:uFillTx/>
+                <a:latin typeface="Aptos Light"/>
+              </a:rPr>
+              <a:t>Second level</a:t>
+            </a:r>
+            <a:endParaRPr lang="es-ES" sz="1400" b="0" u="none" strike="noStrike">
+              <a:solidFill>
+                <a:srgbClr val="000000"/>
+              </a:solidFill>
+              <a:effectLst/>
+              <a:uFillTx/>
+              <a:latin typeface="Arial"/>
+            </a:endParaRPr>
+          </a:p>
+          <a:p>
+            <a:pPr marL="685800" lvl="2" indent="-228600" defTabSz="914400">
+              <a:lnSpc>
+                <a:spcPct val="120000"/>
+              </a:lnSpc>
+              <a:spcBef>
+                <a:spcPts val="499"/>
+              </a:spcBef>
+              <a:buClr>
+                <a:srgbClr val="35403a"/>
+              </a:buClr>
+              <a:buFont typeface="Arial"/>
+              <a:buChar char="•"/>
+            </a:pPr>
+            <a:r>
+              <a:rPr lang="en-US" sz="1200" b="0" u="none" strike="noStrike">
+                <a:solidFill>
+                  <a:schemeClr val="dk2"/>
+                </a:solidFill>
+                <a:effectLst/>
+                <a:uFillTx/>
+                <a:latin typeface="Aptos Light"/>
+              </a:rPr>
+              <a:t>Third level</a:t>
+            </a:r>
+            <a:endParaRPr lang="es-ES" sz="1200" b="0" u="none" strike="noStrike">
+              <a:solidFill>
+                <a:srgbClr val="000000"/>
+              </a:solidFill>
+              <a:effectLst/>
+              <a:uFillTx/>
+              <a:latin typeface="Arial"/>
+            </a:endParaRPr>
+          </a:p>
+          <a:p>
+            <a:pPr marL="914400" lvl="3" indent="-228600" defTabSz="914400">
+              <a:lnSpc>
+                <a:spcPct val="120000"/>
+              </a:lnSpc>
+              <a:spcBef>
+                <a:spcPts val="499"/>
+              </a:spcBef>
+              <a:buClr>
+                <a:srgbClr val="35403a"/>
+              </a:buClr>
+              <a:buFont typeface="Arial"/>
+              <a:buChar char="•"/>
+            </a:pPr>
+            <a:r>
+              <a:rPr lang="en-US" sz="1100" b="0" u="none" strike="noStrike">
+                <a:solidFill>
+                  <a:schemeClr val="dk2"/>
+                </a:solidFill>
+                <a:effectLst/>
+                <a:uFillTx/>
+                <a:latin typeface="Aptos Light"/>
+              </a:rPr>
+              <a:t>Fourth level</a:t>
+            </a:r>
+            <a:endParaRPr lang="es-ES" sz="1100" b="0" u="none" strike="noStrike">
+              <a:solidFill>
+                <a:srgbClr val="000000"/>
+              </a:solidFill>
+              <a:effectLst/>
+              <a:uFillTx/>
+              <a:latin typeface="Arial"/>
+            </a:endParaRPr>
+          </a:p>
+          <a:p>
+            <a:pPr marL="1143000" lvl="4" indent="-228600" defTabSz="914400">
+              <a:lnSpc>
+                <a:spcPct val="120000"/>
+              </a:lnSpc>
+              <a:spcBef>
+                <a:spcPts val="499"/>
+              </a:spcBef>
+              <a:buClr>
+                <a:srgbClr val="35403a"/>
+              </a:buClr>
+              <a:buFont typeface="Arial"/>
+              <a:buChar char="•"/>
+            </a:pPr>
+            <a:r>
+              <a:rPr lang="en-US" sz="1100" b="0" u="none" strike="noStrike">
+                <a:solidFill>
+                  <a:schemeClr val="dk2"/>
+                </a:solidFill>
+                <a:effectLst/>
+                <a:uFillTx/>
+                <a:latin typeface="Aptos Light"/>
+              </a:rPr>
+              <a:t>Fifth level</a:t>
+            </a:r>
+            <a:endParaRPr lang="es-ES" sz="1100" b="0" u="none" strike="noStrike">
+              <a:solidFill>
+                <a:srgbClr val="000000"/>
+              </a:solidFill>
+              <a:effectLst/>
+              <a:uFillTx/>
+              <a:latin typeface="Arial"/>
+            </a:endParaRPr>
+          </a:p>
+        </p:txBody>
+      </p:sp>
+      <p:sp>
+        <p:nvSpPr>
+          <p:cNvPr id="5" name="PlaceHolder 3"/>
+          <p:cNvSpPr>
+            <a:spLocks noGrp="1"/>
+          </p:cNvSpPr>
+          <p:nvPr>
+            <p:ph type="body"/>
+          </p:nvPr>
+        </p:nvSpPr>
+        <p:spPr>
+          <a:xfrm>
+            <a:off x="6328440" y="2159280"/>
+            <a:ext cx="4984560" cy="4016880"/>
+          </a:xfrm>
+          <a:prstGeom prst="rect">
+            <a:avLst/>
+          </a:prstGeom>
+          <a:noFill/>
+          <a:ln w="0">
+            <a:noFill/>
+          </a:ln>
+        </p:spPr>
+        <p:txBody>
+          <a:bodyPr lIns="91440" rIns="91440" tIns="45720" bIns="45720" anchor="t">
+            <a:noAutofit/>
+          </a:bodyPr>
+          <a:p>
+            <a:pPr marL="228600" indent="-228600" defTabSz="914400">
+              <a:lnSpc>
+                <a:spcPct val="120000"/>
+              </a:lnSpc>
+              <a:spcBef>
+                <a:spcPts val="1001"/>
+              </a:spcBef>
+              <a:buClr>
+                <a:srgbClr val="35403a"/>
+              </a:buClr>
+              <a:buFont typeface="Arial"/>
+              <a:buChar char="•"/>
+            </a:pPr>
+            <a:r>
+              <a:rPr lang="en-US" sz="1600" b="0" u="none" strike="noStrike">
+                <a:solidFill>
+                  <a:schemeClr val="dk2"/>
+                </a:solidFill>
+                <a:effectLst/>
+                <a:uFillTx/>
+                <a:latin typeface="Aptos Light"/>
+              </a:rPr>
+              <a:t>Click to edit Master text styles</a:t>
+            </a:r>
+            <a:endParaRPr lang="es-ES" sz="1600" b="0" u="none" strike="noStrike">
+              <a:solidFill>
+                <a:srgbClr val="000000"/>
+              </a:solidFill>
+              <a:effectLst/>
+              <a:uFillTx/>
+              <a:latin typeface="Arial"/>
+            </a:endParaRPr>
+          </a:p>
+          <a:p>
+            <a:pPr marL="457200" lvl="1" indent="-228600" defTabSz="914400">
+              <a:lnSpc>
+                <a:spcPct val="120000"/>
+              </a:lnSpc>
+              <a:spcBef>
+                <a:spcPts val="499"/>
+              </a:spcBef>
+              <a:buClr>
+                <a:srgbClr val="35403a"/>
+              </a:buClr>
+              <a:buFont typeface="Arial"/>
+              <a:buChar char="•"/>
+            </a:pPr>
+            <a:r>
+              <a:rPr lang="en-US" sz="1400" b="0" u="none" strike="noStrike">
+                <a:solidFill>
+                  <a:schemeClr val="dk2"/>
+                </a:solidFill>
+                <a:effectLst/>
+                <a:uFillTx/>
+                <a:latin typeface="Aptos Light"/>
+              </a:rPr>
+              <a:t>Second level</a:t>
+            </a:r>
+            <a:endParaRPr lang="es-ES" sz="1400" b="0" u="none" strike="noStrike">
+              <a:solidFill>
+                <a:srgbClr val="000000"/>
+              </a:solidFill>
+              <a:effectLst/>
+              <a:uFillTx/>
+              <a:latin typeface="Arial"/>
+            </a:endParaRPr>
+          </a:p>
+          <a:p>
+            <a:pPr marL="685800" lvl="2" indent="-228600" defTabSz="914400">
+              <a:lnSpc>
+                <a:spcPct val="120000"/>
+              </a:lnSpc>
+              <a:spcBef>
+                <a:spcPts val="499"/>
+              </a:spcBef>
+              <a:buClr>
+                <a:srgbClr val="35403a"/>
+              </a:buClr>
+              <a:buFont typeface="Arial"/>
+              <a:buChar char="•"/>
+            </a:pPr>
+            <a:r>
+              <a:rPr lang="en-US" sz="1200" b="0" u="none" strike="noStrike">
+                <a:solidFill>
+                  <a:schemeClr val="dk2"/>
+                </a:solidFill>
+                <a:effectLst/>
+                <a:uFillTx/>
+                <a:latin typeface="Aptos Light"/>
+              </a:rPr>
+              <a:t>Third level</a:t>
+            </a:r>
+            <a:endParaRPr lang="es-ES" sz="1200" b="0" u="none" strike="noStrike">
+              <a:solidFill>
+                <a:srgbClr val="000000"/>
+              </a:solidFill>
+              <a:effectLst/>
+              <a:uFillTx/>
+              <a:latin typeface="Arial"/>
+            </a:endParaRPr>
+          </a:p>
+          <a:p>
+            <a:pPr marL="914400" lvl="3" indent="-228600" defTabSz="914400">
+              <a:lnSpc>
+                <a:spcPct val="120000"/>
+              </a:lnSpc>
+              <a:spcBef>
+                <a:spcPts val="499"/>
+              </a:spcBef>
+              <a:buClr>
+                <a:srgbClr val="35403a"/>
+              </a:buClr>
+              <a:buFont typeface="Arial"/>
+              <a:buChar char="•"/>
+            </a:pPr>
+            <a:r>
+              <a:rPr lang="en-US" sz="1100" b="0" u="none" strike="noStrike">
+                <a:solidFill>
+                  <a:schemeClr val="dk2"/>
+                </a:solidFill>
+                <a:effectLst/>
+                <a:uFillTx/>
+                <a:latin typeface="Aptos Light"/>
+              </a:rPr>
+              <a:t>Fourth level</a:t>
+            </a:r>
+            <a:endParaRPr lang="es-ES" sz="1100" b="0" u="none" strike="noStrike">
+              <a:solidFill>
+                <a:srgbClr val="000000"/>
+              </a:solidFill>
+              <a:effectLst/>
+              <a:uFillTx/>
+              <a:latin typeface="Arial"/>
+            </a:endParaRPr>
+          </a:p>
+          <a:p>
+            <a:pPr marL="1143000" lvl="4" indent="-228600" defTabSz="914400">
+              <a:lnSpc>
+                <a:spcPct val="120000"/>
+              </a:lnSpc>
+              <a:spcBef>
+                <a:spcPts val="499"/>
+              </a:spcBef>
+              <a:buClr>
+                <a:srgbClr val="35403a"/>
+              </a:buClr>
+              <a:buFont typeface="Arial"/>
+              <a:buChar char="•"/>
+            </a:pPr>
+            <a:r>
+              <a:rPr lang="en-US" sz="1100" b="0" u="none" strike="noStrike">
+                <a:solidFill>
+                  <a:schemeClr val="dk2"/>
+                </a:solidFill>
+                <a:effectLst/>
+                <a:uFillTx/>
+                <a:latin typeface="Aptos Light"/>
+              </a:rPr>
+              <a:t>Fifth level</a:t>
+            </a:r>
+            <a:endParaRPr lang="es-ES" sz="1100" b="0" u="none" strike="noStrike">
+              <a:solidFill>
+                <a:srgbClr val="000000"/>
+              </a:solidFill>
+              <a:effectLst/>
+              <a:uFillTx/>
+              <a:latin typeface="Arial"/>
+            </a:endParaRPr>
+          </a:p>
+        </p:txBody>
+      </p:sp>
+      <p:sp>
+        <p:nvSpPr>
+          <p:cNvPr id="6" name="PlaceHolder 4"/>
+          <p:cNvSpPr>
+            <a:spLocks noGrp="1"/>
+          </p:cNvSpPr>
+          <p:nvPr>
             <p:ph type="dt" idx="1"/>
           </p:nvPr>
         </p:nvSpPr>
         <p:spPr>
           <a:xfrm>
             <a:off x="877680" y="6356520"/>
-            <a:ext cx="2742480" cy="364320"/>
+            <a:ext cx="2742120" cy="363960"/>
           </a:xfrm>
           <a:prstGeom prst="rect">
             <a:avLst/>
@@ -182,7 +661,7 @@
       </p:sp>
       <p:sp>
         <p:nvSpPr>
-          <p:cNvPr id="4" name="PlaceHolder 2"/>
+          <p:cNvPr id="7" name="PlaceHolder 5"/>
           <p:cNvSpPr>
             <a:spLocks noGrp="1"/>
           </p:cNvSpPr>
@@ -193,7 +672,7 @@
         <p:spPr>
           <a:xfrm>
             <a:off x="7132320" y="6356520"/>
-            <a:ext cx="4296960" cy="364320"/>
+            <a:ext cx="4296600" cy="363960"/>
           </a:xfrm>
           <a:prstGeom prst="rect">
             <a:avLst/>
@@ -260,7 +739,7 @@
       </p:sp>
       <p:sp>
         <p:nvSpPr>
-          <p:cNvPr id="5" name="PlaceHolder 3"/>
+          <p:cNvPr id="8" name="PlaceHolder 6"/>
           <p:cNvSpPr>
             <a:spLocks noGrp="1"/>
           </p:cNvSpPr>
@@ -271,7 +750,7 @@
         <p:spPr>
           <a:xfrm>
             <a:off x="11430000" y="6356520"/>
-            <a:ext cx="520560" cy="364320"/>
+            <a:ext cx="520200" cy="363960"/>
           </a:xfrm>
           <a:prstGeom prst="rect">
             <a:avLst/>
@@ -314,7 +793,7 @@
                 <a:tab algn="l" pos="0"/>
               </a:tabLst>
             </a:pPr>
-            <a:fld id="{DC752A89-4F37-465B-99C2-8FE63609BB0F}" type="slidenum">
+            <a:fld id="{F533C509-6F0E-40C4-B944-0B86E1CE88B1}" type="slidenum">
               <a:rPr lang="en-US" sz="1400" b="0" u="none" strike="noStrike">
                 <a:solidFill>
                   <a:schemeClr val="dk2"/>
@@ -342,8 +821,8 @@
 </file>
 
 <file path=ppt/slideLayouts/slideLayout10.xml><?xml version="1.0" encoding="utf-8"?>
-<p:sldLayout xmlns:a="http://schemas.openxmlformats.org/drawingml/2006/main" xmlns:p="http://schemas.openxmlformats.org/presentationml/2006/main" xmlns:r="http://schemas.openxmlformats.org/officeDocument/2006/relationships" xmlns:p14="http://schemas.microsoft.com/office/powerpoint/2010/main" xmlns:p15="http://schemas.microsoft.com/office/powerpoint/2012/main" xmlns:mc="http://schemas.openxmlformats.org/markup-compatibility/2006" type="blank" preserve="1">
-  <p:cSld name="Comparison">
+<p:sldLayout xmlns:a="http://schemas.openxmlformats.org/drawingml/2006/main" xmlns:p="http://schemas.openxmlformats.org/presentationml/2006/main" xmlns:r="http://schemas.openxmlformats.org/officeDocument/2006/relationships" xmlns:p14="http://schemas.microsoft.com/office/powerpoint/2010/main" xmlns:p15="http://schemas.microsoft.com/office/powerpoint/2012/main" xmlns:mc="http://schemas.openxmlformats.org/markup-compatibility/2006" type="obj" preserve="1">
+  <p:cSld name="Title and Content">
     <p:bg>
       <p:bgPr>
         <a:solidFill>
@@ -367,14 +846,14 @@
       </p:grpSpPr>
       <p:sp>
         <p:nvSpPr>
-          <p:cNvPr id="57" name="Rectangle 6"/>
+          <p:cNvPr id="59" name="Rectangle 6"/>
           <p:cNvSpPr/>
           <p:nvPr/>
         </p:nvSpPr>
         <p:spPr>
           <a:xfrm>
             <a:off x="0" y="0"/>
-            <a:ext cx="12191400" cy="6859440"/>
+            <a:ext cx="12191040" cy="6859080"/>
           </a:xfrm>
           <a:prstGeom prst="rect">
             <a:avLst/>
@@ -426,7 +905,7 @@
       </p:sp>
       <p:sp>
         <p:nvSpPr>
-          <p:cNvPr id="58" name="PlaceHolder 1"/>
+          <p:cNvPr id="60" name="PlaceHolder 1"/>
           <p:cNvSpPr>
             <a:spLocks noGrp="1"/>
           </p:cNvSpPr>
@@ -436,8 +915,8 @@
         </p:nvSpPr>
         <p:spPr>
           <a:xfrm>
-            <a:off x="881280" y="602640"/>
-            <a:ext cx="10428480" cy="768240"/>
+            <a:off x="871200" y="588240"/>
+            <a:ext cx="10448640" cy="1264680"/>
           </a:xfrm>
           <a:prstGeom prst="rect">
             <a:avLst/>
@@ -485,7 +964,7 @@
       </p:sp>
       <p:sp>
         <p:nvSpPr>
-          <p:cNvPr id="59" name="PlaceHolder 2"/>
+          <p:cNvPr id="61" name="PlaceHolder 2"/>
           <p:cNvSpPr>
             <a:spLocks noGrp="1"/>
           </p:cNvSpPr>
@@ -495,70 +974,8 @@
         </p:nvSpPr>
         <p:spPr>
           <a:xfrm>
-            <a:off x="881280" y="1696320"/>
-            <a:ext cx="4962960" cy="646920"/>
-          </a:xfrm>
-          <a:prstGeom prst="rect">
-            <a:avLst/>
-          </a:prstGeom>
-          <a:noFill/>
-          <a:ln w="0">
-            <a:noFill/>
-          </a:ln>
-        </p:spPr>
-        <p:txBody>
-          <a:bodyPr lIns="91440" rIns="91440" tIns="45720" bIns="45720" anchor="b">
-            <a:noAutofit/>
-          </a:bodyPr>
-          <a:p>
-            <a:pPr indent="0" defTabSz="914400">
-              <a:lnSpc>
-                <a:spcPct val="120000"/>
-              </a:lnSpc>
-              <a:spcBef>
-                <a:spcPts val="1001"/>
-              </a:spcBef>
-              <a:buNone/>
-              <a:tabLst>
-                <a:tab algn="l" pos="0"/>
-              </a:tabLst>
-            </a:pPr>
-            <a:r>
-              <a:rPr lang="en-US" sz="1400" b="1" u="none" spc="300" strike="noStrike" cap="all">
-                <a:solidFill>
-                  <a:schemeClr val="dk2"/>
-                </a:solidFill>
-                <a:effectLst/>
-                <a:uFillTx/>
-                <a:latin typeface="Aptos Light"/>
-              </a:rPr>
-              <a:t>Click to edit Master text styles</a:t>
-            </a:r>
-            <a:endParaRPr lang="es-ES" sz="1400" b="0" u="none" strike="noStrike">
-              <a:solidFill>
-                <a:srgbClr val="000000"/>
-              </a:solidFill>
-              <a:effectLst/>
-              <a:uFillTx/>
-              <a:latin typeface="Arial"/>
-            </a:endParaRPr>
-          </a:p>
-        </p:txBody>
-      </p:sp>
-      <p:sp>
-        <p:nvSpPr>
-          <p:cNvPr id="60" name="PlaceHolder 3"/>
-          <p:cNvSpPr>
-            <a:spLocks noGrp="1"/>
-          </p:cNvSpPr>
-          <p:nvPr>
-            <p:ph type="body"/>
-          </p:nvPr>
-        </p:nvSpPr>
-        <p:spPr>
-          <a:xfrm>
-            <a:off x="881280" y="2343960"/>
-            <a:ext cx="4962960" cy="3832560"/>
+            <a:off x="877680" y="2157840"/>
+            <a:ext cx="10441440" cy="3902760"/>
           </a:xfrm>
           <a:prstGeom prst="rect">
             <a:avLst/>
@@ -746,268 +1163,7 @@
       </p:sp>
       <p:sp>
         <p:nvSpPr>
-          <p:cNvPr id="61" name="PlaceHolder 4"/>
-          <p:cNvSpPr>
-            <a:spLocks noGrp="1"/>
-          </p:cNvSpPr>
-          <p:nvPr>
-            <p:ph type="body"/>
-          </p:nvPr>
-        </p:nvSpPr>
-        <p:spPr>
-          <a:xfrm>
-            <a:off x="6322680" y="1696320"/>
-            <a:ext cx="4987440" cy="646920"/>
-          </a:xfrm>
-          <a:prstGeom prst="rect">
-            <a:avLst/>
-          </a:prstGeom>
-          <a:noFill/>
-          <a:ln w="0">
-            <a:noFill/>
-          </a:ln>
-        </p:spPr>
-        <p:txBody>
-          <a:bodyPr lIns="91440" rIns="91440" tIns="45720" bIns="45720" anchor="b">
-            <a:noAutofit/>
-          </a:bodyPr>
-          <a:p>
-            <a:pPr indent="0" defTabSz="914400">
-              <a:lnSpc>
-                <a:spcPct val="120000"/>
-              </a:lnSpc>
-              <a:spcBef>
-                <a:spcPts val="1001"/>
-              </a:spcBef>
-              <a:buNone/>
-              <a:tabLst>
-                <a:tab algn="l" pos="0"/>
-              </a:tabLst>
-            </a:pPr>
-            <a:r>
-              <a:rPr lang="en-US" sz="1400" b="1" u="none" spc="300" strike="noStrike" cap="all">
-                <a:solidFill>
-                  <a:schemeClr val="dk2"/>
-                </a:solidFill>
-                <a:effectLst/>
-                <a:uFillTx/>
-                <a:latin typeface="Aptos Light"/>
-              </a:rPr>
-              <a:t>Click to edit Master text styles</a:t>
-            </a:r>
-            <a:endParaRPr lang="es-ES" sz="1400" b="0" u="none" strike="noStrike">
-              <a:solidFill>
-                <a:srgbClr val="000000"/>
-              </a:solidFill>
-              <a:effectLst/>
-              <a:uFillTx/>
-              <a:latin typeface="Arial"/>
-            </a:endParaRPr>
-          </a:p>
-        </p:txBody>
-      </p:sp>
-      <p:sp>
-        <p:nvSpPr>
-          <p:cNvPr id="62" name="PlaceHolder 5"/>
-          <p:cNvSpPr>
-            <a:spLocks noGrp="1"/>
-          </p:cNvSpPr>
-          <p:nvPr>
-            <p:ph type="body"/>
-          </p:nvPr>
-        </p:nvSpPr>
-        <p:spPr>
-          <a:xfrm>
-            <a:off x="6322680" y="2343960"/>
-            <a:ext cx="4987440" cy="3832560"/>
-          </a:xfrm>
-          <a:prstGeom prst="rect">
-            <a:avLst/>
-          </a:prstGeom>
-          <a:noFill/>
-          <a:ln w="0">
-            <a:noFill/>
-          </a:ln>
-        </p:spPr>
-        <p:txBody>
-          <a:bodyPr lIns="91440" rIns="91440" tIns="45720" bIns="45720" anchor="t">
-            <a:noAutofit/>
-          </a:bodyPr>
-          <a:p>
-            <a:pPr marL="228600" indent="-228600" defTabSz="914400">
-              <a:lnSpc>
-                <a:spcPct val="120000"/>
-              </a:lnSpc>
-              <a:spcBef>
-                <a:spcPts val="1001"/>
-              </a:spcBef>
-              <a:buClr>
-                <a:srgbClr val="35403a"/>
-              </a:buClr>
-              <a:buFont typeface="Arial"/>
-              <a:buChar char="•"/>
-            </a:pPr>
-            <a:r>
-              <a:rPr lang="en-US" sz="1600" b="0" u="none" strike="noStrike">
-                <a:solidFill>
-                  <a:schemeClr val="dk2"/>
-                </a:solidFill>
-                <a:effectLst/>
-                <a:uFillTx/>
-                <a:latin typeface="Aptos Light"/>
-              </a:rPr>
-              <a:t>Click to edit Master text styles</a:t>
-            </a:r>
-            <a:endParaRPr lang="es-ES" sz="1600" b="0" u="none" strike="noStrike">
-              <a:solidFill>
-                <a:srgbClr val="000000"/>
-              </a:solidFill>
-              <a:effectLst/>
-              <a:uFillTx/>
-              <a:latin typeface="Arial"/>
-            </a:endParaRPr>
-          </a:p>
-          <a:p>
-            <a:pPr marL="457200" lvl="1" indent="-228600" defTabSz="914400">
-              <a:lnSpc>
-                <a:spcPct val="120000"/>
-              </a:lnSpc>
-              <a:spcBef>
-                <a:spcPts val="499"/>
-              </a:spcBef>
-              <a:buClr>
-                <a:srgbClr val="35403a"/>
-              </a:buClr>
-              <a:buFont typeface="Arial"/>
-              <a:buChar char="•"/>
-            </a:pPr>
-            <a:r>
-              <a:rPr lang="en-US" sz="1400" b="0" u="none" strike="noStrike">
-                <a:solidFill>
-                  <a:schemeClr val="dk2"/>
-                </a:solidFill>
-                <a:effectLst/>
-                <a:uFillTx/>
-                <a:latin typeface="Aptos Light"/>
-              </a:rPr>
-              <a:t>Second level</a:t>
-            </a:r>
-            <a:endParaRPr lang="es-ES" sz="1400" b="0" u="none" strike="noStrike">
-              <a:solidFill>
-                <a:srgbClr val="000000"/>
-              </a:solidFill>
-              <a:effectLst/>
-              <a:uFillTx/>
-              <a:latin typeface="Arial"/>
-            </a:endParaRPr>
-          </a:p>
-          <a:p>
-            <a:pPr marL="685800" lvl="2" indent="-228600" defTabSz="914400">
-              <a:lnSpc>
-                <a:spcPct val="120000"/>
-              </a:lnSpc>
-              <a:spcBef>
-                <a:spcPts val="499"/>
-              </a:spcBef>
-              <a:buClr>
-                <a:srgbClr val="35403a"/>
-              </a:buClr>
-              <a:buFont typeface="Arial"/>
-              <a:buChar char="•"/>
-            </a:pPr>
-            <a:r>
-              <a:rPr lang="en-US" sz="1200" b="0" u="none" strike="noStrike">
-                <a:solidFill>
-                  <a:schemeClr val="dk2"/>
-                </a:solidFill>
-                <a:effectLst/>
-                <a:uFillTx/>
-                <a:latin typeface="Aptos Light"/>
-              </a:rPr>
-              <a:t>Third level</a:t>
-            </a:r>
-            <a:endParaRPr lang="es-ES" sz="1200" b="0" u="none" strike="noStrike">
-              <a:solidFill>
-                <a:srgbClr val="000000"/>
-              </a:solidFill>
-              <a:effectLst/>
-              <a:uFillTx/>
-              <a:latin typeface="Arial"/>
-            </a:endParaRPr>
-          </a:p>
-          <a:p>
-            <a:pPr marL="914400" lvl="3" indent="-228600" defTabSz="914400">
-              <a:lnSpc>
-                <a:spcPct val="120000"/>
-              </a:lnSpc>
-              <a:spcBef>
-                <a:spcPts val="499"/>
-              </a:spcBef>
-              <a:buClr>
-                <a:srgbClr val="35403a"/>
-              </a:buClr>
-              <a:buFont typeface="Arial"/>
-              <a:buChar char="•"/>
-            </a:pPr>
-            <a:r>
-              <a:rPr lang="en-US" sz="1100" b="0" u="none" strike="noStrike">
-                <a:solidFill>
-                  <a:schemeClr val="dk2"/>
-                </a:solidFill>
-                <a:effectLst/>
-                <a:uFillTx/>
-                <a:latin typeface="Aptos Light"/>
-              </a:rPr>
-              <a:t>Fourth level</a:t>
-            </a:r>
-            <a:endParaRPr lang="es-ES" sz="1100" b="0" u="none" strike="noStrike">
-              <a:solidFill>
-                <a:srgbClr val="000000"/>
-              </a:solidFill>
-              <a:effectLst/>
-              <a:uFillTx/>
-              <a:latin typeface="Arial"/>
-            </a:endParaRPr>
-          </a:p>
-          <a:p>
-            <a:pPr marL="1143000" lvl="4" indent="-228600" defTabSz="914400">
-              <a:lnSpc>
-                <a:spcPct val="120000"/>
-              </a:lnSpc>
-              <a:spcBef>
-                <a:spcPts val="499"/>
-              </a:spcBef>
-              <a:buClr>
-                <a:srgbClr val="35403a"/>
-              </a:buClr>
-              <a:buFont typeface="Arial"/>
-              <a:buChar char="•"/>
-            </a:pPr>
-            <a:r>
-              <a:rPr lang="en-US" sz="1100" b="0" u="none" strike="noStrike">
-                <a:solidFill>
-                  <a:schemeClr val="dk2"/>
-                </a:solidFill>
-                <a:effectLst/>
-                <a:uFillTx/>
-                <a:latin typeface="Aptos Light"/>
-              </a:rPr>
-              <a:t>Fifth level</a:t>
-            </a:r>
-            <a:endParaRPr lang="es-ES" sz="1100" b="0" u="none" strike="noStrike">
-              <a:solidFill>
-                <a:srgbClr val="000000"/>
-              </a:solidFill>
-              <a:effectLst/>
-              <a:uFillTx/>
-              <a:latin typeface="Arial"/>
-            </a:endParaRPr>
-          </a:p>
-        </p:txBody>
-      </p:sp>
-      <p:sp>
-        <p:nvSpPr>
-          <p:cNvPr id="63" name="PlaceHolder 6"/>
+          <p:cNvPr id="62" name="PlaceHolder 3"/>
           <p:cNvSpPr>
             <a:spLocks noGrp="1"/>
           </p:cNvSpPr>
@@ -1018,7 +1174,7 @@
         <p:spPr>
           <a:xfrm>
             <a:off x="877680" y="6356520"/>
-            <a:ext cx="2742480" cy="364320"/>
+            <a:ext cx="2742120" cy="363960"/>
           </a:xfrm>
           <a:prstGeom prst="rect">
             <a:avLst/>
@@ -1085,7 +1241,7 @@
       </p:sp>
       <p:sp>
         <p:nvSpPr>
-          <p:cNvPr id="64" name="PlaceHolder 7"/>
+          <p:cNvPr id="63" name="PlaceHolder 4"/>
           <p:cNvSpPr>
             <a:spLocks noGrp="1"/>
           </p:cNvSpPr>
@@ -1096,7 +1252,7 @@
         <p:spPr>
           <a:xfrm>
             <a:off x="7132320" y="6356520"/>
-            <a:ext cx="4296960" cy="364320"/>
+            <a:ext cx="4296600" cy="363960"/>
           </a:xfrm>
           <a:prstGeom prst="rect">
             <a:avLst/>
@@ -1163,7 +1319,7 @@
       </p:sp>
       <p:sp>
         <p:nvSpPr>
-          <p:cNvPr id="65" name="PlaceHolder 8"/>
+          <p:cNvPr id="64" name="PlaceHolder 5"/>
           <p:cNvSpPr>
             <a:spLocks noGrp="1"/>
           </p:cNvSpPr>
@@ -1174,7 +1330,7 @@
         <p:spPr>
           <a:xfrm>
             <a:off x="11430000" y="6356520"/>
-            <a:ext cx="520560" cy="364320"/>
+            <a:ext cx="520200" cy="363960"/>
           </a:xfrm>
           <a:prstGeom prst="rect">
             <a:avLst/>
@@ -1217,7 +1373,7 @@
                 <a:tab algn="l" pos="0"/>
               </a:tabLst>
             </a:pPr>
-            <a:fld id="{20B6F1DC-FD33-4E02-BDDE-241EE0BF59D6}" type="slidenum">
+            <a:fld id="{1ADA8607-1367-49B0-874C-64E77AB0BCC1}" type="slidenum">
               <a:rPr lang="en-US" sz="1400" b="0" u="none" strike="noStrike">
                 <a:solidFill>
                   <a:schemeClr val="dk2"/>
@@ -1245,8 +1401,8 @@
 </file>
 
 <file path=ppt/slideLayouts/slideLayout11.xml><?xml version="1.0" encoding="utf-8"?>
-<p:sldLayout xmlns:a="http://schemas.openxmlformats.org/drawingml/2006/main" xmlns:p="http://schemas.openxmlformats.org/presentationml/2006/main" xmlns:r="http://schemas.openxmlformats.org/officeDocument/2006/relationships" xmlns:p14="http://schemas.microsoft.com/office/powerpoint/2010/main" xmlns:p15="http://schemas.microsoft.com/office/powerpoint/2012/main" xmlns:mc="http://schemas.openxmlformats.org/markup-compatibility/2006" type="titleOnly" preserve="1">
-  <p:cSld name="Title Only">
+<p:sldLayout xmlns:a="http://schemas.openxmlformats.org/drawingml/2006/main" xmlns:p="http://schemas.openxmlformats.org/presentationml/2006/main" xmlns:r="http://schemas.openxmlformats.org/officeDocument/2006/relationships" xmlns:p14="http://schemas.microsoft.com/office/powerpoint/2010/main" xmlns:p15="http://schemas.microsoft.com/office/powerpoint/2012/main" xmlns:mc="http://schemas.openxmlformats.org/markup-compatibility/2006" type="blank" preserve="1">
+  <p:cSld name="Section Header">
     <p:bg>
       <p:bgPr>
         <a:solidFill>
@@ -1270,14 +1426,14 @@
       </p:grpSpPr>
       <p:sp>
         <p:nvSpPr>
-          <p:cNvPr id="66" name="Rectangle 6"/>
+          <p:cNvPr id="65" name="Rectangle 6"/>
           <p:cNvSpPr/>
           <p:nvPr/>
         </p:nvSpPr>
         <p:spPr>
           <a:xfrm>
             <a:off x="0" y="0"/>
-            <a:ext cx="12191400" cy="6859440"/>
+            <a:ext cx="12191040" cy="6859080"/>
           </a:xfrm>
           <a:prstGeom prst="rect">
             <a:avLst/>
@@ -1329,7 +1485,7 @@
       </p:sp>
       <p:sp>
         <p:nvSpPr>
-          <p:cNvPr id="67" name="PlaceHolder 1"/>
+          <p:cNvPr id="66" name="PlaceHolder 1"/>
           <p:cNvSpPr>
             <a:spLocks noGrp="1"/>
           </p:cNvSpPr>
@@ -1339,8 +1495,8 @@
         </p:nvSpPr>
         <p:spPr>
           <a:xfrm>
-            <a:off x="871200" y="588240"/>
-            <a:ext cx="10449000" cy="1265040"/>
+            <a:off x="1474200" y="1514520"/>
+            <a:ext cx="8583120" cy="3137760"/>
           </a:xfrm>
           <a:prstGeom prst="rect">
             <a:avLst/>
@@ -1352,7 +1508,7 @@
         </p:spPr>
         <p:txBody>
           <a:bodyPr lIns="91440" rIns="91440" tIns="45720" bIns="45720" anchor="b">
-            <a:noAutofit/>
+            <a:normAutofit/>
           </a:bodyPr>
           <a:p>
             <a:pPr indent="0" defTabSz="914400">
@@ -1365,7 +1521,7 @@
               </a:tabLst>
             </a:pPr>
             <a:r>
-              <a:rPr lang="en-US" sz="3200" b="0" u="none" strike="noStrike">
+              <a:rPr lang="en-US" sz="3600" b="0" u="none" spc="300" strike="noStrike" cap="all">
                 <a:solidFill>
                   <a:schemeClr val="dk2"/>
                 </a:solidFill>
@@ -1375,7 +1531,7 @@
               </a:rPr>
               <a:t>Click to edit Master title style</a:t>
             </a:r>
-            <a:endParaRPr lang="es-ES" sz="3200" b="0" u="none" strike="noStrike">
+            <a:endParaRPr lang="es-ES" sz="3600" b="0" u="none" strike="noStrike">
               <a:solidFill>
                 <a:srgbClr val="000000"/>
               </a:solidFill>
@@ -1388,7 +1544,69 @@
       </p:sp>
       <p:sp>
         <p:nvSpPr>
-          <p:cNvPr id="68" name="PlaceHolder 2"/>
+          <p:cNvPr id="67" name="PlaceHolder 2"/>
+          <p:cNvSpPr>
+            <a:spLocks noGrp="1"/>
+          </p:cNvSpPr>
+          <p:nvPr>
+            <p:ph type="body"/>
+          </p:nvPr>
+        </p:nvSpPr>
+        <p:spPr>
+          <a:xfrm>
+            <a:off x="1474200" y="4964040"/>
+            <a:ext cx="8583120" cy="1124640"/>
+          </a:xfrm>
+          <a:prstGeom prst="rect">
+            <a:avLst/>
+          </a:prstGeom>
+          <a:noFill/>
+          <a:ln w="0">
+            <a:noFill/>
+          </a:ln>
+        </p:spPr>
+        <p:txBody>
+          <a:bodyPr lIns="91440" rIns="91440" tIns="45720" bIns="45720" anchor="t">
+            <a:normAutofit/>
+          </a:bodyPr>
+          <a:p>
+            <a:pPr indent="0" defTabSz="914400">
+              <a:lnSpc>
+                <a:spcPct val="120000"/>
+              </a:lnSpc>
+              <a:spcBef>
+                <a:spcPts val="1001"/>
+              </a:spcBef>
+              <a:buNone/>
+              <a:tabLst>
+                <a:tab algn="l" pos="0"/>
+              </a:tabLst>
+            </a:pPr>
+            <a:r>
+              <a:rPr lang="en-US" sz="1600" b="0" u="none" spc="300" strike="noStrike" cap="all">
+                <a:solidFill>
+                  <a:schemeClr val="dk2"/>
+                </a:solidFill>
+                <a:effectLst/>
+                <a:uFillTx/>
+                <a:latin typeface="Aptos Light"/>
+              </a:rPr>
+              <a:t>Click to edit Master text styles</a:t>
+            </a:r>
+            <a:endParaRPr lang="es-ES" sz="1600" b="0" u="none" strike="noStrike">
+              <a:solidFill>
+                <a:srgbClr val="000000"/>
+              </a:solidFill>
+              <a:effectLst/>
+              <a:uFillTx/>
+              <a:latin typeface="Arial"/>
+            </a:endParaRPr>
+          </a:p>
+        </p:txBody>
+      </p:sp>
+      <p:sp>
+        <p:nvSpPr>
+          <p:cNvPr id="68" name="PlaceHolder 3"/>
           <p:cNvSpPr>
             <a:spLocks noGrp="1"/>
           </p:cNvSpPr>
@@ -1399,7 +1617,7 @@
         <p:spPr>
           <a:xfrm>
             <a:off x="877680" y="6356520"/>
-            <a:ext cx="2742480" cy="364320"/>
+            <a:ext cx="2742120" cy="363960"/>
           </a:xfrm>
           <a:prstGeom prst="rect">
             <a:avLst/>
@@ -1466,7 +1684,7 @@
       </p:sp>
       <p:sp>
         <p:nvSpPr>
-          <p:cNvPr id="69" name="PlaceHolder 3"/>
+          <p:cNvPr id="69" name="PlaceHolder 4"/>
           <p:cNvSpPr>
             <a:spLocks noGrp="1"/>
           </p:cNvSpPr>
@@ -1477,7 +1695,7 @@
         <p:spPr>
           <a:xfrm>
             <a:off x="7132320" y="6356520"/>
-            <a:ext cx="4296960" cy="364320"/>
+            <a:ext cx="4296600" cy="363960"/>
           </a:xfrm>
           <a:prstGeom prst="rect">
             <a:avLst/>
@@ -1544,7 +1762,7 @@
       </p:sp>
       <p:sp>
         <p:nvSpPr>
-          <p:cNvPr id="70" name="PlaceHolder 4"/>
+          <p:cNvPr id="70" name="PlaceHolder 5"/>
           <p:cNvSpPr>
             <a:spLocks noGrp="1"/>
           </p:cNvSpPr>
@@ -1555,7 +1773,7 @@
         <p:spPr>
           <a:xfrm>
             <a:off x="11430000" y="6356520"/>
-            <a:ext cx="520560" cy="364320"/>
+            <a:ext cx="520200" cy="363960"/>
           </a:xfrm>
           <a:prstGeom prst="rect">
             <a:avLst/>
@@ -1598,7 +1816,7 @@
                 <a:tab algn="l" pos="0"/>
               </a:tabLst>
             </a:pPr>
-            <a:fld id="{80A69B57-0F48-4F1E-8DEA-92E70784C226}" type="slidenum">
+            <a:fld id="{2FABF495-D718-4048-9386-4A74F1A0E490}" type="slidenum">
               <a:rPr lang="en-US" sz="1400" b="0" u="none" strike="noStrike">
                 <a:solidFill>
                   <a:schemeClr val="dk2"/>
@@ -1627,7 +1845,7 @@
 
 <file path=ppt/slideLayouts/slideLayout2.xml><?xml version="1.0" encoding="utf-8"?>
 <p:sldLayout xmlns:a="http://schemas.openxmlformats.org/drawingml/2006/main" xmlns:p="http://schemas.openxmlformats.org/presentationml/2006/main" xmlns:r="http://schemas.openxmlformats.org/officeDocument/2006/relationships" xmlns:p14="http://schemas.microsoft.com/office/powerpoint/2010/main" xmlns:p15="http://schemas.microsoft.com/office/powerpoint/2012/main" xmlns:mc="http://schemas.openxmlformats.org/markup-compatibility/2006" type="blank" preserve="1">
-  <p:cSld name="Content with Caption">
+  <p:cSld name="Comparison">
     <p:bg>
       <p:bgPr>
         <a:solidFill>
@@ -1651,14 +1869,14 @@
       </p:grpSpPr>
       <p:sp>
         <p:nvSpPr>
-          <p:cNvPr id="6" name="Rectangle 6"/>
+          <p:cNvPr id="9" name="Rectangle 6"/>
           <p:cNvSpPr/>
           <p:nvPr/>
         </p:nvSpPr>
         <p:spPr>
           <a:xfrm>
             <a:off x="0" y="0"/>
-            <a:ext cx="12191400" cy="6859440"/>
+            <a:ext cx="12191040" cy="6859080"/>
           </a:xfrm>
           <a:prstGeom prst="rect">
             <a:avLst/>
@@ -1710,7 +1928,7 @@
       </p:sp>
       <p:sp>
         <p:nvSpPr>
-          <p:cNvPr id="7" name="PlaceHolder 1"/>
+          <p:cNvPr id="10" name="PlaceHolder 1"/>
           <p:cNvSpPr>
             <a:spLocks noGrp="1"/>
           </p:cNvSpPr>
@@ -1720,266 +1938,8 @@
         </p:nvSpPr>
         <p:spPr>
           <a:xfrm>
-            <a:off x="839880" y="807840"/>
-            <a:ext cx="3639960" cy="2061720"/>
-          </a:xfrm>
-          <a:prstGeom prst="rect">
-            <a:avLst/>
-          </a:prstGeom>
-          <a:noFill/>
-          <a:ln w="0">
-            <a:noFill/>
-          </a:ln>
-        </p:spPr>
-        <p:txBody>
-          <a:bodyPr lIns="91440" rIns="91440" tIns="45720" bIns="45720" anchor="t">
-            <a:normAutofit/>
-          </a:bodyPr>
-          <a:p>
-            <a:pPr indent="0" defTabSz="914400">
-              <a:lnSpc>
-                <a:spcPct val="100000"/>
-              </a:lnSpc>
-              <a:buNone/>
-              <a:tabLst>
-                <a:tab algn="l" pos="0"/>
-              </a:tabLst>
-            </a:pPr>
-            <a:r>
-              <a:rPr lang="en-US" sz="2800" b="0" u="none" strike="noStrike">
-                <a:solidFill>
-                  <a:schemeClr val="dk2"/>
-                </a:solidFill>
-                <a:effectLst/>
-                <a:uFillTx/>
-                <a:latin typeface="Walbaum Display"/>
-              </a:rPr>
-              <a:t>Click to edit Master title style</a:t>
-            </a:r>
-            <a:endParaRPr lang="es-ES" sz="2800" b="0" u="none" strike="noStrike">
-              <a:solidFill>
-                <a:srgbClr val="000000"/>
-              </a:solidFill>
-              <a:effectLst/>
-              <a:uFillTx/>
-              <a:latin typeface="Arial"/>
-            </a:endParaRPr>
-          </a:p>
-        </p:txBody>
-      </p:sp>
-      <p:sp>
-        <p:nvSpPr>
-          <p:cNvPr id="8" name="PlaceHolder 2"/>
-          <p:cNvSpPr>
-            <a:spLocks noGrp="1"/>
-          </p:cNvSpPr>
-          <p:nvPr>
-            <p:ph type="body"/>
-          </p:nvPr>
-        </p:nvSpPr>
-        <p:spPr>
-          <a:xfrm>
-            <a:off x="5432760" y="807840"/>
-            <a:ext cx="5921640" cy="5052600"/>
-          </a:xfrm>
-          <a:prstGeom prst="rect">
-            <a:avLst/>
-          </a:prstGeom>
-          <a:noFill/>
-          <a:ln w="0">
-            <a:noFill/>
-          </a:ln>
-        </p:spPr>
-        <p:txBody>
-          <a:bodyPr lIns="91440" rIns="91440" tIns="45720" bIns="45720" anchor="t">
-            <a:normAutofit/>
-          </a:bodyPr>
-          <a:p>
-            <a:pPr marL="228600" indent="-228600" defTabSz="914400">
-              <a:lnSpc>
-                <a:spcPct val="120000"/>
-              </a:lnSpc>
-              <a:spcBef>
-                <a:spcPts val="1001"/>
-              </a:spcBef>
-              <a:buClr>
-                <a:srgbClr val="35403a"/>
-              </a:buClr>
-              <a:buFont typeface="Arial"/>
-              <a:buChar char="•"/>
-            </a:pPr>
-            <a:r>
-              <a:rPr lang="en-US" sz="2400" b="0" u="none" strike="noStrike">
-                <a:solidFill>
-                  <a:schemeClr val="dk2"/>
-                </a:solidFill>
-                <a:effectLst/>
-                <a:uFillTx/>
-                <a:latin typeface="Aptos Light"/>
-              </a:rPr>
-              <a:t>Click to edit Master text styles</a:t>
-            </a:r>
-            <a:endParaRPr lang="es-ES" sz="2400" b="0" u="none" strike="noStrike">
-              <a:solidFill>
-                <a:srgbClr val="000000"/>
-              </a:solidFill>
-              <a:effectLst/>
-              <a:uFillTx/>
-              <a:latin typeface="Arial"/>
-            </a:endParaRPr>
-          </a:p>
-          <a:p>
-            <a:pPr marL="457200" lvl="1" indent="-228600" defTabSz="914400">
-              <a:lnSpc>
-                <a:spcPct val="120000"/>
-              </a:lnSpc>
-              <a:spcBef>
-                <a:spcPts val="499"/>
-              </a:spcBef>
-              <a:buClr>
-                <a:srgbClr val="35403a"/>
-              </a:buClr>
-              <a:buFont typeface="Arial"/>
-              <a:buChar char="•"/>
-            </a:pPr>
-            <a:r>
-              <a:rPr lang="en-US" sz="2000" b="0" u="none" strike="noStrike">
-                <a:solidFill>
-                  <a:schemeClr val="dk2"/>
-                </a:solidFill>
-                <a:effectLst/>
-                <a:uFillTx/>
-                <a:latin typeface="Aptos Light"/>
-              </a:rPr>
-              <a:t>Second level</a:t>
-            </a:r>
-            <a:endParaRPr lang="es-ES" sz="2000" b="0" u="none" strike="noStrike">
-              <a:solidFill>
-                <a:srgbClr val="000000"/>
-              </a:solidFill>
-              <a:effectLst/>
-              <a:uFillTx/>
-              <a:latin typeface="Arial"/>
-            </a:endParaRPr>
-          </a:p>
-          <a:p>
-            <a:pPr marL="685800" lvl="2" indent="-228600" defTabSz="914400">
-              <a:lnSpc>
-                <a:spcPct val="120000"/>
-              </a:lnSpc>
-              <a:spcBef>
-                <a:spcPts val="499"/>
-              </a:spcBef>
-              <a:buClr>
-                <a:srgbClr val="35403a"/>
-              </a:buClr>
-              <a:buFont typeface="Arial"/>
-              <a:buChar char="•"/>
-            </a:pPr>
-            <a:r>
-              <a:rPr lang="en-US" sz="1800" b="0" u="none" strike="noStrike">
-                <a:solidFill>
-                  <a:schemeClr val="dk2"/>
-                </a:solidFill>
-                <a:effectLst/>
-                <a:uFillTx/>
-                <a:latin typeface="Aptos Light"/>
-              </a:rPr>
-              <a:t>Third level</a:t>
-            </a:r>
-            <a:endParaRPr lang="es-ES" sz="1800" b="0" u="none" strike="noStrike">
-              <a:solidFill>
-                <a:srgbClr val="000000"/>
-              </a:solidFill>
-              <a:effectLst/>
-              <a:uFillTx/>
-              <a:latin typeface="Arial"/>
-            </a:endParaRPr>
-          </a:p>
-          <a:p>
-            <a:pPr marL="914400" lvl="3" indent="-228600" defTabSz="914400">
-              <a:lnSpc>
-                <a:spcPct val="120000"/>
-              </a:lnSpc>
-              <a:spcBef>
-                <a:spcPts val="499"/>
-              </a:spcBef>
-              <a:buClr>
-                <a:srgbClr val="35403a"/>
-              </a:buClr>
-              <a:buFont typeface="Arial"/>
-              <a:buChar char="•"/>
-            </a:pPr>
-            <a:r>
-              <a:rPr lang="en-US" sz="1600" b="0" u="none" strike="noStrike">
-                <a:solidFill>
-                  <a:schemeClr val="dk2"/>
-                </a:solidFill>
-                <a:effectLst/>
-                <a:uFillTx/>
-                <a:latin typeface="Aptos Light"/>
-              </a:rPr>
-              <a:t>Fourth level</a:t>
-            </a:r>
-            <a:endParaRPr lang="es-ES" sz="1600" b="0" u="none" strike="noStrike">
-              <a:solidFill>
-                <a:srgbClr val="000000"/>
-              </a:solidFill>
-              <a:effectLst/>
-              <a:uFillTx/>
-              <a:latin typeface="Arial"/>
-            </a:endParaRPr>
-          </a:p>
-          <a:p>
-            <a:pPr marL="1143000" lvl="4" indent="-228600" defTabSz="914400">
-              <a:lnSpc>
-                <a:spcPct val="120000"/>
-              </a:lnSpc>
-              <a:spcBef>
-                <a:spcPts val="499"/>
-              </a:spcBef>
-              <a:buClr>
-                <a:srgbClr val="35403a"/>
-              </a:buClr>
-              <a:buFont typeface="Arial"/>
-              <a:buChar char="•"/>
-            </a:pPr>
-            <a:r>
-              <a:rPr lang="en-US" sz="1600" b="0" u="none" strike="noStrike">
-                <a:solidFill>
-                  <a:schemeClr val="dk2"/>
-                </a:solidFill>
-                <a:effectLst/>
-                <a:uFillTx/>
-                <a:latin typeface="Aptos Light"/>
-              </a:rPr>
-              <a:t>Fifth level</a:t>
-            </a:r>
-            <a:endParaRPr lang="es-ES" sz="1600" b="0" u="none" strike="noStrike">
-              <a:solidFill>
-                <a:srgbClr val="000000"/>
-              </a:solidFill>
-              <a:effectLst/>
-              <a:uFillTx/>
-              <a:latin typeface="Arial"/>
-            </a:endParaRPr>
-          </a:p>
-        </p:txBody>
-      </p:sp>
-      <p:sp>
-        <p:nvSpPr>
-          <p:cNvPr id="9" name="PlaceHolder 3"/>
-          <p:cNvSpPr>
-            <a:spLocks noGrp="1"/>
-          </p:cNvSpPr>
-          <p:nvPr>
-            <p:ph type="body"/>
-          </p:nvPr>
-        </p:nvSpPr>
-        <p:spPr>
-          <a:xfrm>
-            <a:off x="839880" y="3000600"/>
-            <a:ext cx="3639960" cy="2867760"/>
+            <a:off x="881280" y="602640"/>
+            <a:ext cx="10428120" cy="767880"/>
           </a:xfrm>
           <a:prstGeom prst="rect">
             <a:avLst/>
@@ -1996,28 +1956,47 @@
           <a:p>
             <a:pPr indent="0" defTabSz="914400">
               <a:lnSpc>
-                <a:spcPct val="120000"/>
-              </a:lnSpc>
-              <a:spcBef>
-                <a:spcPts val="1001"/>
-              </a:spcBef>
-              <a:buNone/>
-              <a:tabLst>
-                <a:tab algn="l" pos="0"/>
-              </a:tabLst>
-            </a:pPr>
-            <a:r>
-              <a:rPr lang="en-US" sz="1600" b="0" u="none" strike="noStrike">
-                <a:solidFill>
-                  <a:schemeClr val="dk2"/>
-                </a:solidFill>
-                <a:effectLst/>
-                <a:uFillTx/>
-                <a:latin typeface="Aptos Light"/>
-              </a:rPr>
-              <a:t>Click to edit Master text styles</a:t>
-            </a:r>
-            <a:endParaRPr lang="es-ES" sz="1600" b="0" u="none" strike="noStrike">
+                <a:spcPct val="100000"/>
+              </a:lnSpc>
+              <a:buNone/>
+              <a:tabLst>
+                <a:tab algn="l" pos="0"/>
+              </a:tabLst>
+            </a:pPr>
+            <a:r>
+              <a:rPr lang="en-US" sz="3200" b="0" u="none" strike="noStrike">
+                <a:solidFill>
+                  <a:schemeClr val="dk2"/>
+                </a:solidFill>
+                <a:effectLst/>
+                <a:uFillTx/>
+                <a:latin typeface="Walbaum Display"/>
+              </a:rPr>
+              <a:t>Click to edit </a:t>
+            </a:r>
+            <a:r>
+              <a:rPr lang="en-US" sz="3200" b="0" u="none" strike="noStrike">
+                <a:solidFill>
+                  <a:schemeClr val="dk2"/>
+                </a:solidFill>
+                <a:effectLst/>
+                <a:uFillTx/>
+                <a:latin typeface="Walbaum Display"/>
+              </a:rPr>
+              <a:t>Master title </a:t>
+            </a:r>
+            <a:r>
+              <a:rPr lang="en-US" sz="3200" b="0" u="none" strike="noStrike">
+                <a:solidFill>
+                  <a:schemeClr val="dk2"/>
+                </a:solidFill>
+                <a:effectLst/>
+                <a:uFillTx/>
+                <a:latin typeface="Walbaum Display"/>
+              </a:rPr>
+              <a:t>style</a:t>
+            </a:r>
+            <a:endParaRPr lang="es-ES" sz="3200" b="0" u="none" strike="noStrike">
               <a:solidFill>
                 <a:srgbClr val="000000"/>
               </a:solidFill>
@@ -2030,7 +2009,529 @@
       </p:sp>
       <p:sp>
         <p:nvSpPr>
-          <p:cNvPr id="10" name="PlaceHolder 4"/>
+          <p:cNvPr id="11" name="PlaceHolder 2"/>
+          <p:cNvSpPr>
+            <a:spLocks noGrp="1"/>
+          </p:cNvSpPr>
+          <p:nvPr>
+            <p:ph type="body"/>
+          </p:nvPr>
+        </p:nvSpPr>
+        <p:spPr>
+          <a:xfrm>
+            <a:off x="881280" y="1696320"/>
+            <a:ext cx="4962600" cy="646560"/>
+          </a:xfrm>
+          <a:prstGeom prst="rect">
+            <a:avLst/>
+          </a:prstGeom>
+          <a:noFill/>
+          <a:ln w="0">
+            <a:noFill/>
+          </a:ln>
+        </p:spPr>
+        <p:txBody>
+          <a:bodyPr lIns="91440" rIns="91440" tIns="45720" bIns="45720" anchor="b">
+            <a:noAutofit/>
+          </a:bodyPr>
+          <a:p>
+            <a:pPr indent="0" defTabSz="914400">
+              <a:lnSpc>
+                <a:spcPct val="120000"/>
+              </a:lnSpc>
+              <a:spcBef>
+                <a:spcPts val="1001"/>
+              </a:spcBef>
+              <a:buNone/>
+              <a:tabLst>
+                <a:tab algn="l" pos="0"/>
+              </a:tabLst>
+            </a:pPr>
+            <a:r>
+              <a:rPr lang="en-US" sz="1400" b="1" u="none" spc="300" strike="noStrike" cap="all">
+                <a:solidFill>
+                  <a:schemeClr val="dk2"/>
+                </a:solidFill>
+                <a:effectLst/>
+                <a:uFillTx/>
+                <a:latin typeface="Aptos Light"/>
+              </a:rPr>
+              <a:t>Click to edit Master text styles</a:t>
+            </a:r>
+            <a:endParaRPr lang="es-ES" sz="1400" b="0" u="none" strike="noStrike">
+              <a:solidFill>
+                <a:srgbClr val="000000"/>
+              </a:solidFill>
+              <a:effectLst/>
+              <a:uFillTx/>
+              <a:latin typeface="Arial"/>
+            </a:endParaRPr>
+          </a:p>
+        </p:txBody>
+      </p:sp>
+      <p:sp>
+        <p:nvSpPr>
+          <p:cNvPr id="12" name="PlaceHolder 3"/>
+          <p:cNvSpPr>
+            <a:spLocks noGrp="1"/>
+          </p:cNvSpPr>
+          <p:nvPr>
+            <p:ph type="body"/>
+          </p:nvPr>
+        </p:nvSpPr>
+        <p:spPr>
+          <a:xfrm>
+            <a:off x="881280" y="2343960"/>
+            <a:ext cx="4962600" cy="3832200"/>
+          </a:xfrm>
+          <a:prstGeom prst="rect">
+            <a:avLst/>
+          </a:prstGeom>
+          <a:noFill/>
+          <a:ln w="0">
+            <a:noFill/>
+          </a:ln>
+        </p:spPr>
+        <p:txBody>
+          <a:bodyPr lIns="91440" rIns="91440" tIns="45720" bIns="45720" anchor="t">
+            <a:noAutofit/>
+          </a:bodyPr>
+          <a:p>
+            <a:pPr marL="228600" indent="-228600" defTabSz="914400">
+              <a:lnSpc>
+                <a:spcPct val="120000"/>
+              </a:lnSpc>
+              <a:spcBef>
+                <a:spcPts val="1001"/>
+              </a:spcBef>
+              <a:buClr>
+                <a:srgbClr val="35403a"/>
+              </a:buClr>
+              <a:buFont typeface="Arial"/>
+              <a:buChar char="•"/>
+            </a:pPr>
+            <a:r>
+              <a:rPr lang="en-US" sz="1600" b="0" u="none" strike="noStrike">
+                <a:solidFill>
+                  <a:schemeClr val="dk2"/>
+                </a:solidFill>
+                <a:effectLst/>
+                <a:uFillTx/>
+                <a:latin typeface="Aptos Light"/>
+              </a:rPr>
+              <a:t>Click to edit Master text styles</a:t>
+            </a:r>
+            <a:endParaRPr lang="es-ES" sz="1600" b="0" u="none" strike="noStrike">
+              <a:solidFill>
+                <a:srgbClr val="000000"/>
+              </a:solidFill>
+              <a:effectLst/>
+              <a:uFillTx/>
+              <a:latin typeface="Arial"/>
+            </a:endParaRPr>
+          </a:p>
+          <a:p>
+            <a:pPr marL="457200" lvl="1" indent="-228600" defTabSz="914400">
+              <a:lnSpc>
+                <a:spcPct val="120000"/>
+              </a:lnSpc>
+              <a:spcBef>
+                <a:spcPts val="499"/>
+              </a:spcBef>
+              <a:buClr>
+                <a:srgbClr val="35403a"/>
+              </a:buClr>
+              <a:buFont typeface="Arial"/>
+              <a:buChar char="•"/>
+            </a:pPr>
+            <a:r>
+              <a:rPr lang="en-US" sz="1400" b="0" u="none" strike="noStrike">
+                <a:solidFill>
+                  <a:schemeClr val="dk2"/>
+                </a:solidFill>
+                <a:effectLst/>
+                <a:uFillTx/>
+                <a:latin typeface="Aptos Light"/>
+              </a:rPr>
+              <a:t>Second level</a:t>
+            </a:r>
+            <a:endParaRPr lang="es-ES" sz="1400" b="0" u="none" strike="noStrike">
+              <a:solidFill>
+                <a:srgbClr val="000000"/>
+              </a:solidFill>
+              <a:effectLst/>
+              <a:uFillTx/>
+              <a:latin typeface="Arial"/>
+            </a:endParaRPr>
+          </a:p>
+          <a:p>
+            <a:pPr marL="685800" lvl="2" indent="-228600" defTabSz="914400">
+              <a:lnSpc>
+                <a:spcPct val="120000"/>
+              </a:lnSpc>
+              <a:spcBef>
+                <a:spcPts val="499"/>
+              </a:spcBef>
+              <a:buClr>
+                <a:srgbClr val="35403a"/>
+              </a:buClr>
+              <a:buFont typeface="Arial"/>
+              <a:buChar char="•"/>
+            </a:pPr>
+            <a:r>
+              <a:rPr lang="en-US" sz="1200" b="0" u="none" strike="noStrike">
+                <a:solidFill>
+                  <a:schemeClr val="dk2"/>
+                </a:solidFill>
+                <a:effectLst/>
+                <a:uFillTx/>
+                <a:latin typeface="Aptos Light"/>
+              </a:rPr>
+              <a:t>Third level</a:t>
+            </a:r>
+            <a:endParaRPr lang="es-ES" sz="1200" b="0" u="none" strike="noStrike">
+              <a:solidFill>
+                <a:srgbClr val="000000"/>
+              </a:solidFill>
+              <a:effectLst/>
+              <a:uFillTx/>
+              <a:latin typeface="Arial"/>
+            </a:endParaRPr>
+          </a:p>
+          <a:p>
+            <a:pPr marL="914400" lvl="3" indent="-228600" defTabSz="914400">
+              <a:lnSpc>
+                <a:spcPct val="120000"/>
+              </a:lnSpc>
+              <a:spcBef>
+                <a:spcPts val="499"/>
+              </a:spcBef>
+              <a:buClr>
+                <a:srgbClr val="35403a"/>
+              </a:buClr>
+              <a:buFont typeface="Arial"/>
+              <a:buChar char="•"/>
+            </a:pPr>
+            <a:r>
+              <a:rPr lang="en-US" sz="1100" b="0" u="none" strike="noStrike">
+                <a:solidFill>
+                  <a:schemeClr val="dk2"/>
+                </a:solidFill>
+                <a:effectLst/>
+                <a:uFillTx/>
+                <a:latin typeface="Aptos Light"/>
+              </a:rPr>
+              <a:t>Fourth level</a:t>
+            </a:r>
+            <a:endParaRPr lang="es-ES" sz="1100" b="0" u="none" strike="noStrike">
+              <a:solidFill>
+                <a:srgbClr val="000000"/>
+              </a:solidFill>
+              <a:effectLst/>
+              <a:uFillTx/>
+              <a:latin typeface="Arial"/>
+            </a:endParaRPr>
+          </a:p>
+          <a:p>
+            <a:pPr marL="1143000" lvl="4" indent="-228600" defTabSz="914400">
+              <a:lnSpc>
+                <a:spcPct val="120000"/>
+              </a:lnSpc>
+              <a:spcBef>
+                <a:spcPts val="499"/>
+              </a:spcBef>
+              <a:buClr>
+                <a:srgbClr val="35403a"/>
+              </a:buClr>
+              <a:buFont typeface="Arial"/>
+              <a:buChar char="•"/>
+            </a:pPr>
+            <a:r>
+              <a:rPr lang="en-US" sz="1100" b="0" u="none" strike="noStrike">
+                <a:solidFill>
+                  <a:schemeClr val="dk2"/>
+                </a:solidFill>
+                <a:effectLst/>
+                <a:uFillTx/>
+                <a:latin typeface="Aptos Light"/>
+              </a:rPr>
+              <a:t>Fifth level</a:t>
+            </a:r>
+            <a:endParaRPr lang="es-ES" sz="1100" b="0" u="none" strike="noStrike">
+              <a:solidFill>
+                <a:srgbClr val="000000"/>
+              </a:solidFill>
+              <a:effectLst/>
+              <a:uFillTx/>
+              <a:latin typeface="Arial"/>
+            </a:endParaRPr>
+          </a:p>
+        </p:txBody>
+      </p:sp>
+      <p:sp>
+        <p:nvSpPr>
+          <p:cNvPr id="13" name="PlaceHolder 4"/>
+          <p:cNvSpPr>
+            <a:spLocks noGrp="1"/>
+          </p:cNvSpPr>
+          <p:nvPr>
+            <p:ph type="body"/>
+          </p:nvPr>
+        </p:nvSpPr>
+        <p:spPr>
+          <a:xfrm>
+            <a:off x="6322680" y="1696320"/>
+            <a:ext cx="4987080" cy="646560"/>
+          </a:xfrm>
+          <a:prstGeom prst="rect">
+            <a:avLst/>
+          </a:prstGeom>
+          <a:noFill/>
+          <a:ln w="0">
+            <a:noFill/>
+          </a:ln>
+        </p:spPr>
+        <p:txBody>
+          <a:bodyPr lIns="91440" rIns="91440" tIns="45720" bIns="45720" anchor="b">
+            <a:noAutofit/>
+          </a:bodyPr>
+          <a:p>
+            <a:pPr indent="0" defTabSz="914400">
+              <a:lnSpc>
+                <a:spcPct val="120000"/>
+              </a:lnSpc>
+              <a:spcBef>
+                <a:spcPts val="1001"/>
+              </a:spcBef>
+              <a:buNone/>
+              <a:tabLst>
+                <a:tab algn="l" pos="0"/>
+              </a:tabLst>
+            </a:pPr>
+            <a:r>
+              <a:rPr lang="en-US" sz="1400" b="1" u="none" spc="300" strike="noStrike" cap="all">
+                <a:solidFill>
+                  <a:schemeClr val="dk2"/>
+                </a:solidFill>
+                <a:effectLst/>
+                <a:uFillTx/>
+                <a:latin typeface="Aptos Light"/>
+              </a:rPr>
+              <a:t>Click to edit Master text styles</a:t>
+            </a:r>
+            <a:endParaRPr lang="es-ES" sz="1400" b="0" u="none" strike="noStrike">
+              <a:solidFill>
+                <a:srgbClr val="000000"/>
+              </a:solidFill>
+              <a:effectLst/>
+              <a:uFillTx/>
+              <a:latin typeface="Arial"/>
+            </a:endParaRPr>
+          </a:p>
+        </p:txBody>
+      </p:sp>
+      <p:sp>
+        <p:nvSpPr>
+          <p:cNvPr id="14" name="PlaceHolder 5"/>
+          <p:cNvSpPr>
+            <a:spLocks noGrp="1"/>
+          </p:cNvSpPr>
+          <p:nvPr>
+            <p:ph type="body"/>
+          </p:nvPr>
+        </p:nvSpPr>
+        <p:spPr>
+          <a:xfrm>
+            <a:off x="6322680" y="2343960"/>
+            <a:ext cx="4987080" cy="3832200"/>
+          </a:xfrm>
+          <a:prstGeom prst="rect">
+            <a:avLst/>
+          </a:prstGeom>
+          <a:noFill/>
+          <a:ln w="0">
+            <a:noFill/>
+          </a:ln>
+        </p:spPr>
+        <p:txBody>
+          <a:bodyPr lIns="91440" rIns="91440" tIns="45720" bIns="45720" anchor="t">
+            <a:noAutofit/>
+          </a:bodyPr>
+          <a:p>
+            <a:pPr marL="228600" indent="-228600" defTabSz="914400">
+              <a:lnSpc>
+                <a:spcPct val="120000"/>
+              </a:lnSpc>
+              <a:spcBef>
+                <a:spcPts val="1001"/>
+              </a:spcBef>
+              <a:buClr>
+                <a:srgbClr val="35403a"/>
+              </a:buClr>
+              <a:buFont typeface="Arial"/>
+              <a:buChar char="•"/>
+            </a:pPr>
+            <a:r>
+              <a:rPr lang="en-US" sz="1600" b="0" u="none" strike="noStrike">
+                <a:solidFill>
+                  <a:schemeClr val="dk2"/>
+                </a:solidFill>
+                <a:effectLst/>
+                <a:uFillTx/>
+                <a:latin typeface="Aptos Light"/>
+              </a:rPr>
+              <a:t>Click to edit Master text styles</a:t>
+            </a:r>
+            <a:endParaRPr lang="es-ES" sz="1600" b="0" u="none" strike="noStrike">
+              <a:solidFill>
+                <a:srgbClr val="000000"/>
+              </a:solidFill>
+              <a:effectLst/>
+              <a:uFillTx/>
+              <a:latin typeface="Arial"/>
+            </a:endParaRPr>
+          </a:p>
+          <a:p>
+            <a:pPr marL="457200" lvl="1" indent="-228600" defTabSz="914400">
+              <a:lnSpc>
+                <a:spcPct val="120000"/>
+              </a:lnSpc>
+              <a:spcBef>
+                <a:spcPts val="499"/>
+              </a:spcBef>
+              <a:buClr>
+                <a:srgbClr val="35403a"/>
+              </a:buClr>
+              <a:buFont typeface="Arial"/>
+              <a:buChar char="•"/>
+            </a:pPr>
+            <a:r>
+              <a:rPr lang="en-US" sz="1400" b="0" u="none" strike="noStrike">
+                <a:solidFill>
+                  <a:schemeClr val="dk2"/>
+                </a:solidFill>
+                <a:effectLst/>
+                <a:uFillTx/>
+                <a:latin typeface="Aptos Light"/>
+              </a:rPr>
+              <a:t>Second level</a:t>
+            </a:r>
+            <a:endParaRPr lang="es-ES" sz="1400" b="0" u="none" strike="noStrike">
+              <a:solidFill>
+                <a:srgbClr val="000000"/>
+              </a:solidFill>
+              <a:effectLst/>
+              <a:uFillTx/>
+              <a:latin typeface="Arial"/>
+            </a:endParaRPr>
+          </a:p>
+          <a:p>
+            <a:pPr marL="685800" lvl="2" indent="-228600" defTabSz="914400">
+              <a:lnSpc>
+                <a:spcPct val="120000"/>
+              </a:lnSpc>
+              <a:spcBef>
+                <a:spcPts val="499"/>
+              </a:spcBef>
+              <a:buClr>
+                <a:srgbClr val="35403a"/>
+              </a:buClr>
+              <a:buFont typeface="Arial"/>
+              <a:buChar char="•"/>
+            </a:pPr>
+            <a:r>
+              <a:rPr lang="en-US" sz="1200" b="0" u="none" strike="noStrike">
+                <a:solidFill>
+                  <a:schemeClr val="dk2"/>
+                </a:solidFill>
+                <a:effectLst/>
+                <a:uFillTx/>
+                <a:latin typeface="Aptos Light"/>
+              </a:rPr>
+              <a:t>Third level</a:t>
+            </a:r>
+            <a:endParaRPr lang="es-ES" sz="1200" b="0" u="none" strike="noStrike">
+              <a:solidFill>
+                <a:srgbClr val="000000"/>
+              </a:solidFill>
+              <a:effectLst/>
+              <a:uFillTx/>
+              <a:latin typeface="Arial"/>
+            </a:endParaRPr>
+          </a:p>
+          <a:p>
+            <a:pPr marL="914400" lvl="3" indent="-228600" defTabSz="914400">
+              <a:lnSpc>
+                <a:spcPct val="120000"/>
+              </a:lnSpc>
+              <a:spcBef>
+                <a:spcPts val="499"/>
+              </a:spcBef>
+              <a:buClr>
+                <a:srgbClr val="35403a"/>
+              </a:buClr>
+              <a:buFont typeface="Arial"/>
+              <a:buChar char="•"/>
+            </a:pPr>
+            <a:r>
+              <a:rPr lang="en-US" sz="1100" b="0" u="none" strike="noStrike">
+                <a:solidFill>
+                  <a:schemeClr val="dk2"/>
+                </a:solidFill>
+                <a:effectLst/>
+                <a:uFillTx/>
+                <a:latin typeface="Aptos Light"/>
+              </a:rPr>
+              <a:t>Fourth level</a:t>
+            </a:r>
+            <a:endParaRPr lang="es-ES" sz="1100" b="0" u="none" strike="noStrike">
+              <a:solidFill>
+                <a:srgbClr val="000000"/>
+              </a:solidFill>
+              <a:effectLst/>
+              <a:uFillTx/>
+              <a:latin typeface="Arial"/>
+            </a:endParaRPr>
+          </a:p>
+          <a:p>
+            <a:pPr marL="1143000" lvl="4" indent="-228600" defTabSz="914400">
+              <a:lnSpc>
+                <a:spcPct val="120000"/>
+              </a:lnSpc>
+              <a:spcBef>
+                <a:spcPts val="499"/>
+              </a:spcBef>
+              <a:buClr>
+                <a:srgbClr val="35403a"/>
+              </a:buClr>
+              <a:buFont typeface="Arial"/>
+              <a:buChar char="•"/>
+            </a:pPr>
+            <a:r>
+              <a:rPr lang="en-US" sz="1100" b="0" u="none" strike="noStrike">
+                <a:solidFill>
+                  <a:schemeClr val="dk2"/>
+                </a:solidFill>
+                <a:effectLst/>
+                <a:uFillTx/>
+                <a:latin typeface="Aptos Light"/>
+              </a:rPr>
+              <a:t>Fifth level</a:t>
+            </a:r>
+            <a:endParaRPr lang="es-ES" sz="1100" b="0" u="none" strike="noStrike">
+              <a:solidFill>
+                <a:srgbClr val="000000"/>
+              </a:solidFill>
+              <a:effectLst/>
+              <a:uFillTx/>
+              <a:latin typeface="Arial"/>
+            </a:endParaRPr>
+          </a:p>
+        </p:txBody>
+      </p:sp>
+      <p:sp>
+        <p:nvSpPr>
+          <p:cNvPr id="15" name="PlaceHolder 6"/>
           <p:cNvSpPr>
             <a:spLocks noGrp="1"/>
           </p:cNvSpPr>
@@ -2041,7 +2542,7 @@
         <p:spPr>
           <a:xfrm>
             <a:off x="877680" y="6356520"/>
-            <a:ext cx="2742480" cy="364320"/>
+            <a:ext cx="2742120" cy="363960"/>
           </a:xfrm>
           <a:prstGeom prst="rect">
             <a:avLst/>
@@ -2108,7 +2609,7 @@
       </p:sp>
       <p:sp>
         <p:nvSpPr>
-          <p:cNvPr id="11" name="PlaceHolder 5"/>
+          <p:cNvPr id="16" name="PlaceHolder 7"/>
           <p:cNvSpPr>
             <a:spLocks noGrp="1"/>
           </p:cNvSpPr>
@@ -2119,7 +2620,7 @@
         <p:spPr>
           <a:xfrm>
             <a:off x="7132320" y="6356520"/>
-            <a:ext cx="4296960" cy="364320"/>
+            <a:ext cx="4296600" cy="363960"/>
           </a:xfrm>
           <a:prstGeom prst="rect">
             <a:avLst/>
@@ -2186,7 +2687,7 @@
       </p:sp>
       <p:sp>
         <p:nvSpPr>
-          <p:cNvPr id="12" name="PlaceHolder 6"/>
+          <p:cNvPr id="17" name="PlaceHolder 8"/>
           <p:cNvSpPr>
             <a:spLocks noGrp="1"/>
           </p:cNvSpPr>
@@ -2197,7 +2698,7 @@
         <p:spPr>
           <a:xfrm>
             <a:off x="11430000" y="6356520"/>
-            <a:ext cx="520560" cy="364320"/>
+            <a:ext cx="520200" cy="363960"/>
           </a:xfrm>
           <a:prstGeom prst="rect">
             <a:avLst/>
@@ -2240,7 +2741,7 @@
                 <a:tab algn="l" pos="0"/>
               </a:tabLst>
             </a:pPr>
-            <a:fld id="{421D190E-B7B0-4BAD-BC4D-124AC995AACA}" type="slidenum">
+            <a:fld id="{570D559B-7CA3-4B1C-9A5C-1565F6E55516}" type="slidenum">
               <a:rPr lang="en-US" sz="1400" b="0" u="none" strike="noStrike">
                 <a:solidFill>
                   <a:schemeClr val="dk2"/>
@@ -2268,8 +2769,8 @@
 </file>
 
 <file path=ppt/slideLayouts/slideLayout3.xml><?xml version="1.0" encoding="utf-8"?>
-<p:sldLayout xmlns:a="http://schemas.openxmlformats.org/drawingml/2006/main" xmlns:p="http://schemas.openxmlformats.org/presentationml/2006/main" xmlns:r="http://schemas.openxmlformats.org/officeDocument/2006/relationships" xmlns:p14="http://schemas.microsoft.com/office/powerpoint/2010/main" xmlns:p15="http://schemas.microsoft.com/office/powerpoint/2012/main" xmlns:mc="http://schemas.openxmlformats.org/markup-compatibility/2006" type="blank" preserve="1">
-  <p:cSld name="Picture with Caption">
+<p:sldLayout xmlns:a="http://schemas.openxmlformats.org/drawingml/2006/main" xmlns:p="http://schemas.openxmlformats.org/presentationml/2006/main" xmlns:r="http://schemas.openxmlformats.org/officeDocument/2006/relationships" xmlns:p14="http://schemas.microsoft.com/office/powerpoint/2010/main" xmlns:p15="http://schemas.microsoft.com/office/powerpoint/2012/main" xmlns:mc="http://schemas.openxmlformats.org/markup-compatibility/2006" type="titleOnly" preserve="1">
+  <p:cSld name="Title Only">
     <p:bg>
       <p:bgPr>
         <a:solidFill>
@@ -2293,14 +2794,14 @@
       </p:grpSpPr>
       <p:sp>
         <p:nvSpPr>
-          <p:cNvPr id="13" name="Rectangle 6"/>
+          <p:cNvPr id="18" name="Rectangle 6"/>
           <p:cNvSpPr/>
           <p:nvPr/>
         </p:nvSpPr>
         <p:spPr>
           <a:xfrm>
             <a:off x="0" y="0"/>
-            <a:ext cx="12191400" cy="6859440"/>
+            <a:ext cx="12191040" cy="6859080"/>
           </a:xfrm>
           <a:prstGeom prst="rect">
             <a:avLst/>
@@ -2352,7 +2853,7 @@
       </p:sp>
       <p:sp>
         <p:nvSpPr>
-          <p:cNvPr id="14" name="PlaceHolder 1"/>
+          <p:cNvPr id="19" name="PlaceHolder 1"/>
           <p:cNvSpPr>
             <a:spLocks noGrp="1"/>
           </p:cNvSpPr>
@@ -2362,341 +2863,8 @@
         </p:nvSpPr>
         <p:spPr>
           <a:xfrm>
-            <a:off x="839880" y="820800"/>
-            <a:ext cx="3638520" cy="2061720"/>
-          </a:xfrm>
-          <a:prstGeom prst="rect">
-            <a:avLst/>
-          </a:prstGeom>
-          <a:noFill/>
-          <a:ln w="0">
-            <a:noFill/>
-          </a:ln>
-        </p:spPr>
-        <p:txBody>
-          <a:bodyPr lIns="91440" rIns="91440" tIns="45720" bIns="45720" anchor="t">
-            <a:normAutofit/>
-          </a:bodyPr>
-          <a:p>
-            <a:pPr indent="0" defTabSz="914400">
-              <a:lnSpc>
-                <a:spcPct val="100000"/>
-              </a:lnSpc>
-              <a:buNone/>
-              <a:tabLst>
-                <a:tab algn="l" pos="0"/>
-              </a:tabLst>
-            </a:pPr>
-            <a:r>
-              <a:rPr lang="en-US" sz="2800" b="0" u="none" strike="noStrike">
-                <a:solidFill>
-                  <a:schemeClr val="dk2"/>
-                </a:solidFill>
-                <a:effectLst/>
-                <a:uFillTx/>
-                <a:latin typeface="Walbaum Display"/>
-              </a:rPr>
-              <a:t>Click to edit Master title style</a:t>
-            </a:r>
-            <a:endParaRPr lang="es-ES" sz="2800" b="0" u="none" strike="noStrike">
-              <a:solidFill>
-                <a:srgbClr val="000000"/>
-              </a:solidFill>
-              <a:effectLst/>
-              <a:uFillTx/>
-              <a:latin typeface="Arial"/>
-            </a:endParaRPr>
-          </a:p>
-        </p:txBody>
-      </p:sp>
-      <p:sp>
-        <p:nvSpPr>
-          <p:cNvPr id="15" name="PlaceHolder 2"/>
-          <p:cNvSpPr>
-            <a:spLocks noGrp="1"/>
-          </p:cNvSpPr>
-          <p:nvPr>
-            <p:ph type="body"/>
-          </p:nvPr>
-        </p:nvSpPr>
-        <p:spPr>
-          <a:xfrm>
-            <a:off x="5247360" y="919440"/>
-            <a:ext cx="6107400" cy="5013000"/>
-          </a:xfrm>
-          <a:prstGeom prst="rect">
-            <a:avLst/>
-          </a:prstGeom>
-          <a:noFill/>
-          <a:ln w="0">
-            <a:noFill/>
-          </a:ln>
-        </p:spPr>
-        <p:txBody>
-          <a:bodyPr lIns="90000" rIns="90000" tIns="45000" bIns="45000" anchor="t">
-            <a:noAutofit/>
-          </a:bodyPr>
-          <a:p>
-            <a:pPr marL="432000" indent="-324000">
-              <a:lnSpc>
-                <a:spcPct val="120000"/>
-              </a:lnSpc>
-              <a:spcBef>
-                <a:spcPts val="1417"/>
-              </a:spcBef>
-              <a:buClr>
-                <a:srgbClr val="000000"/>
-              </a:buClr>
-              <a:buSzPct val="45000"/>
-              <a:buFont typeface="Wingdings" charset="2"/>
-              <a:buChar char=""/>
-            </a:pPr>
-            <a:r>
-              <a:rPr lang="es-ES" sz="3200" b="0" u="none" strike="noStrike">
-                <a:solidFill>
-                  <a:schemeClr val="dk2"/>
-                </a:solidFill>
-                <a:effectLst/>
-                <a:uFillTx/>
-                <a:latin typeface="Aptos Light"/>
-              </a:rPr>
-              <a:t>Pulse para editar el formato de texto del esquema</a:t>
-            </a:r>
-            <a:endParaRPr lang="es-ES" sz="3200" b="0" u="none" strike="noStrike">
-              <a:solidFill>
-                <a:srgbClr val="000000"/>
-              </a:solidFill>
-              <a:effectLst/>
-              <a:uFillTx/>
-              <a:latin typeface="Arial"/>
-            </a:endParaRPr>
-          </a:p>
-          <a:p>
-            <a:pPr marL="864000" lvl="1" indent="-324000">
-              <a:lnSpc>
-                <a:spcPct val="120000"/>
-              </a:lnSpc>
-              <a:spcBef>
-                <a:spcPts val="1134"/>
-              </a:spcBef>
-              <a:buClr>
-                <a:srgbClr val="000000"/>
-              </a:buClr>
-              <a:buSzPct val="75000"/>
-              <a:buFont typeface="Symbol" charset="2"/>
-              <a:buChar char=""/>
-            </a:pPr>
-            <a:r>
-              <a:rPr lang="es-ES" sz="3200" b="0" u="none" strike="noStrike">
-                <a:solidFill>
-                  <a:schemeClr val="dk2"/>
-                </a:solidFill>
-                <a:effectLst/>
-                <a:uFillTx/>
-                <a:latin typeface="Aptos Light"/>
-              </a:rPr>
-              <a:t>Segundo nivel del esquema</a:t>
-            </a:r>
-            <a:endParaRPr lang="es-ES" sz="3200" b="0" u="none" strike="noStrike">
-              <a:solidFill>
-                <a:srgbClr val="000000"/>
-              </a:solidFill>
-              <a:effectLst/>
-              <a:uFillTx/>
-              <a:latin typeface="Arial"/>
-            </a:endParaRPr>
-          </a:p>
-          <a:p>
-            <a:pPr marL="1296000" lvl="2" indent="-288000">
-              <a:lnSpc>
-                <a:spcPct val="120000"/>
-              </a:lnSpc>
-              <a:spcBef>
-                <a:spcPts val="850"/>
-              </a:spcBef>
-              <a:buClr>
-                <a:srgbClr val="000000"/>
-              </a:buClr>
-              <a:buSzPct val="45000"/>
-              <a:buFont typeface="Wingdings" charset="2"/>
-              <a:buChar char=""/>
-            </a:pPr>
-            <a:r>
-              <a:rPr lang="es-ES" sz="3200" b="0" u="none" strike="noStrike">
-                <a:solidFill>
-                  <a:schemeClr val="dk2"/>
-                </a:solidFill>
-                <a:effectLst/>
-                <a:uFillTx/>
-                <a:latin typeface="Aptos Light"/>
-              </a:rPr>
-              <a:t>Tercer nivel del esquema</a:t>
-            </a:r>
-            <a:endParaRPr lang="es-ES" sz="3200" b="0" u="none" strike="noStrike">
-              <a:solidFill>
-                <a:srgbClr val="000000"/>
-              </a:solidFill>
-              <a:effectLst/>
-              <a:uFillTx/>
-              <a:latin typeface="Arial"/>
-            </a:endParaRPr>
-          </a:p>
-          <a:p>
-            <a:pPr marL="1728000" lvl="3" indent="-216000">
-              <a:lnSpc>
-                <a:spcPct val="120000"/>
-              </a:lnSpc>
-              <a:spcBef>
-                <a:spcPts val="567"/>
-              </a:spcBef>
-              <a:buClr>
-                <a:srgbClr val="000000"/>
-              </a:buClr>
-              <a:buSzPct val="75000"/>
-              <a:buFont typeface="Symbol" charset="2"/>
-              <a:buChar char=""/>
-            </a:pPr>
-            <a:r>
-              <a:rPr lang="es-ES" sz="3200" b="0" u="none" strike="noStrike">
-                <a:solidFill>
-                  <a:schemeClr val="dk2"/>
-                </a:solidFill>
-                <a:effectLst/>
-                <a:uFillTx/>
-                <a:latin typeface="Aptos Light"/>
-              </a:rPr>
-              <a:t>Cuarto nivel del esquema</a:t>
-            </a:r>
-            <a:endParaRPr lang="es-ES" sz="3200" b="0" u="none" strike="noStrike">
-              <a:solidFill>
-                <a:srgbClr val="000000"/>
-              </a:solidFill>
-              <a:effectLst/>
-              <a:uFillTx/>
-              <a:latin typeface="Arial"/>
-            </a:endParaRPr>
-          </a:p>
-          <a:p>
-            <a:pPr marL="2160000" lvl="4" indent="-216000">
-              <a:lnSpc>
-                <a:spcPct val="120000"/>
-              </a:lnSpc>
-              <a:spcBef>
-                <a:spcPts val="283"/>
-              </a:spcBef>
-              <a:buClr>
-                <a:srgbClr val="000000"/>
-              </a:buClr>
-              <a:buSzPct val="45000"/>
-              <a:buFont typeface="Wingdings" charset="2"/>
-              <a:buChar char=""/>
-            </a:pPr>
-            <a:r>
-              <a:rPr lang="es-ES" sz="3200" b="0" u="none" strike="noStrike">
-                <a:solidFill>
-                  <a:schemeClr val="dk2"/>
-                </a:solidFill>
-                <a:effectLst/>
-                <a:uFillTx/>
-                <a:latin typeface="Aptos Light"/>
-              </a:rPr>
-              <a:t>Quinto nivel del esquema</a:t>
-            </a:r>
-            <a:endParaRPr lang="es-ES" sz="3200" b="0" u="none" strike="noStrike">
-              <a:solidFill>
-                <a:srgbClr val="000000"/>
-              </a:solidFill>
-              <a:effectLst/>
-              <a:uFillTx/>
-              <a:latin typeface="Arial"/>
-            </a:endParaRPr>
-          </a:p>
-          <a:p>
-            <a:pPr marL="2592000" lvl="5" indent="-216000">
-              <a:lnSpc>
-                <a:spcPct val="120000"/>
-              </a:lnSpc>
-              <a:spcBef>
-                <a:spcPts val="283"/>
-              </a:spcBef>
-              <a:buClr>
-                <a:srgbClr val="000000"/>
-              </a:buClr>
-              <a:buSzPct val="45000"/>
-              <a:buFont typeface="Wingdings" charset="2"/>
-              <a:buChar char=""/>
-            </a:pPr>
-            <a:r>
-              <a:rPr lang="es-ES" sz="3200" b="0" u="none" strike="noStrike">
-                <a:solidFill>
-                  <a:schemeClr val="dk2"/>
-                </a:solidFill>
-                <a:effectLst/>
-                <a:uFillTx/>
-                <a:latin typeface="Aptos Light"/>
-              </a:rPr>
-              <a:t>Sexto nivel del esquema</a:t>
-            </a:r>
-            <a:endParaRPr lang="es-ES" sz="3200" b="0" u="none" strike="noStrike">
-              <a:solidFill>
-                <a:srgbClr val="000000"/>
-              </a:solidFill>
-              <a:effectLst/>
-              <a:uFillTx/>
-              <a:latin typeface="Arial"/>
-            </a:endParaRPr>
-          </a:p>
-          <a:p>
-            <a:pPr marL="3024000" lvl="6" indent="-216000">
-              <a:lnSpc>
-                <a:spcPct val="120000"/>
-              </a:lnSpc>
-              <a:spcBef>
-                <a:spcPts val="283"/>
-              </a:spcBef>
-              <a:buClr>
-                <a:srgbClr val="000000"/>
-              </a:buClr>
-              <a:buSzPct val="45000"/>
-              <a:buFont typeface="Wingdings" charset="2"/>
-              <a:buChar char=""/>
-            </a:pPr>
-            <a:r>
-              <a:rPr lang="es-ES" sz="3200" b="0" u="none" strike="noStrike">
-                <a:solidFill>
-                  <a:schemeClr val="dk2"/>
-                </a:solidFill>
-                <a:effectLst/>
-                <a:uFillTx/>
-                <a:latin typeface="Aptos Light"/>
-              </a:rPr>
-              <a:t>Séptimo nivel del esquema</a:t>
-            </a:r>
-            <a:endParaRPr lang="es-ES" sz="3200" b="0" u="none" strike="noStrike">
-              <a:solidFill>
-                <a:srgbClr val="000000"/>
-              </a:solidFill>
-              <a:effectLst/>
-              <a:uFillTx/>
-              <a:latin typeface="Arial"/>
-            </a:endParaRPr>
-          </a:p>
-        </p:txBody>
-      </p:sp>
-      <p:sp>
-        <p:nvSpPr>
-          <p:cNvPr id="16" name="PlaceHolder 3"/>
-          <p:cNvSpPr>
-            <a:spLocks noGrp="1"/>
-          </p:cNvSpPr>
-          <p:nvPr>
-            <p:ph type="body"/>
-          </p:nvPr>
-        </p:nvSpPr>
-        <p:spPr>
-          <a:xfrm>
-            <a:off x="839880" y="3000600"/>
-            <a:ext cx="3643200" cy="2867760"/>
+            <a:off x="871200" y="588240"/>
+            <a:ext cx="10448640" cy="1264680"/>
           </a:xfrm>
           <a:prstGeom prst="rect">
             <a:avLst/>
@@ -2713,28 +2881,47 @@
           <a:p>
             <a:pPr indent="0" defTabSz="914400">
               <a:lnSpc>
-                <a:spcPct val="120000"/>
-              </a:lnSpc>
-              <a:spcBef>
-                <a:spcPts val="1001"/>
-              </a:spcBef>
-              <a:buNone/>
-              <a:tabLst>
-                <a:tab algn="l" pos="0"/>
-              </a:tabLst>
-            </a:pPr>
-            <a:r>
-              <a:rPr lang="en-US" sz="1600" b="0" u="none" strike="noStrike">
-                <a:solidFill>
-                  <a:schemeClr val="dk2"/>
-                </a:solidFill>
-                <a:effectLst/>
-                <a:uFillTx/>
-                <a:latin typeface="Aptos Light"/>
-              </a:rPr>
-              <a:t>Click to edit Master text styles</a:t>
-            </a:r>
-            <a:endParaRPr lang="es-ES" sz="1600" b="0" u="none" strike="noStrike">
+                <a:spcPct val="100000"/>
+              </a:lnSpc>
+              <a:buNone/>
+              <a:tabLst>
+                <a:tab algn="l" pos="0"/>
+              </a:tabLst>
+            </a:pPr>
+            <a:r>
+              <a:rPr lang="en-US" sz="3200" b="0" u="none" strike="noStrike">
+                <a:solidFill>
+                  <a:schemeClr val="dk2"/>
+                </a:solidFill>
+                <a:effectLst/>
+                <a:uFillTx/>
+                <a:latin typeface="Walbaum Display"/>
+              </a:rPr>
+              <a:t>Click to edit </a:t>
+            </a:r>
+            <a:r>
+              <a:rPr lang="en-US" sz="3200" b="0" u="none" strike="noStrike">
+                <a:solidFill>
+                  <a:schemeClr val="dk2"/>
+                </a:solidFill>
+                <a:effectLst/>
+                <a:uFillTx/>
+                <a:latin typeface="Walbaum Display"/>
+              </a:rPr>
+              <a:t>Master title </a:t>
+            </a:r>
+            <a:r>
+              <a:rPr lang="en-US" sz="3200" b="0" u="none" strike="noStrike">
+                <a:solidFill>
+                  <a:schemeClr val="dk2"/>
+                </a:solidFill>
+                <a:effectLst/>
+                <a:uFillTx/>
+                <a:latin typeface="Walbaum Display"/>
+              </a:rPr>
+              <a:t>style</a:t>
+            </a:r>
+            <a:endParaRPr lang="es-ES" sz="3200" b="0" u="none" strike="noStrike">
               <a:solidFill>
                 <a:srgbClr val="000000"/>
               </a:solidFill>
@@ -2747,7 +2934,7 @@
       </p:sp>
       <p:sp>
         <p:nvSpPr>
-          <p:cNvPr id="17" name="PlaceHolder 4"/>
+          <p:cNvPr id="20" name="PlaceHolder 2"/>
           <p:cNvSpPr>
             <a:spLocks noGrp="1"/>
           </p:cNvSpPr>
@@ -2758,7 +2945,7 @@
         <p:spPr>
           <a:xfrm>
             <a:off x="877680" y="6356520"/>
-            <a:ext cx="2742480" cy="364320"/>
+            <a:ext cx="2742120" cy="363960"/>
           </a:xfrm>
           <a:prstGeom prst="rect">
             <a:avLst/>
@@ -2825,7 +3012,7 @@
       </p:sp>
       <p:sp>
         <p:nvSpPr>
-          <p:cNvPr id="18" name="PlaceHolder 5"/>
+          <p:cNvPr id="21" name="PlaceHolder 3"/>
           <p:cNvSpPr>
             <a:spLocks noGrp="1"/>
           </p:cNvSpPr>
@@ -2836,7 +3023,7 @@
         <p:spPr>
           <a:xfrm>
             <a:off x="7132320" y="6356520"/>
-            <a:ext cx="4296960" cy="364320"/>
+            <a:ext cx="4296600" cy="363960"/>
           </a:xfrm>
           <a:prstGeom prst="rect">
             <a:avLst/>
@@ -2903,7 +3090,7 @@
       </p:sp>
       <p:sp>
         <p:nvSpPr>
-          <p:cNvPr id="19" name="PlaceHolder 6"/>
+          <p:cNvPr id="22" name="PlaceHolder 4"/>
           <p:cNvSpPr>
             <a:spLocks noGrp="1"/>
           </p:cNvSpPr>
@@ -2914,7 +3101,7 @@
         <p:spPr>
           <a:xfrm>
             <a:off x="11430000" y="6356520"/>
-            <a:ext cx="520560" cy="364320"/>
+            <a:ext cx="520200" cy="363960"/>
           </a:xfrm>
           <a:prstGeom prst="rect">
             <a:avLst/>
@@ -2957,7 +3144,7 @@
                 <a:tab algn="l" pos="0"/>
               </a:tabLst>
             </a:pPr>
-            <a:fld id="{9AFF2B81-5667-40CB-BB91-C6E78BEFE909}" type="slidenum">
+            <a:fld id="{B73A575F-B934-48C8-B42A-0965B3D9A298}" type="slidenum">
               <a:rPr lang="en-US" sz="1400" b="0" u="none" strike="noStrike">
                 <a:solidFill>
                   <a:schemeClr val="dk2"/>
@@ -2985,8 +3172,8 @@
 </file>
 
 <file path=ppt/slideLayouts/slideLayout4.xml><?xml version="1.0" encoding="utf-8"?>
-<p:sldLayout xmlns:a="http://schemas.openxmlformats.org/drawingml/2006/main" xmlns:p="http://schemas.openxmlformats.org/presentationml/2006/main" xmlns:r="http://schemas.openxmlformats.org/officeDocument/2006/relationships" xmlns:p14="http://schemas.microsoft.com/office/powerpoint/2010/main" xmlns:p15="http://schemas.microsoft.com/office/powerpoint/2012/main" xmlns:mc="http://schemas.openxmlformats.org/markup-compatibility/2006" type="title" preserve="1">
-  <p:cSld name="Title Slide">
+<p:sldLayout xmlns:a="http://schemas.openxmlformats.org/drawingml/2006/main" xmlns:p="http://schemas.openxmlformats.org/presentationml/2006/main" xmlns:r="http://schemas.openxmlformats.org/officeDocument/2006/relationships" xmlns:p14="http://schemas.microsoft.com/office/powerpoint/2010/main" xmlns:p15="http://schemas.microsoft.com/office/powerpoint/2012/main" xmlns:mc="http://schemas.openxmlformats.org/markup-compatibility/2006" type="blank" preserve="1">
+  <p:cSld name="Blank">
     <p:bg>
       <p:bgPr>
         <a:solidFill>
@@ -3010,14 +3197,14 @@
       </p:grpSpPr>
       <p:sp>
         <p:nvSpPr>
-          <p:cNvPr id="20" name="Rectangle 6"/>
+          <p:cNvPr id="23" name="Rectangle 6"/>
           <p:cNvSpPr/>
           <p:nvPr/>
         </p:nvSpPr>
         <p:spPr>
           <a:xfrm>
             <a:off x="0" y="0"/>
-            <a:ext cx="12191400" cy="6859440"/>
+            <a:ext cx="12191040" cy="6859080"/>
           </a:xfrm>
           <a:prstGeom prst="rect">
             <a:avLst/>
@@ -3069,66 +3256,7 @@
       </p:sp>
       <p:sp>
         <p:nvSpPr>
-          <p:cNvPr id="21" name="PlaceHolder 1"/>
-          <p:cNvSpPr>
-            <a:spLocks noGrp="1"/>
-          </p:cNvSpPr>
-          <p:nvPr>
-            <p:ph type="title"/>
-          </p:nvPr>
-        </p:nvSpPr>
-        <p:spPr>
-          <a:xfrm>
-            <a:off x="1523880" y="1122480"/>
-            <a:ext cx="9143280" cy="2208600"/>
-          </a:xfrm>
-          <a:prstGeom prst="rect">
-            <a:avLst/>
-          </a:prstGeom>
-          <a:noFill/>
-          <a:ln w="0">
-            <a:noFill/>
-          </a:ln>
-        </p:spPr>
-        <p:txBody>
-          <a:bodyPr lIns="91440" rIns="91440" tIns="45720" bIns="45720" anchor="b">
-            <a:normAutofit/>
-          </a:bodyPr>
-          <a:p>
-            <a:pPr indent="0" algn="ctr" defTabSz="914400">
-              <a:lnSpc>
-                <a:spcPct val="100000"/>
-              </a:lnSpc>
-              <a:buNone/>
-              <a:tabLst>
-                <a:tab algn="l" pos="0"/>
-              </a:tabLst>
-            </a:pPr>
-            <a:r>
-              <a:rPr lang="en-US" sz="3600" b="0" u="none" strike="noStrike">
-                <a:solidFill>
-                  <a:schemeClr val="dk2"/>
-                </a:solidFill>
-                <a:effectLst/>
-                <a:uFillTx/>
-                <a:latin typeface="Walbaum Display"/>
-              </a:rPr>
-              <a:t>Click to edit Master title style</a:t>
-            </a:r>
-            <a:endParaRPr lang="es-ES" sz="3600" b="0" u="none" strike="noStrike">
-              <a:solidFill>
-                <a:srgbClr val="000000"/>
-              </a:solidFill>
-              <a:effectLst/>
-              <a:uFillTx/>
-              <a:latin typeface="Arial"/>
-            </a:endParaRPr>
-          </a:p>
-        </p:txBody>
-      </p:sp>
-      <p:sp>
-        <p:nvSpPr>
-          <p:cNvPr id="22" name="PlaceHolder 2"/>
+          <p:cNvPr id="24" name="PlaceHolder 1"/>
           <p:cNvSpPr>
             <a:spLocks noGrp="1"/>
           </p:cNvSpPr>
@@ -3139,7 +3267,7 @@
         <p:spPr>
           <a:xfrm>
             <a:off x="877680" y="6356520"/>
-            <a:ext cx="2742480" cy="364320"/>
+            <a:ext cx="2742120" cy="363960"/>
           </a:xfrm>
           <a:prstGeom prst="rect">
             <a:avLst/>
@@ -3206,7 +3334,7 @@
       </p:sp>
       <p:sp>
         <p:nvSpPr>
-          <p:cNvPr id="23" name="PlaceHolder 3"/>
+          <p:cNvPr id="25" name="PlaceHolder 2"/>
           <p:cNvSpPr>
             <a:spLocks noGrp="1"/>
           </p:cNvSpPr>
@@ -3217,7 +3345,7 @@
         <p:spPr>
           <a:xfrm>
             <a:off x="7132320" y="6356520"/>
-            <a:ext cx="4296960" cy="364320"/>
+            <a:ext cx="4296600" cy="363960"/>
           </a:xfrm>
           <a:prstGeom prst="rect">
             <a:avLst/>
@@ -3284,7 +3412,7 @@
       </p:sp>
       <p:sp>
         <p:nvSpPr>
-          <p:cNvPr id="24" name="PlaceHolder 4"/>
+          <p:cNvPr id="26" name="PlaceHolder 3"/>
           <p:cNvSpPr>
             <a:spLocks noGrp="1"/>
           </p:cNvSpPr>
@@ -3295,7 +3423,7 @@
         <p:spPr>
           <a:xfrm>
             <a:off x="11430000" y="6356520"/>
-            <a:ext cx="520560" cy="364320"/>
+            <a:ext cx="520200" cy="363960"/>
           </a:xfrm>
           <a:prstGeom prst="rect">
             <a:avLst/>
@@ -3338,7 +3466,7 @@
                 <a:tab algn="l" pos="0"/>
               </a:tabLst>
             </a:pPr>
-            <a:fld id="{7ED8EC8D-018A-4623-813E-C48FF00F878F}" type="slidenum">
+            <a:fld id="{C5A1A661-57FC-49AF-8986-58FB02A4D848}" type="slidenum">
               <a:rPr lang="en-US" sz="1400" b="0" u="none" strike="noStrike">
                 <a:solidFill>
                   <a:schemeClr val="dk2"/>
@@ -3356,280 +3484,6 @@
               <a:effectLst/>
               <a:uFillTx/>
               <a:latin typeface="Times New Roman"/>
-            </a:endParaRPr>
-          </a:p>
-        </p:txBody>
-      </p:sp>
-      <p:sp>
-        <p:nvSpPr>
-          <p:cNvPr id="25" name="PlaceHolder 5"/>
-          <p:cNvSpPr>
-            <a:spLocks noGrp="1"/>
-          </p:cNvSpPr>
-          <p:nvPr>
-            <p:ph type="body"/>
-          </p:nvPr>
-        </p:nvSpPr>
-        <p:spPr>
-          <a:xfrm>
-            <a:off x="609480" y="1604520"/>
-            <a:ext cx="10972080" cy="3976920"/>
-          </a:xfrm>
-          <a:prstGeom prst="rect">
-            <a:avLst/>
-          </a:prstGeom>
-          <a:noFill/>
-          <a:ln w="0">
-            <a:noFill/>
-          </a:ln>
-        </p:spPr>
-        <p:txBody>
-          <a:bodyPr lIns="0" rIns="0" tIns="0" bIns="0" anchor="t">
-            <a:normAutofit/>
-          </a:bodyPr>
-          <a:p>
-            <a:pPr marL="432000" indent="-324000">
-              <a:lnSpc>
-                <a:spcPct val="120000"/>
-              </a:lnSpc>
-              <a:spcBef>
-                <a:spcPts val="1417"/>
-              </a:spcBef>
-              <a:buClr>
-                <a:srgbClr val="000000"/>
-              </a:buClr>
-              <a:buSzPct val="45000"/>
-              <a:buFont typeface="Wingdings" charset="2"/>
-              <a:buChar char=""/>
-            </a:pPr>
-            <a:r>
-              <a:rPr lang="es-ES" sz="1600" b="0" u="none" strike="noStrike">
-                <a:solidFill>
-                  <a:schemeClr val="dk2"/>
-                </a:solidFill>
-                <a:effectLst/>
-                <a:uFillTx/>
-                <a:latin typeface="Aptos Light"/>
-              </a:rPr>
-              <a:t>Pulse para editar el formato de texto del esquema</a:t>
-            </a:r>
-            <a:endParaRPr lang="es-ES" sz="1600" b="0" u="none" strike="noStrike">
-              <a:solidFill>
-                <a:srgbClr val="000000"/>
-              </a:solidFill>
-              <a:effectLst/>
-              <a:uFillTx/>
-              <a:latin typeface="Arial"/>
-            </a:endParaRPr>
-          </a:p>
-          <a:p>
-            <a:pPr marL="864000" lvl="1" indent="-324000">
-              <a:lnSpc>
-                <a:spcPct val="120000"/>
-              </a:lnSpc>
-              <a:spcBef>
-                <a:spcPts val="1134"/>
-              </a:spcBef>
-              <a:buClr>
-                <a:srgbClr val="000000"/>
-              </a:buClr>
-              <a:buSzPct val="75000"/>
-              <a:buFont typeface="Symbol" charset="2"/>
-              <a:buChar char=""/>
-            </a:pPr>
-            <a:r>
-              <a:rPr lang="es-ES" sz="1200" b="0" u="none" strike="noStrike">
-                <a:solidFill>
-                  <a:schemeClr val="dk2"/>
-                </a:solidFill>
-                <a:effectLst/>
-                <a:uFillTx/>
-                <a:latin typeface="Aptos Light"/>
-              </a:rPr>
-              <a:t>Segundo nivel del esquema</a:t>
-            </a:r>
-            <a:endParaRPr lang="es-ES" sz="1200" b="0" u="none" strike="noStrike">
-              <a:solidFill>
-                <a:srgbClr val="000000"/>
-              </a:solidFill>
-              <a:effectLst/>
-              <a:uFillTx/>
-              <a:latin typeface="Arial"/>
-            </a:endParaRPr>
-          </a:p>
-          <a:p>
-            <a:pPr marL="1296000" lvl="2" indent="-288000">
-              <a:lnSpc>
-                <a:spcPct val="120000"/>
-              </a:lnSpc>
-              <a:spcBef>
-                <a:spcPts val="850"/>
-              </a:spcBef>
-              <a:buClr>
-                <a:srgbClr val="000000"/>
-              </a:buClr>
-              <a:buSzPct val="45000"/>
-              <a:buFont typeface="Wingdings" charset="2"/>
-              <a:buChar char=""/>
-            </a:pPr>
-            <a:r>
-              <a:rPr lang="es-ES" sz="1100" b="0" u="none" strike="noStrike">
-                <a:solidFill>
-                  <a:schemeClr val="dk2"/>
-                </a:solidFill>
-                <a:effectLst/>
-                <a:uFillTx/>
-                <a:latin typeface="Aptos Light"/>
-              </a:rPr>
-              <a:t>Tercer nivel del esquema</a:t>
-            </a:r>
-            <a:endParaRPr lang="es-ES" sz="1100" b="0" u="none" strike="noStrike">
-              <a:solidFill>
-                <a:srgbClr val="000000"/>
-              </a:solidFill>
-              <a:effectLst/>
-              <a:uFillTx/>
-              <a:latin typeface="Arial"/>
-            </a:endParaRPr>
-          </a:p>
-          <a:p>
-            <a:pPr marL="1728000" lvl="3" indent="-216000">
-              <a:lnSpc>
-                <a:spcPct val="120000"/>
-              </a:lnSpc>
-              <a:spcBef>
-                <a:spcPts val="567"/>
-              </a:spcBef>
-              <a:buClr>
-                <a:srgbClr val="000000"/>
-              </a:buClr>
-              <a:buSzPct val="75000"/>
-              <a:buFont typeface="Symbol" charset="2"/>
-              <a:buChar char=""/>
-            </a:pPr>
-            <a:r>
-              <a:rPr lang="es-ES" sz="1100" b="0" u="none" strike="noStrike">
-                <a:solidFill>
-                  <a:schemeClr val="dk2"/>
-                </a:solidFill>
-                <a:effectLst/>
-                <a:uFillTx/>
-                <a:latin typeface="Aptos Light"/>
-              </a:rPr>
-              <a:t>Cuarto nivel del esquema</a:t>
-            </a:r>
-            <a:endParaRPr lang="es-ES" sz="1100" b="0" u="none" strike="noStrike">
-              <a:solidFill>
-                <a:srgbClr val="000000"/>
-              </a:solidFill>
-              <a:effectLst/>
-              <a:uFillTx/>
-              <a:latin typeface="Arial"/>
-            </a:endParaRPr>
-          </a:p>
-          <a:p>
-            <a:pPr marL="2160000" lvl="4" indent="-216000">
-              <a:lnSpc>
-                <a:spcPct val="120000"/>
-              </a:lnSpc>
-              <a:spcBef>
-                <a:spcPts val="283"/>
-              </a:spcBef>
-              <a:buClr>
-                <a:srgbClr val="000000"/>
-              </a:buClr>
-              <a:buSzPct val="45000"/>
-              <a:buFont typeface="Wingdings" charset="2"/>
-              <a:buChar char=""/>
-            </a:pPr>
-            <a:r>
-              <a:rPr lang="es-ES" sz="2000" b="0" u="none" strike="noStrike">
-                <a:solidFill>
-                  <a:schemeClr val="dk2"/>
-                </a:solidFill>
-                <a:effectLst/>
-                <a:uFillTx/>
-                <a:latin typeface="Aptos Light"/>
-              </a:rPr>
-              <a:t>Quinto nivel del esquema</a:t>
-            </a:r>
-            <a:endParaRPr lang="es-ES" sz="2000" b="0" u="none" strike="noStrike">
-              <a:solidFill>
-                <a:srgbClr val="000000"/>
-              </a:solidFill>
-              <a:effectLst/>
-              <a:uFillTx/>
-              <a:latin typeface="Arial"/>
-            </a:endParaRPr>
-          </a:p>
-          <a:p>
-            <a:pPr marL="2592000" lvl="5" indent="-216000">
-              <a:lnSpc>
-                <a:spcPct val="120000"/>
-              </a:lnSpc>
-              <a:spcBef>
-                <a:spcPts val="283"/>
-              </a:spcBef>
-              <a:buClr>
-                <a:srgbClr val="000000"/>
-              </a:buClr>
-              <a:buSzPct val="45000"/>
-              <a:buFont typeface="Wingdings" charset="2"/>
-              <a:buChar char=""/>
-            </a:pPr>
-            <a:r>
-              <a:rPr lang="es-ES" sz="2000" b="0" u="none" strike="noStrike">
-                <a:solidFill>
-                  <a:schemeClr val="dk2"/>
-                </a:solidFill>
-                <a:effectLst/>
-                <a:uFillTx/>
-                <a:latin typeface="Aptos Light"/>
-              </a:rPr>
-              <a:t>Sexto nivel del esquema</a:t>
-            </a:r>
-            <a:endParaRPr lang="es-ES" sz="2000" b="0" u="none" strike="noStrike">
-              <a:solidFill>
-                <a:srgbClr val="000000"/>
-              </a:solidFill>
-              <a:effectLst/>
-              <a:uFillTx/>
-              <a:latin typeface="Arial"/>
-            </a:endParaRPr>
-          </a:p>
-          <a:p>
-            <a:pPr marL="3024000" lvl="6" indent="-216000">
-              <a:lnSpc>
-                <a:spcPct val="120000"/>
-              </a:lnSpc>
-              <a:spcBef>
-                <a:spcPts val="283"/>
-              </a:spcBef>
-              <a:buClr>
-                <a:srgbClr val="000000"/>
-              </a:buClr>
-              <a:buSzPct val="45000"/>
-              <a:buFont typeface="Wingdings" charset="2"/>
-              <a:buChar char=""/>
-            </a:pPr>
-            <a:r>
-              <a:rPr lang="es-ES" sz="2000" b="0" u="none" strike="noStrike">
-                <a:solidFill>
-                  <a:schemeClr val="dk2"/>
-                </a:solidFill>
-                <a:effectLst/>
-                <a:uFillTx/>
-                <a:latin typeface="Aptos Light"/>
-              </a:rPr>
-              <a:t>Séptimo nivel del esquema</a:t>
-            </a:r>
-            <a:endParaRPr lang="es-ES" sz="2000" b="0" u="none" strike="noStrike">
-              <a:solidFill>
-                <a:srgbClr val="000000"/>
-              </a:solidFill>
-              <a:effectLst/>
-              <a:uFillTx/>
-              <a:latin typeface="Arial"/>
             </a:endParaRPr>
           </a:p>
         </p:txBody>
@@ -3640,8 +3494,8 @@
 </file>
 
 <file path=ppt/slideLayouts/slideLayout5.xml><?xml version="1.0" encoding="utf-8"?>
-<p:sldLayout xmlns:a="http://schemas.openxmlformats.org/drawingml/2006/main" xmlns:p="http://schemas.openxmlformats.org/presentationml/2006/main" xmlns:r="http://schemas.openxmlformats.org/officeDocument/2006/relationships" xmlns:p14="http://schemas.microsoft.com/office/powerpoint/2010/main" xmlns:p15="http://schemas.microsoft.com/office/powerpoint/2012/main" xmlns:mc="http://schemas.openxmlformats.org/markup-compatibility/2006" type="vertTx" preserve="1">
-  <p:cSld name="Title and Vertical Text">
+<p:sldLayout xmlns:a="http://schemas.openxmlformats.org/drawingml/2006/main" xmlns:p="http://schemas.openxmlformats.org/presentationml/2006/main" xmlns:r="http://schemas.openxmlformats.org/officeDocument/2006/relationships" xmlns:p14="http://schemas.microsoft.com/office/powerpoint/2010/main" xmlns:p15="http://schemas.microsoft.com/office/powerpoint/2012/main" xmlns:mc="http://schemas.openxmlformats.org/markup-compatibility/2006" type="blank" preserve="1">
+  <p:cSld name="Content with Caption">
     <p:bg>
       <p:bgPr>
         <a:solidFill>
@@ -3665,14 +3519,14 @@
       </p:grpSpPr>
       <p:sp>
         <p:nvSpPr>
-          <p:cNvPr id="26" name="Rectangle 6"/>
+          <p:cNvPr id="27" name="Rectangle 6"/>
           <p:cNvSpPr/>
           <p:nvPr/>
         </p:nvSpPr>
         <p:spPr>
           <a:xfrm>
             <a:off x="0" y="0"/>
-            <a:ext cx="12191400" cy="6859440"/>
+            <a:ext cx="12191040" cy="6859080"/>
           </a:xfrm>
           <a:prstGeom prst="rect">
             <a:avLst/>
@@ -3724,7 +3578,7 @@
       </p:sp>
       <p:sp>
         <p:nvSpPr>
-          <p:cNvPr id="27" name="PlaceHolder 1"/>
+          <p:cNvPr id="28" name="PlaceHolder 1"/>
           <p:cNvSpPr>
             <a:spLocks noGrp="1"/>
           </p:cNvSpPr>
@@ -3734,8 +3588,288 @@
         </p:nvSpPr>
         <p:spPr>
           <a:xfrm>
-            <a:off x="871200" y="588240"/>
-            <a:ext cx="10449000" cy="1265040"/>
+            <a:off x="839880" y="807840"/>
+            <a:ext cx="3639600" cy="2061360"/>
+          </a:xfrm>
+          <a:prstGeom prst="rect">
+            <a:avLst/>
+          </a:prstGeom>
+          <a:noFill/>
+          <a:ln w="0">
+            <a:noFill/>
+          </a:ln>
+        </p:spPr>
+        <p:txBody>
+          <a:bodyPr lIns="91440" rIns="91440" tIns="45720" bIns="45720" anchor="t">
+            <a:normAutofit/>
+          </a:bodyPr>
+          <a:p>
+            <a:pPr indent="0" defTabSz="914400">
+              <a:lnSpc>
+                <a:spcPct val="100000"/>
+              </a:lnSpc>
+              <a:buNone/>
+              <a:tabLst>
+                <a:tab algn="l" pos="0"/>
+              </a:tabLst>
+            </a:pPr>
+            <a:r>
+              <a:rPr lang="en-US" sz="2800" b="0" u="none" strike="noStrike">
+                <a:solidFill>
+                  <a:schemeClr val="dk2"/>
+                </a:solidFill>
+                <a:effectLst/>
+                <a:uFillTx/>
+                <a:latin typeface="Walbaum Display"/>
+              </a:rPr>
+              <a:t>Click to edit </a:t>
+            </a:r>
+            <a:r>
+              <a:rPr lang="en-US" sz="2800" b="0" u="none" strike="noStrike">
+                <a:solidFill>
+                  <a:schemeClr val="dk2"/>
+                </a:solidFill>
+                <a:effectLst/>
+                <a:uFillTx/>
+                <a:latin typeface="Walbaum Display"/>
+              </a:rPr>
+              <a:t>Master title </a:t>
+            </a:r>
+            <a:r>
+              <a:rPr lang="en-US" sz="2800" b="0" u="none" strike="noStrike">
+                <a:solidFill>
+                  <a:schemeClr val="dk2"/>
+                </a:solidFill>
+                <a:effectLst/>
+                <a:uFillTx/>
+                <a:latin typeface="Walbaum Display"/>
+              </a:rPr>
+              <a:t>style</a:t>
+            </a:r>
+            <a:endParaRPr lang="es-ES" sz="2800" b="0" u="none" strike="noStrike">
+              <a:solidFill>
+                <a:srgbClr val="000000"/>
+              </a:solidFill>
+              <a:effectLst/>
+              <a:uFillTx/>
+              <a:latin typeface="Arial"/>
+            </a:endParaRPr>
+          </a:p>
+        </p:txBody>
+      </p:sp>
+      <p:sp>
+        <p:nvSpPr>
+          <p:cNvPr id="29" name="PlaceHolder 2"/>
+          <p:cNvSpPr>
+            <a:spLocks noGrp="1"/>
+          </p:cNvSpPr>
+          <p:nvPr>
+            <p:ph type="body"/>
+          </p:nvPr>
+        </p:nvSpPr>
+        <p:spPr>
+          <a:xfrm>
+            <a:off x="5432760" y="807840"/>
+            <a:ext cx="5921280" cy="5052240"/>
+          </a:xfrm>
+          <a:prstGeom prst="rect">
+            <a:avLst/>
+          </a:prstGeom>
+          <a:noFill/>
+          <a:ln w="0">
+            <a:noFill/>
+          </a:ln>
+        </p:spPr>
+        <p:txBody>
+          <a:bodyPr lIns="91440" rIns="91440" tIns="45720" bIns="45720" anchor="t">
+            <a:normAutofit/>
+          </a:bodyPr>
+          <a:p>
+            <a:pPr marL="228600" indent="-228600" defTabSz="914400">
+              <a:lnSpc>
+                <a:spcPct val="120000"/>
+              </a:lnSpc>
+              <a:spcBef>
+                <a:spcPts val="1001"/>
+              </a:spcBef>
+              <a:buClr>
+                <a:srgbClr val="35403a"/>
+              </a:buClr>
+              <a:buFont typeface="Arial"/>
+              <a:buChar char="•"/>
+            </a:pPr>
+            <a:r>
+              <a:rPr lang="en-US" sz="2400" b="0" u="none" strike="noStrike">
+                <a:solidFill>
+                  <a:schemeClr val="dk2"/>
+                </a:solidFill>
+                <a:effectLst/>
+                <a:uFillTx/>
+                <a:latin typeface="Aptos Light"/>
+              </a:rPr>
+              <a:t>Click to edit Master text styles</a:t>
+            </a:r>
+            <a:endParaRPr lang="es-ES" sz="2400" b="0" u="none" strike="noStrike">
+              <a:solidFill>
+                <a:srgbClr val="000000"/>
+              </a:solidFill>
+              <a:effectLst/>
+              <a:uFillTx/>
+              <a:latin typeface="Arial"/>
+            </a:endParaRPr>
+          </a:p>
+          <a:p>
+            <a:pPr marL="457200" lvl="1" indent="-228600" defTabSz="914400">
+              <a:lnSpc>
+                <a:spcPct val="120000"/>
+              </a:lnSpc>
+              <a:spcBef>
+                <a:spcPts val="499"/>
+              </a:spcBef>
+              <a:buClr>
+                <a:srgbClr val="35403a"/>
+              </a:buClr>
+              <a:buFont typeface="Arial"/>
+              <a:buChar char="•"/>
+            </a:pPr>
+            <a:r>
+              <a:rPr lang="en-US" sz="2000" b="0" u="none" strike="noStrike">
+                <a:solidFill>
+                  <a:schemeClr val="dk2"/>
+                </a:solidFill>
+                <a:effectLst/>
+                <a:uFillTx/>
+                <a:latin typeface="Aptos Light"/>
+              </a:rPr>
+              <a:t>Second level</a:t>
+            </a:r>
+            <a:endParaRPr lang="es-ES" sz="2000" b="0" u="none" strike="noStrike">
+              <a:solidFill>
+                <a:srgbClr val="000000"/>
+              </a:solidFill>
+              <a:effectLst/>
+              <a:uFillTx/>
+              <a:latin typeface="Arial"/>
+            </a:endParaRPr>
+          </a:p>
+          <a:p>
+            <a:pPr marL="685800" lvl="2" indent="-228600" defTabSz="914400">
+              <a:lnSpc>
+                <a:spcPct val="120000"/>
+              </a:lnSpc>
+              <a:spcBef>
+                <a:spcPts val="499"/>
+              </a:spcBef>
+              <a:buClr>
+                <a:srgbClr val="35403a"/>
+              </a:buClr>
+              <a:buFont typeface="Arial"/>
+              <a:buChar char="•"/>
+            </a:pPr>
+            <a:r>
+              <a:rPr lang="en-US" sz="1800" b="0" u="none" strike="noStrike">
+                <a:solidFill>
+                  <a:schemeClr val="dk2"/>
+                </a:solidFill>
+                <a:effectLst/>
+                <a:uFillTx/>
+                <a:latin typeface="Aptos Light"/>
+              </a:rPr>
+              <a:t>Third level</a:t>
+            </a:r>
+            <a:endParaRPr lang="es-ES" sz="1800" b="0" u="none" strike="noStrike">
+              <a:solidFill>
+                <a:srgbClr val="000000"/>
+              </a:solidFill>
+              <a:effectLst/>
+              <a:uFillTx/>
+              <a:latin typeface="Arial"/>
+            </a:endParaRPr>
+          </a:p>
+          <a:p>
+            <a:pPr marL="914400" lvl="3" indent="-228600" defTabSz="914400">
+              <a:lnSpc>
+                <a:spcPct val="120000"/>
+              </a:lnSpc>
+              <a:spcBef>
+                <a:spcPts val="499"/>
+              </a:spcBef>
+              <a:buClr>
+                <a:srgbClr val="35403a"/>
+              </a:buClr>
+              <a:buFont typeface="Arial"/>
+              <a:buChar char="•"/>
+            </a:pPr>
+            <a:r>
+              <a:rPr lang="en-US" sz="1600" b="0" u="none" strike="noStrike">
+                <a:solidFill>
+                  <a:schemeClr val="dk2"/>
+                </a:solidFill>
+                <a:effectLst/>
+                <a:uFillTx/>
+                <a:latin typeface="Aptos Light"/>
+              </a:rPr>
+              <a:t>Fourth level</a:t>
+            </a:r>
+            <a:endParaRPr lang="es-ES" sz="1600" b="0" u="none" strike="noStrike">
+              <a:solidFill>
+                <a:srgbClr val="000000"/>
+              </a:solidFill>
+              <a:effectLst/>
+              <a:uFillTx/>
+              <a:latin typeface="Arial"/>
+            </a:endParaRPr>
+          </a:p>
+          <a:p>
+            <a:pPr marL="1143000" lvl="4" indent="-228600" defTabSz="914400">
+              <a:lnSpc>
+                <a:spcPct val="120000"/>
+              </a:lnSpc>
+              <a:spcBef>
+                <a:spcPts val="499"/>
+              </a:spcBef>
+              <a:buClr>
+                <a:srgbClr val="35403a"/>
+              </a:buClr>
+              <a:buFont typeface="Arial"/>
+              <a:buChar char="•"/>
+            </a:pPr>
+            <a:r>
+              <a:rPr lang="en-US" sz="1600" b="0" u="none" strike="noStrike">
+                <a:solidFill>
+                  <a:schemeClr val="dk2"/>
+                </a:solidFill>
+                <a:effectLst/>
+                <a:uFillTx/>
+                <a:latin typeface="Aptos Light"/>
+              </a:rPr>
+              <a:t>Fifth level</a:t>
+            </a:r>
+            <a:endParaRPr lang="es-ES" sz="1600" b="0" u="none" strike="noStrike">
+              <a:solidFill>
+                <a:srgbClr val="000000"/>
+              </a:solidFill>
+              <a:effectLst/>
+              <a:uFillTx/>
+              <a:latin typeface="Arial"/>
+            </a:endParaRPr>
+          </a:p>
+        </p:txBody>
+      </p:sp>
+      <p:sp>
+        <p:nvSpPr>
+          <p:cNvPr id="30" name="PlaceHolder 3"/>
+          <p:cNvSpPr>
+            <a:spLocks noGrp="1"/>
+          </p:cNvSpPr>
+          <p:nvPr>
+            <p:ph type="body"/>
+          </p:nvPr>
+        </p:nvSpPr>
+        <p:spPr>
+          <a:xfrm>
+            <a:off x="839880" y="3000600"/>
+            <a:ext cx="3639600" cy="2867400"/>
           </a:xfrm>
           <a:prstGeom prst="rect">
             <a:avLst/>
@@ -3752,25 +3886,28 @@
           <a:p>
             <a:pPr indent="0" defTabSz="914400">
               <a:lnSpc>
-                <a:spcPct val="100000"/>
-              </a:lnSpc>
-              <a:buNone/>
-              <a:tabLst>
-                <a:tab algn="l" pos="0"/>
-              </a:tabLst>
-            </a:pPr>
-            <a:r>
-              <a:rPr lang="en-US" sz="3200" b="0" u="none" strike="noStrike">
-                <a:solidFill>
-                  <a:schemeClr val="dk2"/>
-                </a:solidFill>
-                <a:effectLst/>
-                <a:uFillTx/>
-                <a:latin typeface="Walbaum Display"/>
-              </a:rPr>
-              <a:t>Click to edit Master title style</a:t>
-            </a:r>
-            <a:endParaRPr lang="es-ES" sz="3200" b="0" u="none" strike="noStrike">
+                <a:spcPct val="120000"/>
+              </a:lnSpc>
+              <a:spcBef>
+                <a:spcPts val="1001"/>
+              </a:spcBef>
+              <a:buNone/>
+              <a:tabLst>
+                <a:tab algn="l" pos="0"/>
+              </a:tabLst>
+            </a:pPr>
+            <a:r>
+              <a:rPr lang="en-US" sz="1600" b="0" u="none" strike="noStrike">
+                <a:solidFill>
+                  <a:schemeClr val="dk2"/>
+                </a:solidFill>
+                <a:effectLst/>
+                <a:uFillTx/>
+                <a:latin typeface="Aptos Light"/>
+              </a:rPr>
+              <a:t>Click to edit Master text styles</a:t>
+            </a:r>
+            <a:endParaRPr lang="es-ES" sz="1600" b="0" u="none" strike="noStrike">
               <a:solidFill>
                 <a:srgbClr val="000000"/>
               </a:solidFill>
@@ -3783,206 +3920,7 @@
       </p:sp>
       <p:sp>
         <p:nvSpPr>
-          <p:cNvPr id="28" name="PlaceHolder 2"/>
-          <p:cNvSpPr>
-            <a:spLocks noGrp="1"/>
-          </p:cNvSpPr>
-          <p:nvPr>
-            <p:ph type="body"/>
-          </p:nvPr>
-        </p:nvSpPr>
-        <p:spPr>
-          <a:xfrm>
-            <a:off x="877680" y="2157840"/>
-            <a:ext cx="10441800" cy="3903120"/>
-          </a:xfrm>
-          <a:prstGeom prst="rect">
-            <a:avLst/>
-          </a:prstGeom>
-          <a:noFill/>
-          <a:ln w="0">
-            <a:noFill/>
-          </a:ln>
-        </p:spPr>
-        <p:txBody>
-          <a:bodyPr lIns="91440" rIns="91440" tIns="45720" bIns="45720" anchor="t" vert="eaVert">
-            <a:noAutofit/>
-          </a:bodyPr>
-          <a:p>
-            <a:pPr marL="228600" indent="-228600" defTabSz="914400">
-              <a:lnSpc>
-                <a:spcPct val="120000"/>
-              </a:lnSpc>
-              <a:spcBef>
-                <a:spcPts val="1001"/>
-              </a:spcBef>
-              <a:buClr>
-                <a:srgbClr val="35403a"/>
-              </a:buClr>
-              <a:buFont typeface="Arial"/>
-              <a:buChar char="•"/>
-            </a:pPr>
-            <a:r>
-              <a:rPr lang="en-US" sz="1600" b="0" u="none" strike="noStrike">
-                <a:solidFill>
-                  <a:schemeClr val="dk2"/>
-                </a:solidFill>
-                <a:effectLst/>
-                <a:uFillTx/>
-                <a:latin typeface="Aptos Light"/>
-              </a:rPr>
-              <a:t>Click to edit Master text styles</a:t>
-            </a:r>
-            <a:endParaRPr lang="es-ES" sz="1600" b="0" u="none" strike="noStrike">
-              <a:solidFill>
-                <a:srgbClr val="000000"/>
-              </a:solidFill>
-              <a:effectLst/>
-              <a:uFillTx/>
-              <a:latin typeface="Arial"/>
-            </a:endParaRPr>
-          </a:p>
-          <a:p>
-            <a:pPr marL="457200" lvl="1" indent="-228600" defTabSz="914400">
-              <a:lnSpc>
-                <a:spcPct val="120000"/>
-              </a:lnSpc>
-              <a:spcBef>
-                <a:spcPts val="499"/>
-              </a:spcBef>
-              <a:buClr>
-                <a:srgbClr val="35403a"/>
-              </a:buClr>
-              <a:buFont typeface="Arial"/>
-              <a:buChar char="•"/>
-            </a:pPr>
-            <a:r>
-              <a:rPr lang="en-US" sz="1400" b="0" u="none" strike="noStrike">
-                <a:solidFill>
-                  <a:schemeClr val="dk2"/>
-                </a:solidFill>
-                <a:effectLst/>
-                <a:uFillTx/>
-                <a:latin typeface="Aptos Light"/>
-              </a:rPr>
-              <a:t>Second level</a:t>
-            </a:r>
-            <a:endParaRPr lang="es-ES" sz="1400" b="0" u="none" strike="noStrike">
-              <a:solidFill>
-                <a:srgbClr val="000000"/>
-              </a:solidFill>
-              <a:effectLst/>
-              <a:uFillTx/>
-              <a:latin typeface="Arial"/>
-            </a:endParaRPr>
-          </a:p>
-          <a:p>
-            <a:pPr marL="685800" lvl="2" indent="-228600" defTabSz="914400">
-              <a:lnSpc>
-                <a:spcPct val="120000"/>
-              </a:lnSpc>
-              <a:spcBef>
-                <a:spcPts val="499"/>
-              </a:spcBef>
-              <a:buClr>
-                <a:srgbClr val="35403a"/>
-              </a:buClr>
-              <a:buFont typeface="Arial"/>
-              <a:buChar char="•"/>
-            </a:pPr>
-            <a:r>
-              <a:rPr lang="en-US" sz="1200" b="0" u="none" strike="noStrike">
-                <a:solidFill>
-                  <a:schemeClr val="dk2"/>
-                </a:solidFill>
-                <a:effectLst/>
-                <a:uFillTx/>
-                <a:latin typeface="Aptos Light"/>
-              </a:rPr>
-              <a:t>Third level</a:t>
-            </a:r>
-            <a:endParaRPr lang="es-ES" sz="1200" b="0" u="none" strike="noStrike">
-              <a:solidFill>
-                <a:srgbClr val="000000"/>
-              </a:solidFill>
-              <a:effectLst/>
-              <a:uFillTx/>
-              <a:latin typeface="Arial"/>
-            </a:endParaRPr>
-          </a:p>
-          <a:p>
-            <a:pPr marL="914400" lvl="3" indent="-228600" defTabSz="914400">
-              <a:lnSpc>
-                <a:spcPct val="120000"/>
-              </a:lnSpc>
-              <a:spcBef>
-                <a:spcPts val="499"/>
-              </a:spcBef>
-              <a:buClr>
-                <a:srgbClr val="35403a"/>
-              </a:buClr>
-              <a:buFont typeface="Arial"/>
-              <a:buChar char="•"/>
-            </a:pPr>
-            <a:r>
-              <a:rPr lang="en-US" sz="1100" b="0" u="none" strike="noStrike">
-                <a:solidFill>
-                  <a:schemeClr val="dk2"/>
-                </a:solidFill>
-                <a:effectLst/>
-                <a:uFillTx/>
-                <a:latin typeface="Aptos Light"/>
-              </a:rPr>
-              <a:t>Fourth level</a:t>
-            </a:r>
-            <a:endParaRPr lang="es-ES" sz="1100" b="0" u="none" strike="noStrike">
-              <a:solidFill>
-                <a:srgbClr val="000000"/>
-              </a:solidFill>
-              <a:effectLst/>
-              <a:uFillTx/>
-              <a:latin typeface="Arial"/>
-            </a:endParaRPr>
-          </a:p>
-          <a:p>
-            <a:pPr marL="1143000" lvl="4" indent="-228600" defTabSz="914400">
-              <a:lnSpc>
-                <a:spcPct val="120000"/>
-              </a:lnSpc>
-              <a:spcBef>
-                <a:spcPts val="499"/>
-              </a:spcBef>
-              <a:buClr>
-                <a:srgbClr val="35403a"/>
-              </a:buClr>
-              <a:buFont typeface="Arial"/>
-              <a:buChar char="•"/>
-            </a:pPr>
-            <a:r>
-              <a:rPr lang="en-US" sz="1100" b="0" u="none" strike="noStrike">
-                <a:solidFill>
-                  <a:schemeClr val="dk2"/>
-                </a:solidFill>
-                <a:effectLst/>
-                <a:uFillTx/>
-                <a:latin typeface="Aptos Light"/>
-              </a:rPr>
-              <a:t>Fifth level</a:t>
-            </a:r>
-            <a:endParaRPr lang="es-ES" sz="1100" b="0" u="none" strike="noStrike">
-              <a:solidFill>
-                <a:srgbClr val="000000"/>
-              </a:solidFill>
-              <a:effectLst/>
-              <a:uFillTx/>
-              <a:latin typeface="Arial"/>
-            </a:endParaRPr>
-          </a:p>
-        </p:txBody>
-      </p:sp>
-      <p:sp>
-        <p:nvSpPr>
-          <p:cNvPr id="29" name="PlaceHolder 3"/>
+          <p:cNvPr id="31" name="PlaceHolder 4"/>
           <p:cNvSpPr>
             <a:spLocks noGrp="1"/>
           </p:cNvSpPr>
@@ -3993,7 +3931,7 @@
         <p:spPr>
           <a:xfrm>
             <a:off x="877680" y="6356520"/>
-            <a:ext cx="2742480" cy="364320"/>
+            <a:ext cx="2742120" cy="363960"/>
           </a:xfrm>
           <a:prstGeom prst="rect">
             <a:avLst/>
@@ -4060,7 +3998,7 @@
       </p:sp>
       <p:sp>
         <p:nvSpPr>
-          <p:cNvPr id="30" name="PlaceHolder 4"/>
+          <p:cNvPr id="32" name="PlaceHolder 5"/>
           <p:cNvSpPr>
             <a:spLocks noGrp="1"/>
           </p:cNvSpPr>
@@ -4071,7 +4009,7 @@
         <p:spPr>
           <a:xfrm>
             <a:off x="7132320" y="6356520"/>
-            <a:ext cx="4296960" cy="364320"/>
+            <a:ext cx="4296600" cy="363960"/>
           </a:xfrm>
           <a:prstGeom prst="rect">
             <a:avLst/>
@@ -4138,7 +4076,7 @@
       </p:sp>
       <p:sp>
         <p:nvSpPr>
-          <p:cNvPr id="31" name="PlaceHolder 5"/>
+          <p:cNvPr id="33" name="PlaceHolder 6"/>
           <p:cNvSpPr>
             <a:spLocks noGrp="1"/>
           </p:cNvSpPr>
@@ -4149,7 +4087,7 @@
         <p:spPr>
           <a:xfrm>
             <a:off x="11430000" y="6356520"/>
-            <a:ext cx="520560" cy="364320"/>
+            <a:ext cx="520200" cy="363960"/>
           </a:xfrm>
           <a:prstGeom prst="rect">
             <a:avLst/>
@@ -4192,7 +4130,7 @@
                 <a:tab algn="l" pos="0"/>
               </a:tabLst>
             </a:pPr>
-            <a:fld id="{4DF6AC2C-2EC0-4611-8CDE-53A2D6BB6764}" type="slidenum">
+            <a:fld id="{32F761E1-F8C3-4AEA-8550-6EBA05A77E01}" type="slidenum">
               <a:rPr lang="en-US" sz="1400" b="0" u="none" strike="noStrike">
                 <a:solidFill>
                   <a:schemeClr val="dk2"/>
@@ -4220,8 +4158,8 @@
 </file>
 
 <file path=ppt/slideLayouts/slideLayout6.xml><?xml version="1.0" encoding="utf-8"?>
-<p:sldLayout xmlns:a="http://schemas.openxmlformats.org/drawingml/2006/main" xmlns:p="http://schemas.openxmlformats.org/presentationml/2006/main" xmlns:r="http://schemas.openxmlformats.org/officeDocument/2006/relationships" xmlns:p14="http://schemas.microsoft.com/office/powerpoint/2010/main" xmlns:p15="http://schemas.microsoft.com/office/powerpoint/2012/main" xmlns:mc="http://schemas.openxmlformats.org/markup-compatibility/2006" type="vertTitleAndTx" preserve="1">
-  <p:cSld name="Vertical Title and Text">
+<p:sldLayout xmlns:a="http://schemas.openxmlformats.org/drawingml/2006/main" xmlns:p="http://schemas.openxmlformats.org/presentationml/2006/main" xmlns:r="http://schemas.openxmlformats.org/officeDocument/2006/relationships" xmlns:p14="http://schemas.microsoft.com/office/powerpoint/2010/main" xmlns:p15="http://schemas.microsoft.com/office/powerpoint/2012/main" xmlns:mc="http://schemas.openxmlformats.org/markup-compatibility/2006" type="blank" preserve="1">
+  <p:cSld name="Picture with Caption">
     <p:bg>
       <p:bgPr>
         <a:solidFill>
@@ -4245,14 +4183,14 @@
       </p:grpSpPr>
       <p:sp>
         <p:nvSpPr>
-          <p:cNvPr id="32" name="Rectangle 6"/>
+          <p:cNvPr id="34" name="Rectangle 6"/>
           <p:cNvSpPr/>
           <p:nvPr/>
         </p:nvSpPr>
         <p:spPr>
           <a:xfrm>
             <a:off x="0" y="0"/>
-            <a:ext cx="12191400" cy="6859440"/>
+            <a:ext cx="12191040" cy="6859080"/>
           </a:xfrm>
           <a:prstGeom prst="rect">
             <a:avLst/>
@@ -4304,7 +4242,7 @@
       </p:sp>
       <p:sp>
         <p:nvSpPr>
-          <p:cNvPr id="33" name="PlaceHolder 1"/>
+          <p:cNvPr id="35" name="PlaceHolder 1"/>
           <p:cNvSpPr>
             <a:spLocks noGrp="1"/>
           </p:cNvSpPr>
@@ -4314,8 +4252,8 @@
         </p:nvSpPr>
         <p:spPr>
           <a:xfrm>
-            <a:off x="8724960" y="592200"/>
-            <a:ext cx="2628360" cy="5583960"/>
+            <a:off x="839880" y="820800"/>
+            <a:ext cx="3638160" cy="2061360"/>
           </a:xfrm>
           <a:prstGeom prst="rect">
             <a:avLst/>
@@ -4326,8 +4264,8 @@
           </a:ln>
         </p:spPr>
         <p:txBody>
-          <a:bodyPr lIns="91440" rIns="91440" tIns="45720" bIns="45720" anchor="b" vert="eaVert">
-            <a:noAutofit/>
+          <a:bodyPr lIns="91440" rIns="91440" tIns="45720" bIns="45720" anchor="t">
+            <a:normAutofit/>
           </a:bodyPr>
           <a:p>
             <a:pPr indent="0" defTabSz="914400">
@@ -4340,7 +4278,7 @@
               </a:tabLst>
             </a:pPr>
             <a:r>
-              <a:rPr lang="en-US" sz="3200" b="0" u="none" strike="noStrike">
+              <a:rPr lang="en-US" sz="2800" b="0" u="none" strike="noStrike">
                 <a:solidFill>
                   <a:schemeClr val="dk2"/>
                 </a:solidFill>
@@ -4348,9 +4286,31 @@
                 <a:uFillTx/>
                 <a:latin typeface="Walbaum Display"/>
               </a:rPr>
-              <a:t>Click to edit Master title style</a:t>
-            </a:r>
-            <a:endParaRPr lang="es-ES" sz="3200" b="0" u="none" strike="noStrike">
+              <a:t>Click to edit </a:t>
+            </a:r>
+            <a:r>
+              <a:rPr lang="en-US" sz="2800" b="0" u="none" strike="noStrike">
+                <a:solidFill>
+                  <a:schemeClr val="dk2"/>
+                </a:solidFill>
+                <a:effectLst/>
+                <a:uFillTx/>
+                <a:latin typeface="Walbaum Display"/>
+              </a:rPr>
+              <a:t>Master title </a:t>
+            </a:r>
+            <a:r>
+              <a:rPr lang="en-US" sz="2800" b="0" u="none" strike="noStrike">
+                <a:solidFill>
+                  <a:schemeClr val="dk2"/>
+                </a:solidFill>
+                <a:effectLst/>
+                <a:uFillTx/>
+                <a:latin typeface="Walbaum Display"/>
+              </a:rPr>
+              <a:t>style</a:t>
+            </a:r>
+            <a:endParaRPr lang="es-ES" sz="2800" b="0" u="none" strike="noStrike">
               <a:solidFill>
                 <a:srgbClr val="000000"/>
               </a:solidFill>
@@ -4363,7 +4323,7 @@
       </p:sp>
       <p:sp>
         <p:nvSpPr>
-          <p:cNvPr id="34" name="PlaceHolder 2"/>
+          <p:cNvPr id="36" name="PlaceHolder 2"/>
           <p:cNvSpPr>
             <a:spLocks noGrp="1"/>
           </p:cNvSpPr>
@@ -4373,8 +4333,8 @@
         </p:nvSpPr>
         <p:spPr>
           <a:xfrm>
-            <a:off x="838080" y="592200"/>
-            <a:ext cx="7733520" cy="5583960"/>
+            <a:off x="5247360" y="919440"/>
+            <a:ext cx="6107040" cy="5012640"/>
           </a:xfrm>
           <a:prstGeom prst="rect">
             <a:avLst/>
@@ -4385,171 +4345,246 @@
           </a:ln>
         </p:spPr>
         <p:txBody>
-          <a:bodyPr lIns="91440" rIns="91440" tIns="45720" bIns="45720" anchor="t" vert="eaVert">
+          <a:bodyPr lIns="90000" rIns="90000" tIns="45000" bIns="45000" anchor="t">
             <a:noAutofit/>
           </a:bodyPr>
           <a:p>
-            <a:pPr marL="228600" indent="-228600" defTabSz="914400">
+            <a:pPr marL="432000" indent="-324000">
               <a:lnSpc>
                 <a:spcPct val="120000"/>
               </a:lnSpc>
               <a:spcBef>
-                <a:spcPts val="1001"/>
+                <a:spcPts val="1417"/>
               </a:spcBef>
               <a:buClr>
-                <a:srgbClr val="35403a"/>
+                <a:srgbClr val="000000"/>
               </a:buClr>
-              <a:buFont typeface="Arial"/>
-              <a:buChar char="•"/>
-            </a:pPr>
-            <a:r>
-              <a:rPr lang="en-US" sz="1600" b="0" u="none" strike="noStrike">
-                <a:solidFill>
-                  <a:schemeClr val="dk2"/>
-                </a:solidFill>
-                <a:effectLst/>
-                <a:uFillTx/>
-                <a:latin typeface="Aptos Light"/>
-              </a:rPr>
-              <a:t>Click to edit Master text styles</a:t>
-            </a:r>
-            <a:endParaRPr lang="es-ES" sz="1600" b="0" u="none" strike="noStrike">
-              <a:solidFill>
-                <a:srgbClr val="000000"/>
-              </a:solidFill>
-              <a:effectLst/>
-              <a:uFillTx/>
-              <a:latin typeface="Arial"/>
-            </a:endParaRPr>
-          </a:p>
-          <a:p>
-            <a:pPr marL="457200" lvl="1" indent="-228600" defTabSz="914400">
+              <a:buSzPct val="45000"/>
+              <a:buFont typeface="Wingdings" charset="2"/>
+              <a:buChar char=""/>
+            </a:pPr>
+            <a:r>
+              <a:rPr lang="es-ES" sz="3200" b="0" u="none" strike="noStrike">
+                <a:solidFill>
+                  <a:schemeClr val="dk2"/>
+                </a:solidFill>
+                <a:effectLst/>
+                <a:uFillTx/>
+                <a:latin typeface="Aptos Light"/>
+              </a:rPr>
+              <a:t>Pulse para editar el formato de texto del esquema</a:t>
+            </a:r>
+            <a:endParaRPr lang="es-ES" sz="3200" b="0" u="none" strike="noStrike">
+              <a:solidFill>
+                <a:srgbClr val="000000"/>
+              </a:solidFill>
+              <a:effectLst/>
+              <a:uFillTx/>
+              <a:latin typeface="Arial"/>
+            </a:endParaRPr>
+          </a:p>
+          <a:p>
+            <a:pPr marL="864000" lvl="1" indent="-324000">
               <a:lnSpc>
                 <a:spcPct val="120000"/>
               </a:lnSpc>
               <a:spcBef>
-                <a:spcPts val="499"/>
+                <a:spcPts val="1134"/>
               </a:spcBef>
               <a:buClr>
-                <a:srgbClr val="35403a"/>
+                <a:srgbClr val="000000"/>
               </a:buClr>
-              <a:buFont typeface="Arial"/>
-              <a:buChar char="•"/>
-            </a:pPr>
-            <a:r>
-              <a:rPr lang="en-US" sz="1400" b="0" u="none" strike="noStrike">
-                <a:solidFill>
-                  <a:schemeClr val="dk2"/>
-                </a:solidFill>
-                <a:effectLst/>
-                <a:uFillTx/>
-                <a:latin typeface="Aptos Light"/>
-              </a:rPr>
-              <a:t>Second level</a:t>
-            </a:r>
-            <a:endParaRPr lang="es-ES" sz="1400" b="0" u="none" strike="noStrike">
-              <a:solidFill>
-                <a:srgbClr val="000000"/>
-              </a:solidFill>
-              <a:effectLst/>
-              <a:uFillTx/>
-              <a:latin typeface="Arial"/>
-            </a:endParaRPr>
-          </a:p>
-          <a:p>
-            <a:pPr marL="685800" lvl="2" indent="-228600" defTabSz="914400">
+              <a:buSzPct val="75000"/>
+              <a:buFont typeface="Symbol" charset="2"/>
+              <a:buChar char=""/>
+            </a:pPr>
+            <a:r>
+              <a:rPr lang="es-ES" sz="3200" b="0" u="none" strike="noStrike">
+                <a:solidFill>
+                  <a:schemeClr val="dk2"/>
+                </a:solidFill>
+                <a:effectLst/>
+                <a:uFillTx/>
+                <a:latin typeface="Aptos Light"/>
+              </a:rPr>
+              <a:t>Segundo nivel del esquema</a:t>
+            </a:r>
+            <a:endParaRPr lang="es-ES" sz="3200" b="0" u="none" strike="noStrike">
+              <a:solidFill>
+                <a:srgbClr val="000000"/>
+              </a:solidFill>
+              <a:effectLst/>
+              <a:uFillTx/>
+              <a:latin typeface="Arial"/>
+            </a:endParaRPr>
+          </a:p>
+          <a:p>
+            <a:pPr marL="1296000" lvl="2" indent="-288000">
               <a:lnSpc>
                 <a:spcPct val="120000"/>
               </a:lnSpc>
               <a:spcBef>
-                <a:spcPts val="499"/>
+                <a:spcPts val="850"/>
               </a:spcBef>
               <a:buClr>
-                <a:srgbClr val="35403a"/>
+                <a:srgbClr val="000000"/>
               </a:buClr>
-              <a:buFont typeface="Arial"/>
-              <a:buChar char="•"/>
-            </a:pPr>
-            <a:r>
-              <a:rPr lang="en-US" sz="1200" b="0" u="none" strike="noStrike">
-                <a:solidFill>
-                  <a:schemeClr val="dk2"/>
-                </a:solidFill>
-                <a:effectLst/>
-                <a:uFillTx/>
-                <a:latin typeface="Aptos Light"/>
-              </a:rPr>
-              <a:t>Third level</a:t>
-            </a:r>
-            <a:endParaRPr lang="es-ES" sz="1200" b="0" u="none" strike="noStrike">
-              <a:solidFill>
-                <a:srgbClr val="000000"/>
-              </a:solidFill>
-              <a:effectLst/>
-              <a:uFillTx/>
-              <a:latin typeface="Arial"/>
-            </a:endParaRPr>
-          </a:p>
-          <a:p>
-            <a:pPr marL="914400" lvl="3" indent="-228600" defTabSz="914400">
+              <a:buSzPct val="45000"/>
+              <a:buFont typeface="Wingdings" charset="2"/>
+              <a:buChar char=""/>
+            </a:pPr>
+            <a:r>
+              <a:rPr lang="es-ES" sz="3200" b="0" u="none" strike="noStrike">
+                <a:solidFill>
+                  <a:schemeClr val="dk2"/>
+                </a:solidFill>
+                <a:effectLst/>
+                <a:uFillTx/>
+                <a:latin typeface="Aptos Light"/>
+              </a:rPr>
+              <a:t>Tercer nivel del esquema</a:t>
+            </a:r>
+            <a:endParaRPr lang="es-ES" sz="3200" b="0" u="none" strike="noStrike">
+              <a:solidFill>
+                <a:srgbClr val="000000"/>
+              </a:solidFill>
+              <a:effectLst/>
+              <a:uFillTx/>
+              <a:latin typeface="Arial"/>
+            </a:endParaRPr>
+          </a:p>
+          <a:p>
+            <a:pPr marL="1728000" lvl="3" indent="-216000">
               <a:lnSpc>
                 <a:spcPct val="120000"/>
               </a:lnSpc>
               <a:spcBef>
-                <a:spcPts val="499"/>
+                <a:spcPts val="567"/>
               </a:spcBef>
               <a:buClr>
-                <a:srgbClr val="35403a"/>
+                <a:srgbClr val="000000"/>
               </a:buClr>
-              <a:buFont typeface="Arial"/>
-              <a:buChar char="•"/>
-            </a:pPr>
-            <a:r>
-              <a:rPr lang="en-US" sz="1100" b="0" u="none" strike="noStrike">
-                <a:solidFill>
-                  <a:schemeClr val="dk2"/>
-                </a:solidFill>
-                <a:effectLst/>
-                <a:uFillTx/>
-                <a:latin typeface="Aptos Light"/>
-              </a:rPr>
-              <a:t>Fourth level</a:t>
-            </a:r>
-            <a:endParaRPr lang="es-ES" sz="1100" b="0" u="none" strike="noStrike">
-              <a:solidFill>
-                <a:srgbClr val="000000"/>
-              </a:solidFill>
-              <a:effectLst/>
-              <a:uFillTx/>
-              <a:latin typeface="Arial"/>
-            </a:endParaRPr>
-          </a:p>
-          <a:p>
-            <a:pPr marL="1143000" lvl="4" indent="-228600" defTabSz="914400">
+              <a:buSzPct val="75000"/>
+              <a:buFont typeface="Symbol" charset="2"/>
+              <a:buChar char=""/>
+            </a:pPr>
+            <a:r>
+              <a:rPr lang="es-ES" sz="3200" b="0" u="none" strike="noStrike">
+                <a:solidFill>
+                  <a:schemeClr val="dk2"/>
+                </a:solidFill>
+                <a:effectLst/>
+                <a:uFillTx/>
+                <a:latin typeface="Aptos Light"/>
+              </a:rPr>
+              <a:t>Cuarto nivel del esquema</a:t>
+            </a:r>
+            <a:endParaRPr lang="es-ES" sz="3200" b="0" u="none" strike="noStrike">
+              <a:solidFill>
+                <a:srgbClr val="000000"/>
+              </a:solidFill>
+              <a:effectLst/>
+              <a:uFillTx/>
+              <a:latin typeface="Arial"/>
+            </a:endParaRPr>
+          </a:p>
+          <a:p>
+            <a:pPr marL="2160000" lvl="4" indent="-216000">
               <a:lnSpc>
                 <a:spcPct val="120000"/>
               </a:lnSpc>
               <a:spcBef>
-                <a:spcPts val="499"/>
+                <a:spcPts val="283"/>
               </a:spcBef>
               <a:buClr>
-                <a:srgbClr val="35403a"/>
+                <a:srgbClr val="000000"/>
               </a:buClr>
-              <a:buFont typeface="Arial"/>
-              <a:buChar char="•"/>
-            </a:pPr>
-            <a:r>
-              <a:rPr lang="en-US" sz="1100" b="0" u="none" strike="noStrike">
-                <a:solidFill>
-                  <a:schemeClr val="dk2"/>
-                </a:solidFill>
-                <a:effectLst/>
-                <a:uFillTx/>
-                <a:latin typeface="Aptos Light"/>
-              </a:rPr>
-              <a:t>Fifth level</a:t>
-            </a:r>
-            <a:endParaRPr lang="es-ES" sz="1100" b="0" u="none" strike="noStrike">
+              <a:buSzPct val="45000"/>
+              <a:buFont typeface="Wingdings" charset="2"/>
+              <a:buChar char=""/>
+            </a:pPr>
+            <a:r>
+              <a:rPr lang="es-ES" sz="3200" b="0" u="none" strike="noStrike">
+                <a:solidFill>
+                  <a:schemeClr val="dk2"/>
+                </a:solidFill>
+                <a:effectLst/>
+                <a:uFillTx/>
+                <a:latin typeface="Aptos Light"/>
+              </a:rPr>
+              <a:t>Quinto nivel del esquema</a:t>
+            </a:r>
+            <a:endParaRPr lang="es-ES" sz="3200" b="0" u="none" strike="noStrike">
+              <a:solidFill>
+                <a:srgbClr val="000000"/>
+              </a:solidFill>
+              <a:effectLst/>
+              <a:uFillTx/>
+              <a:latin typeface="Arial"/>
+            </a:endParaRPr>
+          </a:p>
+          <a:p>
+            <a:pPr marL="2592000" lvl="5" indent="-216000">
+              <a:lnSpc>
+                <a:spcPct val="120000"/>
+              </a:lnSpc>
+              <a:spcBef>
+                <a:spcPts val="283"/>
+              </a:spcBef>
+              <a:buClr>
+                <a:srgbClr val="000000"/>
+              </a:buClr>
+              <a:buSzPct val="45000"/>
+              <a:buFont typeface="Wingdings" charset="2"/>
+              <a:buChar char=""/>
+            </a:pPr>
+            <a:r>
+              <a:rPr lang="es-ES" sz="3200" b="0" u="none" strike="noStrike">
+                <a:solidFill>
+                  <a:schemeClr val="dk2"/>
+                </a:solidFill>
+                <a:effectLst/>
+                <a:uFillTx/>
+                <a:latin typeface="Aptos Light"/>
+              </a:rPr>
+              <a:t>Sexto nivel del esquema</a:t>
+            </a:r>
+            <a:endParaRPr lang="es-ES" sz="3200" b="0" u="none" strike="noStrike">
+              <a:solidFill>
+                <a:srgbClr val="000000"/>
+              </a:solidFill>
+              <a:effectLst/>
+              <a:uFillTx/>
+              <a:latin typeface="Arial"/>
+            </a:endParaRPr>
+          </a:p>
+          <a:p>
+            <a:pPr marL="3024000" lvl="6" indent="-216000">
+              <a:lnSpc>
+                <a:spcPct val="120000"/>
+              </a:lnSpc>
+              <a:spcBef>
+                <a:spcPts val="283"/>
+              </a:spcBef>
+              <a:buClr>
+                <a:srgbClr val="000000"/>
+              </a:buClr>
+              <a:buSzPct val="45000"/>
+              <a:buFont typeface="Wingdings" charset="2"/>
+              <a:buChar char=""/>
+            </a:pPr>
+            <a:r>
+              <a:rPr lang="es-ES" sz="3200" b="0" u="none" strike="noStrike">
+                <a:solidFill>
+                  <a:schemeClr val="dk2"/>
+                </a:solidFill>
+                <a:effectLst/>
+                <a:uFillTx/>
+                <a:latin typeface="Aptos Light"/>
+              </a:rPr>
+              <a:t>Séptimo nivel del esquema</a:t>
+            </a:r>
+            <a:endParaRPr lang="es-ES" sz="3200" b="0" u="none" strike="noStrike">
               <a:solidFill>
                 <a:srgbClr val="000000"/>
               </a:solidFill>
@@ -4562,7 +4597,69 @@
       </p:sp>
       <p:sp>
         <p:nvSpPr>
-          <p:cNvPr id="35" name="PlaceHolder 3"/>
+          <p:cNvPr id="37" name="PlaceHolder 3"/>
+          <p:cNvSpPr>
+            <a:spLocks noGrp="1"/>
+          </p:cNvSpPr>
+          <p:nvPr>
+            <p:ph type="body"/>
+          </p:nvPr>
+        </p:nvSpPr>
+        <p:spPr>
+          <a:xfrm>
+            <a:off x="839880" y="3000600"/>
+            <a:ext cx="3642840" cy="2867400"/>
+          </a:xfrm>
+          <a:prstGeom prst="rect">
+            <a:avLst/>
+          </a:prstGeom>
+          <a:noFill/>
+          <a:ln w="0">
+            <a:noFill/>
+          </a:ln>
+        </p:spPr>
+        <p:txBody>
+          <a:bodyPr lIns="91440" rIns="91440" tIns="45720" bIns="45720" anchor="b">
+            <a:noAutofit/>
+          </a:bodyPr>
+          <a:p>
+            <a:pPr indent="0" defTabSz="914400">
+              <a:lnSpc>
+                <a:spcPct val="120000"/>
+              </a:lnSpc>
+              <a:spcBef>
+                <a:spcPts val="1001"/>
+              </a:spcBef>
+              <a:buNone/>
+              <a:tabLst>
+                <a:tab algn="l" pos="0"/>
+              </a:tabLst>
+            </a:pPr>
+            <a:r>
+              <a:rPr lang="en-US" sz="1600" b="0" u="none" strike="noStrike">
+                <a:solidFill>
+                  <a:schemeClr val="dk2"/>
+                </a:solidFill>
+                <a:effectLst/>
+                <a:uFillTx/>
+                <a:latin typeface="Aptos Light"/>
+              </a:rPr>
+              <a:t>Click to edit Master text styles</a:t>
+            </a:r>
+            <a:endParaRPr lang="es-ES" sz="1600" b="0" u="none" strike="noStrike">
+              <a:solidFill>
+                <a:srgbClr val="000000"/>
+              </a:solidFill>
+              <a:effectLst/>
+              <a:uFillTx/>
+              <a:latin typeface="Arial"/>
+            </a:endParaRPr>
+          </a:p>
+        </p:txBody>
+      </p:sp>
+      <p:sp>
+        <p:nvSpPr>
+          <p:cNvPr id="38" name="PlaceHolder 4"/>
           <p:cNvSpPr>
             <a:spLocks noGrp="1"/>
           </p:cNvSpPr>
@@ -4573,7 +4670,7 @@
         <p:spPr>
           <a:xfrm>
             <a:off x="877680" y="6356520"/>
-            <a:ext cx="2742480" cy="364320"/>
+            <a:ext cx="2742120" cy="363960"/>
           </a:xfrm>
           <a:prstGeom prst="rect">
             <a:avLst/>
@@ -4640,7 +4737,7 @@
       </p:sp>
       <p:sp>
         <p:nvSpPr>
-          <p:cNvPr id="36" name="PlaceHolder 4"/>
+          <p:cNvPr id="39" name="PlaceHolder 5"/>
           <p:cNvSpPr>
             <a:spLocks noGrp="1"/>
           </p:cNvSpPr>
@@ -4651,7 +4748,7 @@
         <p:spPr>
           <a:xfrm>
             <a:off x="7132320" y="6356520"/>
-            <a:ext cx="4296960" cy="364320"/>
+            <a:ext cx="4296600" cy="363960"/>
           </a:xfrm>
           <a:prstGeom prst="rect">
             <a:avLst/>
@@ -4718,7 +4815,7 @@
       </p:sp>
       <p:sp>
         <p:nvSpPr>
-          <p:cNvPr id="37" name="PlaceHolder 5"/>
+          <p:cNvPr id="40" name="PlaceHolder 6"/>
           <p:cNvSpPr>
             <a:spLocks noGrp="1"/>
           </p:cNvSpPr>
@@ -4729,7 +4826,7 @@
         <p:spPr>
           <a:xfrm>
             <a:off x="11430000" y="6356520"/>
-            <a:ext cx="520560" cy="364320"/>
+            <a:ext cx="520200" cy="363960"/>
           </a:xfrm>
           <a:prstGeom prst="rect">
             <a:avLst/>
@@ -4772,7 +4869,7 @@
                 <a:tab algn="l" pos="0"/>
               </a:tabLst>
             </a:pPr>
-            <a:fld id="{A0A1127A-1FD7-4CA0-A77A-9CD29EECBD04}" type="slidenum">
+            <a:fld id="{04A9F27C-9163-4207-910E-CD586D6DD2AA}" type="slidenum">
               <a:rPr lang="en-US" sz="1400" b="0" u="none" strike="noStrike">
                 <a:solidFill>
                   <a:schemeClr val="dk2"/>
@@ -4800,8 +4897,8 @@
 </file>
 
 <file path=ppt/slideLayouts/slideLayout7.xml><?xml version="1.0" encoding="utf-8"?>
-<p:sldLayout xmlns:a="http://schemas.openxmlformats.org/drawingml/2006/main" xmlns:p="http://schemas.openxmlformats.org/presentationml/2006/main" xmlns:r="http://schemas.openxmlformats.org/officeDocument/2006/relationships" xmlns:p14="http://schemas.microsoft.com/office/powerpoint/2010/main" xmlns:p15="http://schemas.microsoft.com/office/powerpoint/2012/main" xmlns:mc="http://schemas.openxmlformats.org/markup-compatibility/2006" type="obj" preserve="1">
-  <p:cSld name="Title and Content">
+<p:sldLayout xmlns:a="http://schemas.openxmlformats.org/drawingml/2006/main" xmlns:p="http://schemas.openxmlformats.org/presentationml/2006/main" xmlns:r="http://schemas.openxmlformats.org/officeDocument/2006/relationships" xmlns:p14="http://schemas.microsoft.com/office/powerpoint/2010/main" xmlns:p15="http://schemas.microsoft.com/office/powerpoint/2012/main" xmlns:mc="http://schemas.openxmlformats.org/markup-compatibility/2006" type="title" preserve="1">
+  <p:cSld name="Title Slide">
     <p:bg>
       <p:bgPr>
         <a:solidFill>
@@ -4825,14 +4922,14 @@
       </p:grpSpPr>
       <p:sp>
         <p:nvSpPr>
-          <p:cNvPr id="38" name="Rectangle 6"/>
+          <p:cNvPr id="41" name="Rectangle 6"/>
           <p:cNvSpPr/>
           <p:nvPr/>
         </p:nvSpPr>
         <p:spPr>
           <a:xfrm>
             <a:off x="0" y="0"/>
-            <a:ext cx="12191400" cy="6859440"/>
+            <a:ext cx="12191040" cy="6859080"/>
           </a:xfrm>
           <a:prstGeom prst="rect">
             <a:avLst/>
@@ -4884,7 +4981,7 @@
       </p:sp>
       <p:sp>
         <p:nvSpPr>
-          <p:cNvPr id="39" name="PlaceHolder 1"/>
+          <p:cNvPr id="42" name="PlaceHolder 1"/>
           <p:cNvSpPr>
             <a:spLocks noGrp="1"/>
           </p:cNvSpPr>
@@ -4894,8 +4991,8 @@
         </p:nvSpPr>
         <p:spPr>
           <a:xfrm>
-            <a:off x="871200" y="588240"/>
-            <a:ext cx="10449000" cy="1265040"/>
+            <a:off x="1523880" y="1122480"/>
+            <a:ext cx="9142920" cy="2208240"/>
           </a:xfrm>
           <a:prstGeom prst="rect">
             <a:avLst/>
@@ -4907,10 +5004,10 @@
         </p:spPr>
         <p:txBody>
           <a:bodyPr lIns="91440" rIns="91440" tIns="45720" bIns="45720" anchor="b">
-            <a:noAutofit/>
+            <a:normAutofit/>
           </a:bodyPr>
           <a:p>
-            <a:pPr indent="0" defTabSz="914400">
+            <a:pPr indent="0" algn="ctr" defTabSz="914400">
               <a:lnSpc>
                 <a:spcPct val="100000"/>
               </a:lnSpc>
@@ -4920,7 +5017,7 @@
               </a:tabLst>
             </a:pPr>
             <a:r>
-              <a:rPr lang="en-US" sz="3200" b="0" u="none" strike="noStrike">
+              <a:rPr lang="en-US" sz="3600" b="0" u="none" strike="noStrike">
                 <a:solidFill>
                   <a:schemeClr val="dk2"/>
                 </a:solidFill>
@@ -4928,9 +5025,31 @@
                 <a:uFillTx/>
                 <a:latin typeface="Walbaum Display"/>
               </a:rPr>
-              <a:t>Click to edit Master title style</a:t>
-            </a:r>
-            <a:endParaRPr lang="es-ES" sz="3200" b="0" u="none" strike="noStrike">
+              <a:t>Click to edit </a:t>
+            </a:r>
+            <a:r>
+              <a:rPr lang="en-US" sz="3600" b="0" u="none" strike="noStrike">
+                <a:solidFill>
+                  <a:schemeClr val="dk2"/>
+                </a:solidFill>
+                <a:effectLst/>
+                <a:uFillTx/>
+                <a:latin typeface="Walbaum Display"/>
+              </a:rPr>
+              <a:t>Master title </a:t>
+            </a:r>
+            <a:r>
+              <a:rPr lang="en-US" sz="3600" b="0" u="none" strike="noStrike">
+                <a:solidFill>
+                  <a:schemeClr val="dk2"/>
+                </a:solidFill>
+                <a:effectLst/>
+                <a:uFillTx/>
+                <a:latin typeface="Walbaum Display"/>
+              </a:rPr>
+              <a:t>style</a:t>
+            </a:r>
+            <a:endParaRPr lang="es-ES" sz="3600" b="0" u="none" strike="noStrike">
               <a:solidFill>
                 <a:srgbClr val="000000"/>
               </a:solidFill>
@@ -4943,206 +5062,7 @@
       </p:sp>
       <p:sp>
         <p:nvSpPr>
-          <p:cNvPr id="40" name="PlaceHolder 2"/>
-          <p:cNvSpPr>
-            <a:spLocks noGrp="1"/>
-          </p:cNvSpPr>
-          <p:nvPr>
-            <p:ph type="body"/>
-          </p:nvPr>
-        </p:nvSpPr>
-        <p:spPr>
-          <a:xfrm>
-            <a:off x="877680" y="2157840"/>
-            <a:ext cx="10441800" cy="3903120"/>
-          </a:xfrm>
-          <a:prstGeom prst="rect">
-            <a:avLst/>
-          </a:prstGeom>
-          <a:noFill/>
-          <a:ln w="0">
-            <a:noFill/>
-          </a:ln>
-        </p:spPr>
-        <p:txBody>
-          <a:bodyPr lIns="91440" rIns="91440" tIns="45720" bIns="45720" anchor="t">
-            <a:noAutofit/>
-          </a:bodyPr>
-          <a:p>
-            <a:pPr marL="228600" indent="-228600" defTabSz="914400">
-              <a:lnSpc>
-                <a:spcPct val="120000"/>
-              </a:lnSpc>
-              <a:spcBef>
-                <a:spcPts val="1001"/>
-              </a:spcBef>
-              <a:buClr>
-                <a:srgbClr val="35403a"/>
-              </a:buClr>
-              <a:buFont typeface="Arial"/>
-              <a:buChar char="•"/>
-            </a:pPr>
-            <a:r>
-              <a:rPr lang="en-US" sz="1600" b="0" u="none" strike="noStrike">
-                <a:solidFill>
-                  <a:schemeClr val="dk2"/>
-                </a:solidFill>
-                <a:effectLst/>
-                <a:uFillTx/>
-                <a:latin typeface="Aptos Light"/>
-              </a:rPr>
-              <a:t>Click to edit Master text styles</a:t>
-            </a:r>
-            <a:endParaRPr lang="es-ES" sz="1600" b="0" u="none" strike="noStrike">
-              <a:solidFill>
-                <a:srgbClr val="000000"/>
-              </a:solidFill>
-              <a:effectLst/>
-              <a:uFillTx/>
-              <a:latin typeface="Arial"/>
-            </a:endParaRPr>
-          </a:p>
-          <a:p>
-            <a:pPr marL="457200" lvl="1" indent="-228600" defTabSz="914400">
-              <a:lnSpc>
-                <a:spcPct val="120000"/>
-              </a:lnSpc>
-              <a:spcBef>
-                <a:spcPts val="499"/>
-              </a:spcBef>
-              <a:buClr>
-                <a:srgbClr val="35403a"/>
-              </a:buClr>
-              <a:buFont typeface="Arial"/>
-              <a:buChar char="•"/>
-            </a:pPr>
-            <a:r>
-              <a:rPr lang="en-US" sz="1400" b="0" u="none" strike="noStrike">
-                <a:solidFill>
-                  <a:schemeClr val="dk2"/>
-                </a:solidFill>
-                <a:effectLst/>
-                <a:uFillTx/>
-                <a:latin typeface="Aptos Light"/>
-              </a:rPr>
-              <a:t>Second level</a:t>
-            </a:r>
-            <a:endParaRPr lang="es-ES" sz="1400" b="0" u="none" strike="noStrike">
-              <a:solidFill>
-                <a:srgbClr val="000000"/>
-              </a:solidFill>
-              <a:effectLst/>
-              <a:uFillTx/>
-              <a:latin typeface="Arial"/>
-            </a:endParaRPr>
-          </a:p>
-          <a:p>
-            <a:pPr marL="685800" lvl="2" indent="-228600" defTabSz="914400">
-              <a:lnSpc>
-                <a:spcPct val="120000"/>
-              </a:lnSpc>
-              <a:spcBef>
-                <a:spcPts val="499"/>
-              </a:spcBef>
-              <a:buClr>
-                <a:srgbClr val="35403a"/>
-              </a:buClr>
-              <a:buFont typeface="Arial"/>
-              <a:buChar char="•"/>
-            </a:pPr>
-            <a:r>
-              <a:rPr lang="en-US" sz="1200" b="0" u="none" strike="noStrike">
-                <a:solidFill>
-                  <a:schemeClr val="dk2"/>
-                </a:solidFill>
-                <a:effectLst/>
-                <a:uFillTx/>
-                <a:latin typeface="Aptos Light"/>
-              </a:rPr>
-              <a:t>Third level</a:t>
-            </a:r>
-            <a:endParaRPr lang="es-ES" sz="1200" b="0" u="none" strike="noStrike">
-              <a:solidFill>
-                <a:srgbClr val="000000"/>
-              </a:solidFill>
-              <a:effectLst/>
-              <a:uFillTx/>
-              <a:latin typeface="Arial"/>
-            </a:endParaRPr>
-          </a:p>
-          <a:p>
-            <a:pPr marL="914400" lvl="3" indent="-228600" defTabSz="914400">
-              <a:lnSpc>
-                <a:spcPct val="120000"/>
-              </a:lnSpc>
-              <a:spcBef>
-                <a:spcPts val="499"/>
-              </a:spcBef>
-              <a:buClr>
-                <a:srgbClr val="35403a"/>
-              </a:buClr>
-              <a:buFont typeface="Arial"/>
-              <a:buChar char="•"/>
-            </a:pPr>
-            <a:r>
-              <a:rPr lang="en-US" sz="1100" b="0" u="none" strike="noStrike">
-                <a:solidFill>
-                  <a:schemeClr val="dk2"/>
-                </a:solidFill>
-                <a:effectLst/>
-                <a:uFillTx/>
-                <a:latin typeface="Aptos Light"/>
-              </a:rPr>
-              <a:t>Fourth level</a:t>
-            </a:r>
-            <a:endParaRPr lang="es-ES" sz="1100" b="0" u="none" strike="noStrike">
-              <a:solidFill>
-                <a:srgbClr val="000000"/>
-              </a:solidFill>
-              <a:effectLst/>
-              <a:uFillTx/>
-              <a:latin typeface="Arial"/>
-            </a:endParaRPr>
-          </a:p>
-          <a:p>
-            <a:pPr marL="1143000" lvl="4" indent="-228600" defTabSz="914400">
-              <a:lnSpc>
-                <a:spcPct val="120000"/>
-              </a:lnSpc>
-              <a:spcBef>
-                <a:spcPts val="499"/>
-              </a:spcBef>
-              <a:buClr>
-                <a:srgbClr val="35403a"/>
-              </a:buClr>
-              <a:buFont typeface="Arial"/>
-              <a:buChar char="•"/>
-            </a:pPr>
-            <a:r>
-              <a:rPr lang="en-US" sz="1100" b="0" u="none" strike="noStrike">
-                <a:solidFill>
-                  <a:schemeClr val="dk2"/>
-                </a:solidFill>
-                <a:effectLst/>
-                <a:uFillTx/>
-                <a:latin typeface="Aptos Light"/>
-              </a:rPr>
-              <a:t>Fifth level</a:t>
-            </a:r>
-            <a:endParaRPr lang="es-ES" sz="1100" b="0" u="none" strike="noStrike">
-              <a:solidFill>
-                <a:srgbClr val="000000"/>
-              </a:solidFill>
-              <a:effectLst/>
-              <a:uFillTx/>
-              <a:latin typeface="Arial"/>
-            </a:endParaRPr>
-          </a:p>
-        </p:txBody>
-      </p:sp>
-      <p:sp>
-        <p:nvSpPr>
-          <p:cNvPr id="41" name="PlaceHolder 3"/>
+          <p:cNvPr id="43" name="PlaceHolder 2"/>
           <p:cNvSpPr>
             <a:spLocks noGrp="1"/>
           </p:cNvSpPr>
@@ -5153,7 +5073,7 @@
         <p:spPr>
           <a:xfrm>
             <a:off x="877680" y="6356520"/>
-            <a:ext cx="2742480" cy="364320"/>
+            <a:ext cx="2742120" cy="363960"/>
           </a:xfrm>
           <a:prstGeom prst="rect">
             <a:avLst/>
@@ -5220,7 +5140,7 @@
       </p:sp>
       <p:sp>
         <p:nvSpPr>
-          <p:cNvPr id="42" name="PlaceHolder 4"/>
+          <p:cNvPr id="44" name="PlaceHolder 3"/>
           <p:cNvSpPr>
             <a:spLocks noGrp="1"/>
           </p:cNvSpPr>
@@ -5231,7 +5151,7 @@
         <p:spPr>
           <a:xfrm>
             <a:off x="7132320" y="6356520"/>
-            <a:ext cx="4296960" cy="364320"/>
+            <a:ext cx="4296600" cy="363960"/>
           </a:xfrm>
           <a:prstGeom prst="rect">
             <a:avLst/>
@@ -5298,7 +5218,7 @@
       </p:sp>
       <p:sp>
         <p:nvSpPr>
-          <p:cNvPr id="43" name="PlaceHolder 5"/>
+          <p:cNvPr id="45" name="PlaceHolder 4"/>
           <p:cNvSpPr>
             <a:spLocks noGrp="1"/>
           </p:cNvSpPr>
@@ -5309,7 +5229,7 @@
         <p:spPr>
           <a:xfrm>
             <a:off x="11430000" y="6356520"/>
-            <a:ext cx="520560" cy="364320"/>
+            <a:ext cx="520200" cy="363960"/>
           </a:xfrm>
           <a:prstGeom prst="rect">
             <a:avLst/>
@@ -5352,7 +5272,7 @@
                 <a:tab algn="l" pos="0"/>
               </a:tabLst>
             </a:pPr>
-            <a:fld id="{D1E0DE1F-A32D-4015-BD8D-6DCCB0B1BA25}" type="slidenum">
+            <a:fld id="{0A7E9C20-0347-4C08-AE03-0CC24EF1438B}" type="slidenum">
               <a:rPr lang="en-US" sz="1400" b="0" u="none" strike="noStrike">
                 <a:solidFill>
                   <a:schemeClr val="dk2"/>
@@ -5370,6 +5290,280 @@
               <a:effectLst/>
               <a:uFillTx/>
               <a:latin typeface="Times New Roman"/>
+            </a:endParaRPr>
+          </a:p>
+        </p:txBody>
+      </p:sp>
+      <p:sp>
+        <p:nvSpPr>
+          <p:cNvPr id="46" name="PlaceHolder 5"/>
+          <p:cNvSpPr>
+            <a:spLocks noGrp="1"/>
+          </p:cNvSpPr>
+          <p:nvPr>
+            <p:ph type="body"/>
+          </p:nvPr>
+        </p:nvSpPr>
+        <p:spPr>
+          <a:xfrm>
+            <a:off x="609480" y="1604520"/>
+            <a:ext cx="10971720" cy="3976560"/>
+          </a:xfrm>
+          <a:prstGeom prst="rect">
+            <a:avLst/>
+          </a:prstGeom>
+          <a:noFill/>
+          <a:ln w="0">
+            <a:noFill/>
+          </a:ln>
+        </p:spPr>
+        <p:txBody>
+          <a:bodyPr lIns="0" rIns="0" tIns="0" bIns="0" anchor="t">
+            <a:normAutofit/>
+          </a:bodyPr>
+          <a:p>
+            <a:pPr marL="432000" indent="-324000">
+              <a:lnSpc>
+                <a:spcPct val="120000"/>
+              </a:lnSpc>
+              <a:spcBef>
+                <a:spcPts val="1417"/>
+              </a:spcBef>
+              <a:buClr>
+                <a:srgbClr val="000000"/>
+              </a:buClr>
+              <a:buSzPct val="45000"/>
+              <a:buFont typeface="Wingdings" charset="2"/>
+              <a:buChar char=""/>
+            </a:pPr>
+            <a:r>
+              <a:rPr lang="es-ES" sz="1600" b="0" u="none" strike="noStrike">
+                <a:solidFill>
+                  <a:schemeClr val="dk2"/>
+                </a:solidFill>
+                <a:effectLst/>
+                <a:uFillTx/>
+                <a:latin typeface="Aptos Light"/>
+              </a:rPr>
+              <a:t>Pulse para editar el formato de texto del esquema</a:t>
+            </a:r>
+            <a:endParaRPr lang="es-ES" sz="1600" b="0" u="none" strike="noStrike">
+              <a:solidFill>
+                <a:srgbClr val="000000"/>
+              </a:solidFill>
+              <a:effectLst/>
+              <a:uFillTx/>
+              <a:latin typeface="Arial"/>
+            </a:endParaRPr>
+          </a:p>
+          <a:p>
+            <a:pPr marL="864000" lvl="1" indent="-324000">
+              <a:lnSpc>
+                <a:spcPct val="120000"/>
+              </a:lnSpc>
+              <a:spcBef>
+                <a:spcPts val="1134"/>
+              </a:spcBef>
+              <a:buClr>
+                <a:srgbClr val="000000"/>
+              </a:buClr>
+              <a:buSzPct val="75000"/>
+              <a:buFont typeface="Symbol" charset="2"/>
+              <a:buChar char=""/>
+            </a:pPr>
+            <a:r>
+              <a:rPr lang="es-ES" sz="1200" b="0" u="none" strike="noStrike">
+                <a:solidFill>
+                  <a:schemeClr val="dk2"/>
+                </a:solidFill>
+                <a:effectLst/>
+                <a:uFillTx/>
+                <a:latin typeface="Aptos Light"/>
+              </a:rPr>
+              <a:t>Segundo nivel del esquema</a:t>
+            </a:r>
+            <a:endParaRPr lang="es-ES" sz="1200" b="0" u="none" strike="noStrike">
+              <a:solidFill>
+                <a:srgbClr val="000000"/>
+              </a:solidFill>
+              <a:effectLst/>
+              <a:uFillTx/>
+              <a:latin typeface="Arial"/>
+            </a:endParaRPr>
+          </a:p>
+          <a:p>
+            <a:pPr marL="1296000" lvl="2" indent="-288000">
+              <a:lnSpc>
+                <a:spcPct val="120000"/>
+              </a:lnSpc>
+              <a:spcBef>
+                <a:spcPts val="850"/>
+              </a:spcBef>
+              <a:buClr>
+                <a:srgbClr val="000000"/>
+              </a:buClr>
+              <a:buSzPct val="45000"/>
+              <a:buFont typeface="Wingdings" charset="2"/>
+              <a:buChar char=""/>
+            </a:pPr>
+            <a:r>
+              <a:rPr lang="es-ES" sz="1100" b="0" u="none" strike="noStrike">
+                <a:solidFill>
+                  <a:schemeClr val="dk2"/>
+                </a:solidFill>
+                <a:effectLst/>
+                <a:uFillTx/>
+                <a:latin typeface="Aptos Light"/>
+              </a:rPr>
+              <a:t>Tercer nivel del esquema</a:t>
+            </a:r>
+            <a:endParaRPr lang="es-ES" sz="1100" b="0" u="none" strike="noStrike">
+              <a:solidFill>
+                <a:srgbClr val="000000"/>
+              </a:solidFill>
+              <a:effectLst/>
+              <a:uFillTx/>
+              <a:latin typeface="Arial"/>
+            </a:endParaRPr>
+          </a:p>
+          <a:p>
+            <a:pPr marL="1728000" lvl="3" indent="-216000">
+              <a:lnSpc>
+                <a:spcPct val="120000"/>
+              </a:lnSpc>
+              <a:spcBef>
+                <a:spcPts val="567"/>
+              </a:spcBef>
+              <a:buClr>
+                <a:srgbClr val="000000"/>
+              </a:buClr>
+              <a:buSzPct val="75000"/>
+              <a:buFont typeface="Symbol" charset="2"/>
+              <a:buChar char=""/>
+            </a:pPr>
+            <a:r>
+              <a:rPr lang="es-ES" sz="1100" b="0" u="none" strike="noStrike">
+                <a:solidFill>
+                  <a:schemeClr val="dk2"/>
+                </a:solidFill>
+                <a:effectLst/>
+                <a:uFillTx/>
+                <a:latin typeface="Aptos Light"/>
+              </a:rPr>
+              <a:t>Cuarto nivel del esquema</a:t>
+            </a:r>
+            <a:endParaRPr lang="es-ES" sz="1100" b="0" u="none" strike="noStrike">
+              <a:solidFill>
+                <a:srgbClr val="000000"/>
+              </a:solidFill>
+              <a:effectLst/>
+              <a:uFillTx/>
+              <a:latin typeface="Arial"/>
+            </a:endParaRPr>
+          </a:p>
+          <a:p>
+            <a:pPr marL="2160000" lvl="4" indent="-216000">
+              <a:lnSpc>
+                <a:spcPct val="120000"/>
+              </a:lnSpc>
+              <a:spcBef>
+                <a:spcPts val="283"/>
+              </a:spcBef>
+              <a:buClr>
+                <a:srgbClr val="000000"/>
+              </a:buClr>
+              <a:buSzPct val="45000"/>
+              <a:buFont typeface="Wingdings" charset="2"/>
+              <a:buChar char=""/>
+            </a:pPr>
+            <a:r>
+              <a:rPr lang="es-ES" sz="2000" b="0" u="none" strike="noStrike">
+                <a:solidFill>
+                  <a:schemeClr val="dk2"/>
+                </a:solidFill>
+                <a:effectLst/>
+                <a:uFillTx/>
+                <a:latin typeface="Aptos Light"/>
+              </a:rPr>
+              <a:t>Quinto nivel del esquema</a:t>
+            </a:r>
+            <a:endParaRPr lang="es-ES" sz="2000" b="0" u="none" strike="noStrike">
+              <a:solidFill>
+                <a:srgbClr val="000000"/>
+              </a:solidFill>
+              <a:effectLst/>
+              <a:uFillTx/>
+              <a:latin typeface="Arial"/>
+            </a:endParaRPr>
+          </a:p>
+          <a:p>
+            <a:pPr marL="2592000" lvl="5" indent="-216000">
+              <a:lnSpc>
+                <a:spcPct val="120000"/>
+              </a:lnSpc>
+              <a:spcBef>
+                <a:spcPts val="283"/>
+              </a:spcBef>
+              <a:buClr>
+                <a:srgbClr val="000000"/>
+              </a:buClr>
+              <a:buSzPct val="45000"/>
+              <a:buFont typeface="Wingdings" charset="2"/>
+              <a:buChar char=""/>
+            </a:pPr>
+            <a:r>
+              <a:rPr lang="es-ES" sz="2000" b="0" u="none" strike="noStrike">
+                <a:solidFill>
+                  <a:schemeClr val="dk2"/>
+                </a:solidFill>
+                <a:effectLst/>
+                <a:uFillTx/>
+                <a:latin typeface="Aptos Light"/>
+              </a:rPr>
+              <a:t>Sexto nivel del esquema</a:t>
+            </a:r>
+            <a:endParaRPr lang="es-ES" sz="2000" b="0" u="none" strike="noStrike">
+              <a:solidFill>
+                <a:srgbClr val="000000"/>
+              </a:solidFill>
+              <a:effectLst/>
+              <a:uFillTx/>
+              <a:latin typeface="Arial"/>
+            </a:endParaRPr>
+          </a:p>
+          <a:p>
+            <a:pPr marL="3024000" lvl="6" indent="-216000">
+              <a:lnSpc>
+                <a:spcPct val="120000"/>
+              </a:lnSpc>
+              <a:spcBef>
+                <a:spcPts val="283"/>
+              </a:spcBef>
+              <a:buClr>
+                <a:srgbClr val="000000"/>
+              </a:buClr>
+              <a:buSzPct val="45000"/>
+              <a:buFont typeface="Wingdings" charset="2"/>
+              <a:buChar char=""/>
+            </a:pPr>
+            <a:r>
+              <a:rPr lang="es-ES" sz="2000" b="0" u="none" strike="noStrike">
+                <a:solidFill>
+                  <a:schemeClr val="dk2"/>
+                </a:solidFill>
+                <a:effectLst/>
+                <a:uFillTx/>
+                <a:latin typeface="Aptos Light"/>
+              </a:rPr>
+              <a:t>Séptimo nivel del esquema</a:t>
+            </a:r>
+            <a:endParaRPr lang="es-ES" sz="2000" b="0" u="none" strike="noStrike">
+              <a:solidFill>
+                <a:srgbClr val="000000"/>
+              </a:solidFill>
+              <a:effectLst/>
+              <a:uFillTx/>
+              <a:latin typeface="Arial"/>
             </a:endParaRPr>
           </a:p>
         </p:txBody>
@@ -5380,8 +5574,8 @@
 </file>
 
 <file path=ppt/slideLayouts/slideLayout8.xml><?xml version="1.0" encoding="utf-8"?>
-<p:sldLayout xmlns:a="http://schemas.openxmlformats.org/drawingml/2006/main" xmlns:p="http://schemas.openxmlformats.org/presentationml/2006/main" xmlns:r="http://schemas.openxmlformats.org/officeDocument/2006/relationships" xmlns:p14="http://schemas.microsoft.com/office/powerpoint/2010/main" xmlns:p15="http://schemas.microsoft.com/office/powerpoint/2012/main" xmlns:mc="http://schemas.openxmlformats.org/markup-compatibility/2006" type="blank" preserve="1">
-  <p:cSld name="Section Header">
+<p:sldLayout xmlns:a="http://schemas.openxmlformats.org/drawingml/2006/main" xmlns:p="http://schemas.openxmlformats.org/presentationml/2006/main" xmlns:r="http://schemas.openxmlformats.org/officeDocument/2006/relationships" xmlns:p14="http://schemas.microsoft.com/office/powerpoint/2010/main" xmlns:p15="http://schemas.microsoft.com/office/powerpoint/2012/main" xmlns:mc="http://schemas.openxmlformats.org/markup-compatibility/2006" type="vertTx" preserve="1">
+  <p:cSld name="Title and Vertical Text">
     <p:bg>
       <p:bgPr>
         <a:solidFill>
@@ -5405,14 +5599,14 @@
       </p:grpSpPr>
       <p:sp>
         <p:nvSpPr>
-          <p:cNvPr id="44" name="Rectangle 6"/>
+          <p:cNvPr id="47" name="Rectangle 6"/>
           <p:cNvSpPr/>
           <p:nvPr/>
         </p:nvSpPr>
         <p:spPr>
           <a:xfrm>
             <a:off x="0" y="0"/>
-            <a:ext cx="12191400" cy="6859440"/>
+            <a:ext cx="12191040" cy="6859080"/>
           </a:xfrm>
           <a:prstGeom prst="rect">
             <a:avLst/>
@@ -5464,7 +5658,7 @@
       </p:sp>
       <p:sp>
         <p:nvSpPr>
-          <p:cNvPr id="45" name="PlaceHolder 1"/>
+          <p:cNvPr id="48" name="PlaceHolder 1"/>
           <p:cNvSpPr>
             <a:spLocks noGrp="1"/>
           </p:cNvSpPr>
@@ -5474,8 +5668,8 @@
         </p:nvSpPr>
         <p:spPr>
           <a:xfrm>
-            <a:off x="1474200" y="1514520"/>
-            <a:ext cx="8583480" cy="3138120"/>
+            <a:off x="871200" y="588240"/>
+            <a:ext cx="10448640" cy="1264680"/>
           </a:xfrm>
           <a:prstGeom prst="rect">
             <a:avLst/>
@@ -5487,7 +5681,7 @@
         </p:spPr>
         <p:txBody>
           <a:bodyPr lIns="91440" rIns="91440" tIns="45720" bIns="45720" anchor="b">
-            <a:normAutofit/>
+            <a:noAutofit/>
           </a:bodyPr>
           <a:p>
             <a:pPr indent="0" defTabSz="914400">
@@ -5500,7 +5694,7 @@
               </a:tabLst>
             </a:pPr>
             <a:r>
-              <a:rPr lang="en-US" sz="3600" b="0" u="none" spc="300" strike="noStrike" cap="all">
+              <a:rPr lang="en-US" sz="3200" b="0" u="none" strike="noStrike">
                 <a:solidFill>
                   <a:schemeClr val="dk2"/>
                 </a:solidFill>
@@ -5508,9 +5702,31 @@
                 <a:uFillTx/>
                 <a:latin typeface="Walbaum Display"/>
               </a:rPr>
-              <a:t>Click to edit Master title style</a:t>
-            </a:r>
-            <a:endParaRPr lang="es-ES" sz="3600" b="0" u="none" strike="noStrike">
+              <a:t>Click to edit </a:t>
+            </a:r>
+            <a:r>
+              <a:rPr lang="en-US" sz="3200" b="0" u="none" strike="noStrike">
+                <a:solidFill>
+                  <a:schemeClr val="dk2"/>
+                </a:solidFill>
+                <a:effectLst/>
+                <a:uFillTx/>
+                <a:latin typeface="Walbaum Display"/>
+              </a:rPr>
+              <a:t>Master title </a:t>
+            </a:r>
+            <a:r>
+              <a:rPr lang="en-US" sz="3200" b="0" u="none" strike="noStrike">
+                <a:solidFill>
+                  <a:schemeClr val="dk2"/>
+                </a:solidFill>
+                <a:effectLst/>
+                <a:uFillTx/>
+                <a:latin typeface="Walbaum Display"/>
+              </a:rPr>
+              <a:t>style</a:t>
+            </a:r>
+            <a:endParaRPr lang="es-ES" sz="3200" b="0" u="none" strike="noStrike">
               <a:solidFill>
                 <a:srgbClr val="000000"/>
               </a:solidFill>
@@ -5523,7 +5739,7 @@
       </p:sp>
       <p:sp>
         <p:nvSpPr>
-          <p:cNvPr id="46" name="PlaceHolder 2"/>
+          <p:cNvPr id="49" name="PlaceHolder 2"/>
           <p:cNvSpPr>
             <a:spLocks noGrp="1"/>
           </p:cNvSpPr>
@@ -5533,8 +5749,8 @@
         </p:nvSpPr>
         <p:spPr>
           <a:xfrm>
-            <a:off x="1474200" y="4964040"/>
-            <a:ext cx="8583480" cy="1125000"/>
+            <a:off x="877680" y="2157840"/>
+            <a:ext cx="10441440" cy="3902760"/>
           </a:xfrm>
           <a:prstGeom prst="rect">
             <a:avLst/>
@@ -5545,24 +5761,25 @@
           </a:ln>
         </p:spPr>
         <p:txBody>
-          <a:bodyPr lIns="91440" rIns="91440" tIns="45720" bIns="45720" anchor="t">
-            <a:normAutofit/>
+          <a:bodyPr lIns="91440" rIns="91440" tIns="45720" bIns="45720" anchor="t" vert="eaVert">
+            <a:noAutofit/>
           </a:bodyPr>
           <a:p>
-            <a:pPr indent="0" defTabSz="914400">
+            <a:pPr marL="228600" indent="-228600" defTabSz="914400">
               <a:lnSpc>
                 <a:spcPct val="120000"/>
               </a:lnSpc>
               <a:spcBef>
                 <a:spcPts val="1001"/>
               </a:spcBef>
-              <a:buNone/>
-              <a:tabLst>
-                <a:tab algn="l" pos="0"/>
-              </a:tabLst>
-            </a:pPr>
-            <a:r>
-              <a:rPr lang="en-US" sz="1600" b="0" u="none" spc="300" strike="noStrike" cap="all">
+              <a:buClr>
+                <a:srgbClr val="35403a"/>
+              </a:buClr>
+              <a:buFont typeface="Arial"/>
+              <a:buChar char="•"/>
+            </a:pPr>
+            <a:r>
+              <a:rPr lang="en-US" sz="1600" b="0" u="none" strike="noStrike">
                 <a:solidFill>
                   <a:schemeClr val="dk2"/>
                 </a:solidFill>
@@ -5573,6 +5790,142 @@
               <a:t>Click to edit Master text styles</a:t>
             </a:r>
             <a:endParaRPr lang="es-ES" sz="1600" b="0" u="none" strike="noStrike">
+              <a:solidFill>
+                <a:srgbClr val="000000"/>
+              </a:solidFill>
+              <a:effectLst/>
+              <a:uFillTx/>
+              <a:latin typeface="Arial"/>
+            </a:endParaRPr>
+          </a:p>
+          <a:p>
+            <a:pPr marL="457200" lvl="1" indent="-228600" defTabSz="914400">
+              <a:lnSpc>
+                <a:spcPct val="120000"/>
+              </a:lnSpc>
+              <a:spcBef>
+                <a:spcPts val="499"/>
+              </a:spcBef>
+              <a:buClr>
+                <a:srgbClr val="35403a"/>
+              </a:buClr>
+              <a:buFont typeface="Arial"/>
+              <a:buChar char="•"/>
+            </a:pPr>
+            <a:r>
+              <a:rPr lang="en-US" sz="1400" b="0" u="none" strike="noStrike">
+                <a:solidFill>
+                  <a:schemeClr val="dk2"/>
+                </a:solidFill>
+                <a:effectLst/>
+                <a:uFillTx/>
+                <a:latin typeface="Aptos Light"/>
+              </a:rPr>
+              <a:t>Second level</a:t>
+            </a:r>
+            <a:endParaRPr lang="es-ES" sz="1400" b="0" u="none" strike="noStrike">
+              <a:solidFill>
+                <a:srgbClr val="000000"/>
+              </a:solidFill>
+              <a:effectLst/>
+              <a:uFillTx/>
+              <a:latin typeface="Arial"/>
+            </a:endParaRPr>
+          </a:p>
+          <a:p>
+            <a:pPr marL="685800" lvl="2" indent="-228600" defTabSz="914400">
+              <a:lnSpc>
+                <a:spcPct val="120000"/>
+              </a:lnSpc>
+              <a:spcBef>
+                <a:spcPts val="499"/>
+              </a:spcBef>
+              <a:buClr>
+                <a:srgbClr val="35403a"/>
+              </a:buClr>
+              <a:buFont typeface="Arial"/>
+              <a:buChar char="•"/>
+            </a:pPr>
+            <a:r>
+              <a:rPr lang="en-US" sz="1200" b="0" u="none" strike="noStrike">
+                <a:solidFill>
+                  <a:schemeClr val="dk2"/>
+                </a:solidFill>
+                <a:effectLst/>
+                <a:uFillTx/>
+                <a:latin typeface="Aptos Light"/>
+              </a:rPr>
+              <a:t>Third level</a:t>
+            </a:r>
+            <a:endParaRPr lang="es-ES" sz="1200" b="0" u="none" strike="noStrike">
+              <a:solidFill>
+                <a:srgbClr val="000000"/>
+              </a:solidFill>
+              <a:effectLst/>
+              <a:uFillTx/>
+              <a:latin typeface="Arial"/>
+            </a:endParaRPr>
+          </a:p>
+          <a:p>
+            <a:pPr marL="914400" lvl="3" indent="-228600" defTabSz="914400">
+              <a:lnSpc>
+                <a:spcPct val="120000"/>
+              </a:lnSpc>
+              <a:spcBef>
+                <a:spcPts val="499"/>
+              </a:spcBef>
+              <a:buClr>
+                <a:srgbClr val="35403a"/>
+              </a:buClr>
+              <a:buFont typeface="Arial"/>
+              <a:buChar char="•"/>
+            </a:pPr>
+            <a:r>
+              <a:rPr lang="en-US" sz="1100" b="0" u="none" strike="noStrike">
+                <a:solidFill>
+                  <a:schemeClr val="dk2"/>
+                </a:solidFill>
+                <a:effectLst/>
+                <a:uFillTx/>
+                <a:latin typeface="Aptos Light"/>
+              </a:rPr>
+              <a:t>Fourth level</a:t>
+            </a:r>
+            <a:endParaRPr lang="es-ES" sz="1100" b="0" u="none" strike="noStrike">
+              <a:solidFill>
+                <a:srgbClr val="000000"/>
+              </a:solidFill>
+              <a:effectLst/>
+              <a:uFillTx/>
+              <a:latin typeface="Arial"/>
+            </a:endParaRPr>
+          </a:p>
+          <a:p>
+            <a:pPr marL="1143000" lvl="4" indent="-228600" defTabSz="914400">
+              <a:lnSpc>
+                <a:spcPct val="120000"/>
+              </a:lnSpc>
+              <a:spcBef>
+                <a:spcPts val="499"/>
+              </a:spcBef>
+              <a:buClr>
+                <a:srgbClr val="35403a"/>
+              </a:buClr>
+              <a:buFont typeface="Arial"/>
+              <a:buChar char="•"/>
+            </a:pPr>
+            <a:r>
+              <a:rPr lang="en-US" sz="1100" b="0" u="none" strike="noStrike">
+                <a:solidFill>
+                  <a:schemeClr val="dk2"/>
+                </a:solidFill>
+                <a:effectLst/>
+                <a:uFillTx/>
+                <a:latin typeface="Aptos Light"/>
+              </a:rPr>
+              <a:t>Fifth level</a:t>
+            </a:r>
+            <a:endParaRPr lang="es-ES" sz="1100" b="0" u="none" strike="noStrike">
               <a:solidFill>
                 <a:srgbClr val="000000"/>
               </a:solidFill>
@@ -5585,7 +5938,7 @@
       </p:sp>
       <p:sp>
         <p:nvSpPr>
-          <p:cNvPr id="47" name="PlaceHolder 3"/>
+          <p:cNvPr id="50" name="PlaceHolder 3"/>
           <p:cNvSpPr>
             <a:spLocks noGrp="1"/>
           </p:cNvSpPr>
@@ -5596,7 +5949,7 @@
         <p:spPr>
           <a:xfrm>
             <a:off x="877680" y="6356520"/>
-            <a:ext cx="2742480" cy="364320"/>
+            <a:ext cx="2742120" cy="363960"/>
           </a:xfrm>
           <a:prstGeom prst="rect">
             <a:avLst/>
@@ -5663,7 +6016,7 @@
       </p:sp>
       <p:sp>
         <p:nvSpPr>
-          <p:cNvPr id="48" name="PlaceHolder 4"/>
+          <p:cNvPr id="51" name="PlaceHolder 4"/>
           <p:cNvSpPr>
             <a:spLocks noGrp="1"/>
           </p:cNvSpPr>
@@ -5674,7 +6027,7 @@
         <p:spPr>
           <a:xfrm>
             <a:off x="7132320" y="6356520"/>
-            <a:ext cx="4296960" cy="364320"/>
+            <a:ext cx="4296600" cy="363960"/>
           </a:xfrm>
           <a:prstGeom prst="rect">
             <a:avLst/>
@@ -5741,7 +6094,7 @@
       </p:sp>
       <p:sp>
         <p:nvSpPr>
-          <p:cNvPr id="49" name="PlaceHolder 5"/>
+          <p:cNvPr id="52" name="PlaceHolder 5"/>
           <p:cNvSpPr>
             <a:spLocks noGrp="1"/>
           </p:cNvSpPr>
@@ -5752,7 +6105,7 @@
         <p:spPr>
           <a:xfrm>
             <a:off x="11430000" y="6356520"/>
-            <a:ext cx="520560" cy="364320"/>
+            <a:ext cx="520200" cy="363960"/>
           </a:xfrm>
           <a:prstGeom prst="rect">
             <a:avLst/>
@@ -5795,7 +6148,7 @@
                 <a:tab algn="l" pos="0"/>
               </a:tabLst>
             </a:pPr>
-            <a:fld id="{3BE9EFF3-1C1F-4FE8-BCC3-38C7F5453A45}" type="slidenum">
+            <a:fld id="{ABC5512C-F2C5-4FBE-B6A7-9AE9A6D1DAA7}" type="slidenum">
               <a:rPr lang="en-US" sz="1400" b="0" u="none" strike="noStrike">
                 <a:solidFill>
                   <a:schemeClr val="dk2"/>
@@ -5823,8 +6176,8 @@
 </file>
 
 <file path=ppt/slideLayouts/slideLayout9.xml><?xml version="1.0" encoding="utf-8"?>
-<p:sldLayout xmlns:a="http://schemas.openxmlformats.org/drawingml/2006/main" xmlns:p="http://schemas.openxmlformats.org/presentationml/2006/main" xmlns:r="http://schemas.openxmlformats.org/officeDocument/2006/relationships" xmlns:p14="http://schemas.microsoft.com/office/powerpoint/2010/main" xmlns:p15="http://schemas.microsoft.com/office/powerpoint/2012/main" xmlns:mc="http://schemas.openxmlformats.org/markup-compatibility/2006" type="twoObj" preserve="1">
-  <p:cSld name="Two Content">
+<p:sldLayout xmlns:a="http://schemas.openxmlformats.org/drawingml/2006/main" xmlns:p="http://schemas.openxmlformats.org/presentationml/2006/main" xmlns:r="http://schemas.openxmlformats.org/officeDocument/2006/relationships" xmlns:p14="http://schemas.microsoft.com/office/powerpoint/2010/main" xmlns:p15="http://schemas.microsoft.com/office/powerpoint/2012/main" xmlns:mc="http://schemas.openxmlformats.org/markup-compatibility/2006" type="vertTitleAndTx" preserve="1">
+  <p:cSld name="Vertical Title and Text">
     <p:bg>
       <p:bgPr>
         <a:solidFill>
@@ -5848,14 +6201,14 @@
       </p:grpSpPr>
       <p:sp>
         <p:nvSpPr>
-          <p:cNvPr id="50" name="Rectangle 6"/>
+          <p:cNvPr id="53" name="Rectangle 6"/>
           <p:cNvSpPr/>
           <p:nvPr/>
         </p:nvSpPr>
         <p:spPr>
           <a:xfrm>
             <a:off x="0" y="0"/>
-            <a:ext cx="12191400" cy="6859440"/>
+            <a:ext cx="12191040" cy="6859080"/>
           </a:xfrm>
           <a:prstGeom prst="rect">
             <a:avLst/>
@@ -5907,7 +6260,7 @@
       </p:sp>
       <p:sp>
         <p:nvSpPr>
-          <p:cNvPr id="51" name="PlaceHolder 1"/>
+          <p:cNvPr id="54" name="PlaceHolder 1"/>
           <p:cNvSpPr>
             <a:spLocks noGrp="1"/>
           </p:cNvSpPr>
@@ -5917,8 +6270,8 @@
         </p:nvSpPr>
         <p:spPr>
           <a:xfrm>
-            <a:off x="871200" y="588240"/>
-            <a:ext cx="10449000" cy="1265040"/>
+            <a:off x="8724960" y="592200"/>
+            <a:ext cx="2628000" cy="5583600"/>
           </a:xfrm>
           <a:prstGeom prst="rect">
             <a:avLst/>
@@ -5929,7 +6282,7 @@
           </a:ln>
         </p:spPr>
         <p:txBody>
-          <a:bodyPr lIns="91440" rIns="91440" tIns="45720" bIns="45720" anchor="b">
+          <a:bodyPr lIns="91440" rIns="91440" tIns="45720" bIns="45720" anchor="b" vert="eaVert">
             <a:noAutofit/>
           </a:bodyPr>
           <a:p>
@@ -5951,7 +6304,40 @@
                 <a:uFillTx/>
                 <a:latin typeface="Walbaum Display"/>
               </a:rPr>
-              <a:t>Click to edit Master title style</a:t>
+              <a:t>Click to </a:t>
+            </a:r>
+            <a:r>
+              <a:rPr lang="en-US" sz="3200" b="0" u="none" strike="noStrike">
+                <a:solidFill>
+                  <a:schemeClr val="dk2"/>
+                </a:solidFill>
+                <a:effectLst/>
+                <a:uFillTx/>
+                <a:latin typeface="Walbaum Display"/>
+              </a:rPr>
+              <a:t>edit </a:t>
+            </a:r>
+            <a:r>
+              <a:rPr lang="en-US" sz="3200" b="0" u="none" strike="noStrike">
+                <a:solidFill>
+                  <a:schemeClr val="dk2"/>
+                </a:solidFill>
+                <a:effectLst/>
+                <a:uFillTx/>
+                <a:latin typeface="Walbaum Display"/>
+              </a:rPr>
+              <a:t>Master </a:t>
+            </a:r>
+            <a:r>
+              <a:rPr lang="en-US" sz="3200" b="0" u="none" strike="noStrike">
+                <a:solidFill>
+                  <a:schemeClr val="dk2"/>
+                </a:solidFill>
+                <a:effectLst/>
+                <a:uFillTx/>
+                <a:latin typeface="Walbaum Display"/>
+              </a:rPr>
+              <a:t>title style</a:t>
             </a:r>
             <a:endParaRPr lang="es-ES" sz="3200" b="0" u="none" strike="noStrike">
               <a:solidFill>
@@ -5966,7 +6352,7 @@
       </p:sp>
       <p:sp>
         <p:nvSpPr>
-          <p:cNvPr id="52" name="PlaceHolder 2"/>
+          <p:cNvPr id="55" name="PlaceHolder 2"/>
           <p:cNvSpPr>
             <a:spLocks noGrp="1"/>
           </p:cNvSpPr>
@@ -5976,8 +6362,8 @@
         </p:nvSpPr>
         <p:spPr>
           <a:xfrm>
-            <a:off x="877680" y="2159280"/>
-            <a:ext cx="4976640" cy="4017240"/>
+            <a:off x="838080" y="592200"/>
+            <a:ext cx="7733160" cy="5583600"/>
           </a:xfrm>
           <a:prstGeom prst="rect">
             <a:avLst/>
@@ -5988,7 +6374,7 @@
           </a:ln>
         </p:spPr>
         <p:txBody>
-          <a:bodyPr lIns="91440" rIns="91440" tIns="45720" bIns="45720" anchor="t">
+          <a:bodyPr lIns="91440" rIns="91440" tIns="45720" bIns="45720" anchor="t" vert="eaVert">
             <a:noAutofit/>
           </a:bodyPr>
           <a:p>
@@ -6165,206 +6551,7 @@
       </p:sp>
       <p:sp>
         <p:nvSpPr>
-          <p:cNvPr id="53" name="PlaceHolder 3"/>
-          <p:cNvSpPr>
-            <a:spLocks noGrp="1"/>
-          </p:cNvSpPr>
-          <p:nvPr>
-            <p:ph type="body"/>
-          </p:nvPr>
-        </p:nvSpPr>
-        <p:spPr>
-          <a:xfrm>
-            <a:off x="6328440" y="2159280"/>
-            <a:ext cx="4984920" cy="4017240"/>
-          </a:xfrm>
-          <a:prstGeom prst="rect">
-            <a:avLst/>
-          </a:prstGeom>
-          <a:noFill/>
-          <a:ln w="0">
-            <a:noFill/>
-          </a:ln>
-        </p:spPr>
-        <p:txBody>
-          <a:bodyPr lIns="91440" rIns="91440" tIns="45720" bIns="45720" anchor="t">
-            <a:noAutofit/>
-          </a:bodyPr>
-          <a:p>
-            <a:pPr marL="228600" indent="-228600" defTabSz="914400">
-              <a:lnSpc>
-                <a:spcPct val="120000"/>
-              </a:lnSpc>
-              <a:spcBef>
-                <a:spcPts val="1001"/>
-              </a:spcBef>
-              <a:buClr>
-                <a:srgbClr val="35403a"/>
-              </a:buClr>
-              <a:buFont typeface="Arial"/>
-              <a:buChar char="•"/>
-            </a:pPr>
-            <a:r>
-              <a:rPr lang="en-US" sz="1600" b="0" u="none" strike="noStrike">
-                <a:solidFill>
-                  <a:schemeClr val="dk2"/>
-                </a:solidFill>
-                <a:effectLst/>
-                <a:uFillTx/>
-                <a:latin typeface="Aptos Light"/>
-              </a:rPr>
-              <a:t>Click to edit Master text styles</a:t>
-            </a:r>
-            <a:endParaRPr lang="es-ES" sz="1600" b="0" u="none" strike="noStrike">
-              <a:solidFill>
-                <a:srgbClr val="000000"/>
-              </a:solidFill>
-              <a:effectLst/>
-              <a:uFillTx/>
-              <a:latin typeface="Arial"/>
-            </a:endParaRPr>
-          </a:p>
-          <a:p>
-            <a:pPr marL="457200" lvl="1" indent="-228600" defTabSz="914400">
-              <a:lnSpc>
-                <a:spcPct val="120000"/>
-              </a:lnSpc>
-              <a:spcBef>
-                <a:spcPts val="499"/>
-              </a:spcBef>
-              <a:buClr>
-                <a:srgbClr val="35403a"/>
-              </a:buClr>
-              <a:buFont typeface="Arial"/>
-              <a:buChar char="•"/>
-            </a:pPr>
-            <a:r>
-              <a:rPr lang="en-US" sz="1400" b="0" u="none" strike="noStrike">
-                <a:solidFill>
-                  <a:schemeClr val="dk2"/>
-                </a:solidFill>
-                <a:effectLst/>
-                <a:uFillTx/>
-                <a:latin typeface="Aptos Light"/>
-              </a:rPr>
-              <a:t>Second level</a:t>
-            </a:r>
-            <a:endParaRPr lang="es-ES" sz="1400" b="0" u="none" strike="noStrike">
-              <a:solidFill>
-                <a:srgbClr val="000000"/>
-              </a:solidFill>
-              <a:effectLst/>
-              <a:uFillTx/>
-              <a:latin typeface="Arial"/>
-            </a:endParaRPr>
-          </a:p>
-          <a:p>
-            <a:pPr marL="685800" lvl="2" indent="-228600" defTabSz="914400">
-              <a:lnSpc>
-                <a:spcPct val="120000"/>
-              </a:lnSpc>
-              <a:spcBef>
-                <a:spcPts val="499"/>
-              </a:spcBef>
-              <a:buClr>
-                <a:srgbClr val="35403a"/>
-              </a:buClr>
-              <a:buFont typeface="Arial"/>
-              <a:buChar char="•"/>
-            </a:pPr>
-            <a:r>
-              <a:rPr lang="en-US" sz="1200" b="0" u="none" strike="noStrike">
-                <a:solidFill>
-                  <a:schemeClr val="dk2"/>
-                </a:solidFill>
-                <a:effectLst/>
-                <a:uFillTx/>
-                <a:latin typeface="Aptos Light"/>
-              </a:rPr>
-              <a:t>Third level</a:t>
-            </a:r>
-            <a:endParaRPr lang="es-ES" sz="1200" b="0" u="none" strike="noStrike">
-              <a:solidFill>
-                <a:srgbClr val="000000"/>
-              </a:solidFill>
-              <a:effectLst/>
-              <a:uFillTx/>
-              <a:latin typeface="Arial"/>
-            </a:endParaRPr>
-          </a:p>
-          <a:p>
-            <a:pPr marL="914400" lvl="3" indent="-228600" defTabSz="914400">
-              <a:lnSpc>
-                <a:spcPct val="120000"/>
-              </a:lnSpc>
-              <a:spcBef>
-                <a:spcPts val="499"/>
-              </a:spcBef>
-              <a:buClr>
-                <a:srgbClr val="35403a"/>
-              </a:buClr>
-              <a:buFont typeface="Arial"/>
-              <a:buChar char="•"/>
-            </a:pPr>
-            <a:r>
-              <a:rPr lang="en-US" sz="1100" b="0" u="none" strike="noStrike">
-                <a:solidFill>
-                  <a:schemeClr val="dk2"/>
-                </a:solidFill>
-                <a:effectLst/>
-                <a:uFillTx/>
-                <a:latin typeface="Aptos Light"/>
-              </a:rPr>
-              <a:t>Fourth level</a:t>
-            </a:r>
-            <a:endParaRPr lang="es-ES" sz="1100" b="0" u="none" strike="noStrike">
-              <a:solidFill>
-                <a:srgbClr val="000000"/>
-              </a:solidFill>
-              <a:effectLst/>
-              <a:uFillTx/>
-              <a:latin typeface="Arial"/>
-            </a:endParaRPr>
-          </a:p>
-          <a:p>
-            <a:pPr marL="1143000" lvl="4" indent="-228600" defTabSz="914400">
-              <a:lnSpc>
-                <a:spcPct val="120000"/>
-              </a:lnSpc>
-              <a:spcBef>
-                <a:spcPts val="499"/>
-              </a:spcBef>
-              <a:buClr>
-                <a:srgbClr val="35403a"/>
-              </a:buClr>
-              <a:buFont typeface="Arial"/>
-              <a:buChar char="•"/>
-            </a:pPr>
-            <a:r>
-              <a:rPr lang="en-US" sz="1100" b="0" u="none" strike="noStrike">
-                <a:solidFill>
-                  <a:schemeClr val="dk2"/>
-                </a:solidFill>
-                <a:effectLst/>
-                <a:uFillTx/>
-                <a:latin typeface="Aptos Light"/>
-              </a:rPr>
-              <a:t>Fifth level</a:t>
-            </a:r>
-            <a:endParaRPr lang="es-ES" sz="1100" b="0" u="none" strike="noStrike">
-              <a:solidFill>
-                <a:srgbClr val="000000"/>
-              </a:solidFill>
-              <a:effectLst/>
-              <a:uFillTx/>
-              <a:latin typeface="Arial"/>
-            </a:endParaRPr>
-          </a:p>
-        </p:txBody>
-      </p:sp>
-      <p:sp>
-        <p:nvSpPr>
-          <p:cNvPr id="54" name="PlaceHolder 4"/>
+          <p:cNvPr id="56" name="PlaceHolder 3"/>
           <p:cNvSpPr>
             <a:spLocks noGrp="1"/>
           </p:cNvSpPr>
@@ -6375,7 +6562,7 @@
         <p:spPr>
           <a:xfrm>
             <a:off x="877680" y="6356520"/>
-            <a:ext cx="2742480" cy="364320"/>
+            <a:ext cx="2742120" cy="363960"/>
           </a:xfrm>
           <a:prstGeom prst="rect">
             <a:avLst/>
@@ -6442,7 +6629,7 @@
       </p:sp>
       <p:sp>
         <p:nvSpPr>
-          <p:cNvPr id="55" name="PlaceHolder 5"/>
+          <p:cNvPr id="57" name="PlaceHolder 4"/>
           <p:cNvSpPr>
             <a:spLocks noGrp="1"/>
           </p:cNvSpPr>
@@ -6453,7 +6640,7 @@
         <p:spPr>
           <a:xfrm>
             <a:off x="7132320" y="6356520"/>
-            <a:ext cx="4296960" cy="364320"/>
+            <a:ext cx="4296600" cy="363960"/>
           </a:xfrm>
           <a:prstGeom prst="rect">
             <a:avLst/>
@@ -6520,7 +6707,7 @@
       </p:sp>
       <p:sp>
         <p:nvSpPr>
-          <p:cNvPr id="56" name="PlaceHolder 6"/>
+          <p:cNvPr id="58" name="PlaceHolder 5"/>
           <p:cNvSpPr>
             <a:spLocks noGrp="1"/>
           </p:cNvSpPr>
@@ -6531,7 +6718,7 @@
         <p:spPr>
           <a:xfrm>
             <a:off x="11430000" y="6356520"/>
-            <a:ext cx="520560" cy="364320"/>
+            <a:ext cx="520200" cy="363960"/>
           </a:xfrm>
           <a:prstGeom prst="rect">
             <a:avLst/>
@@ -6574,7 +6761,7 @@
                 <a:tab algn="l" pos="0"/>
               </a:tabLst>
             </a:pPr>
-            <a:fld id="{D1EAD038-B482-4671-B8FB-B30A5FBF8585}" type="slidenum">
+            <a:fld id="{0105BCED-D674-445B-82A5-59C80E252CA1}" type="slidenum">
               <a:rPr lang="en-US" sz="1400" b="0" u="none" strike="noStrike">
                 <a:solidFill>
                   <a:schemeClr val="dk2"/>
@@ -6667,7 +6854,7 @@
         <p:spPr>
           <a:xfrm>
             <a:off x="5040" y="745560"/>
-            <a:ext cx="12189960" cy="2247120"/>
+            <a:ext cx="12189600" cy="2246760"/>
           </a:xfrm>
           <a:prstGeom prst="rect">
             <a:avLst/>
@@ -6727,7 +6914,7 @@
         <p:spPr>
           <a:xfrm>
             <a:off x="1523880" y="4012920"/>
-            <a:ext cx="9143280" cy="1400040"/>
+            <a:ext cx="9142920" cy="1399680"/>
           </a:xfrm>
           <a:prstGeom prst="rect">
             <a:avLst/>
@@ -6885,7 +7072,7 @@
         <p:spPr>
           <a:xfrm>
             <a:off x="871200" y="442080"/>
-            <a:ext cx="10438560" cy="973080"/>
+            <a:ext cx="10438200" cy="972720"/>
           </a:xfrm>
           <a:prstGeom prst="rect">
             <a:avLst/>
@@ -6944,7 +7131,7 @@
         <p:spPr>
           <a:xfrm>
             <a:off x="877680" y="2157840"/>
-            <a:ext cx="10441800" cy="3903120"/>
+            <a:ext cx="10441440" cy="3902760"/>
           </a:xfrm>
           <a:prstGeom prst="rect">
             <a:avLst/>
@@ -7193,7 +7380,7 @@
         <p:txBody>
           <a:bodyPr/>
           <a:p>
-            <a:fld id="{7B27FC7C-BBE2-4C47-B0A5-F0258A9DD2CC}" type="slidenum">
+            <a:fld id="{94F2B0C3-FE70-4E88-8BBE-A7731DCBC133}" type="slidenum">
               <a:t>2</a:t>
             </a:fld>
           </a:p>
@@ -7213,7 +7400,7 @@
         <p:txBody>
           <a:bodyPr/>
           <a:p>
-            <a:fld id="{EAE327A7-ED8C-40E1-B25A-65767EA5C336}" type="datetime1">
+            <a:fld id="{8BAE0D88-2938-4BAA-9DB4-F0CCA7CB602F}" type="datetime1">
               <a:rPr lang="es-ES"/>
               <a:t>10/03/2026</a:t>
             </a:fld>
@@ -7263,7 +7450,7 @@
         <p:spPr>
           <a:xfrm>
             <a:off x="871200" y="229680"/>
-            <a:ext cx="10449000" cy="951480"/>
+            <a:ext cx="10448640" cy="951120"/>
           </a:xfrm>
           <a:prstGeom prst="rect">
             <a:avLst/>
@@ -7322,7 +7509,7 @@
         <p:spPr>
           <a:xfrm>
             <a:off x="877680" y="1373400"/>
-            <a:ext cx="10441800" cy="5236560"/>
+            <a:ext cx="10441440" cy="5236200"/>
           </a:xfrm>
           <a:prstGeom prst="rect">
             <a:avLst/>
@@ -7692,7 +7879,7 @@
         <p:txBody>
           <a:bodyPr/>
           <a:p>
-            <a:fld id="{C43F5DD8-2DEE-416C-ABDB-CDB8FB928192}" type="slidenum">
+            <a:fld id="{F5A86DD7-B736-4043-840D-7677AA69F020}" type="slidenum">
               <a:t>3</a:t>
             </a:fld>
           </a:p>
@@ -7712,7 +7899,7 @@
         <p:txBody>
           <a:bodyPr/>
           <a:p>
-            <a:fld id="{B4E4A10E-E78F-43AD-9422-DD4B991D1F0C}" type="datetime1">
+            <a:fld id="{FC65D85F-A541-4E25-9031-A7A536C73850}" type="datetime1">
               <a:rPr lang="es-ES"/>
               <a:t>10/03/2026</a:t>
             </a:fld>
@@ -7762,7 +7949,7 @@
         <p:spPr>
           <a:xfrm>
             <a:off x="871200" y="588240"/>
-            <a:ext cx="10449000" cy="503280"/>
+            <a:ext cx="10448640" cy="502920"/>
           </a:xfrm>
           <a:prstGeom prst="rect">
             <a:avLst/>
@@ -7822,7 +8009,7 @@
         <p:spPr>
           <a:xfrm>
             <a:off x="877680" y="1272600"/>
-            <a:ext cx="10441800" cy="4788360"/>
+            <a:ext cx="10441440" cy="4788000"/>
           </a:xfrm>
           <a:prstGeom prst="rect">
             <a:avLst/>
@@ -8333,7 +8520,7 @@
         <p:txBody>
           <a:bodyPr/>
           <a:p>
-            <a:fld id="{B6BBB01F-75E2-444D-A316-2B467A989B87}" type="slidenum">
+            <a:fld id="{8B0C08CB-6965-474C-AC33-E0E8AEDB0920}" type="slidenum">
               <a:t>4</a:t>
             </a:fld>
           </a:p>
@@ -8353,7 +8540,7 @@
         <p:txBody>
           <a:bodyPr/>
           <a:p>
-            <a:fld id="{737CEA08-4160-414B-9A89-BF58A29549B2}" type="datetime1">
+            <a:fld id="{9846D064-3402-4E48-8619-3C0CC0693BDD}" type="datetime1">
               <a:rPr lang="es-ES"/>
               <a:t>10/03/2026</a:t>
             </a:fld>
@@ -8403,7 +8590,7 @@
         <p:spPr>
           <a:xfrm>
             <a:off x="871200" y="5400"/>
-            <a:ext cx="10449000" cy="727200"/>
+            <a:ext cx="10448640" cy="726840"/>
           </a:xfrm>
           <a:prstGeom prst="rect">
             <a:avLst/>
@@ -8463,7 +8650,7 @@
         <p:spPr>
           <a:xfrm>
             <a:off x="877680" y="745920"/>
-            <a:ext cx="10441800" cy="5315040"/>
+            <a:ext cx="10441440" cy="5314680"/>
           </a:xfrm>
           <a:prstGeom prst="rect">
             <a:avLst/>
@@ -8983,7 +9170,7 @@
         <p:txBody>
           <a:bodyPr/>
           <a:p>
-            <a:fld id="{8AC39D2A-9116-4407-A8B3-2A91D3EDF0E0}" type="slidenum">
+            <a:fld id="{000386C5-3A01-4C78-B6AD-CA7EFD960B75}" type="slidenum">
               <a:t>5</a:t>
             </a:fld>
           </a:p>
@@ -9003,7 +9190,7 @@
         <p:txBody>
           <a:bodyPr/>
           <a:p>
-            <a:fld id="{3B3D8515-3190-4848-81C7-CB85B854E816}" type="datetime1">
+            <a:fld id="{21F1D1E9-7BDE-493B-8A3A-C65FE283FFBC}" type="datetime1">
               <a:rPr lang="es-ES"/>
               <a:t>10/03/2026</a:t>
             </a:fld>
@@ -9053,7 +9240,7 @@
         <p:spPr>
           <a:xfrm>
             <a:off x="871200" y="128880"/>
-            <a:ext cx="10449000" cy="749880"/>
+            <a:ext cx="10448640" cy="749520"/>
           </a:xfrm>
           <a:prstGeom prst="rect">
             <a:avLst/>
@@ -11200,7 +11387,7 @@
         <p:txBody>
           <a:bodyPr/>
           <a:p>
-            <a:fld id="{87A258E7-578C-4965-A2CF-F878D426247D}" type="slidenum">
+            <a:fld id="{34656F6B-0CE2-4423-98A5-C9131A19FA19}" type="slidenum">
               <a:t>6</a:t>
             </a:fld>
           </a:p>
@@ -11220,7 +11407,7 @@
         <p:txBody>
           <a:bodyPr/>
           <a:p>
-            <a:fld id="{FCE980F6-0A31-4A15-8930-2CA62ED87960}" type="datetime1">
+            <a:fld id="{A5844BF9-5E76-4569-9769-59DC61B993B8}" type="datetime1">
               <a:rPr lang="es-ES"/>
               <a:t>10/03/2026</a:t>
             </a:fld>
@@ -11270,7 +11457,7 @@
         <p:spPr>
           <a:xfrm>
             <a:off x="871200" y="5400"/>
-            <a:ext cx="10449000" cy="861840"/>
+            <a:ext cx="10448640" cy="861480"/>
           </a:xfrm>
           <a:prstGeom prst="rect">
             <a:avLst/>
@@ -11329,8 +11516,8 @@
         </p:nvSpPr>
         <p:spPr>
           <a:xfrm>
-            <a:off x="866520" y="1127160"/>
-            <a:ext cx="10441800" cy="5236560"/>
+            <a:off x="540000" y="1063800"/>
+            <a:ext cx="10441440" cy="5236200"/>
           </a:xfrm>
           <a:prstGeom prst="rect">
             <a:avLst/>
@@ -11350,7 +11537,7 @@
                 <a:spcPct val="120000"/>
               </a:lnSpc>
               <a:spcBef>
-                <a:spcPts val="1001"/>
+                <a:spcPts val="717"/>
               </a:spcBef>
               <a:buNone/>
               <a:tabLst>
@@ -11358,7 +11545,7 @@
               </a:tabLst>
             </a:pPr>
             <a:r>
-              <a:rPr lang="es-ES" sz="1800" b="0" i="1" u="none" strike="noStrike">
+              <a:rPr lang="es-ES" sz="1400" b="0" i="1" u="none" strike="noStrike">
                 <a:solidFill>
                   <a:schemeClr val="dk2"/>
                 </a:solidFill>
@@ -11370,7 +11557,7 @@
               <a:t>Modelo:</a:t>
             </a:r>
             <a:r>
-              <a:rPr lang="es-ES" sz="1800" b="0" u="none" strike="noStrike">
+              <a:rPr lang="es-ES" sz="1400" b="0" u="none" strike="noStrike">
                 <a:solidFill>
                   <a:schemeClr val="dk2"/>
                 </a:solidFill>
@@ -11381,13 +11568,14 @@
               </a:rPr>
               <a:t> Blackview MP60 (Intel Alder Lake N95)</a:t>
             </a:r>
-            <a:endParaRPr lang="es-ES" sz="1800" b="0" u="none" strike="noStrike">
-              <a:solidFill>
-                <a:srgbClr val="000000"/>
-              </a:solidFill>
-              <a:effectLst/>
-              <a:uFillTx/>
-              <a:latin typeface="Arial"/>
+            <a:endParaRPr lang="es-ES" sz="1400" b="0" u="none" strike="noStrike">
+              <a:solidFill>
+                <a:srgbClr val="000000"/>
+              </a:solidFill>
+              <a:effectLst/>
+              <a:uFillTx/>
+              <a:latin typeface="Arial"/>
+              <a:ea typeface="Noto Sans CJK SC"/>
             </a:endParaRPr>
           </a:p>
           <a:p>
@@ -11396,7 +11584,7 @@
                 <a:spcPct val="120000"/>
               </a:lnSpc>
               <a:spcBef>
-                <a:spcPts val="1001"/>
+                <a:spcPts val="717"/>
               </a:spcBef>
               <a:buNone/>
               <a:tabLst>
@@ -11404,7 +11592,7 @@
               </a:tabLst>
             </a:pPr>
             <a:r>
-              <a:rPr lang="es-ES" sz="1800" b="0" i="1" u="none" strike="noStrike">
+              <a:rPr lang="es-ES" sz="1400" b="0" i="1" u="none" strike="noStrike">
                 <a:solidFill>
                   <a:schemeClr val="dk2"/>
                 </a:solidFill>
@@ -11416,7 +11604,7 @@
               <a:t>Precio: </a:t>
             </a:r>
             <a:r>
-              <a:rPr lang="es-ES" sz="1800" b="0" u="none" strike="noStrike">
+              <a:rPr lang="es-ES" sz="1400" b="0" u="none" strike="noStrike">
                 <a:solidFill>
                   <a:schemeClr val="dk2"/>
                 </a:solidFill>
@@ -11427,13 +11615,14 @@
               </a:rPr>
               <a:t>299,00 € (Incluye Windows 11 Pro preinstalado)</a:t>
             </a:r>
-            <a:endParaRPr lang="es-ES" sz="1800" b="0" u="none" strike="noStrike">
-              <a:solidFill>
-                <a:srgbClr val="000000"/>
-              </a:solidFill>
-              <a:effectLst/>
-              <a:uFillTx/>
-              <a:latin typeface="Arial"/>
+            <a:endParaRPr lang="es-ES" sz="1400" b="0" u="none" strike="noStrike">
+              <a:solidFill>
+                <a:srgbClr val="000000"/>
+              </a:solidFill>
+              <a:effectLst/>
+              <a:uFillTx/>
+              <a:latin typeface="Arial"/>
+              <a:ea typeface="Noto Sans CJK SC"/>
             </a:endParaRPr>
           </a:p>
           <a:p>
@@ -11442,7 +11631,7 @@
                 <a:spcPct val="120000"/>
               </a:lnSpc>
               <a:spcBef>
-                <a:spcPts val="1001"/>
+                <a:spcPts val="717"/>
               </a:spcBef>
               <a:buNone/>
               <a:tabLst>
@@ -11450,7 +11639,7 @@
               </a:tabLst>
             </a:pPr>
             <a:r>
-              <a:rPr lang="es-ES" sz="1800" b="0" i="1" u="none" strike="noStrike">
+              <a:rPr lang="es-ES" sz="1400" b="0" i="1" u="none" strike="noStrike">
                 <a:solidFill>
                   <a:schemeClr val="dk2"/>
                 </a:solidFill>
@@ -11462,7 +11651,7 @@
               <a:t>URL:</a:t>
             </a:r>
             <a:r>
-              <a:rPr lang="es-ES" sz="1800" b="0" u="none" strike="noStrike">
+              <a:rPr lang="es-ES" sz="1400" b="0" u="none" strike="noStrike">
                 <a:solidFill>
                   <a:schemeClr val="dk2"/>
                 </a:solidFill>
@@ -11474,7 +11663,7 @@
               <a:t> </a:t>
             </a:r>
             <a:r>
-              <a:rPr lang="es-ES" sz="1800" b="0" u="sng" strike="noStrike">
+              <a:rPr lang="es-ES" sz="1400" b="0" u="sng" strike="noStrike">
                 <a:solidFill>
                   <a:schemeClr val="dk2"/>
                 </a:solidFill>
@@ -11486,22 +11675,175 @@
               </a:rPr>
               <a:t>Enlace</a:t>
             </a:r>
-            <a:endParaRPr lang="es-ES" sz="1800" b="0" u="none" strike="noStrike">
-              <a:solidFill>
-                <a:srgbClr val="000000"/>
-              </a:solidFill>
-              <a:effectLst/>
-              <a:uFillTx/>
-              <a:latin typeface="Arial"/>
+            <a:endParaRPr lang="es-ES" sz="1400" b="0" u="none" strike="noStrike">
+              <a:solidFill>
+                <a:srgbClr val="000000"/>
+              </a:solidFill>
+              <a:effectLst/>
+              <a:uFillTx/>
+              <a:latin typeface="Arial"/>
+              <a:ea typeface="Noto Sans CJK SC"/>
             </a:endParaRPr>
           </a:p>
           <a:p>
             <a:pPr indent="0" defTabSz="914400">
               <a:lnSpc>
+                <a:spcPct val="100000"/>
+              </a:lnSpc>
+              <a:spcBef>
+                <a:spcPts val="340"/>
+              </a:spcBef>
+              <a:spcAft>
+                <a:spcPts val="142"/>
+              </a:spcAft>
+              <a:buNone/>
+              <a:tabLst>
+                <a:tab algn="l" pos="0"/>
+              </a:tabLst>
+            </a:pPr>
+            <a:r>
+              <a:rPr lang="es-ES" sz="1400" b="0" u="none" strike="noStrike">
+                <a:solidFill>
+                  <a:srgbClr val="1c1c1c"/>
+                </a:solidFill>
+                <a:effectLst/>
+                <a:uFillTx/>
+                <a:latin typeface="Aptos Light"/>
+                <a:ea typeface="Aptos Light"/>
+              </a:rPr>
+              <a:t>CPU: Intel Alder Lake N95 (4 núcleos, 4 hilos, hasta 3,40 GHz)</a:t>
+            </a:r>
+            <a:endParaRPr lang="es-ES" sz="1400" b="0" u="none" strike="noStrike">
+              <a:solidFill>
+                <a:srgbClr val="000000"/>
+              </a:solidFill>
+              <a:effectLst/>
+              <a:uFillTx/>
+              <a:latin typeface="Arial"/>
+              <a:ea typeface="Noto Sans CJK SC"/>
+            </a:endParaRPr>
+          </a:p>
+          <a:p>
+            <a:pPr indent="0" defTabSz="914400">
+              <a:lnSpc>
+                <a:spcPct val="100000"/>
+              </a:lnSpc>
+              <a:spcBef>
+                <a:spcPts val="340"/>
+              </a:spcBef>
+              <a:spcAft>
+                <a:spcPts val="142"/>
+              </a:spcAft>
+              <a:buNone/>
+              <a:tabLst>
+                <a:tab algn="l" pos="0"/>
+              </a:tabLst>
+            </a:pPr>
+            <a:r>
+              <a:rPr lang="es-ES" sz="1400" b="0" u="none" strike="noStrike">
+                <a:solidFill>
+                  <a:srgbClr val="1c1c1c"/>
+                </a:solidFill>
+                <a:effectLst/>
+                <a:uFillTx/>
+                <a:latin typeface="Aptos Light"/>
+                <a:ea typeface="Aptos Light"/>
+              </a:rPr>
+              <a:t>RAM: 16 GB DDR4</a:t>
+            </a:r>
+            <a:endParaRPr lang="es-ES" sz="1400" b="0" u="none" strike="noStrike">
+              <a:solidFill>
+                <a:srgbClr val="000000"/>
+              </a:solidFill>
+              <a:effectLst/>
+              <a:uFillTx/>
+              <a:latin typeface="Arial"/>
+              <a:ea typeface="Noto Sans CJK SC"/>
+            </a:endParaRPr>
+          </a:p>
+          <a:p>
+            <a:pPr indent="0" defTabSz="914400">
+              <a:lnSpc>
+                <a:spcPct val="100000"/>
+              </a:lnSpc>
+              <a:spcBef>
+                <a:spcPts val="340"/>
+              </a:spcBef>
+              <a:spcAft>
+                <a:spcPts val="142"/>
+              </a:spcAft>
+              <a:buNone/>
+              <a:tabLst>
+                <a:tab algn="l" pos="0"/>
+              </a:tabLst>
+            </a:pPr>
+            <a:r>
+              <a:rPr lang="es-ES" sz="1400" b="0" u="none" strike="noStrike">
+                <a:solidFill>
+                  <a:srgbClr val="1c1c1c"/>
+                </a:solidFill>
+                <a:effectLst/>
+                <a:uFillTx/>
+                <a:latin typeface="Aptos Light"/>
+                <a:ea typeface="Aptos Light"/>
+              </a:rPr>
+              <a:t>SSD/almacenamiento: SSD M.2 de 512 GB</a:t>
+            </a:r>
+            <a:endParaRPr lang="es-ES" sz="1400" b="0" u="none" strike="noStrike">
+              <a:solidFill>
+                <a:srgbClr val="000000"/>
+              </a:solidFill>
+              <a:effectLst/>
+              <a:uFillTx/>
+              <a:latin typeface="Arial"/>
+              <a:ea typeface="Noto Sans CJK SC"/>
+            </a:endParaRPr>
+          </a:p>
+          <a:p>
+            <a:pPr indent="0" defTabSz="914400">
+              <a:lnSpc>
+                <a:spcPct val="100000"/>
+              </a:lnSpc>
+              <a:spcBef>
+                <a:spcPts val="340"/>
+              </a:spcBef>
+              <a:spcAft>
+                <a:spcPts val="142"/>
+              </a:spcAft>
+              <a:buNone/>
+              <a:tabLst>
+                <a:tab algn="l" pos="0"/>
+              </a:tabLst>
+            </a:pPr>
+            <a:r>
+              <a:rPr lang="es-ES" sz="1400" b="0" u="none" strike="noStrike">
+                <a:solidFill>
+                  <a:srgbClr val="1c1c1c"/>
+                </a:solidFill>
+                <a:effectLst/>
+                <a:uFillTx/>
+                <a:latin typeface="Aptos Light"/>
+                <a:ea typeface="Aptos Light"/>
+              </a:rPr>
+              <a:t>Conectividad (Wi‑Fi/Ethernet/USB/vídeo): Wi-Fi 5 de doble banda (2.4G/5G), Bluetooth 4.2, 1x Gigabit Ethernet RJ45, 2x USB 3.0, 2x USB 2.0, 2x HDMI (soporte 4K a 60Hz).</a:t>
+            </a:r>
+            <a:endParaRPr lang="es-ES" sz="1400" b="0" u="none" strike="noStrike">
+              <a:solidFill>
+                <a:srgbClr val="000000"/>
+              </a:solidFill>
+              <a:effectLst/>
+              <a:uFillTx/>
+              <a:latin typeface="Arial"/>
+              <a:ea typeface="Noto Sans CJK SC"/>
+            </a:endParaRPr>
+          </a:p>
+          <a:p>
+            <a:pPr indent="0" defTabSz="914400">
+              <a:lnSpc>
                 <a:spcPct val="120000"/>
               </a:lnSpc>
               <a:spcBef>
-                <a:spcPts val="1001"/>
+                <a:spcPts val="717"/>
               </a:spcBef>
               <a:buNone/>
               <a:tabLst>
@@ -11509,7 +11851,7 @@
               </a:tabLst>
             </a:pPr>
             <a:r>
-              <a:rPr lang="es-ES" sz="1800" b="1" i="1" u="none" strike="noStrike">
+              <a:rPr lang="es-ES" sz="1400" b="1" i="1" u="none" strike="noStrike">
                 <a:solidFill>
                   <a:schemeClr val="dk2"/>
                 </a:solidFill>
@@ -11520,13 +11862,14 @@
               </a:rPr>
               <a:t>Pros:</a:t>
             </a:r>
-            <a:endParaRPr lang="es-ES" sz="1800" b="0" u="none" strike="noStrike">
-              <a:solidFill>
-                <a:srgbClr val="000000"/>
-              </a:solidFill>
-              <a:effectLst/>
-              <a:uFillTx/>
-              <a:latin typeface="Arial"/>
+            <a:endParaRPr lang="es-ES" sz="1400" b="0" u="none" strike="noStrike">
+              <a:solidFill>
+                <a:srgbClr val="000000"/>
+              </a:solidFill>
+              <a:effectLst/>
+              <a:uFillTx/>
+              <a:latin typeface="Arial"/>
+              <a:ea typeface="Noto Sans CJK SC"/>
             </a:endParaRPr>
           </a:p>
           <a:p>
@@ -11535,7 +11878,7 @@
                 <a:spcPct val="120000"/>
               </a:lnSpc>
               <a:spcBef>
-                <a:spcPts val="1001"/>
+                <a:spcPts val="717"/>
               </a:spcBef>
               <a:buNone/>
               <a:tabLst>
@@ -11543,7 +11886,7 @@
               </a:tabLst>
             </a:pPr>
             <a:r>
-              <a:rPr lang="es-ES" sz="1800" b="0" u="none" strike="noStrike">
+              <a:rPr lang="es-ES" sz="1400" b="0" u="none" strike="noStrike">
                 <a:solidFill>
                   <a:schemeClr val="dk2"/>
                 </a:solidFill>
@@ -11554,13 +11897,14 @@
               </a:rPr>
               <a:t> Formato ultra compacto.</a:t>
             </a:r>
-            <a:endParaRPr lang="es-ES" sz="1800" b="0" u="none" strike="noStrike">
-              <a:solidFill>
-                <a:srgbClr val="000000"/>
-              </a:solidFill>
-              <a:effectLst/>
-              <a:uFillTx/>
-              <a:latin typeface="Arial"/>
+            <a:endParaRPr lang="es-ES" sz="1400" b="0" u="none" strike="noStrike">
+              <a:solidFill>
+                <a:srgbClr val="000000"/>
+              </a:solidFill>
+              <a:effectLst/>
+              <a:uFillTx/>
+              <a:latin typeface="Arial"/>
+              <a:ea typeface="Noto Sans CJK SC"/>
             </a:endParaRPr>
           </a:p>
           <a:p>
@@ -11569,7 +11913,7 @@
                 <a:spcPct val="120000"/>
               </a:lnSpc>
               <a:spcBef>
-                <a:spcPts val="1001"/>
+                <a:spcPts val="717"/>
               </a:spcBef>
               <a:buNone/>
               <a:tabLst>
@@ -11577,7 +11921,7 @@
               </a:tabLst>
             </a:pPr>
             <a:r>
-              <a:rPr lang="es-ES" sz="1800" b="0" u="none" strike="noStrike">
+              <a:rPr lang="es-ES" sz="1400" b="0" u="none" strike="noStrike">
                 <a:solidFill>
                   <a:schemeClr val="dk2"/>
                 </a:solidFill>
@@ -11588,13 +11932,14 @@
               </a:rPr>
               <a:t> Más barato y listo para usar (Plug &amp; Play con SO incluido).</a:t>
             </a:r>
-            <a:endParaRPr lang="es-ES" sz="1800" b="0" u="none" strike="noStrike">
-              <a:solidFill>
-                <a:srgbClr val="000000"/>
-              </a:solidFill>
-              <a:effectLst/>
-              <a:uFillTx/>
-              <a:latin typeface="Arial"/>
+            <a:endParaRPr lang="es-ES" sz="1400" b="0" u="none" strike="noStrike">
+              <a:solidFill>
+                <a:srgbClr val="000000"/>
+              </a:solidFill>
+              <a:effectLst/>
+              <a:uFillTx/>
+              <a:latin typeface="Arial"/>
+              <a:ea typeface="Noto Sans CJK SC"/>
             </a:endParaRPr>
           </a:p>
           <a:p>
@@ -11603,7 +11948,7 @@
                 <a:spcPct val="120000"/>
               </a:lnSpc>
               <a:spcBef>
-                <a:spcPts val="1001"/>
+                <a:spcPts val="717"/>
               </a:spcBef>
               <a:buNone/>
               <a:tabLst>
@@ -11611,7 +11956,7 @@
               </a:tabLst>
             </a:pPr>
             <a:r>
-              <a:rPr lang="es-ES" sz="1800" b="0" u="none" strike="noStrike">
+              <a:rPr lang="es-ES" sz="1400" b="0" u="none" strike="noStrike">
                 <a:solidFill>
                   <a:schemeClr val="dk2"/>
                 </a:solidFill>
@@ -11622,13 +11967,14 @@
               </a:rPr>
               <a:t> Doble salida HDMI para dos monitores 4K.</a:t>
             </a:r>
-            <a:endParaRPr lang="es-ES" sz="1800" b="0" u="none" strike="noStrike">
-              <a:solidFill>
-                <a:srgbClr val="000000"/>
-              </a:solidFill>
-              <a:effectLst/>
-              <a:uFillTx/>
-              <a:latin typeface="Arial"/>
+            <a:endParaRPr lang="es-ES" sz="1400" b="0" u="none" strike="noStrike">
+              <a:solidFill>
+                <a:srgbClr val="000000"/>
+              </a:solidFill>
+              <a:effectLst/>
+              <a:uFillTx/>
+              <a:latin typeface="Arial"/>
+              <a:ea typeface="Noto Sans CJK SC"/>
             </a:endParaRPr>
           </a:p>
           <a:p>
@@ -11637,7 +11983,7 @@
                 <a:spcPct val="120000"/>
               </a:lnSpc>
               <a:spcBef>
-                <a:spcPts val="1001"/>
+                <a:spcPts val="717"/>
               </a:spcBef>
               <a:buNone/>
               <a:tabLst>
@@ -11645,7 +11991,7 @@
               </a:tabLst>
             </a:pPr>
             <a:r>
-              <a:rPr lang="es-ES" sz="1800" b="1" i="1" u="none" strike="noStrike">
+              <a:rPr lang="es-ES" sz="1400" b="1" i="1" u="none" strike="noStrike">
                 <a:solidFill>
                   <a:schemeClr val="dk2"/>
                 </a:solidFill>
@@ -11657,7 +12003,7 @@
               <a:t>Contras</a:t>
             </a:r>
             <a:r>
-              <a:rPr lang="es-ES" sz="1800" b="0" u="none" strike="noStrike">
+              <a:rPr lang="es-ES" sz="1400" b="0" u="none" strike="noStrike">
                 <a:solidFill>
                   <a:schemeClr val="dk2"/>
                 </a:solidFill>
@@ -11668,13 +12014,14 @@
               </a:rPr>
               <a:t>:</a:t>
             </a:r>
-            <a:endParaRPr lang="es-ES" sz="1800" b="0" u="none" strike="noStrike">
-              <a:solidFill>
-                <a:srgbClr val="000000"/>
-              </a:solidFill>
-              <a:effectLst/>
-              <a:uFillTx/>
-              <a:latin typeface="Arial"/>
+            <a:endParaRPr lang="es-ES" sz="1400" b="0" u="none" strike="noStrike">
+              <a:solidFill>
+                <a:srgbClr val="000000"/>
+              </a:solidFill>
+              <a:effectLst/>
+              <a:uFillTx/>
+              <a:latin typeface="Arial"/>
+              <a:ea typeface="Noto Sans CJK SC"/>
             </a:endParaRPr>
           </a:p>
           <a:p>
@@ -11683,7 +12030,7 @@
                 <a:spcPct val="120000"/>
               </a:lnSpc>
               <a:spcBef>
-                <a:spcPts val="1001"/>
+                <a:spcPts val="717"/>
               </a:spcBef>
               <a:buNone/>
               <a:tabLst>
@@ -11691,7 +12038,7 @@
               </a:tabLst>
             </a:pPr>
             <a:r>
-              <a:rPr lang="es-ES" sz="1800" b="0" u="none" strike="noStrike">
+              <a:rPr lang="es-ES" sz="1400" b="0" u="none" strike="noStrike">
                 <a:solidFill>
                   <a:schemeClr val="dk2"/>
                 </a:solidFill>
@@ -11702,13 +12049,14 @@
               </a:rPr>
               <a:t> Potencia muy inferior a la Opción A.</a:t>
             </a:r>
-            <a:endParaRPr lang="es-ES" sz="1800" b="0" u="none" strike="noStrike">
-              <a:solidFill>
-                <a:srgbClr val="000000"/>
-              </a:solidFill>
-              <a:effectLst/>
-              <a:uFillTx/>
-              <a:latin typeface="Arial"/>
+            <a:endParaRPr lang="es-ES" sz="1400" b="0" u="none" strike="noStrike">
+              <a:solidFill>
+                <a:srgbClr val="000000"/>
+              </a:solidFill>
+              <a:effectLst/>
+              <a:uFillTx/>
+              <a:latin typeface="Arial"/>
+              <a:ea typeface="Noto Sans CJK SC"/>
             </a:endParaRPr>
           </a:p>
           <a:p>
@@ -11717,7 +12065,7 @@
                 <a:spcPct val="120000"/>
               </a:lnSpc>
               <a:spcBef>
-                <a:spcPts val="1001"/>
+                <a:spcPts val="717"/>
               </a:spcBef>
               <a:buNone/>
               <a:tabLst>
@@ -11725,7 +12073,7 @@
               </a:tabLst>
             </a:pPr>
             <a:r>
-              <a:rPr lang="es-ES" sz="1800" b="0" u="none" strike="noStrike">
+              <a:rPr lang="es-ES" sz="1400" b="0" u="none" strike="noStrike">
                 <a:solidFill>
                   <a:schemeClr val="dk2"/>
                 </a:solidFill>
@@ -11736,13 +12084,14 @@
               </a:rPr>
               <a:t> RAM limitada a 16 GB y no ampliable.</a:t>
             </a:r>
-            <a:endParaRPr lang="es-ES" sz="1800" b="0" u="none" strike="noStrike">
-              <a:solidFill>
-                <a:srgbClr val="000000"/>
-              </a:solidFill>
-              <a:effectLst/>
-              <a:uFillTx/>
-              <a:latin typeface="Arial"/>
+            <a:endParaRPr lang="es-ES" sz="1400" b="0" u="none" strike="noStrike">
+              <a:solidFill>
+                <a:srgbClr val="000000"/>
+              </a:solidFill>
+              <a:effectLst/>
+              <a:uFillTx/>
+              <a:latin typeface="Arial"/>
+              <a:ea typeface="Noto Sans CJK SC"/>
             </a:endParaRPr>
           </a:p>
           <a:p>
@@ -11751,7 +12100,7 @@
                 <a:spcPct val="120000"/>
               </a:lnSpc>
               <a:spcBef>
-                <a:spcPts val="1001"/>
+                <a:spcPts val="717"/>
               </a:spcBef>
               <a:buNone/>
               <a:tabLst>
@@ -11759,7 +12108,7 @@
               </a:tabLst>
             </a:pPr>
             <a:r>
-              <a:rPr lang="es-ES" sz="1800" b="0" u="none" strike="noStrike">
+              <a:rPr lang="es-ES" sz="1400" b="0" u="none" strike="noStrike">
                 <a:solidFill>
                   <a:schemeClr val="dk2"/>
                 </a:solidFill>
@@ -11770,13 +12119,14 @@
               </a:rPr>
               <a:t> Si se rompe una pieza interna, hay que cambiar todo el equipo.</a:t>
             </a:r>
-            <a:endParaRPr lang="es-ES" sz="1800" b="0" u="none" strike="noStrike">
-              <a:solidFill>
-                <a:srgbClr val="000000"/>
-              </a:solidFill>
-              <a:effectLst/>
-              <a:uFillTx/>
-              <a:latin typeface="Arial"/>
+            <a:endParaRPr lang="es-ES" sz="1400" b="0" u="none" strike="noStrike">
+              <a:solidFill>
+                <a:srgbClr val="000000"/>
+              </a:solidFill>
+              <a:effectLst/>
+              <a:uFillTx/>
+              <a:latin typeface="Arial"/>
+              <a:ea typeface="Noto Sans CJK SC"/>
             </a:endParaRPr>
           </a:p>
           <a:p>
@@ -11838,7 +12188,7 @@
         <p:txBody>
           <a:bodyPr/>
           <a:p>
-            <a:fld id="{241B81D5-6770-4F74-A863-7CEE25AAC2DF}" type="slidenum">
+            <a:fld id="{FE421F96-CD83-426C-AFE0-0969ADDCD8BE}" type="slidenum">
               <a:t>7</a:t>
             </a:fld>
           </a:p>
@@ -11858,7 +12208,7 @@
         <p:txBody>
           <a:bodyPr/>
           <a:p>
-            <a:fld id="{652F67C1-E71B-4F1E-942E-166F3D420C40}" type="datetime1">
+            <a:fld id="{7A2FE305-87EC-49D4-B6F0-008F42F5A154}" type="datetime1">
               <a:rPr lang="es-ES"/>
               <a:t>10/03/2026</a:t>
             </a:fld>
@@ -11908,7 +12258,7 @@
         <p:spPr>
           <a:xfrm>
             <a:off x="871200" y="-5760"/>
-            <a:ext cx="10449000" cy="805680"/>
+            <a:ext cx="10448640" cy="805320"/>
           </a:xfrm>
           <a:prstGeom prst="rect">
             <a:avLst/>
@@ -11968,7 +12318,7 @@
         <p:spPr>
           <a:xfrm>
             <a:off x="877680" y="1104480"/>
-            <a:ext cx="10441800" cy="4956480"/>
+            <a:ext cx="10441440" cy="4956120"/>
           </a:xfrm>
           <a:prstGeom prst="rect">
             <a:avLst/>
@@ -12313,7 +12663,7 @@
         <p:txBody>
           <a:bodyPr/>
           <a:p>
-            <a:fld id="{0D049D8E-CB18-4D83-9016-EEA8FAF7095A}" type="slidenum">
+            <a:fld id="{3D796432-0264-46AF-849E-6B4B20B479C4}" type="slidenum">
               <a:t>8</a:t>
             </a:fld>
           </a:p>
@@ -12333,7 +12683,7 @@
         <p:txBody>
           <a:bodyPr/>
           <a:p>
-            <a:fld id="{FD3EC390-5431-47FD-8DC2-42675B097BD2}" type="datetime1">
+            <a:fld id="{D3507428-0E31-4E1E-B56B-D055FAE806FF}" type="datetime1">
               <a:rPr lang="es-ES"/>
               <a:t>10/03/2026</a:t>
             </a:fld>
